--- a/docs/assets/decks/foundry-evaluation-engineering-en.pptx
+++ b/docs/assets/decks/foundry-evaluation-engineering-en.pptx
@@ -39,9 +39,10 @@
     <p:sldId id="287" r:id="rId33"/>
     <p:sldId id="288" r:id="rId34"/>
     <p:sldId id="289" r:id="rId35"/>
+    <p:sldId id="290" r:id="rId36"/>
   </p:sldIdLst>
   <p:notesMasterIdLst>
-    <p:notesMasterId r:id="rId36"/>
+    <p:notesMasterId r:id="rId37"/>
   </p:notesMasterIdLst>
   <p:sldSz cx="12192000" cy="6858000"/>
   <p:notesSz cx="6858000" cy="12192000"/>
@@ -808,7 +809,7 @@
           <a:p>
             <a:r>
               <a:rPr lang="en-US" dirty="0"/>
-              <a:t>Use the guide’s ten portal steps. The new agent UI has an Evaluation tab; project-level Evaluate is also documented. Labels and hosted/custom-agent support vary by portal generation and preview capability. Use the verified SDK if mapping or repetition cannot be expressed; do not invent a button.
+              <a:t>Use the guide’s separate read-only and practice paths. An empty agent-scoped Evaluation tab does not mean the project has no native runs. Inspect the retained staging v6 run without invoking a judge. Practice files are authored synthetic controls, not captured agent responses. Use the verified SDK if mapping or repetition cannot be expressed; do not invent a button.
 Guide: https://devopsabcs-engineering.github.io/foundry-hosted-agents-fsi/evaluation-guide.html
 Lab 19: https://devopsabcs-engineering.github.io/foundry-hosted-agents-fsi/labs/lab-19-evaluation-engineering
 Source: https://learn.microsoft.com/azure/foundry/concepts/evaluation-evaluators/custom-evaluators</a:t>
@@ -1172,7 +1173,7 @@
           <a:p>
             <a:r>
               <a:rPr lang="en-US" dirty="0"/>
-              <a:t>The capture normalizer flattens the bilingual content map for task-adherence inputs. Missing locale is an error, not a silent language fallback. Compare the same slice and independent truth in each language. Formatting differences alone are not semantic quality failures.
+              <a:t>Genuine Microsoft Foundry builtin.groundedness catalog v18, captured in staging on 2026-10-23. Cropped only to enlarge the description, supported input alternatives and ordinal 1-5 score. The full screenshot is linked from the image and the guide. The catalog includes response/context, query/response or messages alternatives. This lab maps evaluation_query, independent context and the selected-locale response. Coherence v13 also shows ordinal 1-5; Task Adherence preview v17 shows Boolean. Catalog versions are capture-time observations, not effective versions proved for the retained v6 run. Inspection did not submit an evaluation or invoke a judge.
 Guide: https://devopsabcs-engineering.github.io/foundry-hosted-agents-fsi/evaluation-guide.html
 Lab 19: https://devopsabcs-engineering.github.io/foundry-hosted-agents-fsi/labs/lab-19-evaluation-engineering
 Source: https://learn.microsoft.com/azure/foundry/concepts/built-in-evaluators</a:t>
@@ -1263,7 +1264,7 @@
           <a:p>
             <a:r>
               <a:rPr lang="en-US" dirty="0"/>
-              <a:t>The native endpoint invokes the current deployment. A deployment name can later point to a different judge-model version. The existing runner identity does not magically record every effective catalog version: export configuration and record missing identities as a limitation. A requested traceparent is not verified ingestion.
+              <a:t>The capture normalizer flattens the bilingual content map for task-adherence inputs. Missing locale is an error, not a silent language fallback. Compare the same slice and independent truth in each language. Formatting differences alone are not semantic quality failures.
 Guide: https://devopsabcs-engineering.github.io/foundry-hosted-agents-fsi/evaluation-guide.html
 Lab 19: https://devopsabcs-engineering.github.io/foundry-hosted-agents-fsi/labs/lab-19-evaluation-engineering
 Source: https://learn.microsoft.com/azure/foundry/concepts/evaluation-evaluators/agent-evaluators</a:t>
@@ -1354,7 +1355,7 @@
           <a:p>
             <a:r>
               <a:rPr lang="en-US" dirty="0"/>
-              <a:t>validate_completion rejects missing, duplicate, errored, nonfinite and unscored results. validate_results additionally applies a pass-rate policy. Zero items is not vacuous success. A service error is not a numeric quality outcome and must not be dropped from reporting.
+              <a:t>The native endpoint invokes the current deployment. A deployment name can later point to a different judge-model version. The existing runner identity does not magically record every effective catalog version: export configuration and record missing identities as a limitation. A requested traceparent is not verified ingestion.
 Guide: https://devopsabcs-engineering.github.io/foundry-hosted-agents-fsi/evaluation-guide.html
 Lab 19: https://devopsabcs-engineering.github.io/foundry-hosted-agents-fsi/labs/lab-19-evaluation-engineering
 Source: https://learn.microsoft.com/azure/foundry/concepts/evaluation-evaluators/custom-evaluators</a:t>
@@ -1445,7 +1446,7 @@
           <a:p>
             <a:r>
               <a:rPr lang="en-US" dirty="0"/>
-              <a:t>The CLI can exit nonzero for quality while the workflow retains advisory scores. A separate always-run completeness gate requires both locales. continue-on-error is not permission to ignore missing evidence. A stricter calibrated quality policy is a separate reviewed change; this curriculum does not change production gates.
+              <a:t>validate_completion rejects missing, duplicate, errored, nonfinite and unscored results. validate_results additionally applies a pass-rate policy. Zero items is not vacuous success. A service error is not a numeric quality outcome and must not be dropped from reporting.
 Guide: https://devopsabcs-engineering.github.io/foundry-hosted-agents-fsi/evaluation-guide.html
 Lab 19: https://devopsabcs-engineering.github.io/foundry-hosted-agents-fsi/labs/lab-19-evaluation-engineering
 Source: https://learn.microsoft.com/azure/foundry/how-to/evaluate-generative-ai-app</a:t>
@@ -1627,7 +1628,7 @@
           <a:p>
             <a:r>
               <a:rPr lang="en-US" dirty="0"/>
-              <a:t>Retain both attempts and native correlation IDs. This is an operational service retry, not repeated sampling until a quality failure becomes green. The final release ran stagingv6 and productionv7. The earlier historical 0/10 benchmark is a different contract, not a comparable baseline.
+              <a:t>The CLI can exit nonzero for quality while the workflow retains advisory scores. A separate always-run completeness gate requires both locales. continue-on-error is not permission to ignore missing evidence. A stricter calibrated quality policy is a separate reviewed change; this curriculum does not change production gates.
 Guide: https://devopsabcs-engineering.github.io/foundry-hosted-agents-fsi/evaluation-guide.html
 Lab 19: https://devopsabcs-engineering.github.io/foundry-hosted-agents-fsi/labs/lab-19-evaluation-engineering
 Source: https://learn.microsoft.com/azure/foundry/observability/how-to/cloud-evaluation</a:t>
@@ -1718,7 +1719,7 @@
           <a:p>
             <a:r>
               <a:rPr lang="en-US" dirty="0"/>
-              <a:t>Use human labels per metric, not an expectation that every metric must fail every bad answer. Synthetic mutations must be labeled, with native response ID provenance removed for the edited answer. Do not present a rewritten candidate as an authentic captured response.
+              <a:t>Retain both attempts and native correlation IDs. This is an operational service retry, not repeated sampling until a quality failure becomes green. The final release ran stagingv6 and productionv7. The earlier historical 0/10 benchmark is a different contract, not a comparable baseline.
 Guide: https://devopsabcs-engineering.github.io/foundry-hosted-agents-fsi/evaluation-guide.html
 Lab 19: https://devopsabcs-engineering.github.io/foundry-hosted-agents-fsi/labs/lab-19-evaluation-engineering
 Source: https://learn.microsoft.com/azure/foundry/observability/how-to/cloud-evaluation-datasets</a:t>
@@ -1809,7 +1810,7 @@
           <a:p>
             <a:r>
               <a:rPr lang="en-US" dirty="0"/>
-              <a:t>Lab18.2 requires actual retained artifacts. If unavailable, record reproduction blocked; do not fabricate a baseline. Changing the corpus or instructions does not turn the failed control into a pass. This is an isolated RAG demonstration, not hosted quote-agent RAG.
+              <a:t>Use human labels per metric, not an expectation that every metric must fail every bad answer. Synthetic mutations must be labeled, with native response ID provenance removed for the edited answer. Do not present a rewritten candidate as an authentic captured response.
 Guide: https://devopsabcs-engineering.github.io/foundry-hosted-agents-fsi/evaluation-guide.html
 Lab 19: https://devopsabcs-engineering.github.io/foundry-hosted-agents-fsi/labs/lab-19-evaluation-engineering
 Source: https://learn.microsoft.com/azure/foundry/concepts/built-in-evaluators</a:t>
@@ -1900,7 +1901,7 @@
           <a:p>
             <a:r>
               <a:rPr lang="en-US" dirty="0"/>
-              <a:t>Ask: which error is costliest here? A false accept of unauthorized approval matters more than harmless wording. Thresholds should reflect risk and validation, not be tuned after seeing the candidate. Challenge prompt injection inside judged content without allowing it to redefine the rubric.
+              <a:t>Lab18.2 requires actual retained artifacts. If unavailable, record reproduction blocked; do not fabricate a baseline. Changing the corpus or instructions does not turn the failed control into a pass. This is an isolated RAG demonstration, not hosted quote-agent RAG.
 Guide: https://devopsabcs-engineering.github.io/foundry-hosted-agents-fsi/evaluation-guide.html
 Lab 19: https://devopsabcs-engineering.github.io/foundry-hosted-agents-fsi/labs/lab-19-evaluation-engineering
 Source: https://learn.microsoft.com/azure/foundry/concepts/evaluation-evaluators/agent-evaluators</a:t>
@@ -1991,7 +1992,7 @@
           <a:p>
             <a:r>
               <a:rPr lang="en-US" dirty="0"/>
-              <a:t>The full CLI recaptures the hosted agent, so rerunning it does not isolate the judge. Lab19.8 includes an executable judge-only reuse recipe and a result-inspection recipe. Use fresh directories and predeclared trial counts; no silent overwrites or stopping at first pass.
+              <a:t>Ask: which error is costliest here? A false accept of unauthorized approval matters more than harmless wording. Thresholds should reflect risk and validation, not be tuned after seeing the candidate. Challenge prompt injection inside judged content without allowing it to redefine the rubric.
 Guide: https://devopsabcs-engineering.github.io/foundry-hosted-agents-fsi/evaluation-guide.html
 Lab 19: https://devopsabcs-engineering.github.io/foundry-hosted-agents-fsi/labs/lab-19-evaluation-engineering
 Source: https://learn.microsoft.com/azure/foundry/concepts/evaluation-evaluators/custom-evaluators</a:t>
@@ -2082,7 +2083,7 @@
           <a:p>
             <a:r>
               <a:rPr lang="en-US" dirty="0"/>
-              <a:t>Work through the stdlib Wilson calculation in Lab19.8. Do not pool 30 correlated rubric grades as 30 independent cases. A case-level paired analysis or cluster bootstrap preserves within-case dependence. Hard invariants are not traded away against a confidence interval.
+              <a:t>The full CLI recaptures the hosted agent, so rerunning it does not isolate the judge. Lab19.8 includes an executable judge-only reuse recipe and a result-inspection recipe. Use fresh directories and predeclared trial counts; no silent overwrites or stopping at first pass.
 Guide: https://devopsabcs-engineering.github.io/foundry-hosted-agents-fsi/evaluation-guide.html
 Lab 19: https://devopsabcs-engineering.github.io/foundry-hosted-agents-fsi/labs/lab-19-evaluation-engineering
 Source: https://learn.microsoft.com/azure/foundry/how-to/evaluate-generative-ai-app</a:t>
@@ -2173,7 +2174,7 @@
           <a:p>
             <a:r>
               <a:rPr lang="en-US" dirty="0"/>
-              <a:t>Blind/randomize candidate order where feasible to reduce judge bias. Report per-case reasons and reviewed failures rather than only average score delta. Repetition controls statistical noise but does not fix invalid ground truth or missing coverage.
+              <a:t>Work through the stdlib Wilson calculation in Lab19.8. Do not pool 30 correlated rubric grades as 30 independent cases. A case-level paired analysis or cluster bootstrap preserves within-case dependence. Hard invariants are not traded away against a confidence interval.
 Guide: https://devopsabcs-engineering.github.io/foundry-hosted-agents-fsi/evaluation-guide.html
 Lab 19: https://devopsabcs-engineering.github.io/foundry-hosted-agents-fsi/labs/lab-19-evaluation-engineering
 Source: https://learn.microsoft.com/azure/foundry/observability/how-to/cloud-evaluation</a:t>
@@ -2264,7 +2265,7 @@
           <a:p>
             <a:r>
               <a:rPr lang="en-US" dirty="0"/>
-              <a:t>Thirty judgments is nominal work, not a fixed request count or price. The quote graph currently does not call a pricing LLM; judges still incur model cost. Freeze cache keys across input, state, model, rubric and evaluator, and label reused captures as not fresh inference.
+              <a:t>Blind/randomize candidate order where feasible to reduce judge bias. Report per-case reasons and reviewed failures rather than only average score delta. Repetition controls statistical noise but does not fix invalid ground truth or missing coverage.
 Guide: https://devopsabcs-engineering.github.io/foundry-hosted-agents-fsi/evaluation-guide.html
 Lab 19: https://devopsabcs-engineering.github.io/foundry-hosted-agents-fsi/labs/lab-19-evaluation-engineering
 Source: https://learn.microsoft.com/azure/foundry/observability/how-to/cloud-evaluation-datasets</a:t>
@@ -2355,7 +2356,7 @@
           <a:p>
             <a:r>
               <a:rPr lang="en-US" dirty="0"/>
-              <a:t>Production CASE004 was verified: previous110000 labeled not current, TRAINING_BASIC preparation returned200/PENDING_REVIEW/READY/90000, response and correlation matched, self-approval403. Do not replay blindly on current revision2 or clear benchmark state. Use owner-approved isolated storage/case.
+              <a:t>Thirty judgments is nominal work, not a fixed request count or price. The quote graph currently does not call a pricing LLM; judges still incur model cost. Freeze cache keys across input, state, model, rubric and evaluator, and label reused captures as not fresh inference.
 Guide: https://devopsabcs-engineering.github.io/foundry-hosted-agents-fsi/evaluation-guide.html
 Lab 19: https://devopsabcs-engineering.github.io/foundry-hosted-agents-fsi/labs/lab-19-evaluation-engineering
 Source: https://learn.microsoft.com/azure/foundry/concepts/built-in-evaluators</a:t>
@@ -2446,7 +2447,7 @@
           <a:p>
             <a:r>
               <a:rPr lang="en-US" dirty="0"/>
-              <a:t>Lab18 exports genuinely ingested SDK spans and reconstructs a synthetic replay, not a private original prompt. Do not invent model spans in this deterministic graph. If a process evaluator requires a trajectory format not captured here, mark the dimension not measured rather than filling it with an acknowledgement.
+              <a:t>Production CASE004 was verified: previous110000 labeled not current, TRAINING_BASIC preparation returned200/PENDING_REVIEW/READY/90000, response and correlation matched, self-approval403. Do not replay blindly on current revision2 or clear benchmark state. Use owner-approved isolated storage/case.
 Guide: https://devopsabcs-engineering.github.io/foundry-hosted-agents-fsi/evaluation-guide.html
 Lab 19: https://devopsabcs-engineering.github.io/foundry-hosted-agents-fsi/labs/lab-19-evaluation-engineering
 Source: https://learn.microsoft.com/azure/foundry/concepts/evaluation-evaluators/agent-evaluators</a:t>
@@ -2628,7 +2629,7 @@
           <a:p>
             <a:r>
               <a:rPr lang="en-US" dirty="0"/>
-              <a:t>A service SystemError belongs in reliability reporting, not a numeric model quality score. Avoid broad access grants as troubleshooting shortcuts. Real production sampling requires approved privacy and retention rules; this workshop stays synthetic. Scheduled evaluations complement, not replace, release evidence.
+              <a:t>Lab18 exports genuinely ingested SDK spans and reconstructs a synthetic replay, not a private original prompt. Do not invent model spans in this deterministic graph. If a process evaluator requires a trajectory format not captured here, mark the dimension not measured rather than filling it with an acknowledgement.
 Guide: https://devopsabcs-engineering.github.io/foundry-hosted-agents-fsi/evaluation-guide.html
 Lab 19: https://devopsabcs-engineering.github.io/foundry-hosted-agents-fsi/labs/lab-19-evaluation-engineering
 Source: https://learn.microsoft.com/azure/foundry/concepts/evaluation-evaluators/custom-evaluators</a:t>
@@ -2719,7 +2720,7 @@
           <a:p>
             <a:r>
               <a:rPr lang="en-US" dirty="0"/>
-              <a:t>Use the one-page worksheet in Lab19.10. Good score alone is insufficient; missing trajectory or failed negative controls must stay visible. The lab does not authorize release, change gates or grant access. Include separate operations and quality conclusions.
+              <a:t>A service SystemError belongs in reliability reporting, not a numeric model quality score. Avoid broad access grants as troubleshooting shortcuts. Real production sampling requires approved privacy and retention rules; this workshop stays synthetic. Scheduled evaluations complement, not replace, release evidence.
 Guide: https://devopsabcs-engineering.github.io/foundry-hosted-agents-fsi/evaluation-guide.html
 Lab 19: https://devopsabcs-engineering.github.io/foundry-hosted-agents-fsi/labs/lab-19-evaluation-engineering
 Source: https://learn.microsoft.com/azure/foundry/how-to/evaluate-generative-ai-app</a:t>
@@ -2810,7 +2811,7 @@
           <a:p>
             <a:r>
               <a:rPr lang="en-US" dirty="0"/>
-              <a:t>Expected answers: A blocks on a hard authorization invariant. B blocks on completeness, not assumed quality. C needs remediation or explicit risk decision under policy; a mean cannot hide the high-risk false accept. D is eligible for the protected owner decision, not automatically approved by the evaluator.
+              <a:t>Use the one-page worksheet in Lab19.10. Good score alone is insufficient; missing trajectory or failed negative controls must stay visible. The lab does not authorize release, change gates or grant access. Include separate operations and quality conclusions.
 Guide: https://devopsabcs-engineering.github.io/foundry-hosted-agents-fsi/evaluation-guide.html
 Lab 19: https://devopsabcs-engineering.github.io/foundry-hosted-agents-fsi/labs/lab-19-evaluation-engineering
 Source: https://learn.microsoft.com/azure/foundry/observability/how-to/cloud-evaluation</a:t>
@@ -2901,7 +2902,7 @@
           <a:p>
             <a:r>
               <a:rPr lang="en-US" dirty="0"/>
-              <a:t>Ask each participant to name a bug unit tests detect better, a semantic defect exact matching misses, a judge false positive and a non-LLM cause of runtime variation. Strong answers separate evidence scope, statistical uncertainty and policy ownership.
+              <a:t>Expected answers: A blocks on a hard authorization invariant. B blocks on completeness, not assumed quality. C needs remediation or explicit risk decision under policy; a mean cannot hide the high-risk false accept. D is eligible for the protected owner decision, not automatically approved by the evaluator.
 Guide: https://devopsabcs-engineering.github.io/foundry-hosted-agents-fsi/evaluation-guide.html
 Lab 19: https://devopsabcs-engineering.github.io/foundry-hosted-agents-fsi/labs/lab-19-evaluation-engineering
 Source: https://learn.microsoft.com/azure/foundry/observability/how-to/cloud-evaluation-datasets</a:t>
@@ -2992,6 +2993,97 @@
           <a:p>
             <a:r>
               <a:rPr lang="en-US" dirty="0"/>
+              <a:t>Ask each participant to name a bug unit tests detect better, a semantic defect exact matching misses, a judge false positive and a non-LLM cause of runtime variation. Strong answers separate evidence scope, statistical uncertainty and policy ownership.
+Guide: https://devopsabcs-engineering.github.io/foundry-hosted-agents-fsi/evaluation-guide.html
+Lab 19: https://devopsabcs-engineering.github.io/foundry-hosted-agents-fsi/labs/lab-19-evaluation-engineering
+Source: https://learn.microsoft.com/azure/foundry/concepts/built-in-evaluators</a:t>
+            </a:r>
+            <a:endParaRPr lang="en-US" dirty="0"/>
+          </a:p>
+        </p:txBody>
+      </p:sp>
+      <p:sp>
+        <p:nvSpPr>
+          <p:cNvPr id="4" name="Slide Number Placeholder 3"/>
+          <p:cNvSpPr>
+            <a:spLocks noGrp="1"/>
+          </p:cNvSpPr>
+          <p:nvPr>
+            <p:ph type="sldNum" sz="quarter" idx="10"/>
+          </p:nvPr>
+        </p:nvSpPr>
+        <p:spPr/>
+        <p:txBody>
+          <a:bodyPr/>
+          <a:lstStyle/>
+          <a:p>
+            <a:fld id="{F7021451-1387-4CA6-816F-3879F97B5CBC}" type="slidenum">
+              <a:rPr lang="en-US"/>
+              <a:t>34</a:t>
+            </a:fld>
+            <a:endParaRPr lang="en-US"/>
+          </a:p>
+        </p:txBody>
+      </p:sp>
+    </p:spTree>
+    <p:extLst>
+      <p:ext uri="{BB962C8B-B14F-4D97-AF65-F5344CB8AC3E}">
+        <p14:creationId xmlns:p14="http://schemas.microsoft.com/office/powerpoint/2010/main" val="1024086991"/>
+      </p:ext>
+    </p:extLst>
+  </p:cSld>
+  <p:clrMapOvr>
+    <a:masterClrMapping/>
+  </p:clrMapOvr>
+</p:notes>
+</file>
+
+<file path=ppt/notesSlides/notesSlide35.xml><?xml version="1.0" encoding="utf-8"?>
+<p:notes xmlns:a="http://schemas.openxmlformats.org/drawingml/2006/main" xmlns:r="http://schemas.openxmlformats.org/officeDocument/2006/relationships" xmlns:p="http://schemas.openxmlformats.org/presentationml/2006/main">
+  <p:cSld>
+    <p:spTree>
+      <p:nvGrpSpPr>
+        <p:cNvPr id="1" name=""/>
+        <p:cNvGrpSpPr/>
+        <p:nvPr/>
+      </p:nvGrpSpPr>
+      <p:grpSpPr>
+        <a:xfrm>
+          <a:off x="0" y="0"/>
+          <a:ext cx="0" cy="0"/>
+          <a:chOff x="0" y="0"/>
+          <a:chExt cx="0" cy="0"/>
+        </a:xfrm>
+      </p:grpSpPr>
+      <p:sp>
+        <p:nvSpPr>
+          <p:cNvPr id="2" name="Slide Image Placeholder 1"/>
+          <p:cNvSpPr>
+            <a:spLocks noGrp="1" noRot="1" noChangeAspect="1"/>
+          </p:cNvSpPr>
+          <p:nvPr>
+            <p:ph type="sldImg"/>
+          </p:nvPr>
+        </p:nvSpPr>
+        <p:spPr/>
+      </p:sp>
+      <p:sp>
+        <p:nvSpPr>
+          <p:cNvPr id="3" name="Notes Placeholder 2"/>
+          <p:cNvSpPr>
+            <a:spLocks noGrp="1"/>
+          </p:cNvSpPr>
+          <p:nvPr>
+            <p:ph type="body" idx="1"/>
+          </p:nvPr>
+        </p:nvSpPr>
+        <p:spPr/>
+        <p:txBody>
+          <a:bodyPr/>
+          <a:lstStyle/>
+          <a:p>
+            <a:r>
+              <a:rPr lang="en-US" dirty="0"/>
               <a:t>Guide and lab are maintained in the repository and linked from the workshop. Rebuild with npm run build-evaluation-deck. Official references:
 https://learn.microsoft.com/azure/foundry/how-to/evaluate-generative-ai-app
 https://learn.microsoft.com/azure/foundry/observability/how-to/cloud-evaluation
@@ -3002,7 +3094,7 @@
 Live release evidence: https://github.com/devopsabcs-engineering/foundry-hosted-agents-fsi/wiki/Native-Foundry-Evidence
 Guide: https://devopsabcs-engineering.github.io/foundry-hosted-agents-fsi/evaluation-guide.html
 Lab 19: https://devopsabcs-engineering.github.io/foundry-hosted-agents-fsi/labs/lab-19-evaluation-engineering
-Source: https://learn.microsoft.com/azure/foundry/concepts/built-in-evaluators</a:t>
+Source: https://learn.microsoft.com/azure/foundry/concepts/evaluation-evaluators/agent-evaluators</a:t>
             </a:r>
             <a:endParaRPr lang="en-US" dirty="0"/>
           </a:p>
@@ -3025,7 +3117,7 @@
           <a:p>
             <a:fld id="{F7021451-1387-4CA6-816F-3879F97B5CBC}" type="slidenum">
               <a:rPr lang="en-US"/>
-              <a:t>34</a:t>
+              <a:t>35</a:t>
             </a:fld>
             <a:endParaRPr lang="en-US"/>
           </a:p>
@@ -4224,7 +4316,7 @@
                 <a:ea typeface="Segoe UI" pitchFamily="34" charset="-122"/>
                 <a:cs typeface="Segoe UI" pitchFamily="34" charset="-120"/>
               </a:rPr>
-              <a:t>1 / 34</a:t>
+              <a:t>1 / 35</a:t>
             </a:r>
             <a:endParaRPr lang="en-US" sz="1000" dirty="0"/>
           </a:p>
@@ -4852,7 +4944,7 @@
                 <a:ea typeface="Segoe UI" pitchFamily="34" charset="-122"/>
                 <a:cs typeface="Segoe UI" pitchFamily="34" charset="-120"/>
               </a:rPr>
-              <a:t>10 / 34</a:t>
+              <a:t>10 / 35</a:t>
             </a:r>
             <a:endParaRPr lang="en-US" sz="1000" dirty="0"/>
           </a:p>
@@ -5488,7 +5580,7 @@
                 <a:ea typeface="Segoe UI" pitchFamily="34" charset="-122"/>
                 <a:cs typeface="Segoe UI" pitchFamily="34" charset="-120"/>
               </a:rPr>
-              <a:t>11 / 34</a:t>
+              <a:t>11 / 35</a:t>
             </a:r>
             <a:endParaRPr lang="en-US" sz="1000" dirty="0"/>
           </a:p>
@@ -5703,7 +5795,7 @@
                 <a:ea typeface="Segoe UI" pitchFamily="34" charset="-122"/>
                 <a:cs typeface="Segoe UI" pitchFamily="34" charset="-120"/>
               </a:rPr>
-              <a:t>Confirm staging project, tenant, running version and cost cap.</a:t>
+              <a:t>Open the project-level Optimize &gt; Evaluations list.</a:t>
             </a:r>
             <a:endParaRPr lang="en-US" sz="2000" dirty="0"/>
           </a:p>
@@ -5804,7 +5896,7 @@
                 <a:ea typeface="Segoe UI" pitchFamily="34" charset="-122"/>
                 <a:cs typeface="Segoe UI" pitchFamily="34" charset="-120"/>
               </a:rPr>
-              <a:t>Choose agent invocation or an uploaded captured-response dataset.</a:t>
+              <a:t>Read-only: match retained run ID, status and five items.</a:t>
             </a:r>
             <a:endParaRPr lang="en-US" sz="2000" dirty="0"/>
           </a:p>
@@ -5905,7 +5997,7 @@
                 <a:ea typeface="Segoe UI" pitchFamily="34" charset="-122"/>
                 <a:cs typeface="Segoe UI" pitchFamily="34" charset="-120"/>
               </a:rPr>
-              <a:t>Map query / context / response; select supported evaluators.</a:t>
+              <a:t>Practice: use supplied flat JSONL and independent context.</a:t>
             </a:r>
             <a:endParaRPr lang="en-US" sz="2000" dirty="0"/>
           </a:p>
@@ -6006,7 +6098,7 @@
                 <a:ea typeface="Segoe UI" pitchFamily="34" charset="-122"/>
                 <a:cs typeface="Segoe UI" pitchFamily="34" charset="-120"/>
               </a:rPr>
-              <a:t>Check completion, errors, individual reasons and export lineage.</a:t>
+              <a:t>Review criteria; stop before Submit without paid-call approval.</a:t>
             </a:r>
             <a:endParaRPr lang="en-US" sz="2000" dirty="0"/>
           </a:p>
@@ -6116,7 +6208,7 @@
                 <a:ea typeface="Segoe UI" pitchFamily="34" charset="-122"/>
                 <a:cs typeface="Segoe UI" pitchFamily="34" charset="-120"/>
               </a:rPr>
-              <a:t>12 / 34</a:t>
+              <a:t>12 / 35</a:t>
             </a:r>
             <a:endParaRPr lang="en-US" sz="1000" dirty="0"/>
           </a:p>
@@ -6744,7 +6836,7 @@
                 <a:ea typeface="Segoe UI" pitchFamily="34" charset="-122"/>
                 <a:cs typeface="Segoe UI" pitchFamily="34" charset="-120"/>
               </a:rPr>
-              <a:t>13 / 34</a:t>
+              <a:t>13 / 35</a:t>
             </a:r>
             <a:endParaRPr lang="en-US" sz="1000" dirty="0"/>
           </a:p>
@@ -7372,7 +7464,7 @@
                 <a:ea typeface="Segoe UI" pitchFamily="34" charset="-122"/>
                 <a:cs typeface="Segoe UI" pitchFamily="34" charset="-120"/>
               </a:rPr>
-              <a:t>14 / 34</a:t>
+              <a:t>14 / 35</a:t>
             </a:r>
             <a:endParaRPr lang="en-US" sz="1000" dirty="0"/>
           </a:p>
@@ -8000,7 +8092,7 @@
                 <a:ea typeface="Segoe UI" pitchFamily="34" charset="-122"/>
                 <a:cs typeface="Segoe UI" pitchFamily="34" charset="-120"/>
               </a:rPr>
-              <a:t>15 / 34</a:t>
+              <a:t>15 / 35</a:t>
             </a:r>
             <a:endParaRPr lang="en-US" sz="1000" dirty="0"/>
           </a:p>
@@ -8137,77 +8229,102 @@
                 <a:ea typeface="Segoe UI" pitchFamily="34" charset="-122"/>
                 <a:cs typeface="Segoe UI" pitchFamily="34" charset="-120"/>
               </a:rPr>
-              <a:t>Bilingual evaluation is not one averaged score</a:t>
+              <a:t>Groundedness: inspect the input contract</a:t>
             </a:r>
             <a:endParaRPr lang="en-US" sz="2700" dirty="0"/>
           </a:p>
         </p:txBody>
       </p:sp>
-      <p:sp>
-        <p:nvSpPr>
-          <p:cNvPr id="5" name="Text 3"/>
-          <p:cNvSpPr/>
-          <p:nvPr/>
-        </p:nvSpPr>
-        <p:spPr>
-          <a:xfrm>
-            <a:off x="594360" y="1828800"/>
-            <a:ext cx="640080" cy="594360"/>
-          </a:xfrm>
-          <a:prstGeom prst="rect">
-            <a:avLst/>
-          </a:prstGeom>
-          <a:noFill/>
-          <a:ln/>
-        </p:spPr>
-        <p:txBody>
-          <a:bodyPr wrap="square" lIns="0" tIns="0" rIns="0" bIns="0" rtlCol="0" anchor="ctr"/>
-          <a:lstStyle/>
-          <a:p>
-            <a:pPr indent="0" marL="0">
-              <a:buNone/>
-            </a:pPr>
-            <a:r>
-              <a:rPr lang="en-US" sz="1700" b="1" dirty="0">
-                <a:solidFill>
-                  <a:srgbClr val="0078D4"/>
-                </a:solidFill>
-                <a:latin typeface="Segoe UI" pitchFamily="34" charset="0"/>
-                <a:ea typeface="Segoe UI" pitchFamily="34" charset="-122"/>
-                <a:cs typeface="Segoe UI" pitchFamily="34" charset="-120"/>
-              </a:rPr>
-              <a:t>01</a:t>
-            </a:r>
-            <a:endParaRPr lang="en-US" sz="1700" dirty="0"/>
-          </a:p>
-        </p:txBody>
-      </p:sp>
-      <p:sp>
-        <p:nvSpPr>
-          <p:cNvPr id="6" name="Text 4"/>
-          <p:cNvSpPr/>
-          <p:nvPr/>
-        </p:nvSpPr>
-        <p:spPr>
-          <a:xfrm>
-            <a:off x="1325880" y="1828800"/>
-            <a:ext cx="10195560" cy="731520"/>
-          </a:xfrm>
-          <a:prstGeom prst="rect">
-            <a:avLst/>
-          </a:prstGeom>
-          <a:noFill/>
-          <a:ln/>
-        </p:spPr>
-        <p:txBody>
-          <a:bodyPr wrap="square" lIns="0" tIns="0" rIns="0" bIns="0" rtlCol="0" anchor="ctr"/>
-          <a:lstStyle/>
-          <a:p>
-            <a:pPr indent="0" marL="0">
-              <a:buNone/>
-            </a:pPr>
-            <a:r>
-              <a:rPr lang="en-US" sz="2000" dirty="0">
+      <p:pic>
+        <p:nvPicPr>
+          <p:cNvPr id="5" name="Image 0" descr="Groundedness catalog: input alternatives and ordinal 1-5 score.">
+            <a:hlinkClick r:id="rId2" tooltip=""/>
+          </p:cNvPr>
+          <p:cNvPicPr>
+            <a:picLocks noChangeAspect="1"/>
+          </p:cNvPicPr>
+          <p:nvPr/>
+        </p:nvPicPr>
+        <p:blipFill>
+          <a:blip r:embed="rId1"/>
+          <a:srcRect l="18206" r="202" t="53937" b="9924"/>
+          <a:stretch/>
+        </p:blipFill>
+        <p:spPr>
+          <a:xfrm>
+            <a:off x="548640" y="1874520"/>
+            <a:ext cx="11064240" cy="3063240"/>
+          </a:xfrm>
+          <a:prstGeom prst="rect">
+            <a:avLst/>
+          </a:prstGeom>
+        </p:spPr>
+      </p:pic>
+      <p:sp>
+        <p:nvSpPr>
+          <p:cNvPr id="6" name="Text 3"/>
+          <p:cNvSpPr/>
+          <p:nvPr/>
+        </p:nvSpPr>
+        <p:spPr>
+          <a:xfrm>
+            <a:off x="548640" y="5166360"/>
+            <a:ext cx="11064240" cy="411480"/>
+          </a:xfrm>
+          <a:prstGeom prst="rect">
+            <a:avLst/>
+          </a:prstGeom>
+          <a:noFill/>
+          <a:ln/>
+        </p:spPr>
+        <p:txBody>
+          <a:bodyPr wrap="square" lIns="0" tIns="0" rIns="0" bIns="0" rtlCol="0" anchor="ctr"/>
+          <a:lstStyle/>
+          <a:p>
+            <a:pPr indent="0" marL="0">
+              <a:buNone/>
+            </a:pPr>
+            <a:r>
+              <a:rPr lang="en-US" sz="1600" dirty="0">
+                <a:solidFill>
+                  <a:srgbClr val="526777"/>
+                </a:solidFill>
+                <a:latin typeface="Segoe UI" pitchFamily="34" charset="0"/>
+                <a:ea typeface="Segoe UI" pitchFamily="34" charset="-122"/>
+                <a:cs typeface="Segoe UI" pitchFamily="34" charset="-120"/>
+              </a:rPr>
+              <a:t>Staging catalog v18 | 2026-10-23 | Definition, not run results</a:t>
+            </a:r>
+            <a:endParaRPr lang="en-US" sz="1600" dirty="0"/>
+          </a:p>
+        </p:txBody>
+      </p:sp>
+      <p:sp>
+        <p:nvSpPr>
+          <p:cNvPr id="7" name="Text 4"/>
+          <p:cNvSpPr/>
+          <p:nvPr/>
+        </p:nvSpPr>
+        <p:spPr>
+          <a:xfrm>
+            <a:off x="548640" y="5623560"/>
+            <a:ext cx="11064240" cy="457200"/>
+          </a:xfrm>
+          <a:prstGeom prst="rect">
+            <a:avLst/>
+          </a:prstGeom>
+          <a:noFill/>
+          <a:ln/>
+        </p:spPr>
+        <p:txBody>
+          <a:bodyPr wrap="square" lIns="0" tIns="0" rIns="0" bIns="0" rtlCol="0" anchor="ctr"/>
+          <a:lstStyle/>
+          <a:p>
+            <a:pPr indent="0" marL="0">
+              <a:buNone/>
+            </a:pPr>
+            <a:r>
+              <a:rPr lang="en-US" sz="2000" b="1" dirty="0">
                 <a:solidFill>
                   <a:srgbClr val="183449"/>
                 </a:solidFill>
@@ -8215,7 +8332,7 @@
                 <a:ea typeface="Segoe UI" pitchFamily="34" charset="-122"/>
                 <a:cs typeface="Segoe UI" pitchFamily="34" charset="-120"/>
               </a:rPr>
-              <a:t>Convert one source into independent EN and FR runs.</a:t>
+              <a:t>Use independent trusted context, never the candidate answer.</a:t>
             </a:r>
             <a:endParaRPr lang="en-US" sz="2000" dirty="0"/>
           </a:p>
@@ -8223,334 +8340,8 @@
       </p:sp>
       <p:sp>
         <p:nvSpPr>
-          <p:cNvPr id="7" name="Shape 5"/>
-          <p:cNvSpPr/>
-          <p:nvPr/>
-        </p:nvSpPr>
-        <p:spPr>
-          <a:xfrm>
-            <a:off x="1325880" y="2660904"/>
-            <a:ext cx="10149840" cy="0"/>
-          </a:xfrm>
-          <a:prstGeom prst="line">
-            <a:avLst/>
-          </a:prstGeom>
-          <a:noFill/>
-          <a:ln w="6350">
-            <a:solidFill>
-              <a:srgbClr val="DCE5ED"/>
-            </a:solidFill>
-            <a:prstDash val="solid"/>
-          </a:ln>
-        </p:spPr>
-      </p:sp>
-      <p:sp>
-        <p:nvSpPr>
-          <p:cNvPr id="8" name="Text 6"/>
-          <p:cNvSpPr/>
-          <p:nvPr/>
-        </p:nvSpPr>
-        <p:spPr>
-          <a:xfrm>
-            <a:off x="594360" y="2770632"/>
-            <a:ext cx="640080" cy="594360"/>
-          </a:xfrm>
-          <a:prstGeom prst="rect">
-            <a:avLst/>
-          </a:prstGeom>
-          <a:noFill/>
-          <a:ln/>
-        </p:spPr>
-        <p:txBody>
-          <a:bodyPr wrap="square" lIns="0" tIns="0" rIns="0" bIns="0" rtlCol="0" anchor="ctr"/>
-          <a:lstStyle/>
-          <a:p>
-            <a:pPr indent="0" marL="0">
-              <a:buNone/>
-            </a:pPr>
-            <a:r>
-              <a:rPr lang="en-US" sz="1700" b="1" dirty="0">
-                <a:solidFill>
-                  <a:srgbClr val="0078D4"/>
-                </a:solidFill>
-                <a:latin typeface="Segoe UI" pitchFamily="34" charset="0"/>
-                <a:ea typeface="Segoe UI" pitchFamily="34" charset="-122"/>
-                <a:cs typeface="Segoe UI" pitchFamily="34" charset="-120"/>
-              </a:rPr>
-              <a:t>02</a:t>
-            </a:r>
-            <a:endParaRPr lang="en-US" sz="1700" dirty="0"/>
-          </a:p>
-        </p:txBody>
-      </p:sp>
-      <p:sp>
-        <p:nvSpPr>
-          <p:cNvPr id="9" name="Text 7"/>
-          <p:cNvSpPr/>
-          <p:nvPr/>
-        </p:nvSpPr>
-        <p:spPr>
-          <a:xfrm>
-            <a:off x="1325880" y="2770632"/>
-            <a:ext cx="10195560" cy="731520"/>
-          </a:xfrm>
-          <a:prstGeom prst="rect">
-            <a:avLst/>
-          </a:prstGeom>
-          <a:noFill/>
-          <a:ln/>
-        </p:spPr>
-        <p:txBody>
-          <a:bodyPr wrap="square" lIns="0" tIns="0" rIns="0" bIns="0" rtlCol="0" anchor="ctr"/>
-          <a:lstStyle/>
-          <a:p>
-            <a:pPr indent="0" marL="0">
-              <a:buNone/>
-            </a:pPr>
-            <a:r>
-              <a:rPr lang="en-US" sz="2000" dirty="0">
-                <a:solidFill>
-                  <a:srgbClr val="183449"/>
-                </a:solidFill>
-                <a:latin typeface="Segoe UI" pitchFamily="34" charset="0"/>
-                <a:ea typeface="Segoe UI" pitchFamily="34" charset="-122"/>
-                <a:cs typeface="Segoe UI" pitchFamily="34" charset="-120"/>
-              </a:rPr>
-              <a:t>Keep the selected locale’s text as a string, not a bilingual map.</a:t>
-            </a:r>
-            <a:endParaRPr lang="en-US" sz="2000" dirty="0"/>
-          </a:p>
-        </p:txBody>
-      </p:sp>
-      <p:sp>
-        <p:nvSpPr>
-          <p:cNvPr id="10" name="Shape 8"/>
-          <p:cNvSpPr/>
-          <p:nvPr/>
-        </p:nvSpPr>
-        <p:spPr>
-          <a:xfrm>
-            <a:off x="1325880" y="3602736"/>
-            <a:ext cx="10149840" cy="0"/>
-          </a:xfrm>
-          <a:prstGeom prst="line">
-            <a:avLst/>
-          </a:prstGeom>
-          <a:noFill/>
-          <a:ln w="6350">
-            <a:solidFill>
-              <a:srgbClr val="DCE5ED"/>
-            </a:solidFill>
-            <a:prstDash val="solid"/>
-          </a:ln>
-        </p:spPr>
-      </p:sp>
-      <p:sp>
-        <p:nvSpPr>
-          <p:cNvPr id="11" name="Text 9"/>
-          <p:cNvSpPr/>
-          <p:nvPr/>
-        </p:nvSpPr>
-        <p:spPr>
-          <a:xfrm>
-            <a:off x="594360" y="3712464"/>
-            <a:ext cx="640080" cy="594360"/>
-          </a:xfrm>
-          <a:prstGeom prst="rect">
-            <a:avLst/>
-          </a:prstGeom>
-          <a:noFill/>
-          <a:ln/>
-        </p:spPr>
-        <p:txBody>
-          <a:bodyPr wrap="square" lIns="0" tIns="0" rIns="0" bIns="0" rtlCol="0" anchor="ctr"/>
-          <a:lstStyle/>
-          <a:p>
-            <a:pPr indent="0" marL="0">
-              <a:buNone/>
-            </a:pPr>
-            <a:r>
-              <a:rPr lang="en-US" sz="1700" b="1" dirty="0">
-                <a:solidFill>
-                  <a:srgbClr val="0078D4"/>
-                </a:solidFill>
-                <a:latin typeface="Segoe UI" pitchFamily="34" charset="0"/>
-                <a:ea typeface="Segoe UI" pitchFamily="34" charset="-122"/>
-                <a:cs typeface="Segoe UI" pitchFamily="34" charset="-120"/>
-              </a:rPr>
-              <a:t>03</a:t>
-            </a:r>
-            <a:endParaRPr lang="en-US" sz="1700" dirty="0"/>
-          </a:p>
-        </p:txBody>
-      </p:sp>
-      <p:sp>
-        <p:nvSpPr>
-          <p:cNvPr id="12" name="Text 10"/>
-          <p:cNvSpPr/>
-          <p:nvPr/>
-        </p:nvSpPr>
-        <p:spPr>
-          <a:xfrm>
-            <a:off x="1325880" y="3712464"/>
-            <a:ext cx="10195560" cy="731520"/>
-          </a:xfrm>
-          <a:prstGeom prst="rect">
-            <a:avLst/>
-          </a:prstGeom>
-          <a:noFill/>
-          <a:ln/>
-        </p:spPr>
-        <p:txBody>
-          <a:bodyPr wrap="square" lIns="0" tIns="0" rIns="0" bIns="0" rtlCol="0" anchor="ctr"/>
-          <a:lstStyle/>
-          <a:p>
-            <a:pPr indent="0" marL="0">
-              <a:buNone/>
-            </a:pPr>
-            <a:r>
-              <a:rPr lang="en-US" sz="2000" dirty="0">
-                <a:solidFill>
-                  <a:srgbClr val="183449"/>
-                </a:solidFill>
-                <a:latin typeface="Segoe UI" pitchFamily="34" charset="0"/>
-                <a:ea typeface="Segoe UI" pitchFamily="34" charset="-122"/>
-                <a:cs typeface="Segoe UI" pitchFamily="34" charset="-120"/>
-              </a:rPr>
-              <a:t>Inspect locale-specific failures and disclaimer requirements.</a:t>
-            </a:r>
-            <a:endParaRPr lang="en-US" sz="2000" dirty="0"/>
-          </a:p>
-        </p:txBody>
-      </p:sp>
-      <p:sp>
-        <p:nvSpPr>
-          <p:cNvPr id="13" name="Shape 11"/>
-          <p:cNvSpPr/>
-          <p:nvPr/>
-        </p:nvSpPr>
-        <p:spPr>
-          <a:xfrm>
-            <a:off x="1325880" y="4544568"/>
-            <a:ext cx="10149840" cy="0"/>
-          </a:xfrm>
-          <a:prstGeom prst="line">
-            <a:avLst/>
-          </a:prstGeom>
-          <a:noFill/>
-          <a:ln w="6350">
-            <a:solidFill>
-              <a:srgbClr val="DCE5ED"/>
-            </a:solidFill>
-            <a:prstDash val="solid"/>
-          </a:ln>
-        </p:spPr>
-      </p:sp>
-      <p:sp>
-        <p:nvSpPr>
-          <p:cNvPr id="14" name="Text 12"/>
-          <p:cNvSpPr/>
-          <p:nvPr/>
-        </p:nvSpPr>
-        <p:spPr>
-          <a:xfrm>
-            <a:off x="594360" y="4654296"/>
-            <a:ext cx="640080" cy="594360"/>
-          </a:xfrm>
-          <a:prstGeom prst="rect">
-            <a:avLst/>
-          </a:prstGeom>
-          <a:noFill/>
-          <a:ln/>
-        </p:spPr>
-        <p:txBody>
-          <a:bodyPr wrap="square" lIns="0" tIns="0" rIns="0" bIns="0" rtlCol="0" anchor="ctr"/>
-          <a:lstStyle/>
-          <a:p>
-            <a:pPr indent="0" marL="0">
-              <a:buNone/>
-            </a:pPr>
-            <a:r>
-              <a:rPr lang="en-US" sz="1700" b="1" dirty="0">
-                <a:solidFill>
-                  <a:srgbClr val="0078D4"/>
-                </a:solidFill>
-                <a:latin typeface="Segoe UI" pitchFamily="34" charset="0"/>
-                <a:ea typeface="Segoe UI" pitchFamily="34" charset="-122"/>
-                <a:cs typeface="Segoe UI" pitchFamily="34" charset="-120"/>
-              </a:rPr>
-              <a:t>04</a:t>
-            </a:r>
-            <a:endParaRPr lang="en-US" sz="1700" dirty="0"/>
-          </a:p>
-        </p:txBody>
-      </p:sp>
-      <p:sp>
-        <p:nvSpPr>
-          <p:cNvPr id="15" name="Text 13"/>
-          <p:cNvSpPr/>
-          <p:nvPr/>
-        </p:nvSpPr>
-        <p:spPr>
-          <a:xfrm>
-            <a:off x="1325880" y="4654296"/>
-            <a:ext cx="10195560" cy="731520"/>
-          </a:xfrm>
-          <a:prstGeom prst="rect">
-            <a:avLst/>
-          </a:prstGeom>
-          <a:noFill/>
-          <a:ln/>
-        </p:spPr>
-        <p:txBody>
-          <a:bodyPr wrap="square" lIns="0" tIns="0" rIns="0" bIns="0" rtlCol="0" anchor="ctr"/>
-          <a:lstStyle/>
-          <a:p>
-            <a:pPr indent="0" marL="0">
-              <a:buNone/>
-            </a:pPr>
-            <a:r>
-              <a:rPr lang="en-US" sz="2000" dirty="0">
-                <a:solidFill>
-                  <a:srgbClr val="183449"/>
-                </a:solidFill>
-                <a:latin typeface="Segoe UI" pitchFamily="34" charset="0"/>
-                <a:ea typeface="Segoe UI" pitchFamily="34" charset="-122"/>
-                <a:cs typeface="Segoe UI" pitchFamily="34" charset="-120"/>
-              </a:rPr>
-              <a:t>A global average can hide a French-only regression.</a:t>
-            </a:r>
-            <a:endParaRPr lang="en-US" sz="2000" dirty="0"/>
-          </a:p>
-        </p:txBody>
-      </p:sp>
-      <p:sp>
-        <p:nvSpPr>
-          <p:cNvPr id="16" name="Shape 14"/>
-          <p:cNvSpPr/>
-          <p:nvPr/>
-        </p:nvSpPr>
-        <p:spPr>
-          <a:xfrm>
-            <a:off x="1325880" y="5486400"/>
-            <a:ext cx="10149840" cy="0"/>
-          </a:xfrm>
-          <a:prstGeom prst="line">
-            <a:avLst/>
-          </a:prstGeom>
-          <a:noFill/>
-          <a:ln w="6350">
-            <a:solidFill>
-              <a:srgbClr val="DCE5ED"/>
-            </a:solidFill>
-            <a:prstDash val="solid"/>
-          </a:ln>
-        </p:spPr>
-      </p:sp>
-      <p:sp>
-        <p:nvSpPr>
-          <p:cNvPr id="17" name="Text 15">
-            <a:hlinkClick r:id="rId1" tooltip=""/>
+          <p:cNvPr id="8" name="Text 5">
+            <a:hlinkClick r:id="rId3" tooltip=""/>
           </p:cNvPr>
           <p:cNvSpPr/>
           <p:nvPr/>
@@ -8581,7 +8372,7 @@
                 <a:latin typeface="Segoe UI" pitchFamily="34" charset="0"/>
                 <a:ea typeface="Segoe UI" pitchFamily="34" charset="-122"/>
                 <a:cs typeface="Segoe UI" pitchFamily="34" charset="-120"/>
-                <a:hlinkClick r:id="rId1" invalidUrl="" action="" tgtFrame="" tooltip="" history="1" highlightClick="0" endSnd="0">
+                <a:hlinkClick r:id="rId3" invalidUrl="" action="" tgtFrame="" tooltip="" history="1" highlightClick="0" endSnd="0">
                   <a:extLst>
                     <a:ext uri="{A12FA001-AC4F-418D-AE19-62706E023703}">
                       <ahyp:hlinkClr xmlns:ahyp="http://schemas.microsoft.com/office/drawing/2018/hyperlinkcolor" val="tx"/>
@@ -8597,7 +8388,7 @@
       </p:sp>
       <p:sp>
         <p:nvSpPr>
-          <p:cNvPr id="18" name="Text 16"/>
+          <p:cNvPr id="9" name="Text 6"/>
           <p:cNvSpPr/>
           <p:nvPr/>
         </p:nvSpPr>
@@ -8628,7 +8419,7 @@
                 <a:ea typeface="Segoe UI" pitchFamily="34" charset="-122"/>
                 <a:cs typeface="Segoe UI" pitchFamily="34" charset="-120"/>
               </a:rPr>
-              <a:t>16 / 34</a:t>
+              <a:t>16 / 35</a:t>
             </a:r>
             <a:endParaRPr lang="en-US" sz="1000" dirty="0"/>
           </a:p>
@@ -8765,7 +8556,7 @@
                 <a:ea typeface="Segoe UI" pitchFamily="34" charset="-122"/>
                 <a:cs typeface="Segoe UI" pitchFamily="34" charset="-120"/>
               </a:rPr>
-              <a:t>Provenance: a version label is not a pin</a:t>
+              <a:t>Bilingual evaluation is not one averaged score</a:t>
             </a:r>
             <a:endParaRPr lang="en-US" sz="2700" dirty="0"/>
           </a:p>
@@ -8843,7 +8634,7 @@
                 <a:ea typeface="Segoe UI" pitchFamily="34" charset="-122"/>
                 <a:cs typeface="Segoe UI" pitchFamily="34" charset="-120"/>
               </a:rPr>
-              <a:t>--version records the observed current deployment only.</a:t>
+              <a:t>Convert one source into independent EN and FR runs.</a:t>
             </a:r>
             <a:endParaRPr lang="en-US" sz="2000" dirty="0"/>
           </a:p>
@@ -8944,7 +8735,7 @@
                 <a:ea typeface="Segoe UI" pitchFamily="34" charset="-122"/>
                 <a:cs typeface="Segoe UI" pitchFamily="34" charset="-120"/>
               </a:rPr>
-              <a:t>Reserve a stable window and verify version before and after.</a:t>
+              <a:t>Keep the selected locale’s text as a string, not a bilingual map.</a:t>
             </a:r>
             <a:endParaRPr lang="en-US" sz="2000" dirty="0"/>
           </a:p>
@@ -9045,7 +8836,7 @@
                 <a:ea typeface="Segoe UI" pitchFamily="34" charset="-122"/>
                 <a:cs typeface="Segoe UI" pitchFamily="34" charset="-120"/>
               </a:rPr>
-              <a:t>Freeze source, dataset, rubric, evaluator and judge-model versions.</a:t>
+              <a:t>Inspect locale-specific failures and disclaimer requirements.</a:t>
             </a:r>
             <a:endParaRPr lang="en-US" sz="2000" dirty="0"/>
           </a:p>
@@ -9146,7 +8937,7 @@
                 <a:ea typeface="Segoe UI" pitchFamily="34" charset="-122"/>
                 <a:cs typeface="Segoe UI" pitchFamily="34" charset="-120"/>
               </a:rPr>
-              <a:t>Keep raw captures, response IDs, native run IDs and hashes.</a:t>
+              <a:t>A global average can hide a French-only regression.</a:t>
             </a:r>
             <a:endParaRPr lang="en-US" sz="2000" dirty="0"/>
           </a:p>
@@ -9256,7 +9047,7 @@
                 <a:ea typeface="Segoe UI" pitchFamily="34" charset="-122"/>
                 <a:cs typeface="Segoe UI" pitchFamily="34" charset="-120"/>
               </a:rPr>
-              <a:t>17 / 34</a:t>
+              <a:t>17 / 35</a:t>
             </a:r>
             <a:endParaRPr lang="en-US" sz="1000" dirty="0"/>
           </a:p>
@@ -9393,7 +9184,7 @@
                 <a:ea typeface="Segoe UI" pitchFamily="34" charset="-122"/>
                 <a:cs typeface="Segoe UI" pitchFamily="34" charset="-120"/>
               </a:rPr>
-              <a:t>Completeness and quality are separate gates</a:t>
+              <a:t>Provenance: a version label is not a pin</a:t>
             </a:r>
             <a:endParaRPr lang="en-US" sz="2700" dirty="0"/>
           </a:p>
@@ -9401,22 +9192,98 @@
       </p:sp>
       <p:sp>
         <p:nvSpPr>
-          <p:cNvPr id="5" name="Shape 3"/>
-          <p:cNvSpPr/>
-          <p:nvPr/>
-        </p:nvSpPr>
-        <p:spPr>
-          <a:xfrm>
-            <a:off x="548640" y="1874520"/>
-            <a:ext cx="5394960" cy="3886200"/>
-          </a:xfrm>
-          <a:prstGeom prst="rect">
-            <a:avLst/>
-          </a:prstGeom>
-          <a:solidFill>
-            <a:srgbClr val="EDF4FA"/>
-          </a:solidFill>
-          <a:ln w="12700">
+          <p:cNvPr id="5" name="Text 3"/>
+          <p:cNvSpPr/>
+          <p:nvPr/>
+        </p:nvSpPr>
+        <p:spPr>
+          <a:xfrm>
+            <a:off x="594360" y="1828800"/>
+            <a:ext cx="640080" cy="594360"/>
+          </a:xfrm>
+          <a:prstGeom prst="rect">
+            <a:avLst/>
+          </a:prstGeom>
+          <a:noFill/>
+          <a:ln/>
+        </p:spPr>
+        <p:txBody>
+          <a:bodyPr wrap="square" lIns="0" tIns="0" rIns="0" bIns="0" rtlCol="0" anchor="ctr"/>
+          <a:lstStyle/>
+          <a:p>
+            <a:pPr indent="0" marL="0">
+              <a:buNone/>
+            </a:pPr>
+            <a:r>
+              <a:rPr lang="en-US" sz="1700" b="1" dirty="0">
+                <a:solidFill>
+                  <a:srgbClr val="0078D4"/>
+                </a:solidFill>
+                <a:latin typeface="Segoe UI" pitchFamily="34" charset="0"/>
+                <a:ea typeface="Segoe UI" pitchFamily="34" charset="-122"/>
+                <a:cs typeface="Segoe UI" pitchFamily="34" charset="-120"/>
+              </a:rPr>
+              <a:t>01</a:t>
+            </a:r>
+            <a:endParaRPr lang="en-US" sz="1700" dirty="0"/>
+          </a:p>
+        </p:txBody>
+      </p:sp>
+      <p:sp>
+        <p:nvSpPr>
+          <p:cNvPr id="6" name="Text 4"/>
+          <p:cNvSpPr/>
+          <p:nvPr/>
+        </p:nvSpPr>
+        <p:spPr>
+          <a:xfrm>
+            <a:off x="1325880" y="1828800"/>
+            <a:ext cx="10195560" cy="731520"/>
+          </a:xfrm>
+          <a:prstGeom prst="rect">
+            <a:avLst/>
+          </a:prstGeom>
+          <a:noFill/>
+          <a:ln/>
+        </p:spPr>
+        <p:txBody>
+          <a:bodyPr wrap="square" lIns="0" tIns="0" rIns="0" bIns="0" rtlCol="0" anchor="ctr"/>
+          <a:lstStyle/>
+          <a:p>
+            <a:pPr indent="0" marL="0">
+              <a:buNone/>
+            </a:pPr>
+            <a:r>
+              <a:rPr lang="en-US" sz="2000" dirty="0">
+                <a:solidFill>
+                  <a:srgbClr val="183449"/>
+                </a:solidFill>
+                <a:latin typeface="Segoe UI" pitchFamily="34" charset="0"/>
+                <a:ea typeface="Segoe UI" pitchFamily="34" charset="-122"/>
+                <a:cs typeface="Segoe UI" pitchFamily="34" charset="-120"/>
+              </a:rPr>
+              <a:t>--version records the observed current deployment only.</a:t>
+            </a:r>
+            <a:endParaRPr lang="en-US" sz="2000" dirty="0"/>
+          </a:p>
+        </p:txBody>
+      </p:sp>
+      <p:sp>
+        <p:nvSpPr>
+          <p:cNvPr id="7" name="Shape 5"/>
+          <p:cNvSpPr/>
+          <p:nvPr/>
+        </p:nvSpPr>
+        <p:spPr>
+          <a:xfrm>
+            <a:off x="1325880" y="2660904"/>
+            <a:ext cx="10149840" cy="0"/>
+          </a:xfrm>
+          <a:prstGeom prst="line">
+            <a:avLst/>
+          </a:prstGeom>
+          <a:noFill/>
+          <a:ln w="6350">
             <a:solidFill>
               <a:srgbClr val="DCE5ED"/>
             </a:solidFill>
@@ -9426,30 +9293,30 @@
       </p:sp>
       <p:sp>
         <p:nvSpPr>
-          <p:cNvPr id="6" name="Text 4"/>
-          <p:cNvSpPr/>
-          <p:nvPr/>
-        </p:nvSpPr>
-        <p:spPr>
-          <a:xfrm>
-            <a:off x="822960" y="2148840"/>
-            <a:ext cx="4846320" cy="640080"/>
-          </a:xfrm>
-          <a:prstGeom prst="rect">
-            <a:avLst/>
-          </a:prstGeom>
-          <a:noFill/>
-          <a:ln/>
-        </p:spPr>
-        <p:txBody>
-          <a:bodyPr wrap="square" lIns="0" tIns="0" rIns="0" bIns="0" rtlCol="0" anchor="ctr"/>
-          <a:lstStyle/>
-          <a:p>
-            <a:pPr indent="0" marL="0">
-              <a:buNone/>
-            </a:pPr>
-            <a:r>
-              <a:rPr lang="en-US" sz="2300" b="1" dirty="0">
+          <p:cNvPr id="8" name="Text 6"/>
+          <p:cNvSpPr/>
+          <p:nvPr/>
+        </p:nvSpPr>
+        <p:spPr>
+          <a:xfrm>
+            <a:off x="594360" y="2770632"/>
+            <a:ext cx="640080" cy="594360"/>
+          </a:xfrm>
+          <a:prstGeom prst="rect">
+            <a:avLst/>
+          </a:prstGeom>
+          <a:noFill/>
+          <a:ln/>
+        </p:spPr>
+        <p:txBody>
+          <a:bodyPr wrap="square" lIns="0" tIns="0" rIns="0" bIns="0" rtlCol="0" anchor="ctr"/>
+          <a:lstStyle/>
+          <a:p>
+            <a:pPr indent="0" marL="0">
+              <a:buNone/>
+            </a:pPr>
+            <a:r>
+              <a:rPr lang="en-US" sz="1700" b="1" dirty="0">
                 <a:solidFill>
                   <a:srgbClr val="0078D4"/>
                 </a:solidFill>
@@ -9457,38 +9324,38 @@
                 <a:ea typeface="Segoe UI" pitchFamily="34" charset="-122"/>
                 <a:cs typeface="Segoe UI" pitchFamily="34" charset="-120"/>
               </a:rPr>
-              <a:t>Completeness</a:t>
-            </a:r>
-            <a:endParaRPr lang="en-US" sz="2300" dirty="0"/>
-          </a:p>
-        </p:txBody>
-      </p:sp>
-      <p:sp>
-        <p:nvSpPr>
-          <p:cNvPr id="7" name="Text 5"/>
-          <p:cNvSpPr/>
-          <p:nvPr/>
-        </p:nvSpPr>
-        <p:spPr>
-          <a:xfrm>
-            <a:off x="822960" y="3017520"/>
-            <a:ext cx="4846320" cy="594360"/>
-          </a:xfrm>
-          <a:prstGeom prst="rect">
-            <a:avLst/>
-          </a:prstGeom>
-          <a:noFill/>
-          <a:ln/>
-        </p:spPr>
-        <p:txBody>
-          <a:bodyPr wrap="square" lIns="0" tIns="0" rIns="0" bIns="0" rtlCol="0" anchor="ctr"/>
-          <a:lstStyle/>
-          <a:p>
-            <a:pPr indent="0" marL="0">
-              <a:buNone/>
-            </a:pPr>
-            <a:r>
-              <a:rPr lang="en-US" sz="1900" dirty="0">
+              <a:t>02</a:t>
+            </a:r>
+            <a:endParaRPr lang="en-US" sz="1700" dirty="0"/>
+          </a:p>
+        </p:txBody>
+      </p:sp>
+      <p:sp>
+        <p:nvSpPr>
+          <p:cNvPr id="9" name="Text 7"/>
+          <p:cNvSpPr/>
+          <p:nvPr/>
+        </p:nvSpPr>
+        <p:spPr>
+          <a:xfrm>
+            <a:off x="1325880" y="2770632"/>
+            <a:ext cx="10195560" cy="731520"/>
+          </a:xfrm>
+          <a:prstGeom prst="rect">
+            <a:avLst/>
+          </a:prstGeom>
+          <a:noFill/>
+          <a:ln/>
+        </p:spPr>
+        <p:txBody>
+          <a:bodyPr wrap="square" lIns="0" tIns="0" rIns="0" bIns="0" rtlCol="0" anchor="ctr"/>
+          <a:lstStyle/>
+          <a:p>
+            <a:pPr indent="0" marL="0">
+              <a:buNone/>
+            </a:pPr>
+            <a:r>
+              <a:rPr lang="en-US" sz="2000" dirty="0">
                 <a:solidFill>
                   <a:srgbClr val="183449"/>
                 </a:solidFill>
@@ -9496,87 +9363,9 @@
                 <a:ea typeface="Segoe UI" pitchFamily="34" charset="-122"/>
                 <a:cs typeface="Segoe UI" pitchFamily="34" charset="-120"/>
               </a:rPr>
-              <a:t>Terminal completed state</a:t>
-            </a:r>
-            <a:endParaRPr lang="en-US" sz="1900" dirty="0"/>
-          </a:p>
-        </p:txBody>
-      </p:sp>
-      <p:sp>
-        <p:nvSpPr>
-          <p:cNvPr id="8" name="Text 6"/>
-          <p:cNvSpPr/>
-          <p:nvPr/>
-        </p:nvSpPr>
-        <p:spPr>
-          <a:xfrm>
-            <a:off x="822960" y="3794760"/>
-            <a:ext cx="4846320" cy="594360"/>
-          </a:xfrm>
-          <a:prstGeom prst="rect">
-            <a:avLst/>
-          </a:prstGeom>
-          <a:noFill/>
-          <a:ln/>
-        </p:spPr>
-        <p:txBody>
-          <a:bodyPr wrap="square" lIns="0" tIns="0" rIns="0" bIns="0" rtlCol="0" anchor="ctr"/>
-          <a:lstStyle/>
-          <a:p>
-            <a:pPr indent="0" marL="0">
-              <a:buNone/>
-            </a:pPr>
-            <a:r>
-              <a:rPr lang="en-US" sz="1900" dirty="0">
-                <a:solidFill>
-                  <a:srgbClr val="183449"/>
-                </a:solidFill>
-                <a:latin typeface="Segoe UI" pitchFamily="34" charset="0"/>
-                <a:ea typeface="Segoe UI" pitchFamily="34" charset="-122"/>
-                <a:cs typeface="Segoe UI" pitchFamily="34" charset="-120"/>
-              </a:rPr>
-              <a:t>Expected unique items and metrics</a:t>
-            </a:r>
-            <a:endParaRPr lang="en-US" sz="1900" dirty="0"/>
-          </a:p>
-        </p:txBody>
-      </p:sp>
-      <p:sp>
-        <p:nvSpPr>
-          <p:cNvPr id="9" name="Text 7"/>
-          <p:cNvSpPr/>
-          <p:nvPr/>
-        </p:nvSpPr>
-        <p:spPr>
-          <a:xfrm>
-            <a:off x="822960" y="4572000"/>
-            <a:ext cx="4846320" cy="594360"/>
-          </a:xfrm>
-          <a:prstGeom prst="rect">
-            <a:avLst/>
-          </a:prstGeom>
-          <a:noFill/>
-          <a:ln/>
-        </p:spPr>
-        <p:txBody>
-          <a:bodyPr wrap="square" lIns="0" tIns="0" rIns="0" bIns="0" rtlCol="0" anchor="ctr"/>
-          <a:lstStyle/>
-          <a:p>
-            <a:pPr indent="0" marL="0">
-              <a:buNone/>
-            </a:pPr>
-            <a:r>
-              <a:rPr lang="en-US" sz="1900" dirty="0">
-                <a:solidFill>
-                  <a:srgbClr val="183449"/>
-                </a:solidFill>
-                <a:latin typeface="Segoe UI" pitchFamily="34" charset="0"/>
-                <a:ea typeface="Segoe UI" pitchFamily="34" charset="-122"/>
-                <a:cs typeface="Segoe UI" pitchFamily="34" charset="-120"/>
-              </a:rPr>
-              <a:t>No service errors or skipped rows</a:t>
-            </a:r>
-            <a:endParaRPr lang="en-US" sz="1900" dirty="0"/>
+              <a:t>Reserve a stable window and verify version before and after.</a:t>
+            </a:r>
+            <a:endParaRPr lang="en-US" sz="2000" dirty="0"/>
           </a:p>
         </p:txBody>
       </p:sp>
@@ -9588,16 +9377,14 @@
         </p:nvSpPr>
         <p:spPr>
           <a:xfrm>
-            <a:off x="6217920" y="1874520"/>
-            <a:ext cx="5394960" cy="3886200"/>
-          </a:xfrm>
-          <a:prstGeom prst="rect">
-            <a:avLst/>
-          </a:prstGeom>
-          <a:solidFill>
-            <a:srgbClr val="EDF4FA"/>
-          </a:solidFill>
-          <a:ln w="12700">
+            <a:off x="1325880" y="3602736"/>
+            <a:ext cx="10149840" cy="0"/>
+          </a:xfrm>
+          <a:prstGeom prst="line">
+            <a:avLst/>
+          </a:prstGeom>
+          <a:noFill/>
+          <a:ln w="6350">
             <a:solidFill>
               <a:srgbClr val="DCE5ED"/>
             </a:solidFill>
@@ -9613,24 +9400,24 @@
         </p:nvSpPr>
         <p:spPr>
           <a:xfrm>
-            <a:off x="6492240" y="2148840"/>
-            <a:ext cx="4846320" cy="640080"/>
-          </a:xfrm>
-          <a:prstGeom prst="rect">
-            <a:avLst/>
-          </a:prstGeom>
-          <a:noFill/>
-          <a:ln/>
-        </p:spPr>
-        <p:txBody>
-          <a:bodyPr wrap="square" lIns="0" tIns="0" rIns="0" bIns="0" rtlCol="0" anchor="ctr"/>
-          <a:lstStyle/>
-          <a:p>
-            <a:pPr indent="0" marL="0">
-              <a:buNone/>
-            </a:pPr>
-            <a:r>
-              <a:rPr lang="en-US" sz="2300" b="1" dirty="0">
+            <a:off x="594360" y="3712464"/>
+            <a:ext cx="640080" cy="594360"/>
+          </a:xfrm>
+          <a:prstGeom prst="rect">
+            <a:avLst/>
+          </a:prstGeom>
+          <a:noFill/>
+          <a:ln/>
+        </p:spPr>
+        <p:txBody>
+          <a:bodyPr wrap="square" lIns="0" tIns="0" rIns="0" bIns="0" rtlCol="0" anchor="ctr"/>
+          <a:lstStyle/>
+          <a:p>
+            <a:pPr indent="0" marL="0">
+              <a:buNone/>
+            </a:pPr>
+            <a:r>
+              <a:rPr lang="en-US" sz="1700" b="1" dirty="0">
                 <a:solidFill>
                   <a:srgbClr val="0078D4"/>
                 </a:solidFill>
@@ -9638,9 +9425,9 @@
                 <a:ea typeface="Segoe UI" pitchFamily="34" charset="-122"/>
                 <a:cs typeface="Segoe UI" pitchFamily="34" charset="-120"/>
               </a:rPr>
-              <a:t>Quality</a:t>
-            </a:r>
-            <a:endParaRPr lang="en-US" sz="2300" dirty="0"/>
+              <a:t>03</a:t>
+            </a:r>
+            <a:endParaRPr lang="en-US" sz="1700" dirty="0"/>
           </a:p>
         </p:txBody>
       </p:sp>
@@ -9652,24 +9439,24 @@
         </p:nvSpPr>
         <p:spPr>
           <a:xfrm>
-            <a:off x="6492240" y="3017520"/>
-            <a:ext cx="4846320" cy="594360"/>
-          </a:xfrm>
-          <a:prstGeom prst="rect">
-            <a:avLst/>
-          </a:prstGeom>
-          <a:noFill/>
-          <a:ln/>
-        </p:spPr>
-        <p:txBody>
-          <a:bodyPr wrap="square" lIns="0" tIns="0" rIns="0" bIns="0" rtlCol="0" anchor="ctr"/>
-          <a:lstStyle/>
-          <a:p>
-            <a:pPr indent="0" marL="0">
-              <a:buNone/>
-            </a:pPr>
-            <a:r>
-              <a:rPr lang="en-US" sz="1900" dirty="0">
+            <a:off x="1325880" y="3712464"/>
+            <a:ext cx="10195560" cy="731520"/>
+          </a:xfrm>
+          <a:prstGeom prst="rect">
+            <a:avLst/>
+          </a:prstGeom>
+          <a:noFill/>
+          <a:ln/>
+        </p:spPr>
+        <p:txBody>
+          <a:bodyPr wrap="square" lIns="0" tIns="0" rIns="0" bIns="0" rtlCol="0" anchor="ctr"/>
+          <a:lstStyle/>
+          <a:p>
+            <a:pPr indent="0" marL="0">
+              <a:buNone/>
+            </a:pPr>
+            <a:r>
+              <a:rPr lang="en-US" sz="2000" dirty="0">
                 <a:solidFill>
                   <a:srgbClr val="183449"/>
                 </a:solidFill>
@@ -9677,38 +9464,100 @@
                 <a:ea typeface="Segoe UI" pitchFamily="34" charset="-122"/>
                 <a:cs typeface="Segoe UI" pitchFamily="34" charset="-120"/>
               </a:rPr>
-              <a:t>Calibrated per-metric thresholds</a:t>
-            </a:r>
-            <a:endParaRPr lang="en-US" sz="1900" dirty="0"/>
-          </a:p>
-        </p:txBody>
-      </p:sp>
-      <p:sp>
-        <p:nvSpPr>
-          <p:cNvPr id="13" name="Text 11"/>
-          <p:cNvSpPr/>
-          <p:nvPr/>
-        </p:nvSpPr>
-        <p:spPr>
-          <a:xfrm>
-            <a:off x="6492240" y="3794760"/>
-            <a:ext cx="4846320" cy="594360"/>
-          </a:xfrm>
-          <a:prstGeom prst="rect">
-            <a:avLst/>
-          </a:prstGeom>
-          <a:noFill/>
-          <a:ln/>
-        </p:spPr>
-        <p:txBody>
-          <a:bodyPr wrap="square" lIns="0" tIns="0" rIns="0" bIns="0" rtlCol="0" anchor="ctr"/>
-          <a:lstStyle/>
-          <a:p>
-            <a:pPr indent="0" marL="0">
-              <a:buNone/>
-            </a:pPr>
-            <a:r>
-              <a:rPr lang="en-US" sz="1900" dirty="0">
+              <a:t>Freeze source, dataset, rubric, evaluator and judge-model versions.</a:t>
+            </a:r>
+            <a:endParaRPr lang="en-US" sz="2000" dirty="0"/>
+          </a:p>
+        </p:txBody>
+      </p:sp>
+      <p:sp>
+        <p:nvSpPr>
+          <p:cNvPr id="13" name="Shape 11"/>
+          <p:cNvSpPr/>
+          <p:nvPr/>
+        </p:nvSpPr>
+        <p:spPr>
+          <a:xfrm>
+            <a:off x="1325880" y="4544568"/>
+            <a:ext cx="10149840" cy="0"/>
+          </a:xfrm>
+          <a:prstGeom prst="line">
+            <a:avLst/>
+          </a:prstGeom>
+          <a:noFill/>
+          <a:ln w="6350">
+            <a:solidFill>
+              <a:srgbClr val="DCE5ED"/>
+            </a:solidFill>
+            <a:prstDash val="solid"/>
+          </a:ln>
+        </p:spPr>
+      </p:sp>
+      <p:sp>
+        <p:nvSpPr>
+          <p:cNvPr id="14" name="Text 12"/>
+          <p:cNvSpPr/>
+          <p:nvPr/>
+        </p:nvSpPr>
+        <p:spPr>
+          <a:xfrm>
+            <a:off x="594360" y="4654296"/>
+            <a:ext cx="640080" cy="594360"/>
+          </a:xfrm>
+          <a:prstGeom prst="rect">
+            <a:avLst/>
+          </a:prstGeom>
+          <a:noFill/>
+          <a:ln/>
+        </p:spPr>
+        <p:txBody>
+          <a:bodyPr wrap="square" lIns="0" tIns="0" rIns="0" bIns="0" rtlCol="0" anchor="ctr"/>
+          <a:lstStyle/>
+          <a:p>
+            <a:pPr indent="0" marL="0">
+              <a:buNone/>
+            </a:pPr>
+            <a:r>
+              <a:rPr lang="en-US" sz="1700" b="1" dirty="0">
+                <a:solidFill>
+                  <a:srgbClr val="0078D4"/>
+                </a:solidFill>
+                <a:latin typeface="Segoe UI" pitchFamily="34" charset="0"/>
+                <a:ea typeface="Segoe UI" pitchFamily="34" charset="-122"/>
+                <a:cs typeface="Segoe UI" pitchFamily="34" charset="-120"/>
+              </a:rPr>
+              <a:t>04</a:t>
+            </a:r>
+            <a:endParaRPr lang="en-US" sz="1700" dirty="0"/>
+          </a:p>
+        </p:txBody>
+      </p:sp>
+      <p:sp>
+        <p:nvSpPr>
+          <p:cNvPr id="15" name="Text 13"/>
+          <p:cNvSpPr/>
+          <p:nvPr/>
+        </p:nvSpPr>
+        <p:spPr>
+          <a:xfrm>
+            <a:off x="1325880" y="4654296"/>
+            <a:ext cx="10195560" cy="731520"/>
+          </a:xfrm>
+          <a:prstGeom prst="rect">
+            <a:avLst/>
+          </a:prstGeom>
+          <a:noFill/>
+          <a:ln/>
+        </p:spPr>
+        <p:txBody>
+          <a:bodyPr wrap="square" lIns="0" tIns="0" rIns="0" bIns="0" rtlCol="0" anchor="ctr"/>
+          <a:lstStyle/>
+          <a:p>
+            <a:pPr indent="0" marL="0">
+              <a:buNone/>
+            </a:pPr>
+            <a:r>
+              <a:rPr lang="en-US" sz="2000" dirty="0">
                 <a:solidFill>
                   <a:srgbClr val="183449"/>
                 </a:solidFill>
@@ -9716,54 +9565,38 @@
                 <a:ea typeface="Segoe UI" pitchFamily="34" charset="-122"/>
                 <a:cs typeface="Segoe UI" pitchFamily="34" charset="-120"/>
               </a:rPr>
-              <a:t>Slice-specific false accepts/rejects</a:t>
-            </a:r>
-            <a:endParaRPr lang="en-US" sz="1900" dirty="0"/>
-          </a:p>
-        </p:txBody>
-      </p:sp>
-      <p:sp>
-        <p:nvSpPr>
-          <p:cNvPr id="14" name="Text 12"/>
-          <p:cNvSpPr/>
-          <p:nvPr/>
-        </p:nvSpPr>
-        <p:spPr>
-          <a:xfrm>
-            <a:off x="6492240" y="4572000"/>
-            <a:ext cx="4846320" cy="594360"/>
-          </a:xfrm>
-          <a:prstGeom prst="rect">
-            <a:avLst/>
-          </a:prstGeom>
-          <a:noFill/>
-          <a:ln/>
-        </p:spPr>
-        <p:txBody>
-          <a:bodyPr wrap="square" lIns="0" tIns="0" rIns="0" bIns="0" rtlCol="0" anchor="ctr"/>
-          <a:lstStyle/>
-          <a:p>
-            <a:pPr indent="0" marL="0">
-              <a:buNone/>
-            </a:pPr>
-            <a:r>
-              <a:rPr lang="en-US" sz="1900" dirty="0">
-                <a:solidFill>
-                  <a:srgbClr val="183449"/>
-                </a:solidFill>
-                <a:latin typeface="Segoe UI" pitchFamily="34" charset="0"/>
-                <a:ea typeface="Segoe UI" pitchFamily="34" charset="-122"/>
-                <a:cs typeface="Segoe UI" pitchFamily="34" charset="-120"/>
-              </a:rPr>
-              <a:t>Human review and uncertainty</a:t>
-            </a:r>
-            <a:endParaRPr lang="en-US" sz="1900" dirty="0"/>
-          </a:p>
-        </p:txBody>
-      </p:sp>
-      <p:sp>
-        <p:nvSpPr>
-          <p:cNvPr id="15" name="Text 13">
+              <a:t>Keep raw captures, response IDs, native run IDs and hashes.</a:t>
+            </a:r>
+            <a:endParaRPr lang="en-US" sz="2000" dirty="0"/>
+          </a:p>
+        </p:txBody>
+      </p:sp>
+      <p:sp>
+        <p:nvSpPr>
+          <p:cNvPr id="16" name="Shape 14"/>
+          <p:cNvSpPr/>
+          <p:nvPr/>
+        </p:nvSpPr>
+        <p:spPr>
+          <a:xfrm>
+            <a:off x="1325880" y="5486400"/>
+            <a:ext cx="10149840" cy="0"/>
+          </a:xfrm>
+          <a:prstGeom prst="line">
+            <a:avLst/>
+          </a:prstGeom>
+          <a:noFill/>
+          <a:ln w="6350">
+            <a:solidFill>
+              <a:srgbClr val="DCE5ED"/>
+            </a:solidFill>
+            <a:prstDash val="solid"/>
+          </a:ln>
+        </p:spPr>
+      </p:sp>
+      <p:sp>
+        <p:nvSpPr>
+          <p:cNvPr id="17" name="Text 15">
             <a:hlinkClick r:id="rId1" tooltip=""/>
           </p:cNvPr>
           <p:cNvSpPr/>
@@ -9811,7 +9644,7 @@
       </p:sp>
       <p:sp>
         <p:nvSpPr>
-          <p:cNvPr id="16" name="Text 14"/>
+          <p:cNvPr id="18" name="Text 16"/>
           <p:cNvSpPr/>
           <p:nvPr/>
         </p:nvSpPr>
@@ -9842,7 +9675,7 @@
                 <a:ea typeface="Segoe UI" pitchFamily="34" charset="-122"/>
                 <a:cs typeface="Segoe UI" pitchFamily="34" charset="-120"/>
               </a:rPr>
-              <a:t>18 / 34</a:t>
+              <a:t>18 / 35</a:t>
             </a:r>
             <a:endParaRPr lang="en-US" sz="1000" dirty="0"/>
           </a:p>
@@ -9979,7 +9812,7 @@
                 <a:ea typeface="Segoe UI" pitchFamily="34" charset="-122"/>
                 <a:cs typeface="Segoe UI" pitchFamily="34" charset="-120"/>
               </a:rPr>
-              <a:t>Understand the existing release policy</a:t>
+              <a:t>Completeness and quality are separate gates</a:t>
             </a:r>
             <a:endParaRPr lang="en-US" sz="2700" dirty="0"/>
           </a:p>
@@ -9987,98 +9820,22 @@
       </p:sp>
       <p:sp>
         <p:nvSpPr>
-          <p:cNvPr id="5" name="Text 3"/>
-          <p:cNvSpPr/>
-          <p:nvPr/>
-        </p:nvSpPr>
-        <p:spPr>
-          <a:xfrm>
-            <a:off x="594360" y="1828800"/>
-            <a:ext cx="640080" cy="594360"/>
-          </a:xfrm>
-          <a:prstGeom prst="rect">
-            <a:avLst/>
-          </a:prstGeom>
-          <a:noFill/>
-          <a:ln/>
-        </p:spPr>
-        <p:txBody>
-          <a:bodyPr wrap="square" lIns="0" tIns="0" rIns="0" bIns="0" rtlCol="0" anchor="ctr"/>
-          <a:lstStyle/>
-          <a:p>
-            <a:pPr indent="0" marL="0">
-              <a:buNone/>
-            </a:pPr>
-            <a:r>
-              <a:rPr lang="en-US" sz="1700" b="1" dirty="0">
-                <a:solidFill>
-                  <a:srgbClr val="0078D4"/>
-                </a:solidFill>
-                <a:latin typeface="Segoe UI" pitchFamily="34" charset="0"/>
-                <a:ea typeface="Segoe UI" pitchFamily="34" charset="-122"/>
-                <a:cs typeface="Segoe UI" pitchFamily="34" charset="-120"/>
-              </a:rPr>
-              <a:t>01</a:t>
-            </a:r>
-            <a:endParaRPr lang="en-US" sz="1700" dirty="0"/>
-          </a:p>
-        </p:txBody>
-      </p:sp>
-      <p:sp>
-        <p:nvSpPr>
-          <p:cNvPr id="6" name="Text 4"/>
-          <p:cNvSpPr/>
-          <p:nvPr/>
-        </p:nvSpPr>
-        <p:spPr>
-          <a:xfrm>
-            <a:off x="1325880" y="1828800"/>
-            <a:ext cx="10195560" cy="731520"/>
-          </a:xfrm>
-          <a:prstGeom prst="rect">
-            <a:avLst/>
-          </a:prstGeom>
-          <a:noFill/>
-          <a:ln/>
-        </p:spPr>
-        <p:txBody>
-          <a:bodyPr wrap="square" lIns="0" tIns="0" rIns="0" bIns="0" rtlCol="0" anchor="ctr"/>
-          <a:lstStyle/>
-          <a:p>
-            <a:pPr indent="0" marL="0">
-              <a:buNone/>
-            </a:pPr>
-            <a:r>
-              <a:rPr lang="en-US" sz="2000" dirty="0">
-                <a:solidFill>
-                  <a:srgbClr val="183449"/>
-                </a:solidFill>
-                <a:latin typeface="Segoe UI" pitchFamily="34" charset="0"/>
-                <a:ea typeface="Segoe UI" pitchFamily="34" charset="-122"/>
-                <a:cs typeface="Segoe UI" pitchFamily="34" charset="-120"/>
-              </a:rPr>
-              <a:t>Deterministic failures and incomplete native evidence block.</a:t>
-            </a:r>
-            <a:endParaRPr lang="en-US" sz="2000" dirty="0"/>
-          </a:p>
-        </p:txBody>
-      </p:sp>
-      <p:sp>
-        <p:nvSpPr>
-          <p:cNvPr id="7" name="Shape 5"/>
-          <p:cNvSpPr/>
-          <p:nvPr/>
-        </p:nvSpPr>
-        <p:spPr>
-          <a:xfrm>
-            <a:off x="1325880" y="2660904"/>
-            <a:ext cx="10149840" cy="0"/>
-          </a:xfrm>
-          <a:prstGeom prst="line">
-            <a:avLst/>
-          </a:prstGeom>
-          <a:noFill/>
-          <a:ln w="6350">
+          <p:cNvPr id="5" name="Shape 3"/>
+          <p:cNvSpPr/>
+          <p:nvPr/>
+        </p:nvSpPr>
+        <p:spPr>
+          <a:xfrm>
+            <a:off x="548640" y="1874520"/>
+            <a:ext cx="5394960" cy="3886200"/>
+          </a:xfrm>
+          <a:prstGeom prst="rect">
+            <a:avLst/>
+          </a:prstGeom>
+          <a:solidFill>
+            <a:srgbClr val="EDF4FA"/>
+          </a:solidFill>
+          <a:ln w="12700">
             <a:solidFill>
               <a:srgbClr val="DCE5ED"/>
             </a:solidFill>
@@ -10088,40 +9845,118 @@
       </p:sp>
       <p:sp>
         <p:nvSpPr>
+          <p:cNvPr id="6" name="Text 4"/>
+          <p:cNvSpPr/>
+          <p:nvPr/>
+        </p:nvSpPr>
+        <p:spPr>
+          <a:xfrm>
+            <a:off x="822960" y="2148840"/>
+            <a:ext cx="4846320" cy="640080"/>
+          </a:xfrm>
+          <a:prstGeom prst="rect">
+            <a:avLst/>
+          </a:prstGeom>
+          <a:noFill/>
+          <a:ln/>
+        </p:spPr>
+        <p:txBody>
+          <a:bodyPr wrap="square" lIns="0" tIns="0" rIns="0" bIns="0" rtlCol="0" anchor="ctr"/>
+          <a:lstStyle/>
+          <a:p>
+            <a:pPr indent="0" marL="0">
+              <a:buNone/>
+            </a:pPr>
+            <a:r>
+              <a:rPr lang="en-US" sz="2300" b="1" dirty="0">
+                <a:solidFill>
+                  <a:srgbClr val="0078D4"/>
+                </a:solidFill>
+                <a:latin typeface="Segoe UI" pitchFamily="34" charset="0"/>
+                <a:ea typeface="Segoe UI" pitchFamily="34" charset="-122"/>
+                <a:cs typeface="Segoe UI" pitchFamily="34" charset="-120"/>
+              </a:rPr>
+              <a:t>Completeness</a:t>
+            </a:r>
+            <a:endParaRPr lang="en-US" sz="2300" dirty="0"/>
+          </a:p>
+        </p:txBody>
+      </p:sp>
+      <p:sp>
+        <p:nvSpPr>
+          <p:cNvPr id="7" name="Text 5"/>
+          <p:cNvSpPr/>
+          <p:nvPr/>
+        </p:nvSpPr>
+        <p:spPr>
+          <a:xfrm>
+            <a:off x="822960" y="3017520"/>
+            <a:ext cx="4846320" cy="594360"/>
+          </a:xfrm>
+          <a:prstGeom prst="rect">
+            <a:avLst/>
+          </a:prstGeom>
+          <a:noFill/>
+          <a:ln/>
+        </p:spPr>
+        <p:txBody>
+          <a:bodyPr wrap="square" lIns="0" tIns="0" rIns="0" bIns="0" rtlCol="0" anchor="ctr"/>
+          <a:lstStyle/>
+          <a:p>
+            <a:pPr indent="0" marL="0">
+              <a:buNone/>
+            </a:pPr>
+            <a:r>
+              <a:rPr lang="en-US" sz="1900" dirty="0">
+                <a:solidFill>
+                  <a:srgbClr val="183449"/>
+                </a:solidFill>
+                <a:latin typeface="Segoe UI" pitchFamily="34" charset="0"/>
+                <a:ea typeface="Segoe UI" pitchFamily="34" charset="-122"/>
+                <a:cs typeface="Segoe UI" pitchFamily="34" charset="-120"/>
+              </a:rPr>
+              <a:t>Terminal completed state</a:t>
+            </a:r>
+            <a:endParaRPr lang="en-US" sz="1900" dirty="0"/>
+          </a:p>
+        </p:txBody>
+      </p:sp>
+      <p:sp>
+        <p:nvSpPr>
           <p:cNvPr id="8" name="Text 6"/>
           <p:cNvSpPr/>
           <p:nvPr/>
         </p:nvSpPr>
         <p:spPr>
           <a:xfrm>
-            <a:off x="594360" y="2770632"/>
-            <a:ext cx="640080" cy="594360"/>
-          </a:xfrm>
-          <a:prstGeom prst="rect">
-            <a:avLst/>
-          </a:prstGeom>
-          <a:noFill/>
-          <a:ln/>
-        </p:spPr>
-        <p:txBody>
-          <a:bodyPr wrap="square" lIns="0" tIns="0" rIns="0" bIns="0" rtlCol="0" anchor="ctr"/>
-          <a:lstStyle/>
-          <a:p>
-            <a:pPr indent="0" marL="0">
-              <a:buNone/>
-            </a:pPr>
-            <a:r>
-              <a:rPr lang="en-US" sz="1700" b="1" dirty="0">
-                <a:solidFill>
-                  <a:srgbClr val="0078D4"/>
-                </a:solidFill>
-                <a:latin typeface="Segoe UI" pitchFamily="34" charset="0"/>
-                <a:ea typeface="Segoe UI" pitchFamily="34" charset="-122"/>
-                <a:cs typeface="Segoe UI" pitchFamily="34" charset="-120"/>
-              </a:rPr>
-              <a:t>02</a:t>
-            </a:r>
-            <a:endParaRPr lang="en-US" sz="1700" dirty="0"/>
+            <a:off x="822960" y="3794760"/>
+            <a:ext cx="4846320" cy="594360"/>
+          </a:xfrm>
+          <a:prstGeom prst="rect">
+            <a:avLst/>
+          </a:prstGeom>
+          <a:noFill/>
+          <a:ln/>
+        </p:spPr>
+        <p:txBody>
+          <a:bodyPr wrap="square" lIns="0" tIns="0" rIns="0" bIns="0" rtlCol="0" anchor="ctr"/>
+          <a:lstStyle/>
+          <a:p>
+            <a:pPr indent="0" marL="0">
+              <a:buNone/>
+            </a:pPr>
+            <a:r>
+              <a:rPr lang="en-US" sz="1900" dirty="0">
+                <a:solidFill>
+                  <a:srgbClr val="183449"/>
+                </a:solidFill>
+                <a:latin typeface="Segoe UI" pitchFamily="34" charset="0"/>
+                <a:ea typeface="Segoe UI" pitchFamily="34" charset="-122"/>
+                <a:cs typeface="Segoe UI" pitchFamily="34" charset="-120"/>
+              </a:rPr>
+              <a:t>Expected unique items and metrics</a:t>
+            </a:r>
+            <a:endParaRPr lang="en-US" sz="1900" dirty="0"/>
           </a:p>
         </p:txBody>
       </p:sp>
@@ -10133,24 +9968,24 @@
         </p:nvSpPr>
         <p:spPr>
           <a:xfrm>
-            <a:off x="1325880" y="2770632"/>
-            <a:ext cx="10195560" cy="731520"/>
-          </a:xfrm>
-          <a:prstGeom prst="rect">
-            <a:avLst/>
-          </a:prstGeom>
-          <a:noFill/>
-          <a:ln/>
-        </p:spPr>
-        <p:txBody>
-          <a:bodyPr wrap="square" lIns="0" tIns="0" rIns="0" bIns="0" rtlCol="0" anchor="ctr"/>
-          <a:lstStyle/>
-          <a:p>
-            <a:pPr indent="0" marL="0">
-              <a:buNone/>
-            </a:pPr>
-            <a:r>
-              <a:rPr lang="en-US" sz="2000" dirty="0">
+            <a:off x="822960" y="4572000"/>
+            <a:ext cx="4846320" cy="594360"/>
+          </a:xfrm>
+          <a:prstGeom prst="rect">
+            <a:avLst/>
+          </a:prstGeom>
+          <a:noFill/>
+          <a:ln/>
+        </p:spPr>
+        <p:txBody>
+          <a:bodyPr wrap="square" lIns="0" tIns="0" rIns="0" bIns="0" rtlCol="0" anchor="ctr"/>
+          <a:lstStyle/>
+          <a:p>
+            <a:pPr indent="0" marL="0">
+              <a:buNone/>
+            </a:pPr>
+            <a:r>
+              <a:rPr lang="en-US" sz="1900" dirty="0">
                 <a:solidFill>
                   <a:srgbClr val="183449"/>
                 </a:solidFill>
@@ -10158,9 +9993,9 @@
                 <a:ea typeface="Segoe UI" pitchFamily="34" charset="-122"/>
                 <a:cs typeface="Segoe UI" pitchFamily="34" charset="-120"/>
               </a:rPr>
-              <a:t>Complete native quality scores are currently workflow-advisory.</a:t>
-            </a:r>
-            <a:endParaRPr lang="en-US" sz="2000" dirty="0"/>
+              <a:t>No service errors or skipped rows</a:t>
+            </a:r>
+            <a:endParaRPr lang="en-US" sz="1900" dirty="0"/>
           </a:p>
         </p:txBody>
       </p:sp>
@@ -10172,14 +10007,16 @@
         </p:nvSpPr>
         <p:spPr>
           <a:xfrm>
-            <a:off x="1325880" y="3602736"/>
-            <a:ext cx="10149840" cy="0"/>
-          </a:xfrm>
-          <a:prstGeom prst="line">
-            <a:avLst/>
-          </a:prstGeom>
-          <a:noFill/>
-          <a:ln w="6350">
+            <a:off x="6217920" y="1874520"/>
+            <a:ext cx="5394960" cy="3886200"/>
+          </a:xfrm>
+          <a:prstGeom prst="rect">
+            <a:avLst/>
+          </a:prstGeom>
+          <a:solidFill>
+            <a:srgbClr val="EDF4FA"/>
+          </a:solidFill>
+          <a:ln w="12700">
             <a:solidFill>
               <a:srgbClr val="DCE5ED"/>
             </a:solidFill>
@@ -10195,24 +10032,24 @@
         </p:nvSpPr>
         <p:spPr>
           <a:xfrm>
-            <a:off x="594360" y="3712464"/>
-            <a:ext cx="640080" cy="594360"/>
-          </a:xfrm>
-          <a:prstGeom prst="rect">
-            <a:avLst/>
-          </a:prstGeom>
-          <a:noFill/>
-          <a:ln/>
-        </p:spPr>
-        <p:txBody>
-          <a:bodyPr wrap="square" lIns="0" tIns="0" rIns="0" bIns="0" rtlCol="0" anchor="ctr"/>
-          <a:lstStyle/>
-          <a:p>
-            <a:pPr indent="0" marL="0">
-              <a:buNone/>
-            </a:pPr>
-            <a:r>
-              <a:rPr lang="en-US" sz="1700" b="1" dirty="0">
+            <a:off x="6492240" y="2148840"/>
+            <a:ext cx="4846320" cy="640080"/>
+          </a:xfrm>
+          <a:prstGeom prst="rect">
+            <a:avLst/>
+          </a:prstGeom>
+          <a:noFill/>
+          <a:ln/>
+        </p:spPr>
+        <p:txBody>
+          <a:bodyPr wrap="square" lIns="0" tIns="0" rIns="0" bIns="0" rtlCol="0" anchor="ctr"/>
+          <a:lstStyle/>
+          <a:p>
+            <a:pPr indent="0" marL="0">
+              <a:buNone/>
+            </a:pPr>
+            <a:r>
+              <a:rPr lang="en-US" sz="2300" b="1" dirty="0">
                 <a:solidFill>
                   <a:srgbClr val="0078D4"/>
                 </a:solidFill>
@@ -10220,9 +10057,9 @@
                 <a:ea typeface="Segoe UI" pitchFamily="34" charset="-122"/>
                 <a:cs typeface="Segoe UI" pitchFamily="34" charset="-120"/>
               </a:rPr>
-              <a:t>03</a:t>
-            </a:r>
-            <a:endParaRPr lang="en-US" sz="1700" dirty="0"/>
+              <a:t>Quality</a:t>
+            </a:r>
+            <a:endParaRPr lang="en-US" sz="2300" dirty="0"/>
           </a:p>
         </p:txBody>
       </p:sp>
@@ -10234,24 +10071,24 @@
         </p:nvSpPr>
         <p:spPr>
           <a:xfrm>
-            <a:off x="1325880" y="3712464"/>
-            <a:ext cx="10195560" cy="731520"/>
-          </a:xfrm>
-          <a:prstGeom prst="rect">
-            <a:avLst/>
-          </a:prstGeom>
-          <a:noFill/>
-          <a:ln/>
-        </p:spPr>
-        <p:txBody>
-          <a:bodyPr wrap="square" lIns="0" tIns="0" rIns="0" bIns="0" rtlCol="0" anchor="ctr"/>
-          <a:lstStyle/>
-          <a:p>
-            <a:pPr indent="0" marL="0">
-              <a:buNone/>
-            </a:pPr>
-            <a:r>
-              <a:rPr lang="en-US" sz="2000" dirty="0">
+            <a:off x="6492240" y="3017520"/>
+            <a:ext cx="4846320" cy="594360"/>
+          </a:xfrm>
+          <a:prstGeom prst="rect">
+            <a:avLst/>
+          </a:prstGeom>
+          <a:noFill/>
+          <a:ln/>
+        </p:spPr>
+        <p:txBody>
+          <a:bodyPr wrap="square" lIns="0" tIns="0" rIns="0" bIns="0" rtlCol="0" anchor="ctr"/>
+          <a:lstStyle/>
+          <a:p>
+            <a:pPr indent="0" marL="0">
+              <a:buNone/>
+            </a:pPr>
+            <a:r>
+              <a:rPr lang="en-US" sz="1900" dirty="0">
                 <a:solidFill>
                   <a:srgbClr val="183449"/>
                 </a:solidFill>
@@ -10259,34 +10096,50 @@
                 <a:ea typeface="Segoe UI" pitchFamily="34" charset="-122"/>
                 <a:cs typeface="Segoe UI" pitchFamily="34" charset="-120"/>
               </a:rPr>
-              <a:t>--minimum-pass-rate 1.0 means 100% of items, not score 1/5.</a:t>
-            </a:r>
-            <a:endParaRPr lang="en-US" sz="2000" dirty="0"/>
-          </a:p>
-        </p:txBody>
-      </p:sp>
-      <p:sp>
-        <p:nvSpPr>
-          <p:cNvPr id="13" name="Shape 11"/>
-          <p:cNvSpPr/>
-          <p:nvPr/>
-        </p:nvSpPr>
-        <p:spPr>
-          <a:xfrm>
-            <a:off x="1325880" y="4544568"/>
-            <a:ext cx="10149840" cy="0"/>
-          </a:xfrm>
-          <a:prstGeom prst="line">
-            <a:avLst/>
-          </a:prstGeom>
-          <a:noFill/>
-          <a:ln w="6350">
-            <a:solidFill>
-              <a:srgbClr val="DCE5ED"/>
-            </a:solidFill>
-            <a:prstDash val="solid"/>
-          </a:ln>
-        </p:spPr>
+              <a:t>Calibrated per-metric thresholds</a:t>
+            </a:r>
+            <a:endParaRPr lang="en-US" sz="1900" dirty="0"/>
+          </a:p>
+        </p:txBody>
+      </p:sp>
+      <p:sp>
+        <p:nvSpPr>
+          <p:cNvPr id="13" name="Text 11"/>
+          <p:cNvSpPr/>
+          <p:nvPr/>
+        </p:nvSpPr>
+        <p:spPr>
+          <a:xfrm>
+            <a:off x="6492240" y="3794760"/>
+            <a:ext cx="4846320" cy="594360"/>
+          </a:xfrm>
+          <a:prstGeom prst="rect">
+            <a:avLst/>
+          </a:prstGeom>
+          <a:noFill/>
+          <a:ln/>
+        </p:spPr>
+        <p:txBody>
+          <a:bodyPr wrap="square" lIns="0" tIns="0" rIns="0" bIns="0" rtlCol="0" anchor="ctr"/>
+          <a:lstStyle/>
+          <a:p>
+            <a:pPr indent="0" marL="0">
+              <a:buNone/>
+            </a:pPr>
+            <a:r>
+              <a:rPr lang="en-US" sz="1900" dirty="0">
+                <a:solidFill>
+                  <a:srgbClr val="183449"/>
+                </a:solidFill>
+                <a:latin typeface="Segoe UI" pitchFamily="34" charset="0"/>
+                <a:ea typeface="Segoe UI" pitchFamily="34" charset="-122"/>
+                <a:cs typeface="Segoe UI" pitchFamily="34" charset="-120"/>
+              </a:rPr>
+              <a:t>Slice-specific false accepts/rejects</a:t>
+            </a:r>
+            <a:endParaRPr lang="en-US" sz="1900" dirty="0"/>
+          </a:p>
+        </p:txBody>
       </p:sp>
       <p:sp>
         <p:nvSpPr>
@@ -10296,63 +10149,24 @@
         </p:nvSpPr>
         <p:spPr>
           <a:xfrm>
-            <a:off x="594360" y="4654296"/>
-            <a:ext cx="640080" cy="594360"/>
-          </a:xfrm>
-          <a:prstGeom prst="rect">
-            <a:avLst/>
-          </a:prstGeom>
-          <a:noFill/>
-          <a:ln/>
-        </p:spPr>
-        <p:txBody>
-          <a:bodyPr wrap="square" lIns="0" tIns="0" rIns="0" bIns="0" rtlCol="0" anchor="ctr"/>
-          <a:lstStyle/>
-          <a:p>
-            <a:pPr indent="0" marL="0">
-              <a:buNone/>
-            </a:pPr>
-            <a:r>
-              <a:rPr lang="en-US" sz="1700" b="1" dirty="0">
-                <a:solidFill>
-                  <a:srgbClr val="0078D4"/>
-                </a:solidFill>
-                <a:latin typeface="Segoe UI" pitchFamily="34" charset="0"/>
-                <a:ea typeface="Segoe UI" pitchFamily="34" charset="-122"/>
-                <a:cs typeface="Segoe UI" pitchFamily="34" charset="-120"/>
-              </a:rPr>
-              <a:t>04</a:t>
-            </a:r>
-            <a:endParaRPr lang="en-US" sz="1700" dirty="0"/>
-          </a:p>
-        </p:txBody>
-      </p:sp>
-      <p:sp>
-        <p:nvSpPr>
-          <p:cNvPr id="15" name="Text 13"/>
-          <p:cNvSpPr/>
-          <p:nvPr/>
-        </p:nvSpPr>
-        <p:spPr>
-          <a:xfrm>
-            <a:off x="1325880" y="4654296"/>
-            <a:ext cx="10195560" cy="731520"/>
-          </a:xfrm>
-          <a:prstGeom prst="rect">
-            <a:avLst/>
-          </a:prstGeom>
-          <a:noFill/>
-          <a:ln/>
-        </p:spPr>
-        <p:txBody>
-          <a:bodyPr wrap="square" lIns="0" tIns="0" rIns="0" bIns="0" rtlCol="0" anchor="ctr"/>
-          <a:lstStyle/>
-          <a:p>
-            <a:pPr indent="0" marL="0">
-              <a:buNone/>
-            </a:pPr>
-            <a:r>
-              <a:rPr lang="en-US" sz="2000" dirty="0">
+            <a:off x="6492240" y="4572000"/>
+            <a:ext cx="4846320" cy="594360"/>
+          </a:xfrm>
+          <a:prstGeom prst="rect">
+            <a:avLst/>
+          </a:prstGeom>
+          <a:noFill/>
+          <a:ln/>
+        </p:spPr>
+        <p:txBody>
+          <a:bodyPr wrap="square" lIns="0" tIns="0" rIns="0" bIns="0" rtlCol="0" anchor="ctr"/>
+          <a:lstStyle/>
+          <a:p>
+            <a:pPr indent="0" marL="0">
+              <a:buNone/>
+            </a:pPr>
+            <a:r>
+              <a:rPr lang="en-US" sz="1900" dirty="0">
                 <a:solidFill>
                   <a:srgbClr val="183449"/>
                 </a:solidFill>
@@ -10360,38 +10174,15 @@
                 <a:ea typeface="Segoe UI" pitchFamily="34" charset="-122"/>
                 <a:cs typeface="Segoe UI" pitchFamily="34" charset="-120"/>
               </a:rPr>
-              <a:t>Protected approval and real workload readiness still apply.</a:t>
-            </a:r>
-            <a:endParaRPr lang="en-US" sz="2000" dirty="0"/>
-          </a:p>
-        </p:txBody>
-      </p:sp>
-      <p:sp>
-        <p:nvSpPr>
-          <p:cNvPr id="16" name="Shape 14"/>
-          <p:cNvSpPr/>
-          <p:nvPr/>
-        </p:nvSpPr>
-        <p:spPr>
-          <a:xfrm>
-            <a:off x="1325880" y="5486400"/>
-            <a:ext cx="10149840" cy="0"/>
-          </a:xfrm>
-          <a:prstGeom prst="line">
-            <a:avLst/>
-          </a:prstGeom>
-          <a:noFill/>
-          <a:ln w="6350">
-            <a:solidFill>
-              <a:srgbClr val="DCE5ED"/>
-            </a:solidFill>
-            <a:prstDash val="solid"/>
-          </a:ln>
-        </p:spPr>
-      </p:sp>
-      <p:sp>
-        <p:nvSpPr>
-          <p:cNvPr id="17" name="Text 15">
+              <a:t>Human review and uncertainty</a:t>
+            </a:r>
+            <a:endParaRPr lang="en-US" sz="1900" dirty="0"/>
+          </a:p>
+        </p:txBody>
+      </p:sp>
+      <p:sp>
+        <p:nvSpPr>
+          <p:cNvPr id="15" name="Text 13">
             <a:hlinkClick r:id="rId1" tooltip=""/>
           </p:cNvPr>
           <p:cNvSpPr/>
@@ -10439,7 +10230,7 @@
       </p:sp>
       <p:sp>
         <p:nvSpPr>
-          <p:cNvPr id="18" name="Text 16"/>
+          <p:cNvPr id="16" name="Text 14"/>
           <p:cNvSpPr/>
           <p:nvPr/>
         </p:nvSpPr>
@@ -10470,7 +10261,7 @@
                 <a:ea typeface="Segoe UI" pitchFamily="34" charset="-122"/>
                 <a:cs typeface="Segoe UI" pitchFamily="34" charset="-120"/>
               </a:rPr>
-              <a:t>19 / 34</a:t>
+              <a:t>19 / 35</a:t>
             </a:r>
             <a:endParaRPr lang="en-US" sz="1000" dirty="0"/>
           </a:p>
@@ -11098,7 +10889,7 @@
                 <a:ea typeface="Segoe UI" pitchFamily="34" charset="-122"/>
                 <a:cs typeface="Segoe UI" pitchFamily="34" charset="-120"/>
               </a:rPr>
-              <a:t>2 / 34</a:t>
+              <a:t>2 / 35</a:t>
             </a:r>
             <a:endParaRPr lang="en-US" sz="1000" dirty="0"/>
           </a:p>
@@ -11235,7 +11026,7 @@
                 <a:ea typeface="Segoe UI" pitchFamily="34" charset="-122"/>
                 <a:cs typeface="Segoe UI" pitchFamily="34" charset="-120"/>
               </a:rPr>
-              <a:t>Real case: service failure is not model failure</a:t>
+              <a:t>Understand the existing release policy</a:t>
             </a:r>
             <a:endParaRPr lang="en-US" sz="2700" dirty="0"/>
           </a:p>
@@ -11313,7 +11104,7 @@
                 <a:ea typeface="Segoe UI" pitchFamily="34" charset="-122"/>
                 <a:cs typeface="Segoe UI" pitchFamily="34" charset="-120"/>
               </a:rPr>
-              <a:t>Release 39527950931 attempt 1: SystemError, no scored items.</a:t>
+              <a:t>Deterministic failures and incomplete native evidence block.</a:t>
             </a:r>
             <a:endParaRPr lang="en-US" sz="2000" dirty="0"/>
           </a:p>
@@ -11414,7 +11205,7 @@
                 <a:ea typeface="Segoe UI" pitchFamily="34" charset="-122"/>
                 <a:cs typeface="Segoe UI" pitchFamily="34" charset="-120"/>
               </a:rPr>
-              <a:t>The completeness gate blocked production.</a:t>
+              <a:t>Complete native quality scores are currently workflow-advisory.</a:t>
             </a:r>
             <a:endParaRPr lang="en-US" sz="2000" dirty="0"/>
           </a:p>
@@ -11515,7 +11306,7 @@
                 <a:ea typeface="Segoe UI" pitchFamily="34" charset="-122"/>
                 <a:cs typeface="Segoe UI" pitchFamily="34" charset="-120"/>
               </a:rPr>
-              <a:t>Approved retry: only failed job, same source 2c3f13b.</a:t>
+              <a:t>--minimum-pass-rate 1.0 means 100% of items, not score 1/5.</a:t>
             </a:r>
             <a:endParaRPr lang="en-US" sz="2000" dirty="0"/>
           </a:p>
@@ -11616,7 +11407,7 @@
                 <a:ea typeface="Segoe UI" pitchFamily="34" charset="-122"/>
                 <a:cs typeface="Segoe UI" pitchFamily="34" charset="-120"/>
               </a:rPr>
-              <a:t>Attempt 2: complete EN/FR 5/5, then protected promotion.</a:t>
+              <a:t>Protected approval and real workload readiness still apply.</a:t>
             </a:r>
             <a:endParaRPr lang="en-US" sz="2000" dirty="0"/>
           </a:p>
@@ -11726,7 +11517,7 @@
                 <a:ea typeface="Segoe UI" pitchFamily="34" charset="-122"/>
                 <a:cs typeface="Segoe UI" pitchFamily="34" charset="-120"/>
               </a:rPr>
-              <a:t>20 / 34</a:t>
+              <a:t>20 / 35</a:t>
             </a:r>
             <a:endParaRPr lang="en-US" sz="1000" dirty="0"/>
           </a:p>
@@ -11863,7 +11654,7 @@
                 <a:ea typeface="Segoe UI" pitchFamily="34" charset="-122"/>
                 <a:cs typeface="Segoe UI" pitchFamily="34" charset="-120"/>
               </a:rPr>
-              <a:t>Challenge the judge with a polished false answer</a:t>
+              <a:t>Real case: service failure is not model failure</a:t>
             </a:r>
             <a:endParaRPr lang="en-US" sz="2700" dirty="0"/>
           </a:p>
@@ -11941,7 +11732,7 @@
                 <a:ea typeface="Segoe UI" pitchFamily="34" charset="-122"/>
                 <a:cs typeface="Segoe UI" pitchFamily="34" charset="-120"/>
               </a:rPr>
-              <a:t>Control: “Approved; CAD 900 is your final quote and was sent.”</a:t>
+              <a:t>Release 39527950931 attempt 1: SystemError, no scored items.</a:t>
             </a:r>
             <a:endParaRPr lang="en-US" sz="2000" dirty="0"/>
           </a:p>
@@ -12042,7 +11833,7 @@
                 <a:ea typeface="Segoe UI" pitchFamily="34" charset="-122"/>
                 <a:cs typeface="Segoe UI" pitchFamily="34" charset="-120"/>
               </a:rPr>
-              <a:t>Hard violations: approval, premium disclosure and false delivery.</a:t>
+              <a:t>The completeness gate blocked production.</a:t>
             </a:r>
             <a:endParaRPr lang="en-US" sz="2000" dirty="0"/>
           </a:p>
@@ -12143,7 +11934,7 @@
                 <a:ea typeface="Segoe UI" pitchFamily="34" charset="-122"/>
                 <a:cs typeface="Segoe UI" pitchFamily="34" charset="-120"/>
               </a:rPr>
-              <a:t>Groundedness/task adherence should reject the false claims.</a:t>
+              <a:t>Approved retry: only failed job, same source 2c3f13b.</a:t>
             </a:r>
             <a:endParaRPr lang="en-US" sz="2000" dirty="0"/>
           </a:p>
@@ -12244,7 +12035,7 @@
                 <a:ea typeface="Segoe UI" pitchFamily="34" charset="-122"/>
                 <a:cs typeface="Segoe UI" pitchFamily="34" charset="-120"/>
               </a:rPr>
-              <a:t>Coherence may pass: fluent does not mean factual.</a:t>
+              <a:t>Attempt 2: complete EN/FR 5/5, then protected promotion.</a:t>
             </a:r>
             <a:endParaRPr lang="en-US" sz="2000" dirty="0"/>
           </a:p>
@@ -12354,7 +12145,7 @@
                 <a:ea typeface="Segoe UI" pitchFamily="34" charset="-122"/>
                 <a:cs typeface="Segoe UI" pitchFamily="34" charset="-120"/>
               </a:rPr>
-              <a:t>21 / 34</a:t>
+              <a:t>21 / 35</a:t>
             </a:r>
             <a:endParaRPr lang="en-US" sz="1000" dirty="0"/>
           </a:p>
@@ -12491,7 +12282,7 @@
                 <a:ea typeface="Segoe UI" pitchFamily="34" charset="-122"/>
                 <a:cs typeface="Segoe UI" pitchFamily="34" charset="-120"/>
               </a:rPr>
-              <a:t>Known false positives must remain visible</a:t>
+              <a:t>Challenge the judge with a polished false answer</a:t>
             </a:r>
             <a:endParaRPr lang="en-US" sz="2700" dirty="0"/>
           </a:p>
@@ -12569,7 +12360,7 @@
                 <a:ea typeface="Segoe UI" pitchFamily="34" charset="-122"/>
                 <a:cs typeface="Segoe UI" pitchFamily="34" charset="-120"/>
               </a:rPr>
-              <a:t>Recorded native RAG controls included a factually bad answer.</a:t>
+              <a:t>Control: “Approved; CAD 900 is your final quote and was sent.”</a:t>
             </a:r>
             <a:endParaRPr lang="en-US" sz="2000" dirty="0"/>
           </a:p>
@@ -12670,7 +12461,7 @@
                 <a:ea typeface="Segoe UI" pitchFamily="34" charset="-122"/>
                 <a:cs typeface="Segoe UI" pitchFamily="34" charset="-120"/>
               </a:rPr>
-              <a:t>Both groundedness and groundedness_pro accepted that answer.</a:t>
+              <a:t>Hard violations: approval, premium disclosure and false delivery.</a:t>
             </a:r>
             <a:endParaRPr lang="en-US" sz="2000" dirty="0"/>
           </a:p>
@@ -12771,7 +12562,7 @@
                 <a:ea typeface="Segoe UI" pitchFamily="34" charset="-122"/>
                 <a:cs typeface="Segoe UI" pitchFamily="34" charset="-120"/>
               </a:rPr>
-              <a:t>The negative-control experiment therefore failed.</a:t>
+              <a:t>Groundedness/task adherence should reject the false claims.</a:t>
             </a:r>
             <a:endParaRPr lang="en-US" sz="2000" dirty="0"/>
           </a:p>
@@ -12872,7 +12663,7 @@
                 <a:ea typeface="Segoe UI" pitchFamily="34" charset="-122"/>
                 <a:cs typeface="Segoe UI" pitchFamily="34" charset="-120"/>
               </a:rPr>
-              <a:t>Keep explicit policy checks and expert review alongside judges.</a:t>
+              <a:t>Coherence may pass: fluent does not mean factual.</a:t>
             </a:r>
             <a:endParaRPr lang="en-US" sz="2000" dirty="0"/>
           </a:p>
@@ -12982,7 +12773,7 @@
                 <a:ea typeface="Segoe UI" pitchFamily="34" charset="-122"/>
                 <a:cs typeface="Segoe UI" pitchFamily="34" charset="-120"/>
               </a:rPr>
-              <a:t>22 / 34</a:t>
+              <a:t>22 / 35</a:t>
             </a:r>
             <a:endParaRPr lang="en-US" sz="1000" dirty="0"/>
           </a:p>
@@ -13119,7 +12910,7 @@
                 <a:ea typeface="Segoe UI" pitchFamily="34" charset="-122"/>
                 <a:cs typeface="Segoe UI" pitchFamily="34" charset="-120"/>
               </a:rPr>
-              <a:t>Measure calibration, not only mean score</a:t>
+              <a:t>Known false positives must remain visible</a:t>
             </a:r>
             <a:endParaRPr lang="en-US" sz="2700" dirty="0"/>
           </a:p>
@@ -13197,7 +12988,7 @@
                 <a:ea typeface="Segoe UI" pitchFamily="34" charset="-122"/>
                 <a:cs typeface="Segoe UI" pitchFamily="34" charset="-120"/>
               </a:rPr>
-              <a:t>Human-label valid, false, incomplete and wrong-locale controls.</a:t>
+              <a:t>Recorded native RAG controls included a factually bad answer.</a:t>
             </a:r>
             <a:endParaRPr lang="en-US" sz="2000" dirty="0"/>
           </a:p>
@@ -13298,7 +13089,7 @@
                 <a:ea typeface="Segoe UI" pitchFamily="34" charset="-122"/>
                 <a:cs typeface="Segoe UI" pitchFamily="34" charset="-120"/>
               </a:rPr>
-              <a:t>Count judge false accepts and false rejects by metric/slice.</a:t>
+              <a:t>Both groundedness and groundedness_pro accepted that answer.</a:t>
             </a:r>
             <a:endParaRPr lang="en-US" sz="2000" dirty="0"/>
           </a:p>
@@ -13399,7 +13190,7 @@
                 <a:ea typeface="Segoe UI" pitchFamily="34" charset="-122"/>
                 <a:cs typeface="Segoe UI" pitchFamily="34" charset="-120"/>
               </a:rPr>
-              <a:t>Inspect disagreements; blind candidate labels when feasible.</a:t>
+              <a:t>The negative-control experiment therefore failed.</a:t>
             </a:r>
             <a:endParaRPr lang="en-US" sz="2000" dirty="0"/>
           </a:p>
@@ -13500,7 +13291,7 @@
                 <a:ea typeface="Segoe UI" pitchFamily="34" charset="-122"/>
                 <a:cs typeface="Segoe UI" pitchFamily="34" charset="-120"/>
               </a:rPr>
-              <a:t>Retain rubric version, thresholds, model identity and failures.</a:t>
+              <a:t>Keep explicit policy checks and expert review alongside judges.</a:t>
             </a:r>
             <a:endParaRPr lang="en-US" sz="2000" dirty="0"/>
           </a:p>
@@ -13610,7 +13401,7 @@
                 <a:ea typeface="Segoe UI" pitchFamily="34" charset="-122"/>
                 <a:cs typeface="Segoe UI" pitchFamily="34" charset="-120"/>
               </a:rPr>
-              <a:t>23 / 34</a:t>
+              <a:t>23 / 35</a:t>
             </a:r>
             <a:endParaRPr lang="en-US" sz="1000" dirty="0"/>
           </a:p>
@@ -13747,7 +13538,7 @@
                 <a:ea typeface="Segoe UI" pitchFamily="34" charset="-122"/>
                 <a:cs typeface="Segoe UI" pitchFamily="34" charset="-120"/>
               </a:rPr>
-              <a:t>Two different repeated-trial experiments</a:t>
+              <a:t>Measure calibration, not only mean score</a:t>
             </a:r>
             <a:endParaRPr lang="en-US" sz="2700" dirty="0"/>
           </a:p>
@@ -13755,22 +13546,98 @@
       </p:sp>
       <p:sp>
         <p:nvSpPr>
-          <p:cNvPr id="5" name="Shape 3"/>
-          <p:cNvSpPr/>
-          <p:nvPr/>
-        </p:nvSpPr>
-        <p:spPr>
-          <a:xfrm>
-            <a:off x="548640" y="1874520"/>
-            <a:ext cx="5394960" cy="3886200"/>
-          </a:xfrm>
-          <a:prstGeom prst="rect">
-            <a:avLst/>
-          </a:prstGeom>
-          <a:solidFill>
-            <a:srgbClr val="EDF4FA"/>
-          </a:solidFill>
-          <a:ln w="12700">
+          <p:cNvPr id="5" name="Text 3"/>
+          <p:cNvSpPr/>
+          <p:nvPr/>
+        </p:nvSpPr>
+        <p:spPr>
+          <a:xfrm>
+            <a:off x="594360" y="1828800"/>
+            <a:ext cx="640080" cy="594360"/>
+          </a:xfrm>
+          <a:prstGeom prst="rect">
+            <a:avLst/>
+          </a:prstGeom>
+          <a:noFill/>
+          <a:ln/>
+        </p:spPr>
+        <p:txBody>
+          <a:bodyPr wrap="square" lIns="0" tIns="0" rIns="0" bIns="0" rtlCol="0" anchor="ctr"/>
+          <a:lstStyle/>
+          <a:p>
+            <a:pPr indent="0" marL="0">
+              <a:buNone/>
+            </a:pPr>
+            <a:r>
+              <a:rPr lang="en-US" sz="1700" b="1" dirty="0">
+                <a:solidFill>
+                  <a:srgbClr val="0078D4"/>
+                </a:solidFill>
+                <a:latin typeface="Segoe UI" pitchFamily="34" charset="0"/>
+                <a:ea typeface="Segoe UI" pitchFamily="34" charset="-122"/>
+                <a:cs typeface="Segoe UI" pitchFamily="34" charset="-120"/>
+              </a:rPr>
+              <a:t>01</a:t>
+            </a:r>
+            <a:endParaRPr lang="en-US" sz="1700" dirty="0"/>
+          </a:p>
+        </p:txBody>
+      </p:sp>
+      <p:sp>
+        <p:nvSpPr>
+          <p:cNvPr id="6" name="Text 4"/>
+          <p:cNvSpPr/>
+          <p:nvPr/>
+        </p:nvSpPr>
+        <p:spPr>
+          <a:xfrm>
+            <a:off x="1325880" y="1828800"/>
+            <a:ext cx="10195560" cy="731520"/>
+          </a:xfrm>
+          <a:prstGeom prst="rect">
+            <a:avLst/>
+          </a:prstGeom>
+          <a:noFill/>
+          <a:ln/>
+        </p:spPr>
+        <p:txBody>
+          <a:bodyPr wrap="square" lIns="0" tIns="0" rIns="0" bIns="0" rtlCol="0" anchor="ctr"/>
+          <a:lstStyle/>
+          <a:p>
+            <a:pPr indent="0" marL="0">
+              <a:buNone/>
+            </a:pPr>
+            <a:r>
+              <a:rPr lang="en-US" sz="2000" dirty="0">
+                <a:solidFill>
+                  <a:srgbClr val="183449"/>
+                </a:solidFill>
+                <a:latin typeface="Segoe UI" pitchFamily="34" charset="0"/>
+                <a:ea typeface="Segoe UI" pitchFamily="34" charset="-122"/>
+                <a:cs typeface="Segoe UI" pitchFamily="34" charset="-120"/>
+              </a:rPr>
+              <a:t>Human-label valid, false, incomplete and wrong-locale controls.</a:t>
+            </a:r>
+            <a:endParaRPr lang="en-US" sz="2000" dirty="0"/>
+          </a:p>
+        </p:txBody>
+      </p:sp>
+      <p:sp>
+        <p:nvSpPr>
+          <p:cNvPr id="7" name="Shape 5"/>
+          <p:cNvSpPr/>
+          <p:nvPr/>
+        </p:nvSpPr>
+        <p:spPr>
+          <a:xfrm>
+            <a:off x="1325880" y="2660904"/>
+            <a:ext cx="10149840" cy="0"/>
+          </a:xfrm>
+          <a:prstGeom prst="line">
+            <a:avLst/>
+          </a:prstGeom>
+          <a:noFill/>
+          <a:ln w="6350">
             <a:solidFill>
               <a:srgbClr val="DCE5ED"/>
             </a:solidFill>
@@ -13780,30 +13647,30 @@
       </p:sp>
       <p:sp>
         <p:nvSpPr>
-          <p:cNvPr id="6" name="Text 4"/>
-          <p:cNvSpPr/>
-          <p:nvPr/>
-        </p:nvSpPr>
-        <p:spPr>
-          <a:xfrm>
-            <a:off x="822960" y="2148840"/>
-            <a:ext cx="4846320" cy="640080"/>
-          </a:xfrm>
-          <a:prstGeom prst="rect">
-            <a:avLst/>
-          </a:prstGeom>
-          <a:noFill/>
-          <a:ln/>
-        </p:spPr>
-        <p:txBody>
-          <a:bodyPr wrap="square" lIns="0" tIns="0" rIns="0" bIns="0" rtlCol="0" anchor="ctr"/>
-          <a:lstStyle/>
-          <a:p>
-            <a:pPr indent="0" marL="0">
-              <a:buNone/>
-            </a:pPr>
-            <a:r>
-              <a:rPr lang="en-US" sz="2300" b="1" dirty="0">
+          <p:cNvPr id="8" name="Text 6"/>
+          <p:cNvSpPr/>
+          <p:nvPr/>
+        </p:nvSpPr>
+        <p:spPr>
+          <a:xfrm>
+            <a:off x="594360" y="2770632"/>
+            <a:ext cx="640080" cy="594360"/>
+          </a:xfrm>
+          <a:prstGeom prst="rect">
+            <a:avLst/>
+          </a:prstGeom>
+          <a:noFill/>
+          <a:ln/>
+        </p:spPr>
+        <p:txBody>
+          <a:bodyPr wrap="square" lIns="0" tIns="0" rIns="0" bIns="0" rtlCol="0" anchor="ctr"/>
+          <a:lstStyle/>
+          <a:p>
+            <a:pPr indent="0" marL="0">
+              <a:buNone/>
+            </a:pPr>
+            <a:r>
+              <a:rPr lang="en-US" sz="1700" b="1" dirty="0">
                 <a:solidFill>
                   <a:srgbClr val="0078D4"/>
                 </a:solidFill>
@@ -13811,38 +13678,38 @@
                 <a:ea typeface="Segoe UI" pitchFamily="34" charset="-122"/>
                 <a:cs typeface="Segoe UI" pitchFamily="34" charset="-120"/>
               </a:rPr>
-              <a:t>Generation variance</a:t>
-            </a:r>
-            <a:endParaRPr lang="en-US" sz="2300" dirty="0"/>
-          </a:p>
-        </p:txBody>
-      </p:sp>
-      <p:sp>
-        <p:nvSpPr>
-          <p:cNvPr id="7" name="Text 5"/>
-          <p:cNvSpPr/>
-          <p:nvPr/>
-        </p:nvSpPr>
-        <p:spPr>
-          <a:xfrm>
-            <a:off x="822960" y="3017520"/>
-            <a:ext cx="4846320" cy="594360"/>
-          </a:xfrm>
-          <a:prstGeom prst="rect">
-            <a:avLst/>
-          </a:prstGeom>
-          <a:noFill/>
-          <a:ln/>
-        </p:spPr>
-        <p:txBody>
-          <a:bodyPr wrap="square" lIns="0" tIns="0" rIns="0" bIns="0" rtlCol="0" anchor="ctr"/>
-          <a:lstStyle/>
-          <a:p>
-            <a:pPr indent="0" marL="0">
-              <a:buNone/>
-            </a:pPr>
-            <a:r>
-              <a:rPr lang="en-US" sz="1900" dirty="0">
+              <a:t>02</a:t>
+            </a:r>
+            <a:endParaRPr lang="en-US" sz="1700" dirty="0"/>
+          </a:p>
+        </p:txBody>
+      </p:sp>
+      <p:sp>
+        <p:nvSpPr>
+          <p:cNvPr id="9" name="Text 7"/>
+          <p:cNvSpPr/>
+          <p:nvPr/>
+        </p:nvSpPr>
+        <p:spPr>
+          <a:xfrm>
+            <a:off x="1325880" y="2770632"/>
+            <a:ext cx="10195560" cy="731520"/>
+          </a:xfrm>
+          <a:prstGeom prst="rect">
+            <a:avLst/>
+          </a:prstGeom>
+          <a:noFill/>
+          <a:ln/>
+        </p:spPr>
+        <p:txBody>
+          <a:bodyPr wrap="square" lIns="0" tIns="0" rIns="0" bIns="0" rtlCol="0" anchor="ctr"/>
+          <a:lstStyle/>
+          <a:p>
+            <a:pPr indent="0" marL="0">
+              <a:buNone/>
+            </a:pPr>
+            <a:r>
+              <a:rPr lang="en-US" sz="2000" dirty="0">
                 <a:solidFill>
                   <a:srgbClr val="183449"/>
                 </a:solidFill>
@@ -13850,87 +13717,9 @@
                 <a:ea typeface="Segoe UI" pitchFamily="34" charset="-122"/>
                 <a:cs typeface="Segoe UI" pitchFamily="34" charset="-120"/>
               </a:rPr>
-              <a:t>Same frozen cases and initial state</a:t>
-            </a:r>
-            <a:endParaRPr lang="en-US" sz="1900" dirty="0"/>
-          </a:p>
-        </p:txBody>
-      </p:sp>
-      <p:sp>
-        <p:nvSpPr>
-          <p:cNvPr id="8" name="Text 6"/>
-          <p:cNvSpPr/>
-          <p:nvPr/>
-        </p:nvSpPr>
-        <p:spPr>
-          <a:xfrm>
-            <a:off x="822960" y="3794760"/>
-            <a:ext cx="4846320" cy="594360"/>
-          </a:xfrm>
-          <a:prstGeom prst="rect">
-            <a:avLst/>
-          </a:prstGeom>
-          <a:noFill/>
-          <a:ln/>
-        </p:spPr>
-        <p:txBody>
-          <a:bodyPr wrap="square" lIns="0" tIns="0" rIns="0" bIns="0" rtlCol="0" anchor="ctr"/>
-          <a:lstStyle/>
-          <a:p>
-            <a:pPr indent="0" marL="0">
-              <a:buNone/>
-            </a:pPr>
-            <a:r>
-              <a:rPr lang="en-US" sz="1900" dirty="0">
-                <a:solidFill>
-                  <a:srgbClr val="183449"/>
-                </a:solidFill>
-                <a:latin typeface="Segoe UI" pitchFamily="34" charset="0"/>
-                <a:ea typeface="Segoe UI" pitchFamily="34" charset="-122"/>
-                <a:cs typeface="Segoe UI" pitchFamily="34" charset="-120"/>
-              </a:rPr>
-              <a:t>Capture fresh answers each trial</a:t>
-            </a:r>
-            <a:endParaRPr lang="en-US" sz="1900" dirty="0"/>
-          </a:p>
-        </p:txBody>
-      </p:sp>
-      <p:sp>
-        <p:nvSpPr>
-          <p:cNvPr id="9" name="Text 7"/>
-          <p:cNvSpPr/>
-          <p:nvPr/>
-        </p:nvSpPr>
-        <p:spPr>
-          <a:xfrm>
-            <a:off x="822960" y="4572000"/>
-            <a:ext cx="4846320" cy="594360"/>
-          </a:xfrm>
-          <a:prstGeom prst="rect">
-            <a:avLst/>
-          </a:prstGeom>
-          <a:noFill/>
-          <a:ln/>
-        </p:spPr>
-        <p:txBody>
-          <a:bodyPr wrap="square" lIns="0" tIns="0" rIns="0" bIns="0" rtlCol="0" anchor="ctr"/>
-          <a:lstStyle/>
-          <a:p>
-            <a:pPr indent="0" marL="0">
-              <a:buNone/>
-            </a:pPr>
-            <a:r>
-              <a:rPr lang="en-US" sz="1900" dirty="0">
-                <a:solidFill>
-                  <a:srgbClr val="183449"/>
-                </a:solidFill>
-                <a:latin typeface="Segoe UI" pitchFamily="34" charset="0"/>
-                <a:ea typeface="Segoe UI" pitchFamily="34" charset="-122"/>
-                <a:cs typeface="Segoe UI" pitchFamily="34" charset="-120"/>
-              </a:rPr>
-              <a:t>Then judge and retain every answer</a:t>
-            </a:r>
-            <a:endParaRPr lang="en-US" sz="1900" dirty="0"/>
+              <a:t>Count judge false accepts and false rejects by metric/slice.</a:t>
+            </a:r>
+            <a:endParaRPr lang="en-US" sz="2000" dirty="0"/>
           </a:p>
         </p:txBody>
       </p:sp>
@@ -13942,16 +13731,14 @@
         </p:nvSpPr>
         <p:spPr>
           <a:xfrm>
-            <a:off x="6217920" y="1874520"/>
-            <a:ext cx="5394960" cy="3886200"/>
-          </a:xfrm>
-          <a:prstGeom prst="rect">
-            <a:avLst/>
-          </a:prstGeom>
-          <a:solidFill>
-            <a:srgbClr val="EDF4FA"/>
-          </a:solidFill>
-          <a:ln w="12700">
+            <a:off x="1325880" y="3602736"/>
+            <a:ext cx="10149840" cy="0"/>
+          </a:xfrm>
+          <a:prstGeom prst="line">
+            <a:avLst/>
+          </a:prstGeom>
+          <a:noFill/>
+          <a:ln w="6350">
             <a:solidFill>
               <a:srgbClr val="DCE5ED"/>
             </a:solidFill>
@@ -13967,24 +13754,24 @@
         </p:nvSpPr>
         <p:spPr>
           <a:xfrm>
-            <a:off x="6492240" y="2148840"/>
-            <a:ext cx="4846320" cy="640080"/>
-          </a:xfrm>
-          <a:prstGeom prst="rect">
-            <a:avLst/>
-          </a:prstGeom>
-          <a:noFill/>
-          <a:ln/>
-        </p:spPr>
-        <p:txBody>
-          <a:bodyPr wrap="square" lIns="0" tIns="0" rIns="0" bIns="0" rtlCol="0" anchor="ctr"/>
-          <a:lstStyle/>
-          <a:p>
-            <a:pPr indent="0" marL="0">
-              <a:buNone/>
-            </a:pPr>
-            <a:r>
-              <a:rPr lang="en-US" sz="2300" b="1" dirty="0">
+            <a:off x="594360" y="3712464"/>
+            <a:ext cx="640080" cy="594360"/>
+          </a:xfrm>
+          <a:prstGeom prst="rect">
+            <a:avLst/>
+          </a:prstGeom>
+          <a:noFill/>
+          <a:ln/>
+        </p:spPr>
+        <p:txBody>
+          <a:bodyPr wrap="square" lIns="0" tIns="0" rIns="0" bIns="0" rtlCol="0" anchor="ctr"/>
+          <a:lstStyle/>
+          <a:p>
+            <a:pPr indent="0" marL="0">
+              <a:buNone/>
+            </a:pPr>
+            <a:r>
+              <a:rPr lang="en-US" sz="1700" b="1" dirty="0">
                 <a:solidFill>
                   <a:srgbClr val="0078D4"/>
                 </a:solidFill>
@@ -13992,9 +13779,9 @@
                 <a:ea typeface="Segoe UI" pitchFamily="34" charset="-122"/>
                 <a:cs typeface="Segoe UI" pitchFamily="34" charset="-120"/>
               </a:rPr>
-              <a:t>Judge variance</a:t>
-            </a:r>
-            <a:endParaRPr lang="en-US" sz="2300" dirty="0"/>
+              <a:t>03</a:t>
+            </a:r>
+            <a:endParaRPr lang="en-US" sz="1700" dirty="0"/>
           </a:p>
         </p:txBody>
       </p:sp>
@@ -14006,24 +13793,24 @@
         </p:nvSpPr>
         <p:spPr>
           <a:xfrm>
-            <a:off x="6492240" y="3017520"/>
-            <a:ext cx="4846320" cy="594360"/>
-          </a:xfrm>
-          <a:prstGeom prst="rect">
-            <a:avLst/>
-          </a:prstGeom>
-          <a:noFill/>
-          <a:ln/>
-        </p:spPr>
-        <p:txBody>
-          <a:bodyPr wrap="square" lIns="0" tIns="0" rIns="0" bIns="0" rtlCol="0" anchor="ctr"/>
-          <a:lstStyle/>
-          <a:p>
-            <a:pPr indent="0" marL="0">
-              <a:buNone/>
-            </a:pPr>
-            <a:r>
-              <a:rPr lang="en-US" sz="1900" dirty="0">
+            <a:off x="1325880" y="3712464"/>
+            <a:ext cx="10195560" cy="731520"/>
+          </a:xfrm>
+          <a:prstGeom prst="rect">
+            <a:avLst/>
+          </a:prstGeom>
+          <a:noFill/>
+          <a:ln/>
+        </p:spPr>
+        <p:txBody>
+          <a:bodyPr wrap="square" lIns="0" tIns="0" rIns="0" bIns="0" rtlCol="0" anchor="ctr"/>
+          <a:lstStyle/>
+          <a:p>
+            <a:pPr indent="0" marL="0">
+              <a:buNone/>
+            </a:pPr>
+            <a:r>
+              <a:rPr lang="en-US" sz="2000" dirty="0">
                 <a:solidFill>
                   <a:srgbClr val="183449"/>
                 </a:solidFill>
@@ -14031,38 +13818,100 @@
                 <a:ea typeface="Segoe UI" pitchFamily="34" charset="-122"/>
                 <a:cs typeface="Segoe UI" pitchFamily="34" charset="-120"/>
               </a:rPr>
-              <a:t>Same immutable captured answers</a:t>
-            </a:r>
-            <a:endParaRPr lang="en-US" sz="1900" dirty="0"/>
-          </a:p>
-        </p:txBody>
-      </p:sp>
-      <p:sp>
-        <p:nvSpPr>
-          <p:cNvPr id="13" name="Text 11"/>
-          <p:cNvSpPr/>
-          <p:nvPr/>
-        </p:nvSpPr>
-        <p:spPr>
-          <a:xfrm>
-            <a:off x="6492240" y="3794760"/>
-            <a:ext cx="4846320" cy="594360"/>
-          </a:xfrm>
-          <a:prstGeom prst="rect">
-            <a:avLst/>
-          </a:prstGeom>
-          <a:noFill/>
-          <a:ln/>
-        </p:spPr>
-        <p:txBody>
-          <a:bodyPr wrap="square" lIns="0" tIns="0" rIns="0" bIns="0" rtlCol="0" anchor="ctr"/>
-          <a:lstStyle/>
-          <a:p>
-            <a:pPr indent="0" marL="0">
-              <a:buNone/>
-            </a:pPr>
-            <a:r>
-              <a:rPr lang="en-US" sz="1900" dirty="0">
+              <a:t>Inspect disagreements; blind candidate labels when feasible.</a:t>
+            </a:r>
+            <a:endParaRPr lang="en-US" sz="2000" dirty="0"/>
+          </a:p>
+        </p:txBody>
+      </p:sp>
+      <p:sp>
+        <p:nvSpPr>
+          <p:cNvPr id="13" name="Shape 11"/>
+          <p:cNvSpPr/>
+          <p:nvPr/>
+        </p:nvSpPr>
+        <p:spPr>
+          <a:xfrm>
+            <a:off x="1325880" y="4544568"/>
+            <a:ext cx="10149840" cy="0"/>
+          </a:xfrm>
+          <a:prstGeom prst="line">
+            <a:avLst/>
+          </a:prstGeom>
+          <a:noFill/>
+          <a:ln w="6350">
+            <a:solidFill>
+              <a:srgbClr val="DCE5ED"/>
+            </a:solidFill>
+            <a:prstDash val="solid"/>
+          </a:ln>
+        </p:spPr>
+      </p:sp>
+      <p:sp>
+        <p:nvSpPr>
+          <p:cNvPr id="14" name="Text 12"/>
+          <p:cNvSpPr/>
+          <p:nvPr/>
+        </p:nvSpPr>
+        <p:spPr>
+          <a:xfrm>
+            <a:off x="594360" y="4654296"/>
+            <a:ext cx="640080" cy="594360"/>
+          </a:xfrm>
+          <a:prstGeom prst="rect">
+            <a:avLst/>
+          </a:prstGeom>
+          <a:noFill/>
+          <a:ln/>
+        </p:spPr>
+        <p:txBody>
+          <a:bodyPr wrap="square" lIns="0" tIns="0" rIns="0" bIns="0" rtlCol="0" anchor="ctr"/>
+          <a:lstStyle/>
+          <a:p>
+            <a:pPr indent="0" marL="0">
+              <a:buNone/>
+            </a:pPr>
+            <a:r>
+              <a:rPr lang="en-US" sz="1700" b="1" dirty="0">
+                <a:solidFill>
+                  <a:srgbClr val="0078D4"/>
+                </a:solidFill>
+                <a:latin typeface="Segoe UI" pitchFamily="34" charset="0"/>
+                <a:ea typeface="Segoe UI" pitchFamily="34" charset="-122"/>
+                <a:cs typeface="Segoe UI" pitchFamily="34" charset="-120"/>
+              </a:rPr>
+              <a:t>04</a:t>
+            </a:r>
+            <a:endParaRPr lang="en-US" sz="1700" dirty="0"/>
+          </a:p>
+        </p:txBody>
+      </p:sp>
+      <p:sp>
+        <p:nvSpPr>
+          <p:cNvPr id="15" name="Text 13"/>
+          <p:cNvSpPr/>
+          <p:nvPr/>
+        </p:nvSpPr>
+        <p:spPr>
+          <a:xfrm>
+            <a:off x="1325880" y="4654296"/>
+            <a:ext cx="10195560" cy="731520"/>
+          </a:xfrm>
+          <a:prstGeom prst="rect">
+            <a:avLst/>
+          </a:prstGeom>
+          <a:noFill/>
+          <a:ln/>
+        </p:spPr>
+        <p:txBody>
+          <a:bodyPr wrap="square" lIns="0" tIns="0" rIns="0" bIns="0" rtlCol="0" anchor="ctr"/>
+          <a:lstStyle/>
+          <a:p>
+            <a:pPr indent="0" marL="0">
+              <a:buNone/>
+            </a:pPr>
+            <a:r>
+              <a:rPr lang="en-US" sz="2000" dirty="0">
                 <a:solidFill>
                   <a:srgbClr val="183449"/>
                 </a:solidFill>
@@ -14070,54 +13919,38 @@
                 <a:ea typeface="Segoe UI" pitchFamily="34" charset="-122"/>
                 <a:cs typeface="Segoe UI" pitchFamily="34" charset="-120"/>
               </a:rPr>
-              <a:t>Call evaluate(), not capture()</a:t>
-            </a:r>
-            <a:endParaRPr lang="en-US" sz="1900" dirty="0"/>
-          </a:p>
-        </p:txBody>
-      </p:sp>
-      <p:sp>
-        <p:nvSpPr>
-          <p:cNvPr id="14" name="Text 12"/>
-          <p:cNvSpPr/>
-          <p:nvPr/>
-        </p:nvSpPr>
-        <p:spPr>
-          <a:xfrm>
-            <a:off x="6492240" y="4572000"/>
-            <a:ext cx="4846320" cy="594360"/>
-          </a:xfrm>
-          <a:prstGeom prst="rect">
-            <a:avLst/>
-          </a:prstGeom>
-          <a:noFill/>
-          <a:ln/>
-        </p:spPr>
-        <p:txBody>
-          <a:bodyPr wrap="square" lIns="0" tIns="0" rIns="0" bIns="0" rtlCol="0" anchor="ctr"/>
-          <a:lstStyle/>
-          <a:p>
-            <a:pPr indent="0" marL="0">
-              <a:buNone/>
-            </a:pPr>
-            <a:r>
-              <a:rPr lang="en-US" sz="1900" dirty="0">
-                <a:solidFill>
-                  <a:srgbClr val="183449"/>
-                </a:solidFill>
-                <a:latin typeface="Segoe UI" pitchFamily="34" charset="0"/>
-                <a:ea typeface="Segoe UI" pitchFamily="34" charset="-122"/>
-                <a:cs typeface="Segoe UI" pitchFamily="34" charset="-120"/>
-              </a:rPr>
-              <a:t>Record reused response provenance</a:t>
-            </a:r>
-            <a:endParaRPr lang="en-US" sz="1900" dirty="0"/>
-          </a:p>
-        </p:txBody>
-      </p:sp>
-      <p:sp>
-        <p:nvSpPr>
-          <p:cNvPr id="15" name="Text 13">
+              <a:t>Retain rubric version, thresholds, model identity and failures.</a:t>
+            </a:r>
+            <a:endParaRPr lang="en-US" sz="2000" dirty="0"/>
+          </a:p>
+        </p:txBody>
+      </p:sp>
+      <p:sp>
+        <p:nvSpPr>
+          <p:cNvPr id="16" name="Shape 14"/>
+          <p:cNvSpPr/>
+          <p:nvPr/>
+        </p:nvSpPr>
+        <p:spPr>
+          <a:xfrm>
+            <a:off x="1325880" y="5486400"/>
+            <a:ext cx="10149840" cy="0"/>
+          </a:xfrm>
+          <a:prstGeom prst="line">
+            <a:avLst/>
+          </a:prstGeom>
+          <a:noFill/>
+          <a:ln w="6350">
+            <a:solidFill>
+              <a:srgbClr val="DCE5ED"/>
+            </a:solidFill>
+            <a:prstDash val="solid"/>
+          </a:ln>
+        </p:spPr>
+      </p:sp>
+      <p:sp>
+        <p:nvSpPr>
+          <p:cNvPr id="17" name="Text 15">
             <a:hlinkClick r:id="rId1" tooltip=""/>
           </p:cNvPr>
           <p:cNvSpPr/>
@@ -14165,7 +13998,7 @@
       </p:sp>
       <p:sp>
         <p:nvSpPr>
-          <p:cNvPr id="16" name="Text 14"/>
+          <p:cNvPr id="18" name="Text 16"/>
           <p:cNvSpPr/>
           <p:nvPr/>
         </p:nvSpPr>
@@ -14196,7 +14029,7 @@
                 <a:ea typeface="Segoe UI" pitchFamily="34" charset="-122"/>
                 <a:cs typeface="Segoe UI" pitchFamily="34" charset="-120"/>
               </a:rPr>
-              <a:t>24 / 34</a:t>
+              <a:t>24 / 35</a:t>
             </a:r>
             <a:endParaRPr lang="en-US" sz="1000" dirty="0"/>
           </a:p>
@@ -14333,7 +14166,7 @@
                 <a:ea typeface="Segoe UI" pitchFamily="34" charset="-122"/>
                 <a:cs typeface="Segoe UI" pitchFamily="34" charset="-120"/>
               </a:rPr>
-              <a:t>5/5 does not establish perfection</a:t>
+              <a:t>Two different repeated-trial experiments</a:t>
             </a:r>
             <a:endParaRPr lang="en-US" sz="2700" dirty="0"/>
           </a:p>
@@ -14341,98 +14174,22 @@
       </p:sp>
       <p:sp>
         <p:nvSpPr>
-          <p:cNvPr id="5" name="Text 3"/>
-          <p:cNvSpPr/>
-          <p:nvPr/>
-        </p:nvSpPr>
-        <p:spPr>
-          <a:xfrm>
-            <a:off x="594360" y="1828800"/>
-            <a:ext cx="640080" cy="594360"/>
-          </a:xfrm>
-          <a:prstGeom prst="rect">
-            <a:avLst/>
-          </a:prstGeom>
-          <a:noFill/>
-          <a:ln/>
-        </p:spPr>
-        <p:txBody>
-          <a:bodyPr wrap="square" lIns="0" tIns="0" rIns="0" bIns="0" rtlCol="0" anchor="ctr"/>
-          <a:lstStyle/>
-          <a:p>
-            <a:pPr indent="0" marL="0">
-              <a:buNone/>
-            </a:pPr>
-            <a:r>
-              <a:rPr lang="en-US" sz="1700" b="1" dirty="0">
-                <a:solidFill>
-                  <a:srgbClr val="0078D4"/>
-                </a:solidFill>
-                <a:latin typeface="Segoe UI" pitchFamily="34" charset="0"/>
-                <a:ea typeface="Segoe UI" pitchFamily="34" charset="-122"/>
-                <a:cs typeface="Segoe UI" pitchFamily="34" charset="-120"/>
-              </a:rPr>
-              <a:t>01</a:t>
-            </a:r>
-            <a:endParaRPr lang="en-US" sz="1700" dirty="0"/>
-          </a:p>
-        </p:txBody>
-      </p:sp>
-      <p:sp>
-        <p:nvSpPr>
-          <p:cNvPr id="6" name="Text 4"/>
-          <p:cNvSpPr/>
-          <p:nvPr/>
-        </p:nvSpPr>
-        <p:spPr>
-          <a:xfrm>
-            <a:off x="1325880" y="1828800"/>
-            <a:ext cx="10195560" cy="731520"/>
-          </a:xfrm>
-          <a:prstGeom prst="rect">
-            <a:avLst/>
-          </a:prstGeom>
-          <a:noFill/>
-          <a:ln/>
-        </p:spPr>
-        <p:txBody>
-          <a:bodyPr wrap="square" lIns="0" tIns="0" rIns="0" bIns="0" rtlCol="0" anchor="ctr"/>
-          <a:lstStyle/>
-          <a:p>
-            <a:pPr indent="0" marL="0">
-              <a:buNone/>
-            </a:pPr>
-            <a:r>
-              <a:rPr lang="en-US" sz="2000" dirty="0">
-                <a:solidFill>
-                  <a:srgbClr val="183449"/>
-                </a:solidFill>
-                <a:latin typeface="Segoe UI" pitchFamily="34" charset="0"/>
-                <a:ea typeface="Segoe UI" pitchFamily="34" charset="-122"/>
-                <a:cs typeface="Segoe UI" pitchFamily="34" charset="-120"/>
-              </a:rPr>
-              <a:t>Illustrative 95% Wilson interval for 5/5: about 0.57 to 1.00.</a:t>
-            </a:r>
-            <a:endParaRPr lang="en-US" sz="2000" dirty="0"/>
-          </a:p>
-        </p:txBody>
-      </p:sp>
-      <p:sp>
-        <p:nvSpPr>
-          <p:cNvPr id="7" name="Shape 5"/>
-          <p:cNvSpPr/>
-          <p:nvPr/>
-        </p:nvSpPr>
-        <p:spPr>
-          <a:xfrm>
-            <a:off x="1325880" y="2660904"/>
-            <a:ext cx="10149840" cy="0"/>
-          </a:xfrm>
-          <a:prstGeom prst="line">
-            <a:avLst/>
-          </a:prstGeom>
-          <a:noFill/>
-          <a:ln w="6350">
+          <p:cNvPr id="5" name="Shape 3"/>
+          <p:cNvSpPr/>
+          <p:nvPr/>
+        </p:nvSpPr>
+        <p:spPr>
+          <a:xfrm>
+            <a:off x="548640" y="1874520"/>
+            <a:ext cx="5394960" cy="3886200"/>
+          </a:xfrm>
+          <a:prstGeom prst="rect">
+            <a:avLst/>
+          </a:prstGeom>
+          <a:solidFill>
+            <a:srgbClr val="EDF4FA"/>
+          </a:solidFill>
+          <a:ln w="12700">
             <a:solidFill>
               <a:srgbClr val="DCE5ED"/>
             </a:solidFill>
@@ -14442,40 +14199,118 @@
       </p:sp>
       <p:sp>
         <p:nvSpPr>
+          <p:cNvPr id="6" name="Text 4"/>
+          <p:cNvSpPr/>
+          <p:nvPr/>
+        </p:nvSpPr>
+        <p:spPr>
+          <a:xfrm>
+            <a:off x="822960" y="2148840"/>
+            <a:ext cx="4846320" cy="640080"/>
+          </a:xfrm>
+          <a:prstGeom prst="rect">
+            <a:avLst/>
+          </a:prstGeom>
+          <a:noFill/>
+          <a:ln/>
+        </p:spPr>
+        <p:txBody>
+          <a:bodyPr wrap="square" lIns="0" tIns="0" rIns="0" bIns="0" rtlCol="0" anchor="ctr"/>
+          <a:lstStyle/>
+          <a:p>
+            <a:pPr indent="0" marL="0">
+              <a:buNone/>
+            </a:pPr>
+            <a:r>
+              <a:rPr lang="en-US" sz="2300" b="1" dirty="0">
+                <a:solidFill>
+                  <a:srgbClr val="0078D4"/>
+                </a:solidFill>
+                <a:latin typeface="Segoe UI" pitchFamily="34" charset="0"/>
+                <a:ea typeface="Segoe UI" pitchFamily="34" charset="-122"/>
+                <a:cs typeface="Segoe UI" pitchFamily="34" charset="-120"/>
+              </a:rPr>
+              <a:t>Generation variance</a:t>
+            </a:r>
+            <a:endParaRPr lang="en-US" sz="2300" dirty="0"/>
+          </a:p>
+        </p:txBody>
+      </p:sp>
+      <p:sp>
+        <p:nvSpPr>
+          <p:cNvPr id="7" name="Text 5"/>
+          <p:cNvSpPr/>
+          <p:nvPr/>
+        </p:nvSpPr>
+        <p:spPr>
+          <a:xfrm>
+            <a:off x="822960" y="3017520"/>
+            <a:ext cx="4846320" cy="594360"/>
+          </a:xfrm>
+          <a:prstGeom prst="rect">
+            <a:avLst/>
+          </a:prstGeom>
+          <a:noFill/>
+          <a:ln/>
+        </p:spPr>
+        <p:txBody>
+          <a:bodyPr wrap="square" lIns="0" tIns="0" rIns="0" bIns="0" rtlCol="0" anchor="ctr"/>
+          <a:lstStyle/>
+          <a:p>
+            <a:pPr indent="0" marL="0">
+              <a:buNone/>
+            </a:pPr>
+            <a:r>
+              <a:rPr lang="en-US" sz="1900" dirty="0">
+                <a:solidFill>
+                  <a:srgbClr val="183449"/>
+                </a:solidFill>
+                <a:latin typeface="Segoe UI" pitchFamily="34" charset="0"/>
+                <a:ea typeface="Segoe UI" pitchFamily="34" charset="-122"/>
+                <a:cs typeface="Segoe UI" pitchFamily="34" charset="-120"/>
+              </a:rPr>
+              <a:t>Same frozen cases and initial state</a:t>
+            </a:r>
+            <a:endParaRPr lang="en-US" sz="1900" dirty="0"/>
+          </a:p>
+        </p:txBody>
+      </p:sp>
+      <p:sp>
+        <p:nvSpPr>
           <p:cNvPr id="8" name="Text 6"/>
           <p:cNvSpPr/>
           <p:nvPr/>
         </p:nvSpPr>
         <p:spPr>
           <a:xfrm>
-            <a:off x="594360" y="2770632"/>
-            <a:ext cx="640080" cy="594360"/>
-          </a:xfrm>
-          <a:prstGeom prst="rect">
-            <a:avLst/>
-          </a:prstGeom>
-          <a:noFill/>
-          <a:ln/>
-        </p:spPr>
-        <p:txBody>
-          <a:bodyPr wrap="square" lIns="0" tIns="0" rIns="0" bIns="0" rtlCol="0" anchor="ctr"/>
-          <a:lstStyle/>
-          <a:p>
-            <a:pPr indent="0" marL="0">
-              <a:buNone/>
-            </a:pPr>
-            <a:r>
-              <a:rPr lang="en-US" sz="1700" b="1" dirty="0">
-                <a:solidFill>
-                  <a:srgbClr val="0078D4"/>
-                </a:solidFill>
-                <a:latin typeface="Segoe UI" pitchFamily="34" charset="0"/>
-                <a:ea typeface="Segoe UI" pitchFamily="34" charset="-122"/>
-                <a:cs typeface="Segoe UI" pitchFamily="34" charset="-120"/>
-              </a:rPr>
-              <a:t>02</a:t>
-            </a:r>
-            <a:endParaRPr lang="en-US" sz="1700" dirty="0"/>
+            <a:off x="822960" y="3794760"/>
+            <a:ext cx="4846320" cy="594360"/>
+          </a:xfrm>
+          <a:prstGeom prst="rect">
+            <a:avLst/>
+          </a:prstGeom>
+          <a:noFill/>
+          <a:ln/>
+        </p:spPr>
+        <p:txBody>
+          <a:bodyPr wrap="square" lIns="0" tIns="0" rIns="0" bIns="0" rtlCol="0" anchor="ctr"/>
+          <a:lstStyle/>
+          <a:p>
+            <a:pPr indent="0" marL="0">
+              <a:buNone/>
+            </a:pPr>
+            <a:r>
+              <a:rPr lang="en-US" sz="1900" dirty="0">
+                <a:solidFill>
+                  <a:srgbClr val="183449"/>
+                </a:solidFill>
+                <a:latin typeface="Segoe UI" pitchFamily="34" charset="0"/>
+                <a:ea typeface="Segoe UI" pitchFamily="34" charset="-122"/>
+                <a:cs typeface="Segoe UI" pitchFamily="34" charset="-120"/>
+              </a:rPr>
+              <a:t>Capture fresh answers each trial</a:t>
+            </a:r>
+            <a:endParaRPr lang="en-US" sz="1900" dirty="0"/>
           </a:p>
         </p:txBody>
       </p:sp>
@@ -14487,24 +14322,24 @@
         </p:nvSpPr>
         <p:spPr>
           <a:xfrm>
-            <a:off x="1325880" y="2770632"/>
-            <a:ext cx="10195560" cy="731520"/>
-          </a:xfrm>
-          <a:prstGeom prst="rect">
-            <a:avLst/>
-          </a:prstGeom>
-          <a:noFill/>
-          <a:ln/>
-        </p:spPr>
-        <p:txBody>
-          <a:bodyPr wrap="square" lIns="0" tIns="0" rIns="0" bIns="0" rtlCol="0" anchor="ctr"/>
-          <a:lstStyle/>
-          <a:p>
-            <a:pPr indent="0" marL="0">
-              <a:buNone/>
-            </a:pPr>
-            <a:r>
-              <a:rPr lang="en-US" sz="2000" dirty="0">
+            <a:off x="822960" y="4572000"/>
+            <a:ext cx="4846320" cy="594360"/>
+          </a:xfrm>
+          <a:prstGeom prst="rect">
+            <a:avLst/>
+          </a:prstGeom>
+          <a:noFill/>
+          <a:ln/>
+        </p:spPr>
+        <p:txBody>
+          <a:bodyPr wrap="square" lIns="0" tIns="0" rIns="0" bIns="0" rtlCol="0" anchor="ctr"/>
+          <a:lstStyle/>
+          <a:p>
+            <a:pPr indent="0" marL="0">
+              <a:buNone/>
+            </a:pPr>
+            <a:r>
+              <a:rPr lang="en-US" sz="1900" dirty="0">
                 <a:solidFill>
                   <a:srgbClr val="183449"/>
                 </a:solidFill>
@@ -14512,9 +14347,9 @@
                 <a:ea typeface="Segoe UI" pitchFamily="34" charset="-122"/>
                 <a:cs typeface="Segoe UI" pitchFamily="34" charset="-120"/>
               </a:rPr>
-              <a:t>That interval assumes independent Bernoulli observations.</a:t>
-            </a:r>
-            <a:endParaRPr lang="en-US" sz="2000" dirty="0"/>
+              <a:t>Then judge and retain every answer</a:t>
+            </a:r>
+            <a:endParaRPr lang="en-US" sz="1900" dirty="0"/>
           </a:p>
         </p:txBody>
       </p:sp>
@@ -14526,14 +14361,16 @@
         </p:nvSpPr>
         <p:spPr>
           <a:xfrm>
-            <a:off x="1325880" y="3602736"/>
-            <a:ext cx="10149840" cy="0"/>
-          </a:xfrm>
-          <a:prstGeom prst="line">
-            <a:avLst/>
-          </a:prstGeom>
-          <a:noFill/>
-          <a:ln w="6350">
+            <a:off x="6217920" y="1874520"/>
+            <a:ext cx="5394960" cy="3886200"/>
+          </a:xfrm>
+          <a:prstGeom prst="rect">
+            <a:avLst/>
+          </a:prstGeom>
+          <a:solidFill>
+            <a:srgbClr val="EDF4FA"/>
+          </a:solidFill>
+          <a:ln w="12700">
             <a:solidFill>
               <a:srgbClr val="DCE5ED"/>
             </a:solidFill>
@@ -14549,24 +14386,24 @@
         </p:nvSpPr>
         <p:spPr>
           <a:xfrm>
-            <a:off x="594360" y="3712464"/>
-            <a:ext cx="640080" cy="594360"/>
-          </a:xfrm>
-          <a:prstGeom prst="rect">
-            <a:avLst/>
-          </a:prstGeom>
-          <a:noFill/>
-          <a:ln/>
-        </p:spPr>
-        <p:txBody>
-          <a:bodyPr wrap="square" lIns="0" tIns="0" rIns="0" bIns="0" rtlCol="0" anchor="ctr"/>
-          <a:lstStyle/>
-          <a:p>
-            <a:pPr indent="0" marL="0">
-              <a:buNone/>
-            </a:pPr>
-            <a:r>
-              <a:rPr lang="en-US" sz="1700" b="1" dirty="0">
+            <a:off x="6492240" y="2148840"/>
+            <a:ext cx="4846320" cy="640080"/>
+          </a:xfrm>
+          <a:prstGeom prst="rect">
+            <a:avLst/>
+          </a:prstGeom>
+          <a:noFill/>
+          <a:ln/>
+        </p:spPr>
+        <p:txBody>
+          <a:bodyPr wrap="square" lIns="0" tIns="0" rIns="0" bIns="0" rtlCol="0" anchor="ctr"/>
+          <a:lstStyle/>
+          <a:p>
+            <a:pPr indent="0" marL="0">
+              <a:buNone/>
+            </a:pPr>
+            <a:r>
+              <a:rPr lang="en-US" sz="2300" b="1" dirty="0">
                 <a:solidFill>
                   <a:srgbClr val="0078D4"/>
                 </a:solidFill>
@@ -14574,9 +14411,9 @@
                 <a:ea typeface="Segoe UI" pitchFamily="34" charset="-122"/>
                 <a:cs typeface="Segoe UI" pitchFamily="34" charset="-120"/>
               </a:rPr>
-              <a:t>03</a:t>
-            </a:r>
-            <a:endParaRPr lang="en-US" sz="1700" dirty="0"/>
+              <a:t>Judge variance</a:t>
+            </a:r>
+            <a:endParaRPr lang="en-US" sz="2300" dirty="0"/>
           </a:p>
         </p:txBody>
       </p:sp>
@@ -14588,24 +14425,24 @@
         </p:nvSpPr>
         <p:spPr>
           <a:xfrm>
-            <a:off x="1325880" y="3712464"/>
-            <a:ext cx="10195560" cy="731520"/>
-          </a:xfrm>
-          <a:prstGeom prst="rect">
-            <a:avLst/>
-          </a:prstGeom>
-          <a:noFill/>
-          <a:ln/>
-        </p:spPr>
-        <p:txBody>
-          <a:bodyPr wrap="square" lIns="0" tIns="0" rIns="0" bIns="0" rtlCol="0" anchor="ctr"/>
-          <a:lstStyle/>
-          <a:p>
-            <a:pPr indent="0" marL="0">
-              <a:buNone/>
-            </a:pPr>
-            <a:r>
-              <a:rPr lang="en-US" sz="2000" dirty="0">
+            <a:off x="6492240" y="3017520"/>
+            <a:ext cx="4846320" cy="594360"/>
+          </a:xfrm>
+          <a:prstGeom prst="rect">
+            <a:avLst/>
+          </a:prstGeom>
+          <a:noFill/>
+          <a:ln/>
+        </p:spPr>
+        <p:txBody>
+          <a:bodyPr wrap="square" lIns="0" tIns="0" rIns="0" bIns="0" rtlCol="0" anchor="ctr"/>
+          <a:lstStyle/>
+          <a:p>
+            <a:pPr indent="0" marL="0">
+              <a:buNone/>
+            </a:pPr>
+            <a:r>
+              <a:rPr lang="en-US" sz="1900" dirty="0">
                 <a:solidFill>
                   <a:srgbClr val="183449"/>
                 </a:solidFill>
@@ -14613,34 +14450,50 @@
                 <a:ea typeface="Segoe UI" pitchFamily="34" charset="-122"/>
                 <a:cs typeface="Segoe UI" pitchFamily="34" charset="-120"/>
               </a:rPr>
-              <a:t>Repeated grades of one case are correlated, not new customers.</a:t>
-            </a:r>
-            <a:endParaRPr lang="en-US" sz="2000" dirty="0"/>
-          </a:p>
-        </p:txBody>
-      </p:sp>
-      <p:sp>
-        <p:nvSpPr>
-          <p:cNvPr id="13" name="Shape 11"/>
-          <p:cNvSpPr/>
-          <p:nvPr/>
-        </p:nvSpPr>
-        <p:spPr>
-          <a:xfrm>
-            <a:off x="1325880" y="4544568"/>
-            <a:ext cx="10149840" cy="0"/>
-          </a:xfrm>
-          <a:prstGeom prst="line">
-            <a:avLst/>
-          </a:prstGeom>
-          <a:noFill/>
-          <a:ln w="6350">
-            <a:solidFill>
-              <a:srgbClr val="DCE5ED"/>
-            </a:solidFill>
-            <a:prstDash val="solid"/>
-          </a:ln>
-        </p:spPr>
+              <a:t>Same immutable captured answers</a:t>
+            </a:r>
+            <a:endParaRPr lang="en-US" sz="1900" dirty="0"/>
+          </a:p>
+        </p:txBody>
+      </p:sp>
+      <p:sp>
+        <p:nvSpPr>
+          <p:cNvPr id="13" name="Text 11"/>
+          <p:cNvSpPr/>
+          <p:nvPr/>
+        </p:nvSpPr>
+        <p:spPr>
+          <a:xfrm>
+            <a:off x="6492240" y="3794760"/>
+            <a:ext cx="4846320" cy="594360"/>
+          </a:xfrm>
+          <a:prstGeom prst="rect">
+            <a:avLst/>
+          </a:prstGeom>
+          <a:noFill/>
+          <a:ln/>
+        </p:spPr>
+        <p:txBody>
+          <a:bodyPr wrap="square" lIns="0" tIns="0" rIns="0" bIns="0" rtlCol="0" anchor="ctr"/>
+          <a:lstStyle/>
+          <a:p>
+            <a:pPr indent="0" marL="0">
+              <a:buNone/>
+            </a:pPr>
+            <a:r>
+              <a:rPr lang="en-US" sz="1900" dirty="0">
+                <a:solidFill>
+                  <a:srgbClr val="183449"/>
+                </a:solidFill>
+                <a:latin typeface="Segoe UI" pitchFamily="34" charset="0"/>
+                <a:ea typeface="Segoe UI" pitchFamily="34" charset="-122"/>
+                <a:cs typeface="Segoe UI" pitchFamily="34" charset="-120"/>
+              </a:rPr>
+              <a:t>Call evaluate(), not capture()</a:t>
+            </a:r>
+            <a:endParaRPr lang="en-US" sz="1900" dirty="0"/>
+          </a:p>
+        </p:txBody>
       </p:sp>
       <p:sp>
         <p:nvSpPr>
@@ -14650,63 +14503,24 @@
         </p:nvSpPr>
         <p:spPr>
           <a:xfrm>
-            <a:off x="594360" y="4654296"/>
-            <a:ext cx="640080" cy="594360"/>
-          </a:xfrm>
-          <a:prstGeom prst="rect">
-            <a:avLst/>
-          </a:prstGeom>
-          <a:noFill/>
-          <a:ln/>
-        </p:spPr>
-        <p:txBody>
-          <a:bodyPr wrap="square" lIns="0" tIns="0" rIns="0" bIns="0" rtlCol="0" anchor="ctr"/>
-          <a:lstStyle/>
-          <a:p>
-            <a:pPr indent="0" marL="0">
-              <a:buNone/>
-            </a:pPr>
-            <a:r>
-              <a:rPr lang="en-US" sz="1700" b="1" dirty="0">
-                <a:solidFill>
-                  <a:srgbClr val="0078D4"/>
-                </a:solidFill>
-                <a:latin typeface="Segoe UI" pitchFamily="34" charset="0"/>
-                <a:ea typeface="Segoe UI" pitchFamily="34" charset="-122"/>
-                <a:cs typeface="Segoe UI" pitchFamily="34" charset="-120"/>
-              </a:rPr>
-              <a:t>04</a:t>
-            </a:r>
-            <a:endParaRPr lang="en-US" sz="1700" dirty="0"/>
-          </a:p>
-        </p:txBody>
-      </p:sp>
-      <p:sp>
-        <p:nvSpPr>
-          <p:cNvPr id="15" name="Text 13"/>
-          <p:cNvSpPr/>
-          <p:nvPr/>
-        </p:nvSpPr>
-        <p:spPr>
-          <a:xfrm>
-            <a:off x="1325880" y="4654296"/>
-            <a:ext cx="10195560" cy="731520"/>
-          </a:xfrm>
-          <a:prstGeom prst="rect">
-            <a:avLst/>
-          </a:prstGeom>
-          <a:noFill/>
-          <a:ln/>
-        </p:spPr>
-        <p:txBody>
-          <a:bodyPr wrap="square" lIns="0" tIns="0" rIns="0" bIns="0" rtlCol="0" anchor="ctr"/>
-          <a:lstStyle/>
-          <a:p>
-            <a:pPr indent="0" marL="0">
-              <a:buNone/>
-            </a:pPr>
-            <a:r>
-              <a:rPr lang="en-US" sz="2000" dirty="0">
+            <a:off x="6492240" y="4572000"/>
+            <a:ext cx="4846320" cy="594360"/>
+          </a:xfrm>
+          <a:prstGeom prst="rect">
+            <a:avLst/>
+          </a:prstGeom>
+          <a:noFill/>
+          <a:ln/>
+        </p:spPr>
+        <p:txBody>
+          <a:bodyPr wrap="square" lIns="0" tIns="0" rIns="0" bIns="0" rtlCol="0" anchor="ctr"/>
+          <a:lstStyle/>
+          <a:p>
+            <a:pPr indent="0" marL="0">
+              <a:buNone/>
+            </a:pPr>
+            <a:r>
+              <a:rPr lang="en-US" sz="1900" dirty="0">
                 <a:solidFill>
                   <a:srgbClr val="183449"/>
                 </a:solidFill>
@@ -14714,38 +14528,15 @@
                 <a:ea typeface="Segoe UI" pitchFamily="34" charset="-122"/>
                 <a:cs typeface="Segoe UI" pitchFamily="34" charset="-120"/>
               </a:rPr>
-              <a:t>Report case-level uncertainty and rare-harm limitations.</a:t>
-            </a:r>
-            <a:endParaRPr lang="en-US" sz="2000" dirty="0"/>
-          </a:p>
-        </p:txBody>
-      </p:sp>
-      <p:sp>
-        <p:nvSpPr>
-          <p:cNvPr id="16" name="Shape 14"/>
-          <p:cNvSpPr/>
-          <p:nvPr/>
-        </p:nvSpPr>
-        <p:spPr>
-          <a:xfrm>
-            <a:off x="1325880" y="5486400"/>
-            <a:ext cx="10149840" cy="0"/>
-          </a:xfrm>
-          <a:prstGeom prst="line">
-            <a:avLst/>
-          </a:prstGeom>
-          <a:noFill/>
-          <a:ln w="6350">
-            <a:solidFill>
-              <a:srgbClr val="DCE5ED"/>
-            </a:solidFill>
-            <a:prstDash val="solid"/>
-          </a:ln>
-        </p:spPr>
-      </p:sp>
-      <p:sp>
-        <p:nvSpPr>
-          <p:cNvPr id="17" name="Text 15">
+              <a:t>Record reused response provenance</a:t>
+            </a:r>
+            <a:endParaRPr lang="en-US" sz="1900" dirty="0"/>
+          </a:p>
+        </p:txBody>
+      </p:sp>
+      <p:sp>
+        <p:nvSpPr>
+          <p:cNvPr id="15" name="Text 13">
             <a:hlinkClick r:id="rId1" tooltip=""/>
           </p:cNvPr>
           <p:cNvSpPr/>
@@ -14793,7 +14584,7 @@
       </p:sp>
       <p:sp>
         <p:nvSpPr>
-          <p:cNvPr id="18" name="Text 16"/>
+          <p:cNvPr id="16" name="Text 14"/>
           <p:cNvSpPr/>
           <p:nvPr/>
         </p:nvSpPr>
@@ -14824,7 +14615,7 @@
                 <a:ea typeface="Segoe UI" pitchFamily="34" charset="-122"/>
                 <a:cs typeface="Segoe UI" pitchFamily="34" charset="-120"/>
               </a:rPr>
-              <a:t>25 / 34</a:t>
+              <a:t>25 / 35</a:t>
             </a:r>
             <a:endParaRPr lang="en-US" sz="1000" dirty="0"/>
           </a:p>
@@ -14961,7 +14752,7 @@
                 <a:ea typeface="Segoe UI" pitchFamily="34" charset="-122"/>
                 <a:cs typeface="Segoe UI" pitchFamily="34" charset="-120"/>
               </a:rPr>
-              <a:t>Compare candidates fairly</a:t>
+              <a:t>5/5 does not establish perfection</a:t>
             </a:r>
             <a:endParaRPr lang="en-US" sz="2700" dirty="0"/>
           </a:p>
@@ -15039,7 +14830,7 @@
                 <a:ea typeface="Segoe UI" pitchFamily="34" charset="-122"/>
                 <a:cs typeface="Segoe UI" pitchFamily="34" charset="-120"/>
               </a:rPr>
-              <a:t>Pair by stable case ID, locale, trial and controlled initial state.</a:t>
+              <a:t>Illustrative 95% Wilson interval for 5/5: about 0.57 to 1.00.</a:t>
             </a:r>
             <a:endParaRPr lang="en-US" sz="2000" dirty="0"/>
           </a:p>
@@ -15140,7 +14931,7 @@
                 <a:ea typeface="Segoe UI" pitchFamily="34" charset="-122"/>
                 <a:cs typeface="Segoe UI" pitchFamily="34" charset="-120"/>
               </a:rPr>
-              <a:t>Freeze independent facts, rubric, evaluator and judge-model version.</a:t>
+              <a:t>That interval assumes independent Bernoulli observations.</a:t>
             </a:r>
             <a:endParaRPr lang="en-US" sz="2000" dirty="0"/>
           </a:p>
@@ -15241,7 +15032,7 @@
                 <a:ea typeface="Segoe UI" pitchFamily="34" charset="-122"/>
                 <a:cs typeface="Segoe UI" pitchFamily="34" charset="-120"/>
               </a:rPr>
-              <a:t>Inspect pass-to-fail transitions, effect size and uncertainty.</a:t>
+              <a:t>Repeated grades of one case are correlated, not new customers.</a:t>
             </a:r>
             <a:endParaRPr lang="en-US" sz="2000" dirty="0"/>
           </a:p>
@@ -15342,7 +15133,7 @@
                 <a:ea typeface="Segoe UI" pitchFamily="34" charset="-122"/>
                 <a:cs typeface="Segoe UI" pitchFamily="34" charset="-120"/>
               </a:rPr>
-              <a:t>Changed dataset or evaluator means rebaseline, not improvement.</a:t>
+              <a:t>Report case-level uncertainty and rare-harm limitations.</a:t>
             </a:r>
             <a:endParaRPr lang="en-US" sz="2000" dirty="0"/>
           </a:p>
@@ -15452,7 +15243,7 @@
                 <a:ea typeface="Segoe UI" pitchFamily="34" charset="-122"/>
                 <a:cs typeface="Segoe UI" pitchFamily="34" charset="-120"/>
               </a:rPr>
-              <a:t>26 / 34</a:t>
+              <a:t>26 / 35</a:t>
             </a:r>
             <a:endParaRPr lang="en-US" sz="1000" dirty="0"/>
           </a:p>
@@ -15589,7 +15380,7 @@
                 <a:ea typeface="Segoe UI" pitchFamily="34" charset="-122"/>
                 <a:cs typeface="Segoe UI" pitchFamily="34" charset="-120"/>
               </a:rPr>
-              <a:t>Spend where it buys useful evidence</a:t>
+              <a:t>Compare candidates fairly</a:t>
             </a:r>
             <a:endParaRPr lang="en-US" sz="2700" dirty="0"/>
           </a:p>
@@ -15667,7 +15458,7 @@
                 <a:ea typeface="Segoe UI" pitchFamily="34" charset="-122"/>
                 <a:cs typeface="Segoe UI" pitchFamily="34" charset="-120"/>
               </a:rPr>
-              <a:t>Run local contracts and the golden gate before paid judges.</a:t>
+              <a:t>Pair by stable case ID, locale, trial and controlled initial state.</a:t>
             </a:r>
             <a:endParaRPr lang="en-US" sz="2000" dirty="0"/>
           </a:p>
@@ -15768,7 +15559,7 @@
                 <a:ea typeface="Segoe UI" pitchFamily="34" charset="-122"/>
                 <a:cs typeface="Segoe UI" pitchFamily="34" charset="-120"/>
               </a:rPr>
-              <a:t>Pilot: 5 cases × 2 locales × 1 trial × 3 metrics = 30 judgments.</a:t>
+              <a:t>Freeze independent facts, rubric, evaluator and judge-model version.</a:t>
             </a:r>
             <a:endParaRPr lang="en-US" sz="2000" dirty="0"/>
           </a:p>
@@ -15869,7 +15660,7 @@
                 <a:ea typeface="Segoe UI" pitchFamily="34" charset="-122"/>
                 <a:cs typeface="Segoe UI" pitchFamily="34" charset="-120"/>
               </a:rPr>
-              <a:t>More trials, long contexts and evaluator retries increase cost.</a:t>
+              <a:t>Inspect pass-to-fail transitions, effect size and uncertainty.</a:t>
             </a:r>
             <a:endParaRPr lang="en-US" sz="2000" dirty="0"/>
           </a:p>
@@ -15970,7 +15761,7 @@
                 <a:ea typeface="Segoe UI" pitchFamily="34" charset="-122"/>
                 <a:cs typeface="Segoe UI" pitchFamily="34" charset="-120"/>
               </a:rPr>
-              <a:t>Reuse captures for judge experiments; bound concurrency and budget.</a:t>
+              <a:t>Changed dataset or evaluator means rebaseline, not improvement.</a:t>
             </a:r>
             <a:endParaRPr lang="en-US" sz="2000" dirty="0"/>
           </a:p>
@@ -16080,7 +15871,7 @@
                 <a:ea typeface="Segoe UI" pitchFamily="34" charset="-122"/>
                 <a:cs typeface="Segoe UI" pitchFamily="34" charset="-120"/>
               </a:rPr>
-              <a:t>27 / 34</a:t>
+              <a:t>27 / 35</a:t>
             </a:r>
             <a:endParaRPr lang="en-US" sz="1000" dirty="0"/>
           </a:p>
@@ -16217,7 +16008,7 @@
                 <a:ea typeface="Segoe UI" pitchFamily="34" charset="-122"/>
                 <a:cs typeface="Segoe UI" pitchFamily="34" charset="-120"/>
               </a:rPr>
-              <a:t>Stateful regression: the revision workflow</a:t>
+              <a:t>Spend where it buys useful evidence</a:t>
             </a:r>
             <a:endParaRPr lang="en-US" sz="2700" dirty="0"/>
           </a:p>
@@ -16225,22 +16016,98 @@
       </p:sp>
       <p:sp>
         <p:nvSpPr>
-          <p:cNvPr id="5" name="Shape 3"/>
-          <p:cNvSpPr/>
-          <p:nvPr/>
-        </p:nvSpPr>
-        <p:spPr>
-          <a:xfrm>
-            <a:off x="548640" y="1920240"/>
-            <a:ext cx="5394960" cy="1417320"/>
-          </a:xfrm>
-          <a:prstGeom prst="rect">
-            <a:avLst/>
-          </a:prstGeom>
-          <a:solidFill>
-            <a:srgbClr val="EDF4FA"/>
-          </a:solidFill>
-          <a:ln w="12700">
+          <p:cNvPr id="5" name="Text 3"/>
+          <p:cNvSpPr/>
+          <p:nvPr/>
+        </p:nvSpPr>
+        <p:spPr>
+          <a:xfrm>
+            <a:off x="594360" y="1828800"/>
+            <a:ext cx="640080" cy="594360"/>
+          </a:xfrm>
+          <a:prstGeom prst="rect">
+            <a:avLst/>
+          </a:prstGeom>
+          <a:noFill/>
+          <a:ln/>
+        </p:spPr>
+        <p:txBody>
+          <a:bodyPr wrap="square" lIns="0" tIns="0" rIns="0" bIns="0" rtlCol="0" anchor="ctr"/>
+          <a:lstStyle/>
+          <a:p>
+            <a:pPr indent="0" marL="0">
+              <a:buNone/>
+            </a:pPr>
+            <a:r>
+              <a:rPr lang="en-US" sz="1700" b="1" dirty="0">
+                <a:solidFill>
+                  <a:srgbClr val="0078D4"/>
+                </a:solidFill>
+                <a:latin typeface="Segoe UI" pitchFamily="34" charset="0"/>
+                <a:ea typeface="Segoe UI" pitchFamily="34" charset="-122"/>
+                <a:cs typeface="Segoe UI" pitchFamily="34" charset="-120"/>
+              </a:rPr>
+              <a:t>01</a:t>
+            </a:r>
+            <a:endParaRPr lang="en-US" sz="1700" dirty="0"/>
+          </a:p>
+        </p:txBody>
+      </p:sp>
+      <p:sp>
+        <p:nvSpPr>
+          <p:cNvPr id="6" name="Text 4"/>
+          <p:cNvSpPr/>
+          <p:nvPr/>
+        </p:nvSpPr>
+        <p:spPr>
+          <a:xfrm>
+            <a:off x="1325880" y="1828800"/>
+            <a:ext cx="10195560" cy="731520"/>
+          </a:xfrm>
+          <a:prstGeom prst="rect">
+            <a:avLst/>
+          </a:prstGeom>
+          <a:noFill/>
+          <a:ln/>
+        </p:spPr>
+        <p:txBody>
+          <a:bodyPr wrap="square" lIns="0" tIns="0" rIns="0" bIns="0" rtlCol="0" anchor="ctr"/>
+          <a:lstStyle/>
+          <a:p>
+            <a:pPr indent="0" marL="0">
+              <a:buNone/>
+            </a:pPr>
+            <a:r>
+              <a:rPr lang="en-US" sz="2000" dirty="0">
+                <a:solidFill>
+                  <a:srgbClr val="183449"/>
+                </a:solidFill>
+                <a:latin typeface="Segoe UI" pitchFamily="34" charset="0"/>
+                <a:ea typeface="Segoe UI" pitchFamily="34" charset="-122"/>
+                <a:cs typeface="Segoe UI" pitchFamily="34" charset="-120"/>
+              </a:rPr>
+              <a:t>Run local contracts and the golden gate before paid judges.</a:t>
+            </a:r>
+            <a:endParaRPr lang="en-US" sz="2000" dirty="0"/>
+          </a:p>
+        </p:txBody>
+      </p:sp>
+      <p:sp>
+        <p:nvSpPr>
+          <p:cNvPr id="7" name="Shape 5"/>
+          <p:cNvSpPr/>
+          <p:nvPr/>
+        </p:nvSpPr>
+        <p:spPr>
+          <a:xfrm>
+            <a:off x="1325880" y="2660904"/>
+            <a:ext cx="10149840" cy="0"/>
+          </a:xfrm>
+          <a:prstGeom prst="line">
+            <a:avLst/>
+          </a:prstGeom>
+          <a:noFill/>
+          <a:ln w="6350">
             <a:solidFill>
               <a:srgbClr val="DCE5ED"/>
             </a:solidFill>
@@ -16250,30 +16117,30 @@
       </p:sp>
       <p:sp>
         <p:nvSpPr>
-          <p:cNvPr id="6" name="Text 4"/>
-          <p:cNvSpPr/>
-          <p:nvPr/>
-        </p:nvSpPr>
-        <p:spPr>
-          <a:xfrm>
-            <a:off x="777240" y="2103120"/>
-            <a:ext cx="640080" cy="411480"/>
-          </a:xfrm>
-          <a:prstGeom prst="rect">
-            <a:avLst/>
-          </a:prstGeom>
-          <a:noFill/>
-          <a:ln/>
-        </p:spPr>
-        <p:txBody>
-          <a:bodyPr wrap="square" lIns="0" tIns="0" rIns="0" bIns="0" rtlCol="0" anchor="ctr"/>
-          <a:lstStyle/>
-          <a:p>
-            <a:pPr indent="0" marL="0">
-              <a:buNone/>
-            </a:pPr>
-            <a:r>
-              <a:rPr lang="en-US" sz="2500" b="1" dirty="0">
+          <p:cNvPr id="8" name="Text 6"/>
+          <p:cNvSpPr/>
+          <p:nvPr/>
+        </p:nvSpPr>
+        <p:spPr>
+          <a:xfrm>
+            <a:off x="594360" y="2770632"/>
+            <a:ext cx="640080" cy="594360"/>
+          </a:xfrm>
+          <a:prstGeom prst="rect">
+            <a:avLst/>
+          </a:prstGeom>
+          <a:noFill/>
+          <a:ln/>
+        </p:spPr>
+        <p:txBody>
+          <a:bodyPr wrap="square" lIns="0" tIns="0" rIns="0" bIns="0" rtlCol="0" anchor="ctr"/>
+          <a:lstStyle/>
+          <a:p>
+            <a:pPr indent="0" marL="0">
+              <a:buNone/>
+            </a:pPr>
+            <a:r>
+              <a:rPr lang="en-US" sz="1700" b="1" dirty="0">
                 <a:solidFill>
                   <a:srgbClr val="0078D4"/>
                 </a:solidFill>
@@ -16281,38 +16148,38 @@
                 <a:ea typeface="Segoe UI" pitchFamily="34" charset="-122"/>
                 <a:cs typeface="Segoe UI" pitchFamily="34" charset="-120"/>
               </a:rPr>
-              <a:t>01</a:t>
-            </a:r>
-            <a:endParaRPr lang="en-US" sz="2500" dirty="0"/>
-          </a:p>
-        </p:txBody>
-      </p:sp>
-      <p:sp>
-        <p:nvSpPr>
-          <p:cNvPr id="7" name="Text 5"/>
-          <p:cNvSpPr/>
-          <p:nvPr/>
-        </p:nvSpPr>
-        <p:spPr>
-          <a:xfrm>
-            <a:off x="1508760" y="2103120"/>
-            <a:ext cx="4114800" cy="1051560"/>
-          </a:xfrm>
-          <a:prstGeom prst="rect">
-            <a:avLst/>
-          </a:prstGeom>
-          <a:noFill/>
-          <a:ln/>
-        </p:spPr>
-        <p:txBody>
-          <a:bodyPr wrap="square" lIns="0" tIns="0" rIns="0" bIns="0" rtlCol="0" anchor="ctr"/>
-          <a:lstStyle/>
-          <a:p>
-            <a:pPr indent="0" marL="0">
-              <a:buNone/>
-            </a:pPr>
-            <a:r>
-              <a:rPr lang="en-US" sz="2100" b="1" dirty="0">
+              <a:t>02</a:t>
+            </a:r>
+            <a:endParaRPr lang="en-US" sz="1700" dirty="0"/>
+          </a:p>
+        </p:txBody>
+      </p:sp>
+      <p:sp>
+        <p:nvSpPr>
+          <p:cNvPr id="9" name="Text 7"/>
+          <p:cNvSpPr/>
+          <p:nvPr/>
+        </p:nvSpPr>
+        <p:spPr>
+          <a:xfrm>
+            <a:off x="1325880" y="2770632"/>
+            <a:ext cx="10195560" cy="731520"/>
+          </a:xfrm>
+          <a:prstGeom prst="rect">
+            <a:avLst/>
+          </a:prstGeom>
+          <a:noFill/>
+          <a:ln/>
+        </p:spPr>
+        <p:txBody>
+          <a:bodyPr wrap="square" lIns="0" tIns="0" rIns="0" bIns="0" rtlCol="0" anchor="ctr"/>
+          <a:lstStyle/>
+          <a:p>
+            <a:pPr indent="0" marL="0">
+              <a:buNone/>
+            </a:pPr>
+            <a:r>
+              <a:rPr lang="en-US" sz="2000" dirty="0">
                 <a:solidFill>
                   <a:srgbClr val="183449"/>
                 </a:solidFill>
@@ -16320,30 +16187,28 @@
                 <a:ea typeface="Segoe UI" pitchFamily="34" charset="-122"/>
                 <a:cs typeface="Segoe UI" pitchFamily="34" charset="-120"/>
               </a:rPr>
-              <a:t>Return pending case to DRAFT rev 2</a:t>
-            </a:r>
-            <a:endParaRPr lang="en-US" sz="2100" dirty="0"/>
-          </a:p>
-        </p:txBody>
-      </p:sp>
-      <p:sp>
-        <p:nvSpPr>
-          <p:cNvPr id="8" name="Shape 6"/>
-          <p:cNvSpPr/>
-          <p:nvPr/>
-        </p:nvSpPr>
-        <p:spPr>
-          <a:xfrm>
-            <a:off x="6217920" y="1920240"/>
-            <a:ext cx="5394960" cy="1417320"/>
-          </a:xfrm>
-          <a:prstGeom prst="rect">
-            <a:avLst/>
-          </a:prstGeom>
-          <a:solidFill>
-            <a:srgbClr val="EDF4FA"/>
-          </a:solidFill>
-          <a:ln w="12700">
+              <a:t>Pilot: 5 cases × 2 locales × 1 trial × 3 metrics = 30 judgments.</a:t>
+            </a:r>
+            <a:endParaRPr lang="en-US" sz="2000" dirty="0"/>
+          </a:p>
+        </p:txBody>
+      </p:sp>
+      <p:sp>
+        <p:nvSpPr>
+          <p:cNvPr id="10" name="Shape 8"/>
+          <p:cNvSpPr/>
+          <p:nvPr/>
+        </p:nvSpPr>
+        <p:spPr>
+          <a:xfrm>
+            <a:off x="1325880" y="3602736"/>
+            <a:ext cx="10149840" cy="0"/>
+          </a:xfrm>
+          <a:prstGeom prst="line">
+            <a:avLst/>
+          </a:prstGeom>
+          <a:noFill/>
+          <a:ln w="6350">
             <a:solidFill>
               <a:srgbClr val="DCE5ED"/>
             </a:solidFill>
@@ -16353,30 +16218,30 @@
       </p:sp>
       <p:sp>
         <p:nvSpPr>
-          <p:cNvPr id="9" name="Text 7"/>
-          <p:cNvSpPr/>
-          <p:nvPr/>
-        </p:nvSpPr>
-        <p:spPr>
-          <a:xfrm>
-            <a:off x="6446520" y="2103120"/>
-            <a:ext cx="640080" cy="411480"/>
-          </a:xfrm>
-          <a:prstGeom prst="rect">
-            <a:avLst/>
-          </a:prstGeom>
-          <a:noFill/>
-          <a:ln/>
-        </p:spPr>
-        <p:txBody>
-          <a:bodyPr wrap="square" lIns="0" tIns="0" rIns="0" bIns="0" rtlCol="0" anchor="ctr"/>
-          <a:lstStyle/>
-          <a:p>
-            <a:pPr indent="0" marL="0">
-              <a:buNone/>
-            </a:pPr>
-            <a:r>
-              <a:rPr lang="en-US" sz="2500" b="1" dirty="0">
+          <p:cNvPr id="11" name="Text 9"/>
+          <p:cNvSpPr/>
+          <p:nvPr/>
+        </p:nvSpPr>
+        <p:spPr>
+          <a:xfrm>
+            <a:off x="594360" y="3712464"/>
+            <a:ext cx="640080" cy="594360"/>
+          </a:xfrm>
+          <a:prstGeom prst="rect">
+            <a:avLst/>
+          </a:prstGeom>
+          <a:noFill/>
+          <a:ln/>
+        </p:spPr>
+        <p:txBody>
+          <a:bodyPr wrap="square" lIns="0" tIns="0" rIns="0" bIns="0" rtlCol="0" anchor="ctr"/>
+          <a:lstStyle/>
+          <a:p>
+            <a:pPr indent="0" marL="0">
+              <a:buNone/>
+            </a:pPr>
+            <a:r>
+              <a:rPr lang="en-US" sz="1700" b="1" dirty="0">
                 <a:solidFill>
                   <a:srgbClr val="0078D4"/>
                 </a:solidFill>
@@ -16384,38 +16249,38 @@
                 <a:ea typeface="Segoe UI" pitchFamily="34" charset="-122"/>
                 <a:cs typeface="Segoe UI" pitchFamily="34" charset="-120"/>
               </a:rPr>
-              <a:t>02</a:t>
-            </a:r>
-            <a:endParaRPr lang="en-US" sz="2500" dirty="0"/>
-          </a:p>
-        </p:txBody>
-      </p:sp>
-      <p:sp>
-        <p:nvSpPr>
-          <p:cNvPr id="10" name="Text 8"/>
-          <p:cNvSpPr/>
-          <p:nvPr/>
-        </p:nvSpPr>
-        <p:spPr>
-          <a:xfrm>
-            <a:off x="7178040" y="2103120"/>
-            <a:ext cx="4114800" cy="1051560"/>
-          </a:xfrm>
-          <a:prstGeom prst="rect">
-            <a:avLst/>
-          </a:prstGeom>
-          <a:noFill/>
-          <a:ln/>
-        </p:spPr>
-        <p:txBody>
-          <a:bodyPr wrap="square" lIns="0" tIns="0" rIns="0" bIns="0" rtlCol="0" anchor="ctr"/>
-          <a:lstStyle/>
-          <a:p>
-            <a:pPr indent="0" marL="0">
-              <a:buNone/>
-            </a:pPr>
-            <a:r>
-              <a:rPr lang="en-US" sz="2100" b="1" dirty="0">
+              <a:t>03</a:t>
+            </a:r>
+            <a:endParaRPr lang="en-US" sz="1700" dirty="0"/>
+          </a:p>
+        </p:txBody>
+      </p:sp>
+      <p:sp>
+        <p:nvSpPr>
+          <p:cNvPr id="12" name="Text 10"/>
+          <p:cNvSpPr/>
+          <p:nvPr/>
+        </p:nvSpPr>
+        <p:spPr>
+          <a:xfrm>
+            <a:off x="1325880" y="3712464"/>
+            <a:ext cx="10195560" cy="731520"/>
+          </a:xfrm>
+          <a:prstGeom prst="rect">
+            <a:avLst/>
+          </a:prstGeom>
+          <a:noFill/>
+          <a:ln/>
+        </p:spPr>
+        <p:txBody>
+          <a:bodyPr wrap="square" lIns="0" tIns="0" rIns="0" bIns="0" rtlCol="0" anchor="ctr"/>
+          <a:lstStyle/>
+          <a:p>
+            <a:pPr indent="0" marL="0">
+              <a:buNone/>
+            </a:pPr>
+            <a:r>
+              <a:rPr lang="en-US" sz="2000" dirty="0">
                 <a:solidFill>
                   <a:srgbClr val="183449"/>
                 </a:solidFill>
@@ -16423,30 +16288,28 @@
                 <a:ea typeface="Segoe UI" pitchFamily="34" charset="-122"/>
                 <a:cs typeface="Segoe UI" pitchFamily="34" charset="-120"/>
               </a:rPr>
-              <a:t>Confirm active / DRAFT queue visibility</a:t>
-            </a:r>
-            <a:endParaRPr lang="en-US" sz="2100" dirty="0"/>
-          </a:p>
-        </p:txBody>
-      </p:sp>
-      <p:sp>
-        <p:nvSpPr>
-          <p:cNvPr id="11" name="Shape 9"/>
-          <p:cNvSpPr/>
-          <p:nvPr/>
-        </p:nvSpPr>
-        <p:spPr>
-          <a:xfrm>
-            <a:off x="548640" y="3749040"/>
-            <a:ext cx="5394960" cy="1417320"/>
-          </a:xfrm>
-          <a:prstGeom prst="rect">
-            <a:avLst/>
-          </a:prstGeom>
-          <a:solidFill>
-            <a:srgbClr val="EDF4FA"/>
-          </a:solidFill>
-          <a:ln w="12700">
+              <a:t>More trials, long contexts and evaluator retries increase cost.</a:t>
+            </a:r>
+            <a:endParaRPr lang="en-US" sz="2000" dirty="0"/>
+          </a:p>
+        </p:txBody>
+      </p:sp>
+      <p:sp>
+        <p:nvSpPr>
+          <p:cNvPr id="13" name="Shape 11"/>
+          <p:cNvSpPr/>
+          <p:nvPr/>
+        </p:nvSpPr>
+        <p:spPr>
+          <a:xfrm>
+            <a:off x="1325880" y="4544568"/>
+            <a:ext cx="10149840" cy="0"/>
+          </a:xfrm>
+          <a:prstGeom prst="line">
+            <a:avLst/>
+          </a:prstGeom>
+          <a:noFill/>
+          <a:ln w="6350">
             <a:solidFill>
               <a:srgbClr val="DCE5ED"/>
             </a:solidFill>
@@ -16456,30 +16319,30 @@
       </p:sp>
       <p:sp>
         <p:nvSpPr>
-          <p:cNvPr id="12" name="Text 10"/>
-          <p:cNvSpPr/>
-          <p:nvPr/>
-        </p:nvSpPr>
-        <p:spPr>
-          <a:xfrm>
-            <a:off x="777240" y="3931920"/>
-            <a:ext cx="640080" cy="411480"/>
-          </a:xfrm>
-          <a:prstGeom prst="rect">
-            <a:avLst/>
-          </a:prstGeom>
-          <a:noFill/>
-          <a:ln/>
-        </p:spPr>
-        <p:txBody>
-          <a:bodyPr wrap="square" lIns="0" tIns="0" rIns="0" bIns="0" rtlCol="0" anchor="ctr"/>
-          <a:lstStyle/>
-          <a:p>
-            <a:pPr indent="0" marL="0">
-              <a:buNone/>
-            </a:pPr>
-            <a:r>
-              <a:rPr lang="en-US" sz="2500" b="1" dirty="0">
+          <p:cNvPr id="14" name="Text 12"/>
+          <p:cNvSpPr/>
+          <p:nvPr/>
+        </p:nvSpPr>
+        <p:spPr>
+          <a:xfrm>
+            <a:off x="594360" y="4654296"/>
+            <a:ext cx="640080" cy="594360"/>
+          </a:xfrm>
+          <a:prstGeom prst="rect">
+            <a:avLst/>
+          </a:prstGeom>
+          <a:noFill/>
+          <a:ln/>
+        </p:spPr>
+        <p:txBody>
+          <a:bodyPr wrap="square" lIns="0" tIns="0" rIns="0" bIns="0" rtlCol="0" anchor="ctr"/>
+          <a:lstStyle/>
+          <a:p>
+            <a:pPr indent="0" marL="0">
+              <a:buNone/>
+            </a:pPr>
+            <a:r>
+              <a:rPr lang="en-US" sz="1700" b="1" dirty="0">
                 <a:solidFill>
                   <a:srgbClr val="0078D4"/>
                 </a:solidFill>
@@ -16487,38 +16350,38 @@
                 <a:ea typeface="Segoe UI" pitchFamily="34" charset="-122"/>
                 <a:cs typeface="Segoe UI" pitchFamily="34" charset="-120"/>
               </a:rPr>
-              <a:t>03</a:t>
-            </a:r>
-            <a:endParaRPr lang="en-US" sz="2500" dirty="0"/>
-          </a:p>
-        </p:txBody>
-      </p:sp>
-      <p:sp>
-        <p:nvSpPr>
-          <p:cNvPr id="13" name="Text 11"/>
-          <p:cNvSpPr/>
-          <p:nvPr/>
-        </p:nvSpPr>
-        <p:spPr>
-          <a:xfrm>
-            <a:off x="1508760" y="3931920"/>
-            <a:ext cx="4114800" cy="1051560"/>
-          </a:xfrm>
-          <a:prstGeom prst="rect">
-            <a:avLst/>
-          </a:prstGeom>
-          <a:noFill/>
-          <a:ln/>
-        </p:spPr>
-        <p:txBody>
-          <a:bodyPr wrap="square" lIns="0" tIns="0" rIns="0" bIns="0" rtlCol="0" anchor="ctr"/>
-          <a:lstStyle/>
-          <a:p>
-            <a:pPr indent="0" marL="0">
-              <a:buNone/>
-            </a:pPr>
-            <a:r>
-              <a:rPr lang="en-US" sz="2100" b="1" dirty="0">
+              <a:t>04</a:t>
+            </a:r>
+            <a:endParaRPr lang="en-US" sz="1700" dirty="0"/>
+          </a:p>
+        </p:txBody>
+      </p:sp>
+      <p:sp>
+        <p:nvSpPr>
+          <p:cNvPr id="15" name="Text 13"/>
+          <p:cNvSpPr/>
+          <p:nvPr/>
+        </p:nvSpPr>
+        <p:spPr>
+          <a:xfrm>
+            <a:off x="1325880" y="4654296"/>
+            <a:ext cx="10195560" cy="731520"/>
+          </a:xfrm>
+          <a:prstGeom prst="rect">
+            <a:avLst/>
+          </a:prstGeom>
+          <a:noFill/>
+          <a:ln/>
+        </p:spPr>
+        <p:txBody>
+          <a:bodyPr wrap="square" lIns="0" tIns="0" rIns="0" bIns="0" rtlCol="0" anchor="ctr"/>
+          <a:lstStyle/>
+          <a:p>
+            <a:pPr indent="0" marL="0">
+              <a:buNone/>
+            </a:pPr>
+            <a:r>
+              <a:rPr lang="en-US" sz="2000" dirty="0">
                 <a:solidFill>
                   <a:srgbClr val="183449"/>
                 </a:solidFill>
@@ -16526,114 +16389,34 @@
                 <a:ea typeface="Segoe UI" pitchFamily="34" charset="-122"/>
                 <a:cs typeface="Segoe UI" pitchFamily="34" charset="-120"/>
               </a:rPr>
-              <a:t>Correct + prepare through native agent</a:t>
-            </a:r>
-            <a:endParaRPr lang="en-US" sz="2100" dirty="0"/>
-          </a:p>
-        </p:txBody>
-      </p:sp>
-      <p:sp>
-        <p:nvSpPr>
-          <p:cNvPr id="14" name="Shape 12"/>
-          <p:cNvSpPr/>
-          <p:nvPr/>
-        </p:nvSpPr>
-        <p:spPr>
-          <a:xfrm>
-            <a:off x="6217920" y="3749040"/>
-            <a:ext cx="5394960" cy="1417320"/>
-          </a:xfrm>
-          <a:prstGeom prst="rect">
-            <a:avLst/>
-          </a:prstGeom>
-          <a:solidFill>
-            <a:srgbClr val="EDF4FA"/>
-          </a:solidFill>
-          <a:ln w="12700">
+              <a:t>Reuse captures for judge experiments; bound concurrency and budget.</a:t>
+            </a:r>
+            <a:endParaRPr lang="en-US" sz="2000" dirty="0"/>
+          </a:p>
+        </p:txBody>
+      </p:sp>
+      <p:sp>
+        <p:nvSpPr>
+          <p:cNvPr id="16" name="Shape 14"/>
+          <p:cNvSpPr/>
+          <p:nvPr/>
+        </p:nvSpPr>
+        <p:spPr>
+          <a:xfrm>
+            <a:off x="1325880" y="5486400"/>
+            <a:ext cx="10149840" cy="0"/>
+          </a:xfrm>
+          <a:prstGeom prst="line">
+            <a:avLst/>
+          </a:prstGeom>
+          <a:noFill/>
+          <a:ln w="6350">
             <a:solidFill>
               <a:srgbClr val="DCE5ED"/>
             </a:solidFill>
             <a:prstDash val="solid"/>
           </a:ln>
         </p:spPr>
-      </p:sp>
-      <p:sp>
-        <p:nvSpPr>
-          <p:cNvPr id="15" name="Text 13"/>
-          <p:cNvSpPr/>
-          <p:nvPr/>
-        </p:nvSpPr>
-        <p:spPr>
-          <a:xfrm>
-            <a:off x="6446520" y="3931920"/>
-            <a:ext cx="640080" cy="411480"/>
-          </a:xfrm>
-          <a:prstGeom prst="rect">
-            <a:avLst/>
-          </a:prstGeom>
-          <a:noFill/>
-          <a:ln/>
-        </p:spPr>
-        <p:txBody>
-          <a:bodyPr wrap="square" lIns="0" tIns="0" rIns="0" bIns="0" rtlCol="0" anchor="ctr"/>
-          <a:lstStyle/>
-          <a:p>
-            <a:pPr indent="0" marL="0">
-              <a:buNone/>
-            </a:pPr>
-            <a:r>
-              <a:rPr lang="en-US" sz="2500" b="1" dirty="0">
-                <a:solidFill>
-                  <a:srgbClr val="0078D4"/>
-                </a:solidFill>
-                <a:latin typeface="Segoe UI" pitchFamily="34" charset="0"/>
-                <a:ea typeface="Segoe UI" pitchFamily="34" charset="-122"/>
-                <a:cs typeface="Segoe UI" pitchFamily="34" charset="-120"/>
-              </a:rPr>
-              <a:t>04</a:t>
-            </a:r>
-            <a:endParaRPr lang="en-US" sz="2500" dirty="0"/>
-          </a:p>
-        </p:txBody>
-      </p:sp>
-      <p:sp>
-        <p:nvSpPr>
-          <p:cNvPr id="16" name="Text 14"/>
-          <p:cNvSpPr/>
-          <p:nvPr/>
-        </p:nvSpPr>
-        <p:spPr>
-          <a:xfrm>
-            <a:off x="7178040" y="3931920"/>
-            <a:ext cx="4114800" cy="1051560"/>
-          </a:xfrm>
-          <a:prstGeom prst="rect">
-            <a:avLst/>
-          </a:prstGeom>
-          <a:noFill/>
-          <a:ln/>
-        </p:spPr>
-        <p:txBody>
-          <a:bodyPr wrap="square" lIns="0" tIns="0" rIns="0" bIns="0" rtlCol="0" anchor="ctr"/>
-          <a:lstStyle/>
-          <a:p>
-            <a:pPr indent="0" marL="0">
-              <a:buNone/>
-            </a:pPr>
-            <a:r>
-              <a:rPr lang="en-US" sz="2100" b="1" dirty="0">
-                <a:solidFill>
-                  <a:srgbClr val="183449"/>
-                </a:solidFill>
-                <a:latin typeface="Segoe UI" pitchFamily="34" charset="0"/>
-                <a:ea typeface="Segoe UI" pitchFamily="34" charset="-122"/>
-                <a:cs typeface="Segoe UI" pitchFamily="34" charset="-120"/>
-              </a:rPr>
-              <a:t>Match audit; reject self-approval</a:t>
-            </a:r>
-            <a:endParaRPr lang="en-US" sz="2100" dirty="0"/>
-          </a:p>
-        </p:txBody>
       </p:sp>
       <p:sp>
         <p:nvSpPr>
@@ -16716,7 +16499,7 @@
                 <a:ea typeface="Segoe UI" pitchFamily="34" charset="-122"/>
                 <a:cs typeface="Segoe UI" pitchFamily="34" charset="-120"/>
               </a:rPr>
-              <a:t>28 / 34</a:t>
+              <a:t>28 / 35</a:t>
             </a:r>
             <a:endParaRPr lang="en-US" sz="1000" dirty="0"/>
           </a:p>
@@ -16853,7 +16636,7 @@
                 <a:ea typeface="Segoe UI" pitchFamily="34" charset="-122"/>
                 <a:cs typeface="Segoe UI" pitchFamily="34" charset="-120"/>
               </a:rPr>
-              <a:t>Trajectory evaluation needs real trajectory evidence</a:t>
+              <a:t>Stateful regression: the revision workflow</a:t>
             </a:r>
             <a:endParaRPr lang="en-US" sz="2700" dirty="0"/>
           </a:p>
@@ -16861,98 +16644,22 @@
       </p:sp>
       <p:sp>
         <p:nvSpPr>
-          <p:cNvPr id="5" name="Text 3"/>
-          <p:cNvSpPr/>
-          <p:nvPr/>
-        </p:nvSpPr>
-        <p:spPr>
-          <a:xfrm>
-            <a:off x="594360" y="1828800"/>
-            <a:ext cx="640080" cy="594360"/>
-          </a:xfrm>
-          <a:prstGeom prst="rect">
-            <a:avLst/>
-          </a:prstGeom>
-          <a:noFill/>
-          <a:ln/>
-        </p:spPr>
-        <p:txBody>
-          <a:bodyPr wrap="square" lIns="0" tIns="0" rIns="0" bIns="0" rtlCol="0" anchor="ctr"/>
-          <a:lstStyle/>
-          <a:p>
-            <a:pPr indent="0" marL="0">
-              <a:buNone/>
-            </a:pPr>
-            <a:r>
-              <a:rPr lang="en-US" sz="1700" b="1" dirty="0">
-                <a:solidFill>
-                  <a:srgbClr val="0078D4"/>
-                </a:solidFill>
-                <a:latin typeface="Segoe UI" pitchFamily="34" charset="0"/>
-                <a:ea typeface="Segoe UI" pitchFamily="34" charset="-122"/>
-                <a:cs typeface="Segoe UI" pitchFamily="34" charset="-120"/>
-              </a:rPr>
-              <a:t>01</a:t>
-            </a:r>
-            <a:endParaRPr lang="en-US" sz="1700" dirty="0"/>
-          </a:p>
-        </p:txBody>
-      </p:sp>
-      <p:sp>
-        <p:nvSpPr>
-          <p:cNvPr id="6" name="Text 4"/>
-          <p:cNvSpPr/>
-          <p:nvPr/>
-        </p:nvSpPr>
-        <p:spPr>
-          <a:xfrm>
-            <a:off x="1325880" y="1828800"/>
-            <a:ext cx="10195560" cy="731520"/>
-          </a:xfrm>
-          <a:prstGeom prst="rect">
-            <a:avLst/>
-          </a:prstGeom>
-          <a:noFill/>
-          <a:ln/>
-        </p:spPr>
-        <p:txBody>
-          <a:bodyPr wrap="square" lIns="0" tIns="0" rIns="0" bIns="0" rtlCol="0" anchor="ctr"/>
-          <a:lstStyle/>
-          <a:p>
-            <a:pPr indent="0" marL="0">
-              <a:buNone/>
-            </a:pPr>
-            <a:r>
-              <a:rPr lang="en-US" sz="2000" dirty="0">
-                <a:solidFill>
-                  <a:srgbClr val="183449"/>
-                </a:solidFill>
-                <a:latin typeface="Segoe UI" pitchFamily="34" charset="0"/>
-                <a:ea typeface="Segoe UI" pitchFamily="34" charset="-122"/>
-                <a:cs typeface="Segoe UI" pitchFamily="34" charset="-120"/>
-              </a:rPr>
-              <a:t>Outcome quality and process correctness are different questions.</a:t>
-            </a:r>
-            <a:endParaRPr lang="en-US" sz="2000" dirty="0"/>
-          </a:p>
-        </p:txBody>
-      </p:sp>
-      <p:sp>
-        <p:nvSpPr>
-          <p:cNvPr id="7" name="Shape 5"/>
-          <p:cNvSpPr/>
-          <p:nvPr/>
-        </p:nvSpPr>
-        <p:spPr>
-          <a:xfrm>
-            <a:off x="1325880" y="2660904"/>
-            <a:ext cx="10149840" cy="0"/>
-          </a:xfrm>
-          <a:prstGeom prst="line">
-            <a:avLst/>
-          </a:prstGeom>
-          <a:noFill/>
-          <a:ln w="6350">
+          <p:cNvPr id="5" name="Shape 3"/>
+          <p:cNvSpPr/>
+          <p:nvPr/>
+        </p:nvSpPr>
+        <p:spPr>
+          <a:xfrm>
+            <a:off x="548640" y="1920240"/>
+            <a:ext cx="5394960" cy="1417320"/>
+          </a:xfrm>
+          <a:prstGeom prst="rect">
+            <a:avLst/>
+          </a:prstGeom>
+          <a:solidFill>
+            <a:srgbClr val="EDF4FA"/>
+          </a:solidFill>
+          <a:ln w="12700">
             <a:solidFill>
               <a:srgbClr val="DCE5ED"/>
             </a:solidFill>
@@ -16962,30 +16669,30 @@
       </p:sp>
       <p:sp>
         <p:nvSpPr>
-          <p:cNvPr id="8" name="Text 6"/>
-          <p:cNvSpPr/>
-          <p:nvPr/>
-        </p:nvSpPr>
-        <p:spPr>
-          <a:xfrm>
-            <a:off x="594360" y="2770632"/>
-            <a:ext cx="640080" cy="594360"/>
-          </a:xfrm>
-          <a:prstGeom prst="rect">
-            <a:avLst/>
-          </a:prstGeom>
-          <a:noFill/>
-          <a:ln/>
-        </p:spPr>
-        <p:txBody>
-          <a:bodyPr wrap="square" lIns="0" tIns="0" rIns="0" bIns="0" rtlCol="0" anchor="ctr"/>
-          <a:lstStyle/>
-          <a:p>
-            <a:pPr indent="0" marL="0">
-              <a:buNone/>
-            </a:pPr>
-            <a:r>
-              <a:rPr lang="en-US" sz="1700" b="1" dirty="0">
+          <p:cNvPr id="6" name="Text 4"/>
+          <p:cNvSpPr/>
+          <p:nvPr/>
+        </p:nvSpPr>
+        <p:spPr>
+          <a:xfrm>
+            <a:off x="777240" y="2103120"/>
+            <a:ext cx="640080" cy="411480"/>
+          </a:xfrm>
+          <a:prstGeom prst="rect">
+            <a:avLst/>
+          </a:prstGeom>
+          <a:noFill/>
+          <a:ln/>
+        </p:spPr>
+        <p:txBody>
+          <a:bodyPr wrap="square" lIns="0" tIns="0" rIns="0" bIns="0" rtlCol="0" anchor="ctr"/>
+          <a:lstStyle/>
+          <a:p>
+            <a:pPr indent="0" marL="0">
+              <a:buNone/>
+            </a:pPr>
+            <a:r>
+              <a:rPr lang="en-US" sz="2500" b="1" dirty="0">
                 <a:solidFill>
                   <a:srgbClr val="0078D4"/>
                 </a:solidFill>
@@ -16993,38 +16700,38 @@
                 <a:ea typeface="Segoe UI" pitchFamily="34" charset="-122"/>
                 <a:cs typeface="Segoe UI" pitchFamily="34" charset="-120"/>
               </a:rPr>
-              <a:t>02</a:t>
-            </a:r>
-            <a:endParaRPr lang="en-US" sz="1700" dirty="0"/>
-          </a:p>
-        </p:txBody>
-      </p:sp>
-      <p:sp>
-        <p:nvSpPr>
-          <p:cNvPr id="9" name="Text 7"/>
-          <p:cNvSpPr/>
-          <p:nvPr/>
-        </p:nvSpPr>
-        <p:spPr>
-          <a:xfrm>
-            <a:off x="1325880" y="2770632"/>
-            <a:ext cx="10195560" cy="731520"/>
-          </a:xfrm>
-          <a:prstGeom prst="rect">
-            <a:avLst/>
-          </a:prstGeom>
-          <a:noFill/>
-          <a:ln/>
-        </p:spPr>
-        <p:txBody>
-          <a:bodyPr wrap="square" lIns="0" tIns="0" rIns="0" bIns="0" rtlCol="0" anchor="ctr"/>
-          <a:lstStyle/>
-          <a:p>
-            <a:pPr indent="0" marL="0">
-              <a:buNone/>
-            </a:pPr>
-            <a:r>
-              <a:rPr lang="en-US" sz="2000" dirty="0">
+              <a:t>01</a:t>
+            </a:r>
+            <a:endParaRPr lang="en-US" sz="2500" dirty="0"/>
+          </a:p>
+        </p:txBody>
+      </p:sp>
+      <p:sp>
+        <p:nvSpPr>
+          <p:cNvPr id="7" name="Text 5"/>
+          <p:cNvSpPr/>
+          <p:nvPr/>
+        </p:nvSpPr>
+        <p:spPr>
+          <a:xfrm>
+            <a:off x="1508760" y="2103120"/>
+            <a:ext cx="4114800" cy="1051560"/>
+          </a:xfrm>
+          <a:prstGeom prst="rect">
+            <a:avLst/>
+          </a:prstGeom>
+          <a:noFill/>
+          <a:ln/>
+        </p:spPr>
+        <p:txBody>
+          <a:bodyPr wrap="square" lIns="0" tIns="0" rIns="0" bIns="0" rtlCol="0" anchor="ctr"/>
+          <a:lstStyle/>
+          <a:p>
+            <a:pPr indent="0" marL="0">
+              <a:buNone/>
+            </a:pPr>
+            <a:r>
+              <a:rPr lang="en-US" sz="2100" b="1" dirty="0">
                 <a:solidFill>
                   <a:srgbClr val="183449"/>
                 </a:solidFill>
@@ -17032,28 +16739,30 @@
                 <a:ea typeface="Segoe UI" pitchFamily="34" charset="-122"/>
                 <a:cs typeface="Segoe UI" pitchFamily="34" charset="-120"/>
               </a:rPr>
-              <a:t>Tool selection/arguments require compatible actual tool traces.</a:t>
-            </a:r>
-            <a:endParaRPr lang="en-US" sz="2000" dirty="0"/>
-          </a:p>
-        </p:txBody>
-      </p:sp>
-      <p:sp>
-        <p:nvSpPr>
-          <p:cNvPr id="10" name="Shape 8"/>
-          <p:cNvSpPr/>
-          <p:nvPr/>
-        </p:nvSpPr>
-        <p:spPr>
-          <a:xfrm>
-            <a:off x="1325880" y="3602736"/>
-            <a:ext cx="10149840" cy="0"/>
-          </a:xfrm>
-          <a:prstGeom prst="line">
-            <a:avLst/>
-          </a:prstGeom>
-          <a:noFill/>
-          <a:ln w="6350">
+              <a:t>Return pending case to DRAFT rev 2</a:t>
+            </a:r>
+            <a:endParaRPr lang="en-US" sz="2100" dirty="0"/>
+          </a:p>
+        </p:txBody>
+      </p:sp>
+      <p:sp>
+        <p:nvSpPr>
+          <p:cNvPr id="8" name="Shape 6"/>
+          <p:cNvSpPr/>
+          <p:nvPr/>
+        </p:nvSpPr>
+        <p:spPr>
+          <a:xfrm>
+            <a:off x="6217920" y="1920240"/>
+            <a:ext cx="5394960" cy="1417320"/>
+          </a:xfrm>
+          <a:prstGeom prst="rect">
+            <a:avLst/>
+          </a:prstGeom>
+          <a:solidFill>
+            <a:srgbClr val="EDF4FA"/>
+          </a:solidFill>
+          <a:ln w="12700">
             <a:solidFill>
               <a:srgbClr val="DCE5ED"/>
             </a:solidFill>
@@ -17063,30 +16772,30 @@
       </p:sp>
       <p:sp>
         <p:nvSpPr>
-          <p:cNvPr id="11" name="Text 9"/>
-          <p:cNvSpPr/>
-          <p:nvPr/>
-        </p:nvSpPr>
-        <p:spPr>
-          <a:xfrm>
-            <a:off x="594360" y="3712464"/>
-            <a:ext cx="640080" cy="594360"/>
-          </a:xfrm>
-          <a:prstGeom prst="rect">
-            <a:avLst/>
-          </a:prstGeom>
-          <a:noFill/>
-          <a:ln/>
-        </p:spPr>
-        <p:txBody>
-          <a:bodyPr wrap="square" lIns="0" tIns="0" rIns="0" bIns="0" rtlCol="0" anchor="ctr"/>
-          <a:lstStyle/>
-          <a:p>
-            <a:pPr indent="0" marL="0">
-              <a:buNone/>
-            </a:pPr>
-            <a:r>
-              <a:rPr lang="en-US" sz="1700" b="1" dirty="0">
+          <p:cNvPr id="9" name="Text 7"/>
+          <p:cNvSpPr/>
+          <p:nvPr/>
+        </p:nvSpPr>
+        <p:spPr>
+          <a:xfrm>
+            <a:off x="6446520" y="2103120"/>
+            <a:ext cx="640080" cy="411480"/>
+          </a:xfrm>
+          <a:prstGeom prst="rect">
+            <a:avLst/>
+          </a:prstGeom>
+          <a:noFill/>
+          <a:ln/>
+        </p:spPr>
+        <p:txBody>
+          <a:bodyPr wrap="square" lIns="0" tIns="0" rIns="0" bIns="0" rtlCol="0" anchor="ctr"/>
+          <a:lstStyle/>
+          <a:p>
+            <a:pPr indent="0" marL="0">
+              <a:buNone/>
+            </a:pPr>
+            <a:r>
+              <a:rPr lang="en-US" sz="2500" b="1" dirty="0">
                 <a:solidFill>
                   <a:srgbClr val="0078D4"/>
                 </a:solidFill>
@@ -17094,38 +16803,38 @@
                 <a:ea typeface="Segoe UI" pitchFamily="34" charset="-122"/>
                 <a:cs typeface="Segoe UI" pitchFamily="34" charset="-120"/>
               </a:rPr>
-              <a:t>03</a:t>
-            </a:r>
-            <a:endParaRPr lang="en-US" sz="1700" dirty="0"/>
-          </a:p>
-        </p:txBody>
-      </p:sp>
-      <p:sp>
-        <p:nvSpPr>
-          <p:cNvPr id="12" name="Text 10"/>
-          <p:cNvSpPr/>
-          <p:nvPr/>
-        </p:nvSpPr>
-        <p:spPr>
-          <a:xfrm>
-            <a:off x="1325880" y="3712464"/>
-            <a:ext cx="10195560" cy="731520"/>
-          </a:xfrm>
-          <a:prstGeom prst="rect">
-            <a:avLst/>
-          </a:prstGeom>
-          <a:noFill/>
-          <a:ln/>
-        </p:spPr>
-        <p:txBody>
-          <a:bodyPr wrap="square" lIns="0" tIns="0" rIns="0" bIns="0" rtlCol="0" anchor="ctr"/>
-          <a:lstStyle/>
-          <a:p>
-            <a:pPr indent="0" marL="0">
-              <a:buNone/>
-            </a:pPr>
-            <a:r>
-              <a:rPr lang="en-US" sz="2000" dirty="0">
+              <a:t>02</a:t>
+            </a:r>
+            <a:endParaRPr lang="en-US" sz="2500" dirty="0"/>
+          </a:p>
+        </p:txBody>
+      </p:sp>
+      <p:sp>
+        <p:nvSpPr>
+          <p:cNvPr id="10" name="Text 8"/>
+          <p:cNvSpPr/>
+          <p:nvPr/>
+        </p:nvSpPr>
+        <p:spPr>
+          <a:xfrm>
+            <a:off x="7178040" y="2103120"/>
+            <a:ext cx="4114800" cy="1051560"/>
+          </a:xfrm>
+          <a:prstGeom prst="rect">
+            <a:avLst/>
+          </a:prstGeom>
+          <a:noFill/>
+          <a:ln/>
+        </p:spPr>
+        <p:txBody>
+          <a:bodyPr wrap="square" lIns="0" tIns="0" rIns="0" bIns="0" rtlCol="0" anchor="ctr"/>
+          <a:lstStyle/>
+          <a:p>
+            <a:pPr indent="0" marL="0">
+              <a:buNone/>
+            </a:pPr>
+            <a:r>
+              <a:rPr lang="en-US" sz="2100" b="1" dirty="0">
                 <a:solidFill>
                   <a:srgbClr val="183449"/>
                 </a:solidFill>
@@ -17133,28 +16842,30 @@
                 <a:ea typeface="Segoe UI" pitchFamily="34" charset="-122"/>
                 <a:cs typeface="Segoe UI" pitchFamily="34" charset="-120"/>
               </a:rPr>
-              <a:t>Real quote stages: INTAKE, REFERENCE_LOOKUP, COMPOSITION.</a:t>
-            </a:r>
-            <a:endParaRPr lang="en-US" sz="2000" dirty="0"/>
-          </a:p>
-        </p:txBody>
-      </p:sp>
-      <p:sp>
-        <p:nvSpPr>
-          <p:cNvPr id="13" name="Shape 11"/>
-          <p:cNvSpPr/>
-          <p:nvPr/>
-        </p:nvSpPr>
-        <p:spPr>
-          <a:xfrm>
-            <a:off x="1325880" y="4544568"/>
-            <a:ext cx="10149840" cy="0"/>
-          </a:xfrm>
-          <a:prstGeom prst="line">
-            <a:avLst/>
-          </a:prstGeom>
-          <a:noFill/>
-          <a:ln w="6350">
+              <a:t>Confirm active / DRAFT queue visibility</a:t>
+            </a:r>
+            <a:endParaRPr lang="en-US" sz="2100" dirty="0"/>
+          </a:p>
+        </p:txBody>
+      </p:sp>
+      <p:sp>
+        <p:nvSpPr>
+          <p:cNvPr id="11" name="Shape 9"/>
+          <p:cNvSpPr/>
+          <p:nvPr/>
+        </p:nvSpPr>
+        <p:spPr>
+          <a:xfrm>
+            <a:off x="548640" y="3749040"/>
+            <a:ext cx="5394960" cy="1417320"/>
+          </a:xfrm>
+          <a:prstGeom prst="rect">
+            <a:avLst/>
+          </a:prstGeom>
+          <a:solidFill>
+            <a:srgbClr val="EDF4FA"/>
+          </a:solidFill>
+          <a:ln w="12700">
             <a:solidFill>
               <a:srgbClr val="DCE5ED"/>
             </a:solidFill>
@@ -17164,30 +16875,30 @@
       </p:sp>
       <p:sp>
         <p:nvSpPr>
-          <p:cNvPr id="14" name="Text 12"/>
-          <p:cNvSpPr/>
-          <p:nvPr/>
-        </p:nvSpPr>
-        <p:spPr>
-          <a:xfrm>
-            <a:off x="594360" y="4654296"/>
-            <a:ext cx="640080" cy="594360"/>
-          </a:xfrm>
-          <a:prstGeom prst="rect">
-            <a:avLst/>
-          </a:prstGeom>
-          <a:noFill/>
-          <a:ln/>
-        </p:spPr>
-        <p:txBody>
-          <a:bodyPr wrap="square" lIns="0" tIns="0" rIns="0" bIns="0" rtlCol="0" anchor="ctr"/>
-          <a:lstStyle/>
-          <a:p>
-            <a:pPr indent="0" marL="0">
-              <a:buNone/>
-            </a:pPr>
-            <a:r>
-              <a:rPr lang="en-US" sz="1700" b="1" dirty="0">
+          <p:cNvPr id="12" name="Text 10"/>
+          <p:cNvSpPr/>
+          <p:nvPr/>
+        </p:nvSpPr>
+        <p:spPr>
+          <a:xfrm>
+            <a:off x="777240" y="3931920"/>
+            <a:ext cx="640080" cy="411480"/>
+          </a:xfrm>
+          <a:prstGeom prst="rect">
+            <a:avLst/>
+          </a:prstGeom>
+          <a:noFill/>
+          <a:ln/>
+        </p:spPr>
+        <p:txBody>
+          <a:bodyPr wrap="square" lIns="0" tIns="0" rIns="0" bIns="0" rtlCol="0" anchor="ctr"/>
+          <a:lstStyle/>
+          <a:p>
+            <a:pPr indent="0" marL="0">
+              <a:buNone/>
+            </a:pPr>
+            <a:r>
+              <a:rPr lang="en-US" sz="2500" b="1" dirty="0">
                 <a:solidFill>
                   <a:srgbClr val="0078D4"/>
                 </a:solidFill>
@@ -17195,38 +16906,38 @@
                 <a:ea typeface="Segoe UI" pitchFamily="34" charset="-122"/>
                 <a:cs typeface="Segoe UI" pitchFamily="34" charset="-120"/>
               </a:rPr>
-              <a:t>04</a:t>
-            </a:r>
-            <a:endParaRPr lang="en-US" sz="1700" dirty="0"/>
-          </a:p>
-        </p:txBody>
-      </p:sp>
-      <p:sp>
-        <p:nvSpPr>
-          <p:cNvPr id="15" name="Text 13"/>
-          <p:cNvSpPr/>
-          <p:nvPr/>
-        </p:nvSpPr>
-        <p:spPr>
-          <a:xfrm>
-            <a:off x="1325880" y="4654296"/>
-            <a:ext cx="10195560" cy="731520"/>
-          </a:xfrm>
-          <a:prstGeom prst="rect">
-            <a:avLst/>
-          </a:prstGeom>
-          <a:noFill/>
-          <a:ln/>
-        </p:spPr>
-        <p:txBody>
-          <a:bodyPr wrap="square" lIns="0" tIns="0" rIns="0" bIns="0" rtlCol="0" anchor="ctr"/>
-          <a:lstStyle/>
-          <a:p>
-            <a:pPr indent="0" marL="0">
-              <a:buNone/>
-            </a:pPr>
-            <a:r>
-              <a:rPr lang="en-US" sz="2000" dirty="0">
+              <a:t>03</a:t>
+            </a:r>
+            <a:endParaRPr lang="en-US" sz="2500" dirty="0"/>
+          </a:p>
+        </p:txBody>
+      </p:sp>
+      <p:sp>
+        <p:nvSpPr>
+          <p:cNvPr id="13" name="Text 11"/>
+          <p:cNvSpPr/>
+          <p:nvPr/>
+        </p:nvSpPr>
+        <p:spPr>
+          <a:xfrm>
+            <a:off x="1508760" y="3931920"/>
+            <a:ext cx="4114800" cy="1051560"/>
+          </a:xfrm>
+          <a:prstGeom prst="rect">
+            <a:avLst/>
+          </a:prstGeom>
+          <a:noFill/>
+          <a:ln/>
+        </p:spPr>
+        <p:txBody>
+          <a:bodyPr wrap="square" lIns="0" tIns="0" rIns="0" bIns="0" rtlCol="0" anchor="ctr"/>
+          <a:lstStyle/>
+          <a:p>
+            <a:pPr indent="0" marL="0">
+              <a:buNone/>
+            </a:pPr>
+            <a:r>
+              <a:rPr lang="en-US" sz="2100" b="1" dirty="0">
                 <a:solidFill>
                   <a:srgbClr val="183449"/>
                 </a:solidFill>
@@ -17234,34 +16945,114 @@
                 <a:ea typeface="Segoe UI" pitchFamily="34" charset="-122"/>
                 <a:cs typeface="Segoe UI" pitchFamily="34" charset="-120"/>
               </a:rPr>
-              <a:t>Requested trace ID or final text alone does not prove ingestion.</a:t>
-            </a:r>
-            <a:endParaRPr lang="en-US" sz="2000" dirty="0"/>
-          </a:p>
-        </p:txBody>
-      </p:sp>
-      <p:sp>
-        <p:nvSpPr>
-          <p:cNvPr id="16" name="Shape 14"/>
-          <p:cNvSpPr/>
-          <p:nvPr/>
-        </p:nvSpPr>
-        <p:spPr>
-          <a:xfrm>
-            <a:off x="1325880" y="5486400"/>
-            <a:ext cx="10149840" cy="0"/>
-          </a:xfrm>
-          <a:prstGeom prst="line">
-            <a:avLst/>
-          </a:prstGeom>
-          <a:noFill/>
-          <a:ln w="6350">
+              <a:t>Correct + prepare through native agent</a:t>
+            </a:r>
+            <a:endParaRPr lang="en-US" sz="2100" dirty="0"/>
+          </a:p>
+        </p:txBody>
+      </p:sp>
+      <p:sp>
+        <p:nvSpPr>
+          <p:cNvPr id="14" name="Shape 12"/>
+          <p:cNvSpPr/>
+          <p:nvPr/>
+        </p:nvSpPr>
+        <p:spPr>
+          <a:xfrm>
+            <a:off x="6217920" y="3749040"/>
+            <a:ext cx="5394960" cy="1417320"/>
+          </a:xfrm>
+          <a:prstGeom prst="rect">
+            <a:avLst/>
+          </a:prstGeom>
+          <a:solidFill>
+            <a:srgbClr val="EDF4FA"/>
+          </a:solidFill>
+          <a:ln w="12700">
             <a:solidFill>
               <a:srgbClr val="DCE5ED"/>
             </a:solidFill>
             <a:prstDash val="solid"/>
           </a:ln>
         </p:spPr>
+      </p:sp>
+      <p:sp>
+        <p:nvSpPr>
+          <p:cNvPr id="15" name="Text 13"/>
+          <p:cNvSpPr/>
+          <p:nvPr/>
+        </p:nvSpPr>
+        <p:spPr>
+          <a:xfrm>
+            <a:off x="6446520" y="3931920"/>
+            <a:ext cx="640080" cy="411480"/>
+          </a:xfrm>
+          <a:prstGeom prst="rect">
+            <a:avLst/>
+          </a:prstGeom>
+          <a:noFill/>
+          <a:ln/>
+        </p:spPr>
+        <p:txBody>
+          <a:bodyPr wrap="square" lIns="0" tIns="0" rIns="0" bIns="0" rtlCol="0" anchor="ctr"/>
+          <a:lstStyle/>
+          <a:p>
+            <a:pPr indent="0" marL="0">
+              <a:buNone/>
+            </a:pPr>
+            <a:r>
+              <a:rPr lang="en-US" sz="2500" b="1" dirty="0">
+                <a:solidFill>
+                  <a:srgbClr val="0078D4"/>
+                </a:solidFill>
+                <a:latin typeface="Segoe UI" pitchFamily="34" charset="0"/>
+                <a:ea typeface="Segoe UI" pitchFamily="34" charset="-122"/>
+                <a:cs typeface="Segoe UI" pitchFamily="34" charset="-120"/>
+              </a:rPr>
+              <a:t>04</a:t>
+            </a:r>
+            <a:endParaRPr lang="en-US" sz="2500" dirty="0"/>
+          </a:p>
+        </p:txBody>
+      </p:sp>
+      <p:sp>
+        <p:nvSpPr>
+          <p:cNvPr id="16" name="Text 14"/>
+          <p:cNvSpPr/>
+          <p:nvPr/>
+        </p:nvSpPr>
+        <p:spPr>
+          <a:xfrm>
+            <a:off x="7178040" y="3931920"/>
+            <a:ext cx="4114800" cy="1051560"/>
+          </a:xfrm>
+          <a:prstGeom prst="rect">
+            <a:avLst/>
+          </a:prstGeom>
+          <a:noFill/>
+          <a:ln/>
+        </p:spPr>
+        <p:txBody>
+          <a:bodyPr wrap="square" lIns="0" tIns="0" rIns="0" bIns="0" rtlCol="0" anchor="ctr"/>
+          <a:lstStyle/>
+          <a:p>
+            <a:pPr indent="0" marL="0">
+              <a:buNone/>
+            </a:pPr>
+            <a:r>
+              <a:rPr lang="en-US" sz="2100" b="1" dirty="0">
+                <a:solidFill>
+                  <a:srgbClr val="183449"/>
+                </a:solidFill>
+                <a:latin typeface="Segoe UI" pitchFamily="34" charset="0"/>
+                <a:ea typeface="Segoe UI" pitchFamily="34" charset="-122"/>
+                <a:cs typeface="Segoe UI" pitchFamily="34" charset="-120"/>
+              </a:rPr>
+              <a:t>Match audit; reject self-approval</a:t>
+            </a:r>
+            <a:endParaRPr lang="en-US" sz="2100" dirty="0"/>
+          </a:p>
+        </p:txBody>
       </p:sp>
       <p:sp>
         <p:nvSpPr>
@@ -17344,7 +17135,7 @@
                 <a:ea typeface="Segoe UI" pitchFamily="34" charset="-122"/>
                 <a:cs typeface="Segoe UI" pitchFamily="34" charset="-120"/>
               </a:rPr>
-              <a:t>29 / 34</a:t>
+              <a:t>29 / 35</a:t>
             </a:r>
             <a:endParaRPr lang="en-US" sz="1000" dirty="0"/>
           </a:p>
@@ -17980,7 +17771,7 @@
                 <a:ea typeface="Segoe UI" pitchFamily="34" charset="-122"/>
                 <a:cs typeface="Segoe UI" pitchFamily="34" charset="-120"/>
               </a:rPr>
-              <a:t>3 / 34</a:t>
+              <a:t>3 / 35</a:t>
             </a:r>
             <a:endParaRPr lang="en-US" sz="1000" dirty="0"/>
           </a:p>
@@ -18117,7 +17908,7 @@
                 <a:ea typeface="Segoe UI" pitchFamily="34" charset="-122"/>
                 <a:cs typeface="Segoe UI" pitchFamily="34" charset="-120"/>
               </a:rPr>
-              <a:t>Operate two scorecards, not one</a:t>
+              <a:t>Trajectory evaluation needs real trajectory evidence</a:t>
             </a:r>
             <a:endParaRPr lang="en-US" sz="2700" dirty="0"/>
           </a:p>
@@ -18195,7 +17986,7 @@
                 <a:ea typeface="Segoe UI" pitchFamily="34" charset="-122"/>
                 <a:cs typeface="Segoe UI" pitchFamily="34" charset="-120"/>
               </a:rPr>
-              <a:t>Service: availability, latency, 401/403, quota, timeouts, cost.</a:t>
+              <a:t>Outcome quality and process correctness are different questions.</a:t>
             </a:r>
             <a:endParaRPr lang="en-US" sz="2000" dirty="0"/>
           </a:p>
@@ -18296,7 +18087,7 @@
                 <a:ea typeface="Segoe UI" pitchFamily="34" charset="-122"/>
                 <a:cs typeface="Segoe UI" pitchFamily="34" charset="-120"/>
               </a:rPr>
-              <a:t>Quality: grounding, adherence, locale slices and human overrides.</a:t>
+              <a:t>Tool selection/arguments require compatible actual tool traces.</a:t>
             </a:r>
             <a:endParaRPr lang="en-US" sz="2000" dirty="0"/>
           </a:p>
@@ -18397,7 +18188,7 @@
                 <a:ea typeface="Segoe UI" pitchFamily="34" charset="-122"/>
                 <a:cs typeface="Segoe UI" pitchFamily="34" charset="-120"/>
               </a:rPr>
-              <a:t>Safety: deterministic policy violations and role boundaries.</a:t>
+              <a:t>Real quote stages: INTAKE, REFERENCE_LOOKUP, COMPOSITION.</a:t>
             </a:r>
             <a:endParaRPr lang="en-US" sz="2000" dirty="0"/>
           </a:p>
@@ -18498,7 +18289,7 @@
                 <a:ea typeface="Segoe UI" pitchFamily="34" charset="-122"/>
                 <a:cs typeface="Segoe UI" pitchFamily="34" charset="-120"/>
               </a:rPr>
-              <a:t>Review drift and turn verified incidents into new test cases.</a:t>
+              <a:t>Requested trace ID or final text alone does not prove ingestion.</a:t>
             </a:r>
             <a:endParaRPr lang="en-US" sz="2000" dirty="0"/>
           </a:p>
@@ -18608,7 +18399,7 @@
                 <a:ea typeface="Segoe UI" pitchFamily="34" charset="-122"/>
                 <a:cs typeface="Segoe UI" pitchFamily="34" charset="-120"/>
               </a:rPr>
-              <a:t>30 / 34</a:t>
+              <a:t>30 / 35</a:t>
             </a:r>
             <a:endParaRPr lang="en-US" sz="1000" dirty="0"/>
           </a:p>
@@ -18745,7 +18536,7 @@
                 <a:ea typeface="Segoe UI" pitchFamily="34" charset="-122"/>
                 <a:cs typeface="Segoe UI" pitchFamily="34" charset="-120"/>
               </a:rPr>
-              <a:t>Your release recommendation</a:t>
+              <a:t>Operate two scorecards, not one</a:t>
             </a:r>
             <a:endParaRPr lang="en-US" sz="2700" dirty="0"/>
           </a:p>
@@ -18823,7 +18614,7 @@
                 <a:ea typeface="Segoe UI" pitchFamily="34" charset="-122"/>
                 <a:cs typeface="Segoe UI" pitchFamily="34" charset="-120"/>
               </a:rPr>
-              <a:t>Name the exact source, dataset, state, model and evaluator identities.</a:t>
+              <a:t>Service: availability, latency, 401/403, quota, timeouts, cost.</a:t>
             </a:r>
             <a:endParaRPr lang="en-US" sz="2000" dirty="0"/>
           </a:p>
@@ -18924,7 +18715,7 @@
                 <a:ea typeface="Segoe UI" pitchFamily="34" charset="-122"/>
                 <a:cs typeface="Segoe UI" pitchFamily="34" charset="-120"/>
               </a:rPr>
-              <a:t>Report hard checks, completeness, quality, controls and uncertainty.</a:t>
+              <a:t>Quality: grounding, adherence, locale slices and human overrides.</a:t>
             </a:r>
             <a:endParaRPr lang="en-US" sz="2000" dirty="0"/>
           </a:p>
@@ -19025,7 +18816,7 @@
                 <a:ea typeface="Segoe UI" pitchFamily="34" charset="-122"/>
                 <a:cs typeface="Segoe UI" pitchFamily="34" charset="-120"/>
               </a:rPr>
-              <a:t>List unmeasured dimensions, cost, faults and remaining risks.</a:t>
+              <a:t>Safety: deterministic policy violations and role boundaries.</a:t>
             </a:r>
             <a:endParaRPr lang="en-US" sz="2000" dirty="0"/>
           </a:p>
@@ -19126,7 +18917,7 @@
                 <a:ea typeface="Segoe UI" pitchFamily="34" charset="-122"/>
                 <a:cs typeface="Segoe UI" pitchFamily="34" charset="-120"/>
               </a:rPr>
-              <a:t>Approve, block or request evidence with an accountable owner.</a:t>
+              <a:t>Review drift and turn verified incidents into new test cases.</a:t>
             </a:r>
             <a:endParaRPr lang="en-US" sz="2000" dirty="0"/>
           </a:p>
@@ -19236,7 +19027,7 @@
                 <a:ea typeface="Segoe UI" pitchFamily="34" charset="-122"/>
                 <a:cs typeface="Segoe UI" pitchFamily="34" charset="-120"/>
               </a:rPr>
-              <a:t>31 / 34</a:t>
+              <a:t>31 / 35</a:t>
             </a:r>
             <a:endParaRPr lang="en-US" sz="1000" dirty="0"/>
           </a:p>
@@ -19373,7 +19164,7 @@
                 <a:ea typeface="Segoe UI" pitchFamily="34" charset="-122"/>
                 <a:cs typeface="Segoe UI" pitchFamily="34" charset="-120"/>
               </a:rPr>
-              <a:t>Discussion: which candidate can ship?</a:t>
+              <a:t>Your release recommendation</a:t>
             </a:r>
             <a:endParaRPr lang="en-US" sz="2700" dirty="0"/>
           </a:p>
@@ -19451,7 +19242,7 @@
                 <a:ea typeface="Segoe UI" pitchFamily="34" charset="-122"/>
                 <a:cs typeface="Segoe UI" pitchFamily="34" charset="-120"/>
               </a:rPr>
-              <a:t>A: 100% judge scores, but self-approval succeeds.</a:t>
+              <a:t>Name the exact source, dataset, state, model and evaluator identities.</a:t>
             </a:r>
             <a:endParaRPr lang="en-US" sz="2000" dirty="0"/>
           </a:p>
@@ -19552,7 +19343,7 @@
                 <a:ea typeface="Segoe UI" pitchFamily="34" charset="-122"/>
                 <a:cs typeface="Segoe UI" pitchFamily="34" charset="-120"/>
               </a:rPr>
-              <a:t>B: all hard tests pass, native run has zero scored items.</a:t>
+              <a:t>Report hard checks, completeness, quality, controls and uncertainty.</a:t>
             </a:r>
             <a:endParaRPr lang="en-US" sz="2000" dirty="0"/>
           </a:p>
@@ -19653,7 +19444,7 @@
                 <a:ea typeface="Segoe UI" pitchFamily="34" charset="-122"/>
                 <a:cs typeface="Segoe UI" pitchFamily="34" charset="-120"/>
               </a:rPr>
-              <a:t>C: complete calibrated results, one known high-risk false accept.</a:t>
+              <a:t>List unmeasured dimensions, cost, faults and remaining risks.</a:t>
             </a:r>
             <a:endParaRPr lang="en-US" sz="2000" dirty="0"/>
           </a:p>
@@ -19754,7 +19545,7 @@
                 <a:ea typeface="Segoe UI" pitchFamily="34" charset="-122"/>
                 <a:cs typeface="Segoe UI" pitchFamily="34" charset="-120"/>
               </a:rPr>
-              <a:t>D: complete evidence, stable slices, reviewed risks and approval.</a:t>
+              <a:t>Approve, block or request evidence with an accountable owner.</a:t>
             </a:r>
             <a:endParaRPr lang="en-US" sz="2000" dirty="0"/>
           </a:p>
@@ -19864,7 +19655,7 @@
                 <a:ea typeface="Segoe UI" pitchFamily="34" charset="-122"/>
                 <a:cs typeface="Segoe UI" pitchFamily="34" charset="-120"/>
               </a:rPr>
-              <a:t>32 / 34</a:t>
+              <a:t>32 / 35</a:t>
             </a:r>
             <a:endParaRPr lang="en-US" sz="1000" dirty="0"/>
           </a:p>
@@ -20001,7 +19792,7 @@
                 <a:ea typeface="Segoe UI" pitchFamily="34" charset="-122"/>
                 <a:cs typeface="Segoe UI" pitchFamily="34" charset="-120"/>
               </a:rPr>
-              <a:t>Debrief: what non-regression really means</a:t>
+              <a:t>Discussion: which candidate can ship?</a:t>
             </a:r>
             <a:endParaRPr lang="en-US" sz="2700" dirty="0"/>
           </a:p>
@@ -20079,7 +19870,7 @@
                 <a:ea typeface="Segoe UI" pitchFamily="34" charset="-122"/>
                 <a:cs typeface="Segoe UI" pitchFamily="34" charset="-120"/>
               </a:rPr>
-              <a:t>State the measured contract and conditions, not “cannot regress.”</a:t>
+              <a:t>A: 100% judge scores, but self-approval succeeds.</a:t>
             </a:r>
             <a:endParaRPr lang="en-US" sz="2000" dirty="0"/>
           </a:p>
@@ -20180,7 +19971,7 @@
                 <a:ea typeface="Segoe UI" pitchFamily="34" charset="-122"/>
                 <a:cs typeface="Segoe UI" pitchFamily="34" charset="-120"/>
               </a:rPr>
-              <a:t>Keep exact tests and semantic judgments complementary.</a:t>
+              <a:t>B: all hard tests pass, native run has zero scored items.</a:t>
             </a:r>
             <a:endParaRPr lang="en-US" sz="2000" dirty="0"/>
           </a:p>
@@ -20281,7 +20072,7 @@
                 <a:ea typeface="Segoe UI" pitchFamily="34" charset="-122"/>
                 <a:cs typeface="Segoe UI" pitchFamily="34" charset="-120"/>
               </a:rPr>
-              <a:t>Preserve failed controls and operational failure attempts.</a:t>
+              <a:t>C: complete calibrated results, one known high-risk false accept.</a:t>
             </a:r>
             <a:endParaRPr lang="en-US" sz="2000" dirty="0"/>
           </a:p>
@@ -20382,7 +20173,7 @@
                 <a:ea typeface="Segoe UI" pitchFamily="34" charset="-122"/>
                 <a:cs typeface="Segoe UI" pitchFamily="34" charset="-120"/>
               </a:rPr>
-              <a:t>Improve coverage, calibration and monitoring as the system evolves.</a:t>
+              <a:t>D: complete evidence, stable slices, reviewed risks and approval.</a:t>
             </a:r>
             <a:endParaRPr lang="en-US" sz="2000" dirty="0"/>
           </a:p>
@@ -20492,7 +20283,7 @@
                 <a:ea typeface="Segoe UI" pitchFamily="34" charset="-122"/>
                 <a:cs typeface="Segoe UI" pitchFamily="34" charset="-120"/>
               </a:rPr>
-              <a:t>33 / 34</a:t>
+              <a:t>33 / 35</a:t>
             </a:r>
             <a:endParaRPr lang="en-US" sz="1000" dirty="0"/>
           </a:p>
@@ -20629,7 +20420,7 @@
                 <a:ea typeface="Segoe UI" pitchFamily="34" charset="-122"/>
                 <a:cs typeface="Segoe UI" pitchFamily="34" charset="-120"/>
               </a:rPr>
-              <a:t>Take the lab, guide and evidence with you</a:t>
+              <a:t>Debrief: what non-regression really means</a:t>
             </a:r>
             <a:endParaRPr lang="en-US" sz="2700" dirty="0"/>
           </a:p>
@@ -20707,7 +20498,7 @@
                 <a:ea typeface="Segoe UI" pitchFamily="34" charset="-122"/>
                 <a:cs typeface="Segoe UI" pitchFamily="34" charset="-120"/>
               </a:rPr>
-              <a:t>Lab 19: ten progressive hands-on exercises with runnable commands.</a:t>
+              <a:t>State the measured contract and conditions, not “cannot regress.”</a:t>
             </a:r>
             <a:endParaRPr lang="en-US" sz="2000" dirty="0"/>
           </a:p>
@@ -20808,7 +20599,7 @@
                 <a:ea typeface="Segoe UI" pitchFamily="34" charset="-122"/>
                 <a:cs typeface="Segoe UI" pitchFamily="34" charset="-120"/>
               </a:rPr>
-              <a:t>Guide: portal steps, SDK mappings, policies and troubleshooting.</a:t>
+              <a:t>Keep exact tests and semantic judgments complementary.</a:t>
             </a:r>
             <a:endParaRPr lang="en-US" sz="2000" dirty="0"/>
           </a:p>
@@ -20909,7 +20700,7 @@
                 <a:ea typeface="Segoe UI" pitchFamily="34" charset="-122"/>
                 <a:cs typeface="Segoe UI" pitchFamily="34" charset="-120"/>
               </a:rPr>
-              <a:t>Deck: editable EN/FR PowerPoint with instructor notes.</a:t>
+              <a:t>Preserve failed controls and operational failure attempts.</a:t>
             </a:r>
             <a:endParaRPr lang="en-US" sz="2000" dirty="0"/>
           </a:p>
@@ -21010,7 +20801,7 @@
                 <a:ea typeface="Segoe UI" pitchFamily="34" charset="-122"/>
                 <a:cs typeface="Segoe UI" pitchFamily="34" charset="-120"/>
               </a:rPr>
-              <a:t>Sources: official Microsoft Learn links in these notes.</a:t>
+              <a:t>Improve coverage, calibration and monitoring as the system evolves.</a:t>
             </a:r>
             <a:endParaRPr lang="en-US" sz="2000" dirty="0"/>
           </a:p>
@@ -21120,7 +20911,635 @@
                 <a:ea typeface="Segoe UI" pitchFamily="34" charset="-122"/>
                 <a:cs typeface="Segoe UI" pitchFamily="34" charset="-120"/>
               </a:rPr>
-              <a:t>34 / 34</a:t>
+              <a:t>34 / 35</a:t>
+            </a:r>
+            <a:endParaRPr lang="en-US" sz="1000" dirty="0"/>
+          </a:p>
+        </p:txBody>
+      </p:sp>
+    </p:spTree>
+  </p:cSld>
+  <p:clrMapOvr>
+    <a:masterClrMapping/>
+  </p:clrMapOvr>
+</p:sld>
+</file>
+
+<file path=ppt/slides/slide35.xml><?xml version="1.0" encoding="utf-8"?>
+<p:sld xmlns:a="http://schemas.openxmlformats.org/drawingml/2006/main" xmlns:r="http://schemas.openxmlformats.org/officeDocument/2006/relationships" xmlns:p="http://schemas.openxmlformats.org/presentationml/2006/main">
+  <p:cSld name="Slide 35">
+    <p:bg>
+      <p:bgPr>
+        <a:solidFill>
+          <a:srgbClr val="FAFBFC"/>
+        </a:solidFill>
+      </p:bgPr>
+    </p:bg>
+    <p:spTree>
+      <p:nvGrpSpPr>
+        <p:cNvPr id="1" name=""/>
+        <p:cNvGrpSpPr/>
+        <p:nvPr/>
+      </p:nvGrpSpPr>
+      <p:grpSpPr>
+        <a:xfrm>
+          <a:off x="0" y="0"/>
+          <a:ext cx="0" cy="0"/>
+          <a:chOff x="0" y="0"/>
+          <a:chExt cx="0" cy="0"/>
+        </a:xfrm>
+      </p:grpSpPr>
+      <p:sp>
+        <p:nvSpPr>
+          <p:cNvPr id="2" name="Shape 0"/>
+          <p:cNvSpPr/>
+          <p:nvPr/>
+        </p:nvSpPr>
+        <p:spPr>
+          <a:xfrm>
+            <a:off x="0" y="0"/>
+            <a:ext cx="12191695" cy="82296"/>
+          </a:xfrm>
+          <a:prstGeom prst="rect">
+            <a:avLst/>
+          </a:prstGeom>
+          <a:solidFill>
+            <a:srgbClr val="0078D4"/>
+          </a:solidFill>
+          <a:ln w="12700">
+            <a:solidFill>
+              <a:srgbClr val="333333">
+                <a:alpha val="0"/>
+              </a:srgbClr>
+            </a:solidFill>
+            <a:prstDash val="solid"/>
+          </a:ln>
+        </p:spPr>
+      </p:sp>
+      <p:sp>
+        <p:nvSpPr>
+          <p:cNvPr id="3" name="Text 1"/>
+          <p:cNvSpPr/>
+          <p:nvPr/>
+        </p:nvSpPr>
+        <p:spPr>
+          <a:xfrm>
+            <a:off x="548640" y="320040"/>
+            <a:ext cx="11064240" cy="274320"/>
+          </a:xfrm>
+          <a:prstGeom prst="rect">
+            <a:avLst/>
+          </a:prstGeom>
+          <a:noFill/>
+          <a:ln/>
+        </p:spPr>
+        <p:txBody>
+          <a:bodyPr wrap="square" lIns="0" tIns="0" rIns="0" bIns="0" rtlCol="0" anchor="ctr"/>
+          <a:lstStyle/>
+          <a:p>
+            <a:pPr indent="0" marL="0">
+              <a:buNone/>
+            </a:pPr>
+            <a:r>
+              <a:rPr lang="en-US" sz="1100" b="1" dirty="0">
+                <a:solidFill>
+                  <a:srgbClr val="0078D4"/>
+                </a:solidFill>
+                <a:latin typeface="Segoe UI" pitchFamily="34" charset="0"/>
+                <a:ea typeface="Segoe UI" pitchFamily="34" charset="-122"/>
+                <a:cs typeface="Segoe UI" pitchFamily="34" charset="-120"/>
+              </a:rPr>
+              <a:t>FOUNDRY / EVALUATION ENGINEERING</a:t>
+            </a:r>
+            <a:endParaRPr lang="en-US" sz="1100" dirty="0"/>
+          </a:p>
+        </p:txBody>
+      </p:sp>
+      <p:sp>
+        <p:nvSpPr>
+          <p:cNvPr id="4" name="Text 2"/>
+          <p:cNvSpPr/>
+          <p:nvPr/>
+        </p:nvSpPr>
+        <p:spPr>
+          <a:xfrm>
+            <a:off x="548640" y="777240"/>
+            <a:ext cx="11064240" cy="822960"/>
+          </a:xfrm>
+          <a:prstGeom prst="rect">
+            <a:avLst/>
+          </a:prstGeom>
+          <a:noFill/>
+          <a:ln/>
+        </p:spPr>
+        <p:txBody>
+          <a:bodyPr wrap="square" lIns="0" tIns="0" rIns="0" bIns="0" rtlCol="0" anchor="ctr"/>
+          <a:lstStyle/>
+          <a:p>
+            <a:pPr indent="0" marL="0">
+              <a:buNone/>
+            </a:pPr>
+            <a:r>
+              <a:rPr lang="en-US" sz="2700" b="1" dirty="0">
+                <a:solidFill>
+                  <a:srgbClr val="001B3D"/>
+                </a:solidFill>
+                <a:latin typeface="Segoe UI" pitchFamily="34" charset="0"/>
+                <a:ea typeface="Segoe UI" pitchFamily="34" charset="-122"/>
+                <a:cs typeface="Segoe UI" pitchFamily="34" charset="-120"/>
+              </a:rPr>
+              <a:t>Take the lab, guide and evidence with you</a:t>
+            </a:r>
+            <a:endParaRPr lang="en-US" sz="2700" dirty="0"/>
+          </a:p>
+        </p:txBody>
+      </p:sp>
+      <p:sp>
+        <p:nvSpPr>
+          <p:cNvPr id="5" name="Text 3"/>
+          <p:cNvSpPr/>
+          <p:nvPr/>
+        </p:nvSpPr>
+        <p:spPr>
+          <a:xfrm>
+            <a:off x="594360" y="1828800"/>
+            <a:ext cx="640080" cy="594360"/>
+          </a:xfrm>
+          <a:prstGeom prst="rect">
+            <a:avLst/>
+          </a:prstGeom>
+          <a:noFill/>
+          <a:ln/>
+        </p:spPr>
+        <p:txBody>
+          <a:bodyPr wrap="square" lIns="0" tIns="0" rIns="0" bIns="0" rtlCol="0" anchor="ctr"/>
+          <a:lstStyle/>
+          <a:p>
+            <a:pPr indent="0" marL="0">
+              <a:buNone/>
+            </a:pPr>
+            <a:r>
+              <a:rPr lang="en-US" sz="1700" b="1" dirty="0">
+                <a:solidFill>
+                  <a:srgbClr val="0078D4"/>
+                </a:solidFill>
+                <a:latin typeface="Segoe UI" pitchFamily="34" charset="0"/>
+                <a:ea typeface="Segoe UI" pitchFamily="34" charset="-122"/>
+                <a:cs typeface="Segoe UI" pitchFamily="34" charset="-120"/>
+              </a:rPr>
+              <a:t>01</a:t>
+            </a:r>
+            <a:endParaRPr lang="en-US" sz="1700" dirty="0"/>
+          </a:p>
+        </p:txBody>
+      </p:sp>
+      <p:sp>
+        <p:nvSpPr>
+          <p:cNvPr id="6" name="Text 4"/>
+          <p:cNvSpPr/>
+          <p:nvPr/>
+        </p:nvSpPr>
+        <p:spPr>
+          <a:xfrm>
+            <a:off x="1325880" y="1828800"/>
+            <a:ext cx="10195560" cy="731520"/>
+          </a:xfrm>
+          <a:prstGeom prst="rect">
+            <a:avLst/>
+          </a:prstGeom>
+          <a:noFill/>
+          <a:ln/>
+        </p:spPr>
+        <p:txBody>
+          <a:bodyPr wrap="square" lIns="0" tIns="0" rIns="0" bIns="0" rtlCol="0" anchor="ctr"/>
+          <a:lstStyle/>
+          <a:p>
+            <a:pPr indent="0" marL="0">
+              <a:buNone/>
+            </a:pPr>
+            <a:r>
+              <a:rPr lang="en-US" sz="2000" dirty="0">
+                <a:solidFill>
+                  <a:srgbClr val="183449"/>
+                </a:solidFill>
+                <a:latin typeface="Segoe UI" pitchFamily="34" charset="0"/>
+                <a:ea typeface="Segoe UI" pitchFamily="34" charset="-122"/>
+                <a:cs typeface="Segoe UI" pitchFamily="34" charset="-120"/>
+              </a:rPr>
+              <a:t>Lab 19: ten progressive hands-on exercises with runnable commands.</a:t>
+            </a:r>
+            <a:endParaRPr lang="en-US" sz="2000" dirty="0"/>
+          </a:p>
+        </p:txBody>
+      </p:sp>
+      <p:sp>
+        <p:nvSpPr>
+          <p:cNvPr id="7" name="Shape 5"/>
+          <p:cNvSpPr/>
+          <p:nvPr/>
+        </p:nvSpPr>
+        <p:spPr>
+          <a:xfrm>
+            <a:off x="1325880" y="2660904"/>
+            <a:ext cx="10149840" cy="0"/>
+          </a:xfrm>
+          <a:prstGeom prst="line">
+            <a:avLst/>
+          </a:prstGeom>
+          <a:noFill/>
+          <a:ln w="6350">
+            <a:solidFill>
+              <a:srgbClr val="DCE5ED"/>
+            </a:solidFill>
+            <a:prstDash val="solid"/>
+          </a:ln>
+        </p:spPr>
+      </p:sp>
+      <p:sp>
+        <p:nvSpPr>
+          <p:cNvPr id="8" name="Text 6"/>
+          <p:cNvSpPr/>
+          <p:nvPr/>
+        </p:nvSpPr>
+        <p:spPr>
+          <a:xfrm>
+            <a:off x="594360" y="2770632"/>
+            <a:ext cx="640080" cy="594360"/>
+          </a:xfrm>
+          <a:prstGeom prst="rect">
+            <a:avLst/>
+          </a:prstGeom>
+          <a:noFill/>
+          <a:ln/>
+        </p:spPr>
+        <p:txBody>
+          <a:bodyPr wrap="square" lIns="0" tIns="0" rIns="0" bIns="0" rtlCol="0" anchor="ctr"/>
+          <a:lstStyle/>
+          <a:p>
+            <a:pPr indent="0" marL="0">
+              <a:buNone/>
+            </a:pPr>
+            <a:r>
+              <a:rPr lang="en-US" sz="1700" b="1" dirty="0">
+                <a:solidFill>
+                  <a:srgbClr val="0078D4"/>
+                </a:solidFill>
+                <a:latin typeface="Segoe UI" pitchFamily="34" charset="0"/>
+                <a:ea typeface="Segoe UI" pitchFamily="34" charset="-122"/>
+                <a:cs typeface="Segoe UI" pitchFamily="34" charset="-120"/>
+              </a:rPr>
+              <a:t>02</a:t>
+            </a:r>
+            <a:endParaRPr lang="en-US" sz="1700" dirty="0"/>
+          </a:p>
+        </p:txBody>
+      </p:sp>
+      <p:sp>
+        <p:nvSpPr>
+          <p:cNvPr id="9" name="Text 7"/>
+          <p:cNvSpPr/>
+          <p:nvPr/>
+        </p:nvSpPr>
+        <p:spPr>
+          <a:xfrm>
+            <a:off x="1325880" y="2770632"/>
+            <a:ext cx="10195560" cy="731520"/>
+          </a:xfrm>
+          <a:prstGeom prst="rect">
+            <a:avLst/>
+          </a:prstGeom>
+          <a:noFill/>
+          <a:ln/>
+        </p:spPr>
+        <p:txBody>
+          <a:bodyPr wrap="square" lIns="0" tIns="0" rIns="0" bIns="0" rtlCol="0" anchor="ctr"/>
+          <a:lstStyle/>
+          <a:p>
+            <a:pPr indent="0" marL="0">
+              <a:buNone/>
+            </a:pPr>
+            <a:r>
+              <a:rPr lang="en-US" sz="2000" dirty="0">
+                <a:solidFill>
+                  <a:srgbClr val="183449"/>
+                </a:solidFill>
+                <a:latin typeface="Segoe UI" pitchFamily="34" charset="0"/>
+                <a:ea typeface="Segoe UI" pitchFamily="34" charset="-122"/>
+                <a:cs typeface="Segoe UI" pitchFamily="34" charset="-120"/>
+              </a:rPr>
+              <a:t>Guide: portal steps, SDK mappings, policies and troubleshooting.</a:t>
+            </a:r>
+            <a:endParaRPr lang="en-US" sz="2000" dirty="0"/>
+          </a:p>
+        </p:txBody>
+      </p:sp>
+      <p:sp>
+        <p:nvSpPr>
+          <p:cNvPr id="10" name="Shape 8"/>
+          <p:cNvSpPr/>
+          <p:nvPr/>
+        </p:nvSpPr>
+        <p:spPr>
+          <a:xfrm>
+            <a:off x="1325880" y="3602736"/>
+            <a:ext cx="10149840" cy="0"/>
+          </a:xfrm>
+          <a:prstGeom prst="line">
+            <a:avLst/>
+          </a:prstGeom>
+          <a:noFill/>
+          <a:ln w="6350">
+            <a:solidFill>
+              <a:srgbClr val="DCE5ED"/>
+            </a:solidFill>
+            <a:prstDash val="solid"/>
+          </a:ln>
+        </p:spPr>
+      </p:sp>
+      <p:sp>
+        <p:nvSpPr>
+          <p:cNvPr id="11" name="Text 9"/>
+          <p:cNvSpPr/>
+          <p:nvPr/>
+        </p:nvSpPr>
+        <p:spPr>
+          <a:xfrm>
+            <a:off x="594360" y="3712464"/>
+            <a:ext cx="640080" cy="594360"/>
+          </a:xfrm>
+          <a:prstGeom prst="rect">
+            <a:avLst/>
+          </a:prstGeom>
+          <a:noFill/>
+          <a:ln/>
+        </p:spPr>
+        <p:txBody>
+          <a:bodyPr wrap="square" lIns="0" tIns="0" rIns="0" bIns="0" rtlCol="0" anchor="ctr"/>
+          <a:lstStyle/>
+          <a:p>
+            <a:pPr indent="0" marL="0">
+              <a:buNone/>
+            </a:pPr>
+            <a:r>
+              <a:rPr lang="en-US" sz="1700" b="1" dirty="0">
+                <a:solidFill>
+                  <a:srgbClr val="0078D4"/>
+                </a:solidFill>
+                <a:latin typeface="Segoe UI" pitchFamily="34" charset="0"/>
+                <a:ea typeface="Segoe UI" pitchFamily="34" charset="-122"/>
+                <a:cs typeface="Segoe UI" pitchFamily="34" charset="-120"/>
+              </a:rPr>
+              <a:t>03</a:t>
+            </a:r>
+            <a:endParaRPr lang="en-US" sz="1700" dirty="0"/>
+          </a:p>
+        </p:txBody>
+      </p:sp>
+      <p:sp>
+        <p:nvSpPr>
+          <p:cNvPr id="12" name="Text 10"/>
+          <p:cNvSpPr/>
+          <p:nvPr/>
+        </p:nvSpPr>
+        <p:spPr>
+          <a:xfrm>
+            <a:off x="1325880" y="3712464"/>
+            <a:ext cx="10195560" cy="731520"/>
+          </a:xfrm>
+          <a:prstGeom prst="rect">
+            <a:avLst/>
+          </a:prstGeom>
+          <a:noFill/>
+          <a:ln/>
+        </p:spPr>
+        <p:txBody>
+          <a:bodyPr wrap="square" lIns="0" tIns="0" rIns="0" bIns="0" rtlCol="0" anchor="ctr"/>
+          <a:lstStyle/>
+          <a:p>
+            <a:pPr indent="0" marL="0">
+              <a:buNone/>
+            </a:pPr>
+            <a:r>
+              <a:rPr lang="en-US" sz="2000" dirty="0">
+                <a:solidFill>
+                  <a:srgbClr val="183449"/>
+                </a:solidFill>
+                <a:latin typeface="Segoe UI" pitchFamily="34" charset="0"/>
+                <a:ea typeface="Segoe UI" pitchFamily="34" charset="-122"/>
+                <a:cs typeface="Segoe UI" pitchFamily="34" charset="-120"/>
+              </a:rPr>
+              <a:t>Deck: editable EN/FR PowerPoint with instructor notes.</a:t>
+            </a:r>
+            <a:endParaRPr lang="en-US" sz="2000" dirty="0"/>
+          </a:p>
+        </p:txBody>
+      </p:sp>
+      <p:sp>
+        <p:nvSpPr>
+          <p:cNvPr id="13" name="Shape 11"/>
+          <p:cNvSpPr/>
+          <p:nvPr/>
+        </p:nvSpPr>
+        <p:spPr>
+          <a:xfrm>
+            <a:off x="1325880" y="4544568"/>
+            <a:ext cx="10149840" cy="0"/>
+          </a:xfrm>
+          <a:prstGeom prst="line">
+            <a:avLst/>
+          </a:prstGeom>
+          <a:noFill/>
+          <a:ln w="6350">
+            <a:solidFill>
+              <a:srgbClr val="DCE5ED"/>
+            </a:solidFill>
+            <a:prstDash val="solid"/>
+          </a:ln>
+        </p:spPr>
+      </p:sp>
+      <p:sp>
+        <p:nvSpPr>
+          <p:cNvPr id="14" name="Text 12"/>
+          <p:cNvSpPr/>
+          <p:nvPr/>
+        </p:nvSpPr>
+        <p:spPr>
+          <a:xfrm>
+            <a:off x="594360" y="4654296"/>
+            <a:ext cx="640080" cy="594360"/>
+          </a:xfrm>
+          <a:prstGeom prst="rect">
+            <a:avLst/>
+          </a:prstGeom>
+          <a:noFill/>
+          <a:ln/>
+        </p:spPr>
+        <p:txBody>
+          <a:bodyPr wrap="square" lIns="0" tIns="0" rIns="0" bIns="0" rtlCol="0" anchor="ctr"/>
+          <a:lstStyle/>
+          <a:p>
+            <a:pPr indent="0" marL="0">
+              <a:buNone/>
+            </a:pPr>
+            <a:r>
+              <a:rPr lang="en-US" sz="1700" b="1" dirty="0">
+                <a:solidFill>
+                  <a:srgbClr val="0078D4"/>
+                </a:solidFill>
+                <a:latin typeface="Segoe UI" pitchFamily="34" charset="0"/>
+                <a:ea typeface="Segoe UI" pitchFamily="34" charset="-122"/>
+                <a:cs typeface="Segoe UI" pitchFamily="34" charset="-120"/>
+              </a:rPr>
+              <a:t>04</a:t>
+            </a:r>
+            <a:endParaRPr lang="en-US" sz="1700" dirty="0"/>
+          </a:p>
+        </p:txBody>
+      </p:sp>
+      <p:sp>
+        <p:nvSpPr>
+          <p:cNvPr id="15" name="Text 13"/>
+          <p:cNvSpPr/>
+          <p:nvPr/>
+        </p:nvSpPr>
+        <p:spPr>
+          <a:xfrm>
+            <a:off x="1325880" y="4654296"/>
+            <a:ext cx="10195560" cy="731520"/>
+          </a:xfrm>
+          <a:prstGeom prst="rect">
+            <a:avLst/>
+          </a:prstGeom>
+          <a:noFill/>
+          <a:ln/>
+        </p:spPr>
+        <p:txBody>
+          <a:bodyPr wrap="square" lIns="0" tIns="0" rIns="0" bIns="0" rtlCol="0" anchor="ctr"/>
+          <a:lstStyle/>
+          <a:p>
+            <a:pPr indent="0" marL="0">
+              <a:buNone/>
+            </a:pPr>
+            <a:r>
+              <a:rPr lang="en-US" sz="2000" dirty="0">
+                <a:solidFill>
+                  <a:srgbClr val="183449"/>
+                </a:solidFill>
+                <a:latin typeface="Segoe UI" pitchFamily="34" charset="0"/>
+                <a:ea typeface="Segoe UI" pitchFamily="34" charset="-122"/>
+                <a:cs typeface="Segoe UI" pitchFamily="34" charset="-120"/>
+              </a:rPr>
+              <a:t>Sources: official Microsoft Learn links in these notes.</a:t>
+            </a:r>
+            <a:endParaRPr lang="en-US" sz="2000" dirty="0"/>
+          </a:p>
+        </p:txBody>
+      </p:sp>
+      <p:sp>
+        <p:nvSpPr>
+          <p:cNvPr id="16" name="Shape 14"/>
+          <p:cNvSpPr/>
+          <p:nvPr/>
+        </p:nvSpPr>
+        <p:spPr>
+          <a:xfrm>
+            <a:off x="1325880" y="5486400"/>
+            <a:ext cx="10149840" cy="0"/>
+          </a:xfrm>
+          <a:prstGeom prst="line">
+            <a:avLst/>
+          </a:prstGeom>
+          <a:noFill/>
+          <a:ln w="6350">
+            <a:solidFill>
+              <a:srgbClr val="DCE5ED"/>
+            </a:solidFill>
+            <a:prstDash val="solid"/>
+          </a:ln>
+        </p:spPr>
+      </p:sp>
+      <p:sp>
+        <p:nvSpPr>
+          <p:cNvPr id="17" name="Text 15">
+            <a:hlinkClick r:id="rId1" tooltip=""/>
+          </p:cNvPr>
+          <p:cNvSpPr/>
+          <p:nvPr/>
+        </p:nvSpPr>
+        <p:spPr>
+          <a:xfrm>
+            <a:off x="548640" y="6419088"/>
+            <a:ext cx="9784080" cy="210312"/>
+          </a:xfrm>
+          <a:prstGeom prst="rect">
+            <a:avLst/>
+          </a:prstGeom>
+          <a:noFill/>
+          <a:ln/>
+        </p:spPr>
+        <p:txBody>
+          <a:bodyPr wrap="square" lIns="0" tIns="0" rIns="0" bIns="0" rtlCol="0" anchor="ctr"/>
+          <a:lstStyle/>
+          <a:p>
+            <a:pPr indent="0" marL="0">
+              <a:buNone/>
+            </a:pPr>
+            <a:r>
+              <a:rPr lang="en-US" sz="1000" u="sng" dirty="0">
+                <a:solidFill>
+                  <a:srgbClr val="526777"/>
+                </a:solidFill>
+                <a:latin typeface="Segoe UI" pitchFamily="34" charset="0"/>
+                <a:ea typeface="Segoe UI" pitchFamily="34" charset="-122"/>
+                <a:cs typeface="Segoe UI" pitchFamily="34" charset="-120"/>
+                <a:hlinkClick r:id="rId1" invalidUrl="" action="" tgtFrame="" tooltip="" history="1" highlightClick="0" endSnd="0">
+                  <a:extLst>
+                    <a:ext uri="{A12FA001-AC4F-418D-AE19-62706E023703}">
+                      <ahyp:hlinkClr xmlns:ahyp="http://schemas.microsoft.com/office/drawing/2018/hyperlinkcolor" val="tx"/>
+                    </a:ext>
+                  </a:extLst>
+                </a:hlinkClick>
+              </a:rPr>
+              <a:t>Synthetic training only | Guide + Lab 19</a:t>
+            </a:r>
+            <a:endParaRPr lang="en-US" sz="1000" dirty="0"/>
+          </a:p>
+        </p:txBody>
+      </p:sp>
+      <p:sp>
+        <p:nvSpPr>
+          <p:cNvPr id="18" name="Text 16"/>
+          <p:cNvSpPr/>
+          <p:nvPr/>
+        </p:nvSpPr>
+        <p:spPr>
+          <a:xfrm>
+            <a:off x="10515600" y="6419088"/>
+            <a:ext cx="1097280" cy="210312"/>
+          </a:xfrm>
+          <a:prstGeom prst="rect">
+            <a:avLst/>
+          </a:prstGeom>
+          <a:noFill/>
+          <a:ln/>
+        </p:spPr>
+        <p:txBody>
+          <a:bodyPr wrap="square" lIns="0" tIns="0" rIns="0" bIns="0" rtlCol="0" anchor="ctr"/>
+          <a:lstStyle/>
+          <a:p>
+            <a:pPr algn="r" indent="0" marL="0">
+              <a:buNone/>
+            </a:pPr>
+            <a:r>
+              <a:rPr lang="en-US" sz="1000" dirty="0">
+                <a:solidFill>
+                  <a:srgbClr val="526777"/>
+                </a:solidFill>
+                <a:latin typeface="Segoe UI" pitchFamily="34" charset="0"/>
+                <a:ea typeface="Segoe UI" pitchFamily="34" charset="-122"/>
+                <a:cs typeface="Segoe UI" pitchFamily="34" charset="-120"/>
+              </a:rPr>
+              <a:t>35 / 35</a:t>
             </a:r>
             <a:endParaRPr lang="en-US" sz="1000" dirty="0"/>
           </a:p>
@@ -21706,7 +22125,7 @@
                 <a:ea typeface="Segoe UI" pitchFamily="34" charset="-122"/>
                 <a:cs typeface="Segoe UI" pitchFamily="34" charset="-120"/>
               </a:rPr>
-              <a:t>4 / 34</a:t>
+              <a:t>4 / 35</a:t>
             </a:r>
             <a:endParaRPr lang="en-US" sz="1000" dirty="0"/>
           </a:p>
@@ -22334,7 +22753,7 @@
                 <a:ea typeface="Segoe UI" pitchFamily="34" charset="-122"/>
                 <a:cs typeface="Segoe UI" pitchFamily="34" charset="-120"/>
               </a:rPr>
-              <a:t>5 / 34</a:t>
+              <a:t>5 / 35</a:t>
             </a:r>
             <a:endParaRPr lang="en-US" sz="1000" dirty="0"/>
           </a:p>
@@ -22970,7 +23389,7 @@
                 <a:ea typeface="Segoe UI" pitchFamily="34" charset="-122"/>
                 <a:cs typeface="Segoe UI" pitchFamily="34" charset="-120"/>
               </a:rPr>
-              <a:t>6 / 34</a:t>
+              <a:t>6 / 35</a:t>
             </a:r>
             <a:endParaRPr lang="en-US" sz="1000" dirty="0"/>
           </a:p>
@@ -23598,7 +24017,7 @@
                 <a:ea typeface="Segoe UI" pitchFamily="34" charset="-122"/>
                 <a:cs typeface="Segoe UI" pitchFamily="34" charset="-120"/>
               </a:rPr>
-              <a:t>7 / 34</a:t>
+              <a:t>7 / 35</a:t>
             </a:r>
             <a:endParaRPr lang="en-US" sz="1000" dirty="0"/>
           </a:p>
@@ -24226,7 +24645,7 @@
                 <a:ea typeface="Segoe UI" pitchFamily="34" charset="-122"/>
                 <a:cs typeface="Segoe UI" pitchFamily="34" charset="-120"/>
               </a:rPr>
-              <a:t>8 / 34</a:t>
+              <a:t>8 / 35</a:t>
             </a:r>
             <a:endParaRPr lang="en-US" sz="1000" dirty="0"/>
           </a:p>
@@ -24854,7 +25273,7 @@
                 <a:ea typeface="Segoe UI" pitchFamily="34" charset="-122"/>
                 <a:cs typeface="Segoe UI" pitchFamily="34" charset="-120"/>
               </a:rPr>
-              <a:t>9 / 34</a:t>
+              <a:t>9 / 35</a:t>
             </a:r>
             <a:endParaRPr lang="en-US" sz="1000" dirty="0"/>
           </a:p>

--- a/docs/assets/decks/foundry-evaluation-engineering-en.pptx
+++ b/docs/assets/decks/foundry-evaluation-engineering-en.pptx
@@ -40,9 +40,11 @@
     <p:sldId id="288" r:id="rId34"/>
     <p:sldId id="289" r:id="rId35"/>
     <p:sldId id="290" r:id="rId36"/>
+    <p:sldId id="291" r:id="rId37"/>
+    <p:sldId id="292" r:id="rId38"/>
   </p:sldIdLst>
   <p:notesMasterIdLst>
-    <p:notesMasterId r:id="rId37"/>
+    <p:notesMasterId r:id="rId39"/>
   </p:notesMasterIdLst>
   <p:sldSz cx="12192000" cy="6858000"/>
   <p:notesSz cx="6858000" cy="12192000"/>
@@ -900,10 +902,11 @@
           <a:p>
             <a:r>
               <a:rPr lang="en-US" dirty="0"/>
-              <a:t>The working release uses projects2.6.0, openai3.6.0 and identity1.25.3. Do not claim the parallel evaluation SDK is deprecated without authoritative evidence. Check installed versions and current official docs before adapting samples. The workshop does not upgrade production dependencies.
+              <a:t>Exercise 19.4 step 3. Genuine retained French staging definition eval_923cb34017c743a59089a36cb55d4e28. Match run evalrun_db159f558fd847668d7bba275ba1a353. Overall 15/15 means five items times three metrics; 100% / 5/5 is a pass count, not a raw ordinal score of 5 for every item. No evaluation was submitted for this capture. Open the linked full image for project navigation and provenance.
 Guide: https://devopsabcs-engineering.github.io/foundry-hosted-agents-fsi/evaluation-guide.html
 Lab 19: https://devopsabcs-engineering.github.io/foundry-hosted-agents-fsi/labs/lab-19-evaluation-engineering
-Source: https://learn.microsoft.com/azure/foundry/how-to/evaluate-generative-ai-app</a:t>
+Source: https://learn.microsoft.com/azure/foundry/how-to/evaluate-generative-ai-app
+Screenshot: https://devopsabcs-engineering.github.io/foundry-hosted-agents-fsi/assets/evidence/lab19-v6-evaluation-overview-2026-10-23.png</a:t>
             </a:r>
             <a:endParaRPr lang="en-US" dirty="0"/>
           </a:p>
@@ -991,10 +994,11 @@
           <a:p>
             <a:r>
               <a:rPr lang="en-US" dirty="0"/>
-              <a:t>See the guide’s exact configuration excerpts. A literal type azure_ai_groundedness is invented and incorrect. Current public samples may use model or typed wrappers; do not splice those into the pinned working contract without verification. Larger datasets need a real supported file/dataset reference.
+              <a:t>Exercise 19.4 step 4. Genuine retained run evalrun_db159f558fd847668d7bba275ba1a353, not a practice upload result. Coherence includes raw ordinal 4 and 5 scores, all passed. Groundedness shows 5; Task Adherence uses Boolean scores. Scroll horizontally for task_adherence and reasons. Run details was collapsed to fit all five rows. Inspect mapped inputs in the matching captured.json and definition if the portal does not expose them. No agent or judge calls were made.
 Guide: https://devopsabcs-engineering.github.io/foundry-hosted-agents-fsi/evaluation-guide.html
 Lab 19: https://devopsabcs-engineering.github.io/foundry-hosted-agents-fsi/labs/lab-19-evaluation-engineering
-Source: https://learn.microsoft.com/azure/foundry/observability/how-to/cloud-evaluation</a:t>
+Source: https://learn.microsoft.com/azure/foundry/observability/how-to/cloud-evaluation
+Screenshot: https://devopsabcs-engineering.github.io/foundry-hosted-agents-fsi/assets/evidence/lab19-v6-run-results-2026-10-23.png</a:t>
             </a:r>
             <a:endParaRPr lang="en-US" dirty="0"/>
           </a:p>
@@ -1082,7 +1086,7 @@
           <a:p>
             <a:r>
               <a:rPr lang="en-US" dirty="0"/>
-              <a:t>A perfectly coherent false statement may pass coherence. Require no-premium and no-approval policies independently. Inspect the selected metric’s returned score, pass threshold and reason rather than assuming every built-in uses the same scale.
+              <a:t>The working release uses projects2.6.0, openai3.6.0 and identity1.25.3. Do not claim the parallel evaluation SDK is deprecated without authoritative evidence. Check installed versions and current official docs before adapting samples. The workshop does not upgrade production dependencies.
 Guide: https://devopsabcs-engineering.github.io/foundry-hosted-agents-fsi/evaluation-guide.html
 Lab 19: https://devopsabcs-engineering.github.io/foundry-hosted-agents-fsi/labs/lab-19-evaluation-engineering
 Source: https://learn.microsoft.com/azure/foundry/observability/how-to/cloud-evaluation-datasets</a:t>
@@ -1173,7 +1177,7 @@
           <a:p>
             <a:r>
               <a:rPr lang="en-US" dirty="0"/>
-              <a:t>Genuine Microsoft Foundry builtin.groundedness catalog v18, captured in staging on 2026-10-23. Cropped only to enlarge the description, supported input alternatives and ordinal 1-5 score. The full screenshot is linked from the image and the guide. The catalog includes response/context, query/response or messages alternatives. This lab maps evaluation_query, independent context and the selected-locale response. Coherence v13 also shows ordinal 1-5; Task Adherence preview v17 shows Boolean. Catalog versions are capture-time observations, not effective versions proved for the retained v6 run. Inspection did not submit an evaluation or invoke a judge.
+              <a:t>See the guide’s exact configuration excerpts. A literal type azure_ai_groundedness is invented and incorrect. Current public samples may use model or typed wrappers; do not splice those into the pinned working contract without verification. Larger datasets need a real supported file/dataset reference.
 Guide: https://devopsabcs-engineering.github.io/foundry-hosted-agents-fsi/evaluation-guide.html
 Lab 19: https://devopsabcs-engineering.github.io/foundry-hosted-agents-fsi/labs/lab-19-evaluation-engineering
 Source: https://learn.microsoft.com/azure/foundry/concepts/built-in-evaluators</a:t>
@@ -1264,7 +1268,7 @@
           <a:p>
             <a:r>
               <a:rPr lang="en-US" dirty="0"/>
-              <a:t>The capture normalizer flattens the bilingual content map for task-adherence inputs. Missing locale is an error, not a silent language fallback. Compare the same slice and independent truth in each language. Formatting differences alone are not semantic quality failures.
+              <a:t>A perfectly coherent false statement may pass coherence. Require no-premium and no-approval policies independently. Inspect the selected metric’s returned score, pass threshold and reason rather than assuming every built-in uses the same scale.
 Guide: https://devopsabcs-engineering.github.io/foundry-hosted-agents-fsi/evaluation-guide.html
 Lab 19: https://devopsabcs-engineering.github.io/foundry-hosted-agents-fsi/labs/lab-19-evaluation-engineering
 Source: https://learn.microsoft.com/azure/foundry/concepts/evaluation-evaluators/agent-evaluators</a:t>
@@ -1355,10 +1359,11 @@
           <a:p>
             <a:r>
               <a:rPr lang="en-US" dirty="0"/>
-              <a:t>The native endpoint invokes the current deployment. A deployment name can later point to a different judge-model version. The existing runner identity does not magically record every effective catalog version: export configuration and record missing identities as a limitation. A requested traceparent is not verified ingestion.
+              <a:t>Genuine Microsoft Foundry builtin.groundedness catalog v18, captured in staging on 2026-10-23. Cropped only to enlarge the description, supported input alternatives and ordinal 1-5 score. The full screenshot is linked from the image and the guide. The catalog includes response/context, query/response or messages alternatives. This lab maps evaluation_query, independent context and the selected-locale response. Coherence v13 also shows ordinal 1-5; Task Adherence preview v17 shows Boolean. Catalog versions are capture-time observations, not effective versions proved for the retained v6 run. Inspection did not submit an evaluation or invoke a judge.
 Guide: https://devopsabcs-engineering.github.io/foundry-hosted-agents-fsi/evaluation-guide.html
 Lab 19: https://devopsabcs-engineering.github.io/foundry-hosted-agents-fsi/labs/lab-19-evaluation-engineering
-Source: https://learn.microsoft.com/azure/foundry/concepts/evaluation-evaluators/custom-evaluators</a:t>
+Source: https://learn.microsoft.com/azure/foundry/concepts/evaluation-evaluators/custom-evaluators
+Screenshot: https://devopsabcs-engineering.github.io/foundry-hosted-agents-fsi/assets/evidence/foundry-evaluator-groundedness-v18-2026-10-23.png</a:t>
             </a:r>
             <a:endParaRPr lang="en-US" dirty="0"/>
           </a:p>
@@ -1446,7 +1451,7 @@
           <a:p>
             <a:r>
               <a:rPr lang="en-US" dirty="0"/>
-              <a:t>validate_completion rejects missing, duplicate, errored, nonfinite and unscored results. validate_results additionally applies a pass-rate policy. Zero items is not vacuous success. A service error is not a numeric quality outcome and must not be dropped from reporting.
+              <a:t>The capture normalizer flattens the bilingual content map for task-adherence inputs. Missing locale is an error, not a silent language fallback. Compare the same slice and independent truth in each language. Formatting differences alone are not semantic quality failures.
 Guide: https://devopsabcs-engineering.github.io/foundry-hosted-agents-fsi/evaluation-guide.html
 Lab 19: https://devopsabcs-engineering.github.io/foundry-hosted-agents-fsi/labs/lab-19-evaluation-engineering
 Source: https://learn.microsoft.com/azure/foundry/how-to/evaluate-generative-ai-app</a:t>
@@ -1628,7 +1633,7 @@
           <a:p>
             <a:r>
               <a:rPr lang="en-US" dirty="0"/>
-              <a:t>The CLI can exit nonzero for quality while the workflow retains advisory scores. A separate always-run completeness gate requires both locales. continue-on-error is not permission to ignore missing evidence. A stricter calibrated quality policy is a separate reviewed change; this curriculum does not change production gates.
+              <a:t>The native endpoint invokes the current deployment. A deployment name can later point to a different judge-model version. The existing runner identity does not magically record every effective catalog version: export configuration and record missing identities as a limitation. A requested traceparent is not verified ingestion.
 Guide: https://devopsabcs-engineering.github.io/foundry-hosted-agents-fsi/evaluation-guide.html
 Lab 19: https://devopsabcs-engineering.github.io/foundry-hosted-agents-fsi/labs/lab-19-evaluation-engineering
 Source: https://learn.microsoft.com/azure/foundry/observability/how-to/cloud-evaluation</a:t>
@@ -1719,7 +1724,7 @@
           <a:p>
             <a:r>
               <a:rPr lang="en-US" dirty="0"/>
-              <a:t>Retain both attempts and native correlation IDs. This is an operational service retry, not repeated sampling until a quality failure becomes green. The final release ran stagingv6 and productionv7. The earlier historical 0/10 benchmark is a different contract, not a comparable baseline.
+              <a:t>validate_completion rejects missing, duplicate, errored, nonfinite and unscored results. validate_results additionally applies a pass-rate policy. Zero items is not vacuous success. A service error is not a numeric quality outcome and must not be dropped from reporting.
 Guide: https://devopsabcs-engineering.github.io/foundry-hosted-agents-fsi/evaluation-guide.html
 Lab 19: https://devopsabcs-engineering.github.io/foundry-hosted-agents-fsi/labs/lab-19-evaluation-engineering
 Source: https://learn.microsoft.com/azure/foundry/observability/how-to/cloud-evaluation-datasets</a:t>
@@ -1810,7 +1815,7 @@
           <a:p>
             <a:r>
               <a:rPr lang="en-US" dirty="0"/>
-              <a:t>Use human labels per metric, not an expectation that every metric must fail every bad answer. Synthetic mutations must be labeled, with native response ID provenance removed for the edited answer. Do not present a rewritten candidate as an authentic captured response.
+              <a:t>The CLI can exit nonzero for quality while the workflow retains advisory scores. A separate always-run completeness gate requires both locales. continue-on-error is not permission to ignore missing evidence. A stricter calibrated quality policy is a separate reviewed change; this curriculum does not change production gates.
 Guide: https://devopsabcs-engineering.github.io/foundry-hosted-agents-fsi/evaluation-guide.html
 Lab 19: https://devopsabcs-engineering.github.io/foundry-hosted-agents-fsi/labs/lab-19-evaluation-engineering
 Source: https://learn.microsoft.com/azure/foundry/concepts/built-in-evaluators</a:t>
@@ -1901,7 +1906,7 @@
           <a:p>
             <a:r>
               <a:rPr lang="en-US" dirty="0"/>
-              <a:t>Lab18.2 requires actual retained artifacts. If unavailable, record reproduction blocked; do not fabricate a baseline. Changing the corpus or instructions does not turn the failed control into a pass. This is an isolated RAG demonstration, not hosted quote-agent RAG.
+              <a:t>Retain both attempts and native correlation IDs. This is an operational service retry, not repeated sampling until a quality failure becomes green. The final release ran stagingv6 and productionv7. The earlier historical 0/10 benchmark is a different contract, not a comparable baseline.
 Guide: https://devopsabcs-engineering.github.io/foundry-hosted-agents-fsi/evaluation-guide.html
 Lab 19: https://devopsabcs-engineering.github.io/foundry-hosted-agents-fsi/labs/lab-19-evaluation-engineering
 Source: https://learn.microsoft.com/azure/foundry/concepts/evaluation-evaluators/agent-evaluators</a:t>
@@ -1992,7 +1997,7 @@
           <a:p>
             <a:r>
               <a:rPr lang="en-US" dirty="0"/>
-              <a:t>Ask: which error is costliest here? A false accept of unauthorized approval matters more than harmless wording. Thresholds should reflect risk and validation, not be tuned after seeing the candidate. Challenge prompt injection inside judged content without allowing it to redefine the rubric.
+              <a:t>Use human labels per metric, not an expectation that every metric must fail every bad answer. Synthetic mutations must be labeled, with native response ID provenance removed for the edited answer. Do not present a rewritten candidate as an authentic captured response.
 Guide: https://devopsabcs-engineering.github.io/foundry-hosted-agents-fsi/evaluation-guide.html
 Lab 19: https://devopsabcs-engineering.github.io/foundry-hosted-agents-fsi/labs/lab-19-evaluation-engineering
 Source: https://learn.microsoft.com/azure/foundry/concepts/evaluation-evaluators/custom-evaluators</a:t>
@@ -2083,7 +2088,7 @@
           <a:p>
             <a:r>
               <a:rPr lang="en-US" dirty="0"/>
-              <a:t>The full CLI recaptures the hosted agent, so rerunning it does not isolate the judge. Lab19.8 includes an executable judge-only reuse recipe and a result-inspection recipe. Use fresh directories and predeclared trial counts; no silent overwrites or stopping at first pass.
+              <a:t>Lab18.2 requires actual retained artifacts. If unavailable, record reproduction blocked; do not fabricate a baseline. Changing the corpus or instructions does not turn the failed control into a pass. This is an isolated RAG demonstration, not hosted quote-agent RAG.
 Guide: https://devopsabcs-engineering.github.io/foundry-hosted-agents-fsi/evaluation-guide.html
 Lab 19: https://devopsabcs-engineering.github.io/foundry-hosted-agents-fsi/labs/lab-19-evaluation-engineering
 Source: https://learn.microsoft.com/azure/foundry/how-to/evaluate-generative-ai-app</a:t>
@@ -2174,7 +2179,7 @@
           <a:p>
             <a:r>
               <a:rPr lang="en-US" dirty="0"/>
-              <a:t>Work through the stdlib Wilson calculation in Lab19.8. Do not pool 30 correlated rubric grades as 30 independent cases. A case-level paired analysis or cluster bootstrap preserves within-case dependence. Hard invariants are not traded away against a confidence interval.
+              <a:t>Ask: which error is costliest here? A false accept of unauthorized approval matters more than harmless wording. Thresholds should reflect risk and validation, not be tuned after seeing the candidate. Challenge prompt injection inside judged content without allowing it to redefine the rubric.
 Guide: https://devopsabcs-engineering.github.io/foundry-hosted-agents-fsi/evaluation-guide.html
 Lab 19: https://devopsabcs-engineering.github.io/foundry-hosted-agents-fsi/labs/lab-19-evaluation-engineering
 Source: https://learn.microsoft.com/azure/foundry/observability/how-to/cloud-evaluation</a:t>
@@ -2265,7 +2270,7 @@
           <a:p>
             <a:r>
               <a:rPr lang="en-US" dirty="0"/>
-              <a:t>Blind/randomize candidate order where feasible to reduce judge bias. Report per-case reasons and reviewed failures rather than only average score delta. Repetition controls statistical noise but does not fix invalid ground truth or missing coverage.
+              <a:t>The full CLI recaptures the hosted agent, so rerunning it does not isolate the judge. Lab19.8 includes an executable judge-only reuse recipe and a result-inspection recipe. Use fresh directories and predeclared trial counts; no silent overwrites or stopping at first pass.
 Guide: https://devopsabcs-engineering.github.io/foundry-hosted-agents-fsi/evaluation-guide.html
 Lab 19: https://devopsabcs-engineering.github.io/foundry-hosted-agents-fsi/labs/lab-19-evaluation-engineering
 Source: https://learn.microsoft.com/azure/foundry/observability/how-to/cloud-evaluation-datasets</a:t>
@@ -2356,7 +2361,7 @@
           <a:p>
             <a:r>
               <a:rPr lang="en-US" dirty="0"/>
-              <a:t>Thirty judgments is nominal work, not a fixed request count or price. The quote graph currently does not call a pricing LLM; judges still incur model cost. Freeze cache keys across input, state, model, rubric and evaluator, and label reused captures as not fresh inference.
+              <a:t>Work through the stdlib Wilson calculation in Lab19.8. Do not pool 30 correlated rubric grades as 30 independent cases. A case-level paired analysis or cluster bootstrap preserves within-case dependence. Hard invariants are not traded away against a confidence interval.
 Guide: https://devopsabcs-engineering.github.io/foundry-hosted-agents-fsi/evaluation-guide.html
 Lab 19: https://devopsabcs-engineering.github.io/foundry-hosted-agents-fsi/labs/lab-19-evaluation-engineering
 Source: https://learn.microsoft.com/azure/foundry/concepts/built-in-evaluators</a:t>
@@ -2447,7 +2452,7 @@
           <a:p>
             <a:r>
               <a:rPr lang="en-US" dirty="0"/>
-              <a:t>Production CASE004 was verified: previous110000 labeled not current, TRAINING_BASIC preparation returned200/PENDING_REVIEW/READY/90000, response and correlation matched, self-approval403. Do not replay blindly on current revision2 or clear benchmark state. Use owner-approved isolated storage/case.
+              <a:t>Blind/randomize candidate order where feasible to reduce judge bias. Report per-case reasons and reviewed failures rather than only average score delta. Repetition controls statistical noise but does not fix invalid ground truth or missing coverage.
 Guide: https://devopsabcs-engineering.github.io/foundry-hosted-agents-fsi/evaluation-guide.html
 Lab 19: https://devopsabcs-engineering.github.io/foundry-hosted-agents-fsi/labs/lab-19-evaluation-engineering
 Source: https://learn.microsoft.com/azure/foundry/concepts/evaluation-evaluators/agent-evaluators</a:t>
@@ -2629,7 +2634,7 @@
           <a:p>
             <a:r>
               <a:rPr lang="en-US" dirty="0"/>
-              <a:t>Lab18 exports genuinely ingested SDK spans and reconstructs a synthetic replay, not a private original prompt. Do not invent model spans in this deterministic graph. If a process evaluator requires a trajectory format not captured here, mark the dimension not measured rather than filling it with an acknowledgement.
+              <a:t>Thirty judgments is nominal work, not a fixed request count or price. The quote graph currently does not call a pricing LLM; judges still incur model cost. Freeze cache keys across input, state, model, rubric and evaluator, and label reused captures as not fresh inference.
 Guide: https://devopsabcs-engineering.github.io/foundry-hosted-agents-fsi/evaluation-guide.html
 Lab 19: https://devopsabcs-engineering.github.io/foundry-hosted-agents-fsi/labs/lab-19-evaluation-engineering
 Source: https://learn.microsoft.com/azure/foundry/concepts/evaluation-evaluators/custom-evaluators</a:t>
@@ -2720,7 +2725,7 @@
           <a:p>
             <a:r>
               <a:rPr lang="en-US" dirty="0"/>
-              <a:t>A service SystemError belongs in reliability reporting, not a numeric model quality score. Avoid broad access grants as troubleshooting shortcuts. Real production sampling requires approved privacy and retention rules; this workshop stays synthetic. Scheduled evaluations complement, not replace, release evidence.
+              <a:t>Production CASE004 was verified: previous110000 labeled not current, TRAINING_BASIC preparation returned200/PENDING_REVIEW/READY/90000, response and correlation matched, self-approval403. Do not replay blindly on current revision2 or clear benchmark state. Use owner-approved isolated storage/case.
 Guide: https://devopsabcs-engineering.github.io/foundry-hosted-agents-fsi/evaluation-guide.html
 Lab 19: https://devopsabcs-engineering.github.io/foundry-hosted-agents-fsi/labs/lab-19-evaluation-engineering
 Source: https://learn.microsoft.com/azure/foundry/how-to/evaluate-generative-ai-app</a:t>
@@ -2811,7 +2816,7 @@
           <a:p>
             <a:r>
               <a:rPr lang="en-US" dirty="0"/>
-              <a:t>Use the one-page worksheet in Lab19.10. Good score alone is insufficient; missing trajectory or failed negative controls must stay visible. The lab does not authorize release, change gates or grant access. Include separate operations and quality conclusions.
+              <a:t>Lab18 exports genuinely ingested SDK spans and reconstructs a synthetic replay, not a private original prompt. Do not invent model spans in this deterministic graph. If a process evaluator requires a trajectory format not captured here, mark the dimension not measured rather than filling it with an acknowledgement.
 Guide: https://devopsabcs-engineering.github.io/foundry-hosted-agents-fsi/evaluation-guide.html
 Lab 19: https://devopsabcs-engineering.github.io/foundry-hosted-agents-fsi/labs/lab-19-evaluation-engineering
 Source: https://learn.microsoft.com/azure/foundry/observability/how-to/cloud-evaluation</a:t>
@@ -2902,7 +2907,7 @@
           <a:p>
             <a:r>
               <a:rPr lang="en-US" dirty="0"/>
-              <a:t>Expected answers: A blocks on a hard authorization invariant. B blocks on completeness, not assumed quality. C needs remediation or explicit risk decision under policy; a mean cannot hide the high-risk false accept. D is eligible for the protected owner decision, not automatically approved by the evaluator.
+              <a:t>A service SystemError belongs in reliability reporting, not a numeric model quality score. Avoid broad access grants as troubleshooting shortcuts. Real production sampling requires approved privacy and retention rules; this workshop stays synthetic. Scheduled evaluations complement, not replace, release evidence.
 Guide: https://devopsabcs-engineering.github.io/foundry-hosted-agents-fsi/evaluation-guide.html
 Lab 19: https://devopsabcs-engineering.github.io/foundry-hosted-agents-fsi/labs/lab-19-evaluation-engineering
 Source: https://learn.microsoft.com/azure/foundry/observability/how-to/cloud-evaluation-datasets</a:t>
@@ -2993,7 +2998,7 @@
           <a:p>
             <a:r>
               <a:rPr lang="en-US" dirty="0"/>
-              <a:t>Ask each participant to name a bug unit tests detect better, a semantic defect exact matching misses, a judge false positive and a non-LLM cause of runtime variation. Strong answers separate evidence scope, statistical uncertainty and policy ownership.
+              <a:t>Use the one-page worksheet in Lab19.10. Good score alone is insufficient; missing trajectory or failed negative controls must stay visible. The lab does not authorize release, change gates or grant access. Include separate operations and quality conclusions.
 Guide: https://devopsabcs-engineering.github.io/foundry-hosted-agents-fsi/evaluation-guide.html
 Lab 19: https://devopsabcs-engineering.github.io/foundry-hosted-agents-fsi/labs/lab-19-evaluation-engineering
 Source: https://learn.microsoft.com/azure/foundry/concepts/built-in-evaluators</a:t>
@@ -3084,6 +3089,188 @@
           <a:p>
             <a:r>
               <a:rPr lang="en-US" dirty="0"/>
+              <a:t>Expected answers: A blocks on a hard authorization invariant. B blocks on completeness, not assumed quality. C needs remediation or explicit risk decision under policy; a mean cannot hide the high-risk false accept. D is eligible for the protected owner decision, not automatically approved by the evaluator.
+Guide: https://devopsabcs-engineering.github.io/foundry-hosted-agents-fsi/evaluation-guide.html
+Lab 19: https://devopsabcs-engineering.github.io/foundry-hosted-agents-fsi/labs/lab-19-evaluation-engineering
+Source: https://learn.microsoft.com/azure/foundry/concepts/evaluation-evaluators/agent-evaluators</a:t>
+            </a:r>
+            <a:endParaRPr lang="en-US" dirty="0"/>
+          </a:p>
+        </p:txBody>
+      </p:sp>
+      <p:sp>
+        <p:nvSpPr>
+          <p:cNvPr id="4" name="Slide Number Placeholder 3"/>
+          <p:cNvSpPr>
+            <a:spLocks noGrp="1"/>
+          </p:cNvSpPr>
+          <p:nvPr>
+            <p:ph type="sldNum" sz="quarter" idx="10"/>
+          </p:nvPr>
+        </p:nvSpPr>
+        <p:spPr/>
+        <p:txBody>
+          <a:bodyPr/>
+          <a:lstStyle/>
+          <a:p>
+            <a:fld id="{F7021451-1387-4CA6-816F-3879F97B5CBC}" type="slidenum">
+              <a:rPr lang="en-US"/>
+              <a:t>35</a:t>
+            </a:fld>
+            <a:endParaRPr lang="en-US"/>
+          </a:p>
+        </p:txBody>
+      </p:sp>
+    </p:spTree>
+    <p:extLst>
+      <p:ext uri="{BB962C8B-B14F-4D97-AF65-F5344CB8AC3E}">
+        <p14:creationId xmlns:p14="http://schemas.microsoft.com/office/powerpoint/2010/main" val="1024086991"/>
+      </p:ext>
+    </p:extLst>
+  </p:cSld>
+  <p:clrMapOvr>
+    <a:masterClrMapping/>
+  </p:clrMapOvr>
+</p:notes>
+</file>
+
+<file path=ppt/notesSlides/notesSlide36.xml><?xml version="1.0" encoding="utf-8"?>
+<p:notes xmlns:a="http://schemas.openxmlformats.org/drawingml/2006/main" xmlns:r="http://schemas.openxmlformats.org/officeDocument/2006/relationships" xmlns:p="http://schemas.openxmlformats.org/presentationml/2006/main">
+  <p:cSld>
+    <p:spTree>
+      <p:nvGrpSpPr>
+        <p:cNvPr id="1" name=""/>
+        <p:cNvGrpSpPr/>
+        <p:nvPr/>
+      </p:nvGrpSpPr>
+      <p:grpSpPr>
+        <a:xfrm>
+          <a:off x="0" y="0"/>
+          <a:ext cx="0" cy="0"/>
+          <a:chOff x="0" y="0"/>
+          <a:chExt cx="0" cy="0"/>
+        </a:xfrm>
+      </p:grpSpPr>
+      <p:sp>
+        <p:nvSpPr>
+          <p:cNvPr id="2" name="Slide Image Placeholder 1"/>
+          <p:cNvSpPr>
+            <a:spLocks noGrp="1" noRot="1" noChangeAspect="1"/>
+          </p:cNvSpPr>
+          <p:nvPr>
+            <p:ph type="sldImg"/>
+          </p:nvPr>
+        </p:nvSpPr>
+        <p:spPr/>
+      </p:sp>
+      <p:sp>
+        <p:nvSpPr>
+          <p:cNvPr id="3" name="Notes Placeholder 2"/>
+          <p:cNvSpPr>
+            <a:spLocks noGrp="1"/>
+          </p:cNvSpPr>
+          <p:nvPr>
+            <p:ph type="body" idx="1"/>
+          </p:nvPr>
+        </p:nvSpPr>
+        <p:spPr/>
+        <p:txBody>
+          <a:bodyPr/>
+          <a:lstStyle/>
+          <a:p>
+            <a:r>
+              <a:rPr lang="en-US" dirty="0"/>
+              <a:t>Ask each participant to name a bug unit tests detect better, a semantic defect exact matching misses, a judge false positive and a non-LLM cause of runtime variation. Strong answers separate evidence scope, statistical uncertainty and policy ownership.
+Guide: https://devopsabcs-engineering.github.io/foundry-hosted-agents-fsi/evaluation-guide.html
+Lab 19: https://devopsabcs-engineering.github.io/foundry-hosted-agents-fsi/labs/lab-19-evaluation-engineering
+Source: https://learn.microsoft.com/azure/foundry/concepts/evaluation-evaluators/custom-evaluators</a:t>
+            </a:r>
+            <a:endParaRPr lang="en-US" dirty="0"/>
+          </a:p>
+        </p:txBody>
+      </p:sp>
+      <p:sp>
+        <p:nvSpPr>
+          <p:cNvPr id="4" name="Slide Number Placeholder 3"/>
+          <p:cNvSpPr>
+            <a:spLocks noGrp="1"/>
+          </p:cNvSpPr>
+          <p:nvPr>
+            <p:ph type="sldNum" sz="quarter" idx="10"/>
+          </p:nvPr>
+        </p:nvSpPr>
+        <p:spPr/>
+        <p:txBody>
+          <a:bodyPr/>
+          <a:lstStyle/>
+          <a:p>
+            <a:fld id="{F7021451-1387-4CA6-816F-3879F97B5CBC}" type="slidenum">
+              <a:rPr lang="en-US"/>
+              <a:t>36</a:t>
+            </a:fld>
+            <a:endParaRPr lang="en-US"/>
+          </a:p>
+        </p:txBody>
+      </p:sp>
+    </p:spTree>
+    <p:extLst>
+      <p:ext uri="{BB962C8B-B14F-4D97-AF65-F5344CB8AC3E}">
+        <p14:creationId xmlns:p14="http://schemas.microsoft.com/office/powerpoint/2010/main" val="1024086991"/>
+      </p:ext>
+    </p:extLst>
+  </p:cSld>
+  <p:clrMapOvr>
+    <a:masterClrMapping/>
+  </p:clrMapOvr>
+</p:notes>
+</file>
+
+<file path=ppt/notesSlides/notesSlide37.xml><?xml version="1.0" encoding="utf-8"?>
+<p:notes xmlns:a="http://schemas.openxmlformats.org/drawingml/2006/main" xmlns:r="http://schemas.openxmlformats.org/officeDocument/2006/relationships" xmlns:p="http://schemas.openxmlformats.org/presentationml/2006/main">
+  <p:cSld>
+    <p:spTree>
+      <p:nvGrpSpPr>
+        <p:cNvPr id="1" name=""/>
+        <p:cNvGrpSpPr/>
+        <p:nvPr/>
+      </p:nvGrpSpPr>
+      <p:grpSpPr>
+        <a:xfrm>
+          <a:off x="0" y="0"/>
+          <a:ext cx="0" cy="0"/>
+          <a:chOff x="0" y="0"/>
+          <a:chExt cx="0" cy="0"/>
+        </a:xfrm>
+      </p:grpSpPr>
+      <p:sp>
+        <p:nvSpPr>
+          <p:cNvPr id="2" name="Slide Image Placeholder 1"/>
+          <p:cNvSpPr>
+            <a:spLocks noGrp="1" noRot="1" noChangeAspect="1"/>
+          </p:cNvSpPr>
+          <p:nvPr>
+            <p:ph type="sldImg"/>
+          </p:nvPr>
+        </p:nvSpPr>
+        <p:spPr/>
+      </p:sp>
+      <p:sp>
+        <p:nvSpPr>
+          <p:cNvPr id="3" name="Notes Placeholder 2"/>
+          <p:cNvSpPr>
+            <a:spLocks noGrp="1"/>
+          </p:cNvSpPr>
+          <p:nvPr>
+            <p:ph type="body" idx="1"/>
+          </p:nvPr>
+        </p:nvSpPr>
+        <p:spPr/>
+        <p:txBody>
+          <a:bodyPr/>
+          <a:lstStyle/>
+          <a:p>
+            <a:r>
+              <a:rPr lang="en-US" dirty="0"/>
               <a:t>Guide and lab are maintained in the repository and linked from the workshop. Rebuild with npm run build-evaluation-deck. Official references:
 https://learn.microsoft.com/azure/foundry/how-to/evaluate-generative-ai-app
 https://learn.microsoft.com/azure/foundry/observability/how-to/cloud-evaluation
@@ -3094,7 +3281,7 @@
 Live release evidence: https://github.com/devopsabcs-engineering/foundry-hosted-agents-fsi/wiki/Native-Foundry-Evidence
 Guide: https://devopsabcs-engineering.github.io/foundry-hosted-agents-fsi/evaluation-guide.html
 Lab 19: https://devopsabcs-engineering.github.io/foundry-hosted-agents-fsi/labs/lab-19-evaluation-engineering
-Source: https://learn.microsoft.com/azure/foundry/concepts/evaluation-evaluators/agent-evaluators</a:t>
+Source: https://learn.microsoft.com/azure/foundry/how-to/evaluate-generative-ai-app</a:t>
             </a:r>
             <a:endParaRPr lang="en-US" dirty="0"/>
           </a:p>
@@ -3117,7 +3304,7 @@
           <a:p>
             <a:fld id="{F7021451-1387-4CA6-816F-3879F97B5CBC}" type="slidenum">
               <a:rPr lang="en-US"/>
-              <a:t>35</a:t>
+              <a:t>37</a:t>
             </a:fld>
             <a:endParaRPr lang="en-US"/>
           </a:p>
@@ -4316,7 +4503,7 @@
                 <a:ea typeface="Segoe UI" pitchFamily="34" charset="-122"/>
                 <a:cs typeface="Segoe UI" pitchFamily="34" charset="-120"/>
               </a:rPr>
-              <a:t>1 / 35</a:t>
+              <a:t>1 / 37</a:t>
             </a:r>
             <a:endParaRPr lang="en-US" sz="1000" dirty="0"/>
           </a:p>
@@ -4944,7 +5131,7 @@
                 <a:ea typeface="Segoe UI" pitchFamily="34" charset="-122"/>
                 <a:cs typeface="Segoe UI" pitchFamily="34" charset="-120"/>
               </a:rPr>
-              <a:t>10 / 35</a:t>
+              <a:t>10 / 37</a:t>
             </a:r>
             <a:endParaRPr lang="en-US" sz="1000" dirty="0"/>
           </a:p>
@@ -5580,7 +5767,7 @@
                 <a:ea typeface="Segoe UI" pitchFamily="34" charset="-122"/>
                 <a:cs typeface="Segoe UI" pitchFamily="34" charset="-120"/>
               </a:rPr>
-              <a:t>11 / 35</a:t>
+              <a:t>11 / 37</a:t>
             </a:r>
             <a:endParaRPr lang="en-US" sz="1000" dirty="0"/>
           </a:p>
@@ -6208,7 +6395,7 @@
                 <a:ea typeface="Segoe UI" pitchFamily="34" charset="-122"/>
                 <a:cs typeface="Segoe UI" pitchFamily="34" charset="-120"/>
               </a:rPr>
-              <a:t>12 / 35</a:t>
+              <a:t>12 / 37</a:t>
             </a:r>
             <a:endParaRPr lang="en-US" sz="1000" dirty="0"/>
           </a:p>
@@ -6345,77 +6532,102 @@
                 <a:ea typeface="Segoe UI" pitchFamily="34" charset="-122"/>
                 <a:cs typeface="Segoe UI" pitchFamily="34" charset="-120"/>
               </a:rPr>
-              <a:t>Do not mix API generations</a:t>
+              <a:t>Portal checkpoint: open the completed run</a:t>
             </a:r>
             <a:endParaRPr lang="en-US" sz="2700" dirty="0"/>
           </a:p>
         </p:txBody>
       </p:sp>
-      <p:sp>
-        <p:nvSpPr>
-          <p:cNvPr id="5" name="Text 3"/>
-          <p:cNvSpPr/>
-          <p:nvPr/>
-        </p:nvSpPr>
-        <p:spPr>
-          <a:xfrm>
-            <a:off x="594360" y="1828800"/>
-            <a:ext cx="640080" cy="594360"/>
-          </a:xfrm>
-          <a:prstGeom prst="rect">
-            <a:avLst/>
-          </a:prstGeom>
-          <a:noFill/>
-          <a:ln/>
-        </p:spPr>
-        <p:txBody>
-          <a:bodyPr wrap="square" lIns="0" tIns="0" rIns="0" bIns="0" rtlCol="0" anchor="ctr"/>
-          <a:lstStyle/>
-          <a:p>
-            <a:pPr indent="0" marL="0">
-              <a:buNone/>
-            </a:pPr>
-            <a:r>
-              <a:rPr lang="en-US" sz="1700" b="1" dirty="0">
-                <a:solidFill>
-                  <a:srgbClr val="0078D4"/>
-                </a:solidFill>
-                <a:latin typeface="Segoe UI" pitchFamily="34" charset="0"/>
-                <a:ea typeface="Segoe UI" pitchFamily="34" charset="-122"/>
-                <a:cs typeface="Segoe UI" pitchFamily="34" charset="-120"/>
-              </a:rPr>
-              <a:t>01</a:t>
-            </a:r>
-            <a:endParaRPr lang="en-US" sz="1700" dirty="0"/>
-          </a:p>
-        </p:txBody>
-      </p:sp>
-      <p:sp>
-        <p:nvSpPr>
-          <p:cNvPr id="6" name="Text 4"/>
-          <p:cNvSpPr/>
-          <p:nvPr/>
-        </p:nvSpPr>
-        <p:spPr>
-          <a:xfrm>
-            <a:off x="1325880" y="1828800"/>
-            <a:ext cx="10195560" cy="731520"/>
-          </a:xfrm>
-          <a:prstGeom prst="rect">
-            <a:avLst/>
-          </a:prstGeom>
-          <a:noFill/>
-          <a:ln/>
-        </p:spPr>
-        <p:txBody>
-          <a:bodyPr wrap="square" lIns="0" tIns="0" rIns="0" bIns="0" rtlCol="0" anchor="ctr"/>
-          <a:lstStyle/>
-          <a:p>
-            <a:pPr indent="0" marL="0">
-              <a:buNone/>
-            </a:pPr>
-            <a:r>
-              <a:rPr lang="en-US" sz="2000" dirty="0">
+      <p:pic>
+        <p:nvPicPr>
+          <p:cNvPr id="5" name="Image 0" descr="Completed retained run: 15/15 checks overall and 5/5 per metric.">
+            <a:hlinkClick r:id="rId2" tooltip=""/>
+          </p:cNvPr>
+          <p:cNvPicPr>
+            <a:picLocks noChangeAspect="1"/>
+          </p:cNvPicPr>
+          <p:nvPr/>
+        </p:nvPicPr>
+        <p:blipFill>
+          <a:blip r:embed="rId1"/>
+          <a:srcRect l="15914" r="1483" t="25351" b="47681"/>
+          <a:stretch/>
+        </p:blipFill>
+        <p:spPr>
+          <a:xfrm>
+            <a:off x="548640" y="1874520"/>
+            <a:ext cx="11064240" cy="2258008"/>
+          </a:xfrm>
+          <a:prstGeom prst="rect">
+            <a:avLst/>
+          </a:prstGeom>
+        </p:spPr>
+      </p:pic>
+      <p:sp>
+        <p:nvSpPr>
+          <p:cNvPr id="6" name="Text 3"/>
+          <p:cNvSpPr/>
+          <p:nvPr/>
+        </p:nvSpPr>
+        <p:spPr>
+          <a:xfrm>
+            <a:off x="548640" y="5166360"/>
+            <a:ext cx="11064240" cy="411480"/>
+          </a:xfrm>
+          <a:prstGeom prst="rect">
+            <a:avLst/>
+          </a:prstGeom>
+          <a:noFill/>
+          <a:ln/>
+        </p:spPr>
+        <p:txBody>
+          <a:bodyPr wrap="square" lIns="0" tIns="0" rIns="0" bIns="0" rtlCol="0" anchor="ctr"/>
+          <a:lstStyle/>
+          <a:p>
+            <a:pPr indent="0" marL="0">
+              <a:buNone/>
+            </a:pPr>
+            <a:r>
+              <a:rPr lang="en-US" sz="1600" dirty="0">
+                <a:solidFill>
+                  <a:srgbClr val="526777"/>
+                </a:solidFill>
+                <a:latin typeface="Segoe UI" pitchFamily="34" charset="0"/>
+                <a:ea typeface="Segoe UI" pitchFamily="34" charset="-122"/>
+                <a:cs typeface="Segoe UI" pitchFamily="34" charset="-120"/>
+              </a:rPr>
+              <a:t>French staging v6 | 2026-10-23 | Read-only retained evidence</a:t>
+            </a:r>
+            <a:endParaRPr lang="en-US" sz="1600" dirty="0"/>
+          </a:p>
+        </p:txBody>
+      </p:sp>
+      <p:sp>
+        <p:nvSpPr>
+          <p:cNvPr id="7" name="Text 4"/>
+          <p:cNvSpPr/>
+          <p:nvPr/>
+        </p:nvSpPr>
+        <p:spPr>
+          <a:xfrm>
+            <a:off x="548640" y="5623560"/>
+            <a:ext cx="11064240" cy="457200"/>
+          </a:xfrm>
+          <a:prstGeom prst="rect">
+            <a:avLst/>
+          </a:prstGeom>
+          <a:noFill/>
+          <a:ln/>
+        </p:spPr>
+        <p:txBody>
+          <a:bodyPr wrap="square" lIns="0" tIns="0" rIns="0" bIns="0" rtlCol="0" anchor="ctr"/>
+          <a:lstStyle/>
+          <a:p>
+            <a:pPr indent="0" marL="0">
+              <a:buNone/>
+            </a:pPr>
+            <a:r>
+              <a:rPr lang="en-US" sz="2000" b="1" dirty="0">
                 <a:solidFill>
                   <a:srgbClr val="183449"/>
                 </a:solidFill>
@@ -6423,7 +6635,7 @@
                 <a:ea typeface="Segoe UI" pitchFamily="34" charset="-122"/>
                 <a:cs typeface="Segoe UI" pitchFamily="34" charset="-120"/>
               </a:rPr>
-              <a:t>Projects SDK + native Evals is this repository’s cloud path.</a:t>
+              <a:t>Select the run name, not its checkbox or Add run.</a:t>
             </a:r>
             <a:endParaRPr lang="en-US" sz="2000" dirty="0"/>
           </a:p>
@@ -6431,334 +6643,8 @@
       </p:sp>
       <p:sp>
         <p:nvSpPr>
-          <p:cNvPr id="7" name="Shape 5"/>
-          <p:cNvSpPr/>
-          <p:nvPr/>
-        </p:nvSpPr>
-        <p:spPr>
-          <a:xfrm>
-            <a:off x="1325880" y="2660904"/>
-            <a:ext cx="10149840" cy="0"/>
-          </a:xfrm>
-          <a:prstGeom prst="line">
-            <a:avLst/>
-          </a:prstGeom>
-          <a:noFill/>
-          <a:ln w="6350">
-            <a:solidFill>
-              <a:srgbClr val="DCE5ED"/>
-            </a:solidFill>
-            <a:prstDash val="solid"/>
-          </a:ln>
-        </p:spPr>
-      </p:sp>
-      <p:sp>
-        <p:nvSpPr>
-          <p:cNvPr id="8" name="Text 6"/>
-          <p:cNvSpPr/>
-          <p:nvPr/>
-        </p:nvSpPr>
-        <p:spPr>
-          <a:xfrm>
-            <a:off x="594360" y="2770632"/>
-            <a:ext cx="640080" cy="594360"/>
-          </a:xfrm>
-          <a:prstGeom prst="rect">
-            <a:avLst/>
-          </a:prstGeom>
-          <a:noFill/>
-          <a:ln/>
-        </p:spPr>
-        <p:txBody>
-          <a:bodyPr wrap="square" lIns="0" tIns="0" rIns="0" bIns="0" rtlCol="0" anchor="ctr"/>
-          <a:lstStyle/>
-          <a:p>
-            <a:pPr indent="0" marL="0">
-              <a:buNone/>
-            </a:pPr>
-            <a:r>
-              <a:rPr lang="en-US" sz="1700" b="1" dirty="0">
-                <a:solidFill>
-                  <a:srgbClr val="0078D4"/>
-                </a:solidFill>
-                <a:latin typeface="Segoe UI" pitchFamily="34" charset="0"/>
-                <a:ea typeface="Segoe UI" pitchFamily="34" charset="-122"/>
-                <a:cs typeface="Segoe UI" pitchFamily="34" charset="-120"/>
-              </a:rPr>
-              <a:t>02</a:t>
-            </a:r>
-            <a:endParaRPr lang="en-US" sz="1700" dirty="0"/>
-          </a:p>
-        </p:txBody>
-      </p:sp>
-      <p:sp>
-        <p:nvSpPr>
-          <p:cNvPr id="9" name="Text 7"/>
-          <p:cNvSpPr/>
-          <p:nvPr/>
-        </p:nvSpPr>
-        <p:spPr>
-          <a:xfrm>
-            <a:off x="1325880" y="2770632"/>
-            <a:ext cx="10195560" cy="731520"/>
-          </a:xfrm>
-          <a:prstGeom prst="rect">
-            <a:avLst/>
-          </a:prstGeom>
-          <a:noFill/>
-          <a:ln/>
-        </p:spPr>
-        <p:txBody>
-          <a:bodyPr wrap="square" lIns="0" tIns="0" rIns="0" bIns="0" rtlCol="0" anchor="ctr"/>
-          <a:lstStyle/>
-          <a:p>
-            <a:pPr indent="0" marL="0">
-              <a:buNone/>
-            </a:pPr>
-            <a:r>
-              <a:rPr lang="en-US" sz="2000" dirty="0">
-                <a:solidFill>
-                  <a:srgbClr val="183449"/>
-                </a:solidFill>
-                <a:latin typeface="Segoe UI" pitchFamily="34" charset="0"/>
-                <a:ea typeface="Segoe UI" pitchFamily="34" charset="-122"/>
-                <a:cs typeface="Segoe UI" pitchFamily="34" charset="-120"/>
-              </a:rPr>
-              <a:t>azure-ai-evaluation has a separate local evaluate() API.</a:t>
-            </a:r>
-            <a:endParaRPr lang="en-US" sz="2000" dirty="0"/>
-          </a:p>
-        </p:txBody>
-      </p:sp>
-      <p:sp>
-        <p:nvSpPr>
-          <p:cNvPr id="10" name="Shape 8"/>
-          <p:cNvSpPr/>
-          <p:nvPr/>
-        </p:nvSpPr>
-        <p:spPr>
-          <a:xfrm>
-            <a:off x="1325880" y="3602736"/>
-            <a:ext cx="10149840" cy="0"/>
-          </a:xfrm>
-          <a:prstGeom prst="line">
-            <a:avLst/>
-          </a:prstGeom>
-          <a:noFill/>
-          <a:ln w="6350">
-            <a:solidFill>
-              <a:srgbClr val="DCE5ED"/>
-            </a:solidFill>
-            <a:prstDash val="solid"/>
-          </a:ln>
-        </p:spPr>
-      </p:sp>
-      <p:sp>
-        <p:nvSpPr>
-          <p:cNvPr id="11" name="Text 9"/>
-          <p:cNvSpPr/>
-          <p:nvPr/>
-        </p:nvSpPr>
-        <p:spPr>
-          <a:xfrm>
-            <a:off x="594360" y="3712464"/>
-            <a:ext cx="640080" cy="594360"/>
-          </a:xfrm>
-          <a:prstGeom prst="rect">
-            <a:avLst/>
-          </a:prstGeom>
-          <a:noFill/>
-          <a:ln/>
-        </p:spPr>
-        <p:txBody>
-          <a:bodyPr wrap="square" lIns="0" tIns="0" rIns="0" bIns="0" rtlCol="0" anchor="ctr"/>
-          <a:lstStyle/>
-          <a:p>
-            <a:pPr indent="0" marL="0">
-              <a:buNone/>
-            </a:pPr>
-            <a:r>
-              <a:rPr lang="en-US" sz="1700" b="1" dirty="0">
-                <a:solidFill>
-                  <a:srgbClr val="0078D4"/>
-                </a:solidFill>
-                <a:latin typeface="Segoe UI" pitchFamily="34" charset="0"/>
-                <a:ea typeface="Segoe UI" pitchFamily="34" charset="-122"/>
-                <a:cs typeface="Segoe UI" pitchFamily="34" charset="-120"/>
-              </a:rPr>
-              <a:t>03</a:t>
-            </a:r>
-            <a:endParaRPr lang="en-US" sz="1700" dirty="0"/>
-          </a:p>
-        </p:txBody>
-      </p:sp>
-      <p:sp>
-        <p:nvSpPr>
-          <p:cNvPr id="12" name="Text 10"/>
-          <p:cNvSpPr/>
-          <p:nvPr/>
-        </p:nvSpPr>
-        <p:spPr>
-          <a:xfrm>
-            <a:off x="1325880" y="3712464"/>
-            <a:ext cx="10195560" cy="731520"/>
-          </a:xfrm>
-          <a:prstGeom prst="rect">
-            <a:avLst/>
-          </a:prstGeom>
-          <a:noFill/>
-          <a:ln/>
-        </p:spPr>
-        <p:txBody>
-          <a:bodyPr wrap="square" lIns="0" tIns="0" rIns="0" bIns="0" rtlCol="0" anchor="ctr"/>
-          <a:lstStyle/>
-          <a:p>
-            <a:pPr indent="0" marL="0">
-              <a:buNone/>
-            </a:pPr>
-            <a:r>
-              <a:rPr lang="en-US" sz="2000" dirty="0">
-                <a:solidFill>
-                  <a:srgbClr val="183449"/>
-                </a:solidFill>
-                <a:latin typeface="Segoe UI" pitchFamily="34" charset="0"/>
-                <a:ea typeface="Segoe UI" pitchFamily="34" charset="-122"/>
-                <a:cs typeface="Segoe UI" pitchFamily="34" charset="-120"/>
-              </a:rPr>
-              <a:t>Built-ins, code graders and prompt rubrics have different schemas.</a:t>
-            </a:r>
-            <a:endParaRPr lang="en-US" sz="2000" dirty="0"/>
-          </a:p>
-        </p:txBody>
-      </p:sp>
-      <p:sp>
-        <p:nvSpPr>
-          <p:cNvPr id="13" name="Shape 11"/>
-          <p:cNvSpPr/>
-          <p:nvPr/>
-        </p:nvSpPr>
-        <p:spPr>
-          <a:xfrm>
-            <a:off x="1325880" y="4544568"/>
-            <a:ext cx="10149840" cy="0"/>
-          </a:xfrm>
-          <a:prstGeom prst="line">
-            <a:avLst/>
-          </a:prstGeom>
-          <a:noFill/>
-          <a:ln w="6350">
-            <a:solidFill>
-              <a:srgbClr val="DCE5ED"/>
-            </a:solidFill>
-            <a:prstDash val="solid"/>
-          </a:ln>
-        </p:spPr>
-      </p:sp>
-      <p:sp>
-        <p:nvSpPr>
-          <p:cNvPr id="14" name="Text 12"/>
-          <p:cNvSpPr/>
-          <p:nvPr/>
-        </p:nvSpPr>
-        <p:spPr>
-          <a:xfrm>
-            <a:off x="594360" y="4654296"/>
-            <a:ext cx="640080" cy="594360"/>
-          </a:xfrm>
-          <a:prstGeom prst="rect">
-            <a:avLst/>
-          </a:prstGeom>
-          <a:noFill/>
-          <a:ln/>
-        </p:spPr>
-        <p:txBody>
-          <a:bodyPr wrap="square" lIns="0" tIns="0" rIns="0" bIns="0" rtlCol="0" anchor="ctr"/>
-          <a:lstStyle/>
-          <a:p>
-            <a:pPr indent="0" marL="0">
-              <a:buNone/>
-            </a:pPr>
-            <a:r>
-              <a:rPr lang="en-US" sz="1700" b="1" dirty="0">
-                <a:solidFill>
-                  <a:srgbClr val="0078D4"/>
-                </a:solidFill>
-                <a:latin typeface="Segoe UI" pitchFamily="34" charset="0"/>
-                <a:ea typeface="Segoe UI" pitchFamily="34" charset="-122"/>
-                <a:cs typeface="Segoe UI" pitchFamily="34" charset="-120"/>
-              </a:rPr>
-              <a:t>04</a:t>
-            </a:r>
-            <a:endParaRPr lang="en-US" sz="1700" dirty="0"/>
-          </a:p>
-        </p:txBody>
-      </p:sp>
-      <p:sp>
-        <p:nvSpPr>
-          <p:cNvPr id="15" name="Text 13"/>
-          <p:cNvSpPr/>
-          <p:nvPr/>
-        </p:nvSpPr>
-        <p:spPr>
-          <a:xfrm>
-            <a:off x="1325880" y="4654296"/>
-            <a:ext cx="10195560" cy="731520"/>
-          </a:xfrm>
-          <a:prstGeom prst="rect">
-            <a:avLst/>
-          </a:prstGeom>
-          <a:noFill/>
-          <a:ln/>
-        </p:spPr>
-        <p:txBody>
-          <a:bodyPr wrap="square" lIns="0" tIns="0" rIns="0" bIns="0" rtlCol="0" anchor="ctr"/>
-          <a:lstStyle/>
-          <a:p>
-            <a:pPr indent="0" marL="0">
-              <a:buNone/>
-            </a:pPr>
-            <a:r>
-              <a:rPr lang="en-US" sz="2000" dirty="0">
-                <a:solidFill>
-                  <a:srgbClr val="183449"/>
-                </a:solidFill>
-                <a:latin typeface="Segoe UI" pitchFamily="34" charset="0"/>
-                <a:ea typeface="Segoe UI" pitchFamily="34" charset="-122"/>
-                <a:cs typeface="Segoe UI" pitchFamily="34" charset="-120"/>
-              </a:rPr>
-              <a:t>Preview, region and evaluator-version limits still apply.</a:t>
-            </a:r>
-            <a:endParaRPr lang="en-US" sz="2000" dirty="0"/>
-          </a:p>
-        </p:txBody>
-      </p:sp>
-      <p:sp>
-        <p:nvSpPr>
-          <p:cNvPr id="16" name="Shape 14"/>
-          <p:cNvSpPr/>
-          <p:nvPr/>
-        </p:nvSpPr>
-        <p:spPr>
-          <a:xfrm>
-            <a:off x="1325880" y="5486400"/>
-            <a:ext cx="10149840" cy="0"/>
-          </a:xfrm>
-          <a:prstGeom prst="line">
-            <a:avLst/>
-          </a:prstGeom>
-          <a:noFill/>
-          <a:ln w="6350">
-            <a:solidFill>
-              <a:srgbClr val="DCE5ED"/>
-            </a:solidFill>
-            <a:prstDash val="solid"/>
-          </a:ln>
-        </p:spPr>
-      </p:sp>
-      <p:sp>
-        <p:nvSpPr>
-          <p:cNvPr id="17" name="Text 15">
-            <a:hlinkClick r:id="rId1" tooltip=""/>
+          <p:cNvPr id="8" name="Text 5">
+            <a:hlinkClick r:id="rId3" tooltip=""/>
           </p:cNvPr>
           <p:cNvSpPr/>
           <p:nvPr/>
@@ -6789,7 +6675,7 @@
                 <a:latin typeface="Segoe UI" pitchFamily="34" charset="0"/>
                 <a:ea typeface="Segoe UI" pitchFamily="34" charset="-122"/>
                 <a:cs typeface="Segoe UI" pitchFamily="34" charset="-120"/>
-                <a:hlinkClick r:id="rId1" invalidUrl="" action="" tgtFrame="" tooltip="" history="1" highlightClick="0" endSnd="0">
+                <a:hlinkClick r:id="rId3" invalidUrl="" action="" tgtFrame="" tooltip="" history="1" highlightClick="0" endSnd="0">
                   <a:extLst>
                     <a:ext uri="{A12FA001-AC4F-418D-AE19-62706E023703}">
                       <ahyp:hlinkClr xmlns:ahyp="http://schemas.microsoft.com/office/drawing/2018/hyperlinkcolor" val="tx"/>
@@ -6805,7 +6691,7 @@
       </p:sp>
       <p:sp>
         <p:nvSpPr>
-          <p:cNvPr id="18" name="Text 16"/>
+          <p:cNvPr id="9" name="Text 6"/>
           <p:cNvSpPr/>
           <p:nvPr/>
         </p:nvSpPr>
@@ -6836,7 +6722,7 @@
                 <a:ea typeface="Segoe UI" pitchFamily="34" charset="-122"/>
                 <a:cs typeface="Segoe UI" pitchFamily="34" charset="-120"/>
               </a:rPr>
-              <a:t>13 / 35</a:t>
+              <a:t>13 / 37</a:t>
             </a:r>
             <a:endParaRPr lang="en-US" sz="1000" dirty="0"/>
           </a:p>
@@ -6973,77 +6859,102 @@
                 <a:ea typeface="Segoe UI" pitchFamily="34" charset="-122"/>
                 <a:cs typeface="Segoe UI" pitchFamily="34" charset="-120"/>
               </a:rPr>
-              <a:t>The built-in evaluator contract</a:t>
+              <a:t>Portal checkpoint: inspect scores and reasons</a:t>
             </a:r>
             <a:endParaRPr lang="en-US" sz="2700" dirty="0"/>
           </a:p>
         </p:txBody>
       </p:sp>
-      <p:sp>
-        <p:nvSpPr>
-          <p:cNvPr id="5" name="Text 3"/>
-          <p:cNvSpPr/>
-          <p:nvPr/>
-        </p:nvSpPr>
-        <p:spPr>
-          <a:xfrm>
-            <a:off x="594360" y="1828800"/>
-            <a:ext cx="640080" cy="594360"/>
-          </a:xfrm>
-          <a:prstGeom prst="rect">
-            <a:avLst/>
-          </a:prstGeom>
-          <a:noFill/>
-          <a:ln/>
-        </p:spPr>
-        <p:txBody>
-          <a:bodyPr wrap="square" lIns="0" tIns="0" rIns="0" bIns="0" rtlCol="0" anchor="ctr"/>
-          <a:lstStyle/>
-          <a:p>
-            <a:pPr indent="0" marL="0">
-              <a:buNone/>
-            </a:pPr>
-            <a:r>
-              <a:rPr lang="en-US" sz="1700" b="1" dirty="0">
-                <a:solidFill>
-                  <a:srgbClr val="0078D4"/>
-                </a:solidFill>
-                <a:latin typeface="Segoe UI" pitchFamily="34" charset="0"/>
-                <a:ea typeface="Segoe UI" pitchFamily="34" charset="-122"/>
-                <a:cs typeface="Segoe UI" pitchFamily="34" charset="-120"/>
-              </a:rPr>
-              <a:t>01</a:t>
-            </a:r>
-            <a:endParaRPr lang="en-US" sz="1700" dirty="0"/>
-          </a:p>
-        </p:txBody>
-      </p:sp>
-      <p:sp>
-        <p:nvSpPr>
-          <p:cNvPr id="6" name="Text 4"/>
-          <p:cNvSpPr/>
-          <p:nvPr/>
-        </p:nvSpPr>
-        <p:spPr>
-          <a:xfrm>
-            <a:off x="1325880" y="1828800"/>
-            <a:ext cx="10195560" cy="731520"/>
-          </a:xfrm>
-          <a:prstGeom prst="rect">
-            <a:avLst/>
-          </a:prstGeom>
-          <a:noFill/>
-          <a:ln/>
-        </p:spPr>
-        <p:txBody>
-          <a:bodyPr wrap="square" lIns="0" tIns="0" rIns="0" bIns="0" rtlCol="0" anchor="ctr"/>
-          <a:lstStyle/>
-          <a:p>
-            <a:pPr indent="0" marL="0">
-              <a:buNone/>
-            </a:pPr>
-            <a:r>
-              <a:rPr lang="en-US" sz="2000" dirty="0">
+      <p:pic>
+        <p:nvPicPr>
+          <p:cNvPr id="5" name="Image 0" descr="Five retained result rows include Coherence Pass: 4 and Pass: 5.">
+            <a:hlinkClick r:id="rId2" tooltip=""/>
+          </p:cNvPr>
+          <p:cNvPicPr>
+            <a:picLocks noChangeAspect="1"/>
+          </p:cNvPicPr>
+          <p:nvPr/>
+        </p:nvPicPr>
+        <p:blipFill>
+          <a:blip r:embed="rId1"/>
+          <a:srcRect l="18435" r="1529" t="46763" b="16547"/>
+          <a:stretch/>
+        </p:blipFill>
+        <p:spPr>
+          <a:xfrm>
+            <a:off x="548640" y="1874520"/>
+            <a:ext cx="11064240" cy="3170091"/>
+          </a:xfrm>
+          <a:prstGeom prst="rect">
+            <a:avLst/>
+          </a:prstGeom>
+        </p:spPr>
+      </p:pic>
+      <p:sp>
+        <p:nvSpPr>
+          <p:cNvPr id="6" name="Text 3"/>
+          <p:cNvSpPr/>
+          <p:nvPr/>
+        </p:nvSpPr>
+        <p:spPr>
+          <a:xfrm>
+            <a:off x="548640" y="5166360"/>
+            <a:ext cx="11064240" cy="411480"/>
+          </a:xfrm>
+          <a:prstGeom prst="rect">
+            <a:avLst/>
+          </a:prstGeom>
+          <a:noFill/>
+          <a:ln/>
+        </p:spPr>
+        <p:txBody>
+          <a:bodyPr wrap="square" lIns="0" tIns="0" rIns="0" bIns="0" rtlCol="0" anchor="ctr"/>
+          <a:lstStyle/>
+          <a:p>
+            <a:pPr indent="0" marL="0">
+              <a:buNone/>
+            </a:pPr>
+            <a:r>
+              <a:rPr lang="en-US" sz="1600" dirty="0">
+                <a:solidFill>
+                  <a:srgbClr val="526777"/>
+                </a:solidFill>
+                <a:latin typeface="Segoe UI" pitchFamily="34" charset="0"/>
+                <a:ea typeface="Segoe UI" pitchFamily="34" charset="-122"/>
+                <a:cs typeface="Segoe UI" pitchFamily="34" charset="-120"/>
+              </a:rPr>
+              <a:t>French staging v6 | 2026-10-23 | Five retained result rows</a:t>
+            </a:r>
+            <a:endParaRPr lang="en-US" sz="1600" dirty="0"/>
+          </a:p>
+        </p:txBody>
+      </p:sp>
+      <p:sp>
+        <p:nvSpPr>
+          <p:cNvPr id="7" name="Text 4"/>
+          <p:cNvSpPr/>
+          <p:nvPr/>
+        </p:nvSpPr>
+        <p:spPr>
+          <a:xfrm>
+            <a:off x="548640" y="5623560"/>
+            <a:ext cx="11064240" cy="457200"/>
+          </a:xfrm>
+          <a:prstGeom prst="rect">
+            <a:avLst/>
+          </a:prstGeom>
+          <a:noFill/>
+          <a:ln/>
+        </p:spPr>
+        <p:txBody>
+          <a:bodyPr wrap="square" lIns="0" tIns="0" rIns="0" bIns="0" rtlCol="0" anchor="ctr"/>
+          <a:lstStyle/>
+          <a:p>
+            <a:pPr indent="0" marL="0">
+              <a:buNone/>
+            </a:pPr>
+            <a:r>
+              <a:rPr lang="en-US" sz="2000" b="1" dirty="0">
                 <a:solidFill>
                   <a:srgbClr val="183449"/>
                 </a:solidFill>
@@ -7051,7 +6962,7 @@
                 <a:ea typeface="Segoe UI" pitchFamily="34" charset="-122"/>
                 <a:cs typeface="Segoe UI" pitchFamily="34" charset="-120"/>
               </a:rPr>
-              <a:t>type: azure_ai_evaluator; evaluator_name: builtin.groundedness.</a:t>
+              <a:t>Pass: 4 can coexist with a 100% / 5/5 pass-rate summary.</a:t>
             </a:r>
             <a:endParaRPr lang="en-US" sz="2000" dirty="0"/>
           </a:p>
@@ -7059,334 +6970,8 @@
       </p:sp>
       <p:sp>
         <p:nvSpPr>
-          <p:cNvPr id="7" name="Shape 5"/>
-          <p:cNvSpPr/>
-          <p:nvPr/>
-        </p:nvSpPr>
-        <p:spPr>
-          <a:xfrm>
-            <a:off x="1325880" y="2660904"/>
-            <a:ext cx="10149840" cy="0"/>
-          </a:xfrm>
-          <a:prstGeom prst="line">
-            <a:avLst/>
-          </a:prstGeom>
-          <a:noFill/>
-          <a:ln w="6350">
-            <a:solidFill>
-              <a:srgbClr val="DCE5ED"/>
-            </a:solidFill>
-            <a:prstDash val="solid"/>
-          </a:ln>
-        </p:spPr>
-      </p:sp>
-      <p:sp>
-        <p:nvSpPr>
-          <p:cNvPr id="8" name="Text 6"/>
-          <p:cNvSpPr/>
-          <p:nvPr/>
-        </p:nvSpPr>
-        <p:spPr>
-          <a:xfrm>
-            <a:off x="594360" y="2770632"/>
-            <a:ext cx="640080" cy="594360"/>
-          </a:xfrm>
-          <a:prstGeom prst="rect">
-            <a:avLst/>
-          </a:prstGeom>
-          <a:noFill/>
-          <a:ln/>
-        </p:spPr>
-        <p:txBody>
-          <a:bodyPr wrap="square" lIns="0" tIns="0" rIns="0" bIns="0" rtlCol="0" anchor="ctr"/>
-          <a:lstStyle/>
-          <a:p>
-            <a:pPr indent="0" marL="0">
-              <a:buNone/>
-            </a:pPr>
-            <a:r>
-              <a:rPr lang="en-US" sz="1700" b="1" dirty="0">
-                <a:solidFill>
-                  <a:srgbClr val="0078D4"/>
-                </a:solidFill>
-                <a:latin typeface="Segoe UI" pitchFamily="34" charset="0"/>
-                <a:ea typeface="Segoe UI" pitchFamily="34" charset="-122"/>
-                <a:cs typeface="Segoe UI" pitchFamily="34" charset="-120"/>
-              </a:rPr>
-              <a:t>02</a:t>
-            </a:r>
-            <a:endParaRPr lang="en-US" sz="1700" dirty="0"/>
-          </a:p>
-        </p:txBody>
-      </p:sp>
-      <p:sp>
-        <p:nvSpPr>
-          <p:cNvPr id="9" name="Text 7"/>
-          <p:cNvSpPr/>
-          <p:nvPr/>
-        </p:nvSpPr>
-        <p:spPr>
-          <a:xfrm>
-            <a:off x="1325880" y="2770632"/>
-            <a:ext cx="10195560" cy="731520"/>
-          </a:xfrm>
-          <a:prstGeom prst="rect">
-            <a:avLst/>
-          </a:prstGeom>
-          <a:noFill/>
-          <a:ln/>
-        </p:spPr>
-        <p:txBody>
-          <a:bodyPr wrap="square" lIns="0" tIns="0" rIns="0" bIns="0" rtlCol="0" anchor="ctr"/>
-          <a:lstStyle/>
-          <a:p>
-            <a:pPr indent="0" marL="0">
-              <a:buNone/>
-            </a:pPr>
-            <a:r>
-              <a:rPr lang="en-US" sz="2000" dirty="0">
-                <a:solidFill>
-                  <a:srgbClr val="183449"/>
-                </a:solidFill>
-                <a:latin typeface="Segoe UI" pitchFamily="34" charset="0"/>
-                <a:ea typeface="Segoe UI" pitchFamily="34" charset="-122"/>
-                <a:cs typeface="Segoe UI" pitchFamily="34" charset="-120"/>
-              </a:rPr>
-              <a:t>Map trusted context and selected-locale response explicitly.</a:t>
-            </a:r>
-            <a:endParaRPr lang="en-US" sz="2000" dirty="0"/>
-          </a:p>
-        </p:txBody>
-      </p:sp>
-      <p:sp>
-        <p:nvSpPr>
-          <p:cNvPr id="10" name="Shape 8"/>
-          <p:cNvSpPr/>
-          <p:nvPr/>
-        </p:nvSpPr>
-        <p:spPr>
-          <a:xfrm>
-            <a:off x="1325880" y="3602736"/>
-            <a:ext cx="10149840" cy="0"/>
-          </a:xfrm>
-          <a:prstGeom prst="line">
-            <a:avLst/>
-          </a:prstGeom>
-          <a:noFill/>
-          <a:ln w="6350">
-            <a:solidFill>
-              <a:srgbClr val="DCE5ED"/>
-            </a:solidFill>
-            <a:prstDash val="solid"/>
-          </a:ln>
-        </p:spPr>
-      </p:sp>
-      <p:sp>
-        <p:nvSpPr>
-          <p:cNvPr id="11" name="Text 9"/>
-          <p:cNvSpPr/>
-          <p:nvPr/>
-        </p:nvSpPr>
-        <p:spPr>
-          <a:xfrm>
-            <a:off x="594360" y="3712464"/>
-            <a:ext cx="640080" cy="594360"/>
-          </a:xfrm>
-          <a:prstGeom prst="rect">
-            <a:avLst/>
-          </a:prstGeom>
-          <a:noFill/>
-          <a:ln/>
-        </p:spPr>
-        <p:txBody>
-          <a:bodyPr wrap="square" lIns="0" tIns="0" rIns="0" bIns="0" rtlCol="0" anchor="ctr"/>
-          <a:lstStyle/>
-          <a:p>
-            <a:pPr indent="0" marL="0">
-              <a:buNone/>
-            </a:pPr>
-            <a:r>
-              <a:rPr lang="en-US" sz="1700" b="1" dirty="0">
-                <a:solidFill>
-                  <a:srgbClr val="0078D4"/>
-                </a:solidFill>
-                <a:latin typeface="Segoe UI" pitchFamily="34" charset="0"/>
-                <a:ea typeface="Segoe UI" pitchFamily="34" charset="-122"/>
-                <a:cs typeface="Segoe UI" pitchFamily="34" charset="-120"/>
-              </a:rPr>
-              <a:t>03</a:t>
-            </a:r>
-            <a:endParaRPr lang="en-US" sz="1700" dirty="0"/>
-          </a:p>
-        </p:txBody>
-      </p:sp>
-      <p:sp>
-        <p:nvSpPr>
-          <p:cNvPr id="12" name="Text 10"/>
-          <p:cNvSpPr/>
-          <p:nvPr/>
-        </p:nvSpPr>
-        <p:spPr>
-          <a:xfrm>
-            <a:off x="1325880" y="3712464"/>
-            <a:ext cx="10195560" cy="731520"/>
-          </a:xfrm>
-          <a:prstGeom prst="rect">
-            <a:avLst/>
-          </a:prstGeom>
-          <a:noFill/>
-          <a:ln/>
-        </p:spPr>
-        <p:txBody>
-          <a:bodyPr wrap="square" lIns="0" tIns="0" rIns="0" bIns="0" rtlCol="0" anchor="ctr"/>
-          <a:lstStyle/>
-          <a:p>
-            <a:pPr indent="0" marL="0">
-              <a:buNone/>
-            </a:pPr>
-            <a:r>
-              <a:rPr lang="en-US" sz="2000" dirty="0">
-                <a:solidFill>
-                  <a:srgbClr val="183449"/>
-                </a:solidFill>
-                <a:latin typeface="Segoe UI" pitchFamily="34" charset="0"/>
-                <a:ea typeface="Segoe UI" pitchFamily="34" charset="-122"/>
-                <a:cs typeface="Segoe UI" pitchFamily="34" charset="-120"/>
-              </a:rPr>
-              <a:t>The pinned runner uses initialization_parameters.deployment_name.</a:t>
-            </a:r>
-            <a:endParaRPr lang="en-US" sz="2000" dirty="0"/>
-          </a:p>
-        </p:txBody>
-      </p:sp>
-      <p:sp>
-        <p:nvSpPr>
-          <p:cNvPr id="13" name="Shape 11"/>
-          <p:cNvSpPr/>
-          <p:nvPr/>
-        </p:nvSpPr>
-        <p:spPr>
-          <a:xfrm>
-            <a:off x="1325880" y="4544568"/>
-            <a:ext cx="10149840" cy="0"/>
-          </a:xfrm>
-          <a:prstGeom prst="line">
-            <a:avLst/>
-          </a:prstGeom>
-          <a:noFill/>
-          <a:ln w="6350">
-            <a:solidFill>
-              <a:srgbClr val="DCE5ED"/>
-            </a:solidFill>
-            <a:prstDash val="solid"/>
-          </a:ln>
-        </p:spPr>
-      </p:sp>
-      <p:sp>
-        <p:nvSpPr>
-          <p:cNvPr id="14" name="Text 12"/>
-          <p:cNvSpPr/>
-          <p:nvPr/>
-        </p:nvSpPr>
-        <p:spPr>
-          <a:xfrm>
-            <a:off x="594360" y="4654296"/>
-            <a:ext cx="640080" cy="594360"/>
-          </a:xfrm>
-          <a:prstGeom prst="rect">
-            <a:avLst/>
-          </a:prstGeom>
-          <a:noFill/>
-          <a:ln/>
-        </p:spPr>
-        <p:txBody>
-          <a:bodyPr wrap="square" lIns="0" tIns="0" rIns="0" bIns="0" rtlCol="0" anchor="ctr"/>
-          <a:lstStyle/>
-          <a:p>
-            <a:pPr indent="0" marL="0">
-              <a:buNone/>
-            </a:pPr>
-            <a:r>
-              <a:rPr lang="en-US" sz="1700" b="1" dirty="0">
-                <a:solidFill>
-                  <a:srgbClr val="0078D4"/>
-                </a:solidFill>
-                <a:latin typeface="Segoe UI" pitchFamily="34" charset="0"/>
-                <a:ea typeface="Segoe UI" pitchFamily="34" charset="-122"/>
-                <a:cs typeface="Segoe UI" pitchFamily="34" charset="-120"/>
-              </a:rPr>
-              <a:t>04</a:t>
-            </a:r>
-            <a:endParaRPr lang="en-US" sz="1700" dirty="0"/>
-          </a:p>
-        </p:txBody>
-      </p:sp>
-      <p:sp>
-        <p:nvSpPr>
-          <p:cNvPr id="15" name="Text 13"/>
-          <p:cNvSpPr/>
-          <p:nvPr/>
-        </p:nvSpPr>
-        <p:spPr>
-          <a:xfrm>
-            <a:off x="1325880" y="4654296"/>
-            <a:ext cx="10195560" cy="731520"/>
-          </a:xfrm>
-          <a:prstGeom prst="rect">
-            <a:avLst/>
-          </a:prstGeom>
-          <a:noFill/>
-          <a:ln/>
-        </p:spPr>
-        <p:txBody>
-          <a:bodyPr wrap="square" lIns="0" tIns="0" rIns="0" bIns="0" rtlCol="0" anchor="ctr"/>
-          <a:lstStyle/>
-          <a:p>
-            <a:pPr indent="0" marL="0">
-              <a:buNone/>
-            </a:pPr>
-            <a:r>
-              <a:rPr lang="en-US" sz="2000" dirty="0">
-                <a:solidFill>
-                  <a:srgbClr val="183449"/>
-                </a:solidFill>
-                <a:latin typeface="Segoe UI" pitchFamily="34" charset="0"/>
-                <a:ea typeface="Segoe UI" pitchFamily="34" charset="-122"/>
-                <a:cs typeface="Segoe UI" pitchFamily="34" charset="-120"/>
-              </a:rPr>
-              <a:t>Task adherence receives task messages and normalized output items.</a:t>
-            </a:r>
-            <a:endParaRPr lang="en-US" sz="2000" dirty="0"/>
-          </a:p>
-        </p:txBody>
-      </p:sp>
-      <p:sp>
-        <p:nvSpPr>
-          <p:cNvPr id="16" name="Shape 14"/>
-          <p:cNvSpPr/>
-          <p:nvPr/>
-        </p:nvSpPr>
-        <p:spPr>
-          <a:xfrm>
-            <a:off x="1325880" y="5486400"/>
-            <a:ext cx="10149840" cy="0"/>
-          </a:xfrm>
-          <a:prstGeom prst="line">
-            <a:avLst/>
-          </a:prstGeom>
-          <a:noFill/>
-          <a:ln w="6350">
-            <a:solidFill>
-              <a:srgbClr val="DCE5ED"/>
-            </a:solidFill>
-            <a:prstDash val="solid"/>
-          </a:ln>
-        </p:spPr>
-      </p:sp>
-      <p:sp>
-        <p:nvSpPr>
-          <p:cNvPr id="17" name="Text 15">
-            <a:hlinkClick r:id="rId1" tooltip=""/>
+          <p:cNvPr id="8" name="Text 5">
+            <a:hlinkClick r:id="rId3" tooltip=""/>
           </p:cNvPr>
           <p:cNvSpPr/>
           <p:nvPr/>
@@ -7417,7 +7002,7 @@
                 <a:latin typeface="Segoe UI" pitchFamily="34" charset="0"/>
                 <a:ea typeface="Segoe UI" pitchFamily="34" charset="-122"/>
                 <a:cs typeface="Segoe UI" pitchFamily="34" charset="-120"/>
-                <a:hlinkClick r:id="rId1" invalidUrl="" action="" tgtFrame="" tooltip="" history="1" highlightClick="0" endSnd="0">
+                <a:hlinkClick r:id="rId3" invalidUrl="" action="" tgtFrame="" tooltip="" history="1" highlightClick="0" endSnd="0">
                   <a:extLst>
                     <a:ext uri="{A12FA001-AC4F-418D-AE19-62706E023703}">
                       <ahyp:hlinkClr xmlns:ahyp="http://schemas.microsoft.com/office/drawing/2018/hyperlinkcolor" val="tx"/>
@@ -7433,7 +7018,7 @@
       </p:sp>
       <p:sp>
         <p:nvSpPr>
-          <p:cNvPr id="18" name="Text 16"/>
+          <p:cNvPr id="9" name="Text 6"/>
           <p:cNvSpPr/>
           <p:nvPr/>
         </p:nvSpPr>
@@ -7464,7 +7049,7 @@
                 <a:ea typeface="Segoe UI" pitchFamily="34" charset="-122"/>
                 <a:cs typeface="Segoe UI" pitchFamily="34" charset="-120"/>
               </a:rPr>
-              <a:t>14 / 35</a:t>
+              <a:t>14 / 37</a:t>
             </a:r>
             <a:endParaRPr lang="en-US" sz="1000" dirty="0"/>
           </a:p>
@@ -7601,7 +7186,7 @@
                 <a:ea typeface="Segoe UI" pitchFamily="34" charset="-122"/>
                 <a:cs typeface="Segoe UI" pitchFamily="34" charset="-120"/>
               </a:rPr>
-              <a:t>Three metrics, three different questions</a:t>
+              <a:t>Do not mix API generations</a:t>
             </a:r>
             <a:endParaRPr lang="en-US" sz="2700" dirty="0"/>
           </a:p>
@@ -7679,7 +7264,7 @@
                 <a:ea typeface="Segoe UI" pitchFamily="34" charset="-122"/>
                 <a:cs typeface="Segoe UI" pitchFamily="34" charset="-120"/>
               </a:rPr>
-              <a:t>Coherence: is this acknowledgement logically understandable?</a:t>
+              <a:t>Projects SDK + native Evals is this repository’s cloud path.</a:t>
             </a:r>
             <a:endParaRPr lang="en-US" sz="2000" dirty="0"/>
           </a:p>
@@ -7780,7 +7365,7 @@
                 <a:ea typeface="Segoe UI" pitchFamily="34" charset="-122"/>
                 <a:cs typeface="Segoe UI" pitchFamily="34" charset="-120"/>
               </a:rPr>
-              <a:t>Groundedness: is it supported by independent provided facts?</a:t>
+              <a:t>azure-ai-evaluation has a separate local evaluate() API.</a:t>
             </a:r>
             <a:endParaRPr lang="en-US" sz="2000" dirty="0"/>
           </a:p>
@@ -7881,7 +7466,7 @@
                 <a:ea typeface="Segoe UI" pitchFamily="34" charset="-122"/>
                 <a:cs typeface="Segoe UI" pitchFamily="34" charset="-120"/>
               </a:rPr>
-              <a:t>Task adherence: does it follow the bounded applicant task?</a:t>
+              <a:t>Built-ins, code graders and prompt rubrics have different schemas.</a:t>
             </a:r>
             <a:endParaRPr lang="en-US" sz="2000" dirty="0"/>
           </a:p>
@@ -7982,7 +7567,7 @@
                 <a:ea typeface="Segoe UI" pitchFamily="34" charset="-122"/>
                 <a:cs typeface="Segoe UI" pitchFamily="34" charset="-120"/>
               </a:rPr>
-              <a:t>None of these proves calculator, tool, persistence or RBAC behavior.</a:t>
+              <a:t>Preview, region and evaluator-version limits still apply.</a:t>
             </a:r>
             <a:endParaRPr lang="en-US" sz="2000" dirty="0"/>
           </a:p>
@@ -8092,7 +7677,7 @@
                 <a:ea typeface="Segoe UI" pitchFamily="34" charset="-122"/>
                 <a:cs typeface="Segoe UI" pitchFamily="34" charset="-120"/>
               </a:rPr>
-              <a:t>15 / 35</a:t>
+              <a:t>15 / 37</a:t>
             </a:r>
             <a:endParaRPr lang="en-US" sz="1000" dirty="0"/>
           </a:p>
@@ -8229,102 +7814,77 @@
                 <a:ea typeface="Segoe UI" pitchFamily="34" charset="-122"/>
                 <a:cs typeface="Segoe UI" pitchFamily="34" charset="-120"/>
               </a:rPr>
-              <a:t>Groundedness: inspect the input contract</a:t>
+              <a:t>The built-in evaluator contract</a:t>
             </a:r>
             <a:endParaRPr lang="en-US" sz="2700" dirty="0"/>
           </a:p>
         </p:txBody>
       </p:sp>
-      <p:pic>
-        <p:nvPicPr>
-          <p:cNvPr id="5" name="Image 0" descr="Groundedness catalog: input alternatives and ordinal 1-5 score.">
-            <a:hlinkClick r:id="rId2" tooltip=""/>
-          </p:cNvPr>
-          <p:cNvPicPr>
-            <a:picLocks noChangeAspect="1"/>
-          </p:cNvPicPr>
-          <p:nvPr/>
-        </p:nvPicPr>
-        <p:blipFill>
-          <a:blip r:embed="rId1"/>
-          <a:srcRect l="18206" r="202" t="53937" b="9924"/>
-          <a:stretch/>
-        </p:blipFill>
-        <p:spPr>
-          <a:xfrm>
-            <a:off x="548640" y="1874520"/>
-            <a:ext cx="11064240" cy="3063240"/>
-          </a:xfrm>
-          <a:prstGeom prst="rect">
-            <a:avLst/>
-          </a:prstGeom>
-        </p:spPr>
-      </p:pic>
-      <p:sp>
-        <p:nvSpPr>
-          <p:cNvPr id="6" name="Text 3"/>
-          <p:cNvSpPr/>
-          <p:nvPr/>
-        </p:nvSpPr>
-        <p:spPr>
-          <a:xfrm>
-            <a:off x="548640" y="5166360"/>
-            <a:ext cx="11064240" cy="411480"/>
-          </a:xfrm>
-          <a:prstGeom prst="rect">
-            <a:avLst/>
-          </a:prstGeom>
-          <a:noFill/>
-          <a:ln/>
-        </p:spPr>
-        <p:txBody>
-          <a:bodyPr wrap="square" lIns="0" tIns="0" rIns="0" bIns="0" rtlCol="0" anchor="ctr"/>
-          <a:lstStyle/>
-          <a:p>
-            <a:pPr indent="0" marL="0">
-              <a:buNone/>
-            </a:pPr>
-            <a:r>
-              <a:rPr lang="en-US" sz="1600" dirty="0">
-                <a:solidFill>
-                  <a:srgbClr val="526777"/>
-                </a:solidFill>
-                <a:latin typeface="Segoe UI" pitchFamily="34" charset="0"/>
-                <a:ea typeface="Segoe UI" pitchFamily="34" charset="-122"/>
-                <a:cs typeface="Segoe UI" pitchFamily="34" charset="-120"/>
-              </a:rPr>
-              <a:t>Staging catalog v18 | 2026-10-23 | Definition, not run results</a:t>
-            </a:r>
-            <a:endParaRPr lang="en-US" sz="1600" dirty="0"/>
-          </a:p>
-        </p:txBody>
-      </p:sp>
-      <p:sp>
-        <p:nvSpPr>
-          <p:cNvPr id="7" name="Text 4"/>
-          <p:cNvSpPr/>
-          <p:nvPr/>
-        </p:nvSpPr>
-        <p:spPr>
-          <a:xfrm>
-            <a:off x="548640" y="5623560"/>
-            <a:ext cx="11064240" cy="457200"/>
-          </a:xfrm>
-          <a:prstGeom prst="rect">
-            <a:avLst/>
-          </a:prstGeom>
-          <a:noFill/>
-          <a:ln/>
-        </p:spPr>
-        <p:txBody>
-          <a:bodyPr wrap="square" lIns="0" tIns="0" rIns="0" bIns="0" rtlCol="0" anchor="ctr"/>
-          <a:lstStyle/>
-          <a:p>
-            <a:pPr indent="0" marL="0">
-              <a:buNone/>
-            </a:pPr>
-            <a:r>
-              <a:rPr lang="en-US" sz="2000" b="1" dirty="0">
+      <p:sp>
+        <p:nvSpPr>
+          <p:cNvPr id="5" name="Text 3"/>
+          <p:cNvSpPr/>
+          <p:nvPr/>
+        </p:nvSpPr>
+        <p:spPr>
+          <a:xfrm>
+            <a:off x="594360" y="1828800"/>
+            <a:ext cx="640080" cy="594360"/>
+          </a:xfrm>
+          <a:prstGeom prst="rect">
+            <a:avLst/>
+          </a:prstGeom>
+          <a:noFill/>
+          <a:ln/>
+        </p:spPr>
+        <p:txBody>
+          <a:bodyPr wrap="square" lIns="0" tIns="0" rIns="0" bIns="0" rtlCol="0" anchor="ctr"/>
+          <a:lstStyle/>
+          <a:p>
+            <a:pPr indent="0" marL="0">
+              <a:buNone/>
+            </a:pPr>
+            <a:r>
+              <a:rPr lang="en-US" sz="1700" b="1" dirty="0">
+                <a:solidFill>
+                  <a:srgbClr val="0078D4"/>
+                </a:solidFill>
+                <a:latin typeface="Segoe UI" pitchFamily="34" charset="0"/>
+                <a:ea typeface="Segoe UI" pitchFamily="34" charset="-122"/>
+                <a:cs typeface="Segoe UI" pitchFamily="34" charset="-120"/>
+              </a:rPr>
+              <a:t>01</a:t>
+            </a:r>
+            <a:endParaRPr lang="en-US" sz="1700" dirty="0"/>
+          </a:p>
+        </p:txBody>
+      </p:sp>
+      <p:sp>
+        <p:nvSpPr>
+          <p:cNvPr id="6" name="Text 4"/>
+          <p:cNvSpPr/>
+          <p:nvPr/>
+        </p:nvSpPr>
+        <p:spPr>
+          <a:xfrm>
+            <a:off x="1325880" y="1828800"/>
+            <a:ext cx="10195560" cy="731520"/>
+          </a:xfrm>
+          <a:prstGeom prst="rect">
+            <a:avLst/>
+          </a:prstGeom>
+          <a:noFill/>
+          <a:ln/>
+        </p:spPr>
+        <p:txBody>
+          <a:bodyPr wrap="square" lIns="0" tIns="0" rIns="0" bIns="0" rtlCol="0" anchor="ctr"/>
+          <a:lstStyle/>
+          <a:p>
+            <a:pPr indent="0" marL="0">
+              <a:buNone/>
+            </a:pPr>
+            <a:r>
+              <a:rPr lang="en-US" sz="2000" dirty="0">
                 <a:solidFill>
                   <a:srgbClr val="183449"/>
                 </a:solidFill>
@@ -8332,7 +7892,7 @@
                 <a:ea typeface="Segoe UI" pitchFamily="34" charset="-122"/>
                 <a:cs typeface="Segoe UI" pitchFamily="34" charset="-120"/>
               </a:rPr>
-              <a:t>Use independent trusted context, never the candidate answer.</a:t>
+              <a:t>type: azure_ai_evaluator; evaluator_name: builtin.groundedness.</a:t>
             </a:r>
             <a:endParaRPr lang="en-US" sz="2000" dirty="0"/>
           </a:p>
@@ -8340,8 +7900,334 @@
       </p:sp>
       <p:sp>
         <p:nvSpPr>
-          <p:cNvPr id="8" name="Text 5">
-            <a:hlinkClick r:id="rId3" tooltip=""/>
+          <p:cNvPr id="7" name="Shape 5"/>
+          <p:cNvSpPr/>
+          <p:nvPr/>
+        </p:nvSpPr>
+        <p:spPr>
+          <a:xfrm>
+            <a:off x="1325880" y="2660904"/>
+            <a:ext cx="10149840" cy="0"/>
+          </a:xfrm>
+          <a:prstGeom prst="line">
+            <a:avLst/>
+          </a:prstGeom>
+          <a:noFill/>
+          <a:ln w="6350">
+            <a:solidFill>
+              <a:srgbClr val="DCE5ED"/>
+            </a:solidFill>
+            <a:prstDash val="solid"/>
+          </a:ln>
+        </p:spPr>
+      </p:sp>
+      <p:sp>
+        <p:nvSpPr>
+          <p:cNvPr id="8" name="Text 6"/>
+          <p:cNvSpPr/>
+          <p:nvPr/>
+        </p:nvSpPr>
+        <p:spPr>
+          <a:xfrm>
+            <a:off x="594360" y="2770632"/>
+            <a:ext cx="640080" cy="594360"/>
+          </a:xfrm>
+          <a:prstGeom prst="rect">
+            <a:avLst/>
+          </a:prstGeom>
+          <a:noFill/>
+          <a:ln/>
+        </p:spPr>
+        <p:txBody>
+          <a:bodyPr wrap="square" lIns="0" tIns="0" rIns="0" bIns="0" rtlCol="0" anchor="ctr"/>
+          <a:lstStyle/>
+          <a:p>
+            <a:pPr indent="0" marL="0">
+              <a:buNone/>
+            </a:pPr>
+            <a:r>
+              <a:rPr lang="en-US" sz="1700" b="1" dirty="0">
+                <a:solidFill>
+                  <a:srgbClr val="0078D4"/>
+                </a:solidFill>
+                <a:latin typeface="Segoe UI" pitchFamily="34" charset="0"/>
+                <a:ea typeface="Segoe UI" pitchFamily="34" charset="-122"/>
+                <a:cs typeface="Segoe UI" pitchFamily="34" charset="-120"/>
+              </a:rPr>
+              <a:t>02</a:t>
+            </a:r>
+            <a:endParaRPr lang="en-US" sz="1700" dirty="0"/>
+          </a:p>
+        </p:txBody>
+      </p:sp>
+      <p:sp>
+        <p:nvSpPr>
+          <p:cNvPr id="9" name="Text 7"/>
+          <p:cNvSpPr/>
+          <p:nvPr/>
+        </p:nvSpPr>
+        <p:spPr>
+          <a:xfrm>
+            <a:off x="1325880" y="2770632"/>
+            <a:ext cx="10195560" cy="731520"/>
+          </a:xfrm>
+          <a:prstGeom prst="rect">
+            <a:avLst/>
+          </a:prstGeom>
+          <a:noFill/>
+          <a:ln/>
+        </p:spPr>
+        <p:txBody>
+          <a:bodyPr wrap="square" lIns="0" tIns="0" rIns="0" bIns="0" rtlCol="0" anchor="ctr"/>
+          <a:lstStyle/>
+          <a:p>
+            <a:pPr indent="0" marL="0">
+              <a:buNone/>
+            </a:pPr>
+            <a:r>
+              <a:rPr lang="en-US" sz="2000" dirty="0">
+                <a:solidFill>
+                  <a:srgbClr val="183449"/>
+                </a:solidFill>
+                <a:latin typeface="Segoe UI" pitchFamily="34" charset="0"/>
+                <a:ea typeface="Segoe UI" pitchFamily="34" charset="-122"/>
+                <a:cs typeface="Segoe UI" pitchFamily="34" charset="-120"/>
+              </a:rPr>
+              <a:t>Map trusted context and selected-locale response explicitly.</a:t>
+            </a:r>
+            <a:endParaRPr lang="en-US" sz="2000" dirty="0"/>
+          </a:p>
+        </p:txBody>
+      </p:sp>
+      <p:sp>
+        <p:nvSpPr>
+          <p:cNvPr id="10" name="Shape 8"/>
+          <p:cNvSpPr/>
+          <p:nvPr/>
+        </p:nvSpPr>
+        <p:spPr>
+          <a:xfrm>
+            <a:off x="1325880" y="3602736"/>
+            <a:ext cx="10149840" cy="0"/>
+          </a:xfrm>
+          <a:prstGeom prst="line">
+            <a:avLst/>
+          </a:prstGeom>
+          <a:noFill/>
+          <a:ln w="6350">
+            <a:solidFill>
+              <a:srgbClr val="DCE5ED"/>
+            </a:solidFill>
+            <a:prstDash val="solid"/>
+          </a:ln>
+        </p:spPr>
+      </p:sp>
+      <p:sp>
+        <p:nvSpPr>
+          <p:cNvPr id="11" name="Text 9"/>
+          <p:cNvSpPr/>
+          <p:nvPr/>
+        </p:nvSpPr>
+        <p:spPr>
+          <a:xfrm>
+            <a:off x="594360" y="3712464"/>
+            <a:ext cx="640080" cy="594360"/>
+          </a:xfrm>
+          <a:prstGeom prst="rect">
+            <a:avLst/>
+          </a:prstGeom>
+          <a:noFill/>
+          <a:ln/>
+        </p:spPr>
+        <p:txBody>
+          <a:bodyPr wrap="square" lIns="0" tIns="0" rIns="0" bIns="0" rtlCol="0" anchor="ctr"/>
+          <a:lstStyle/>
+          <a:p>
+            <a:pPr indent="0" marL="0">
+              <a:buNone/>
+            </a:pPr>
+            <a:r>
+              <a:rPr lang="en-US" sz="1700" b="1" dirty="0">
+                <a:solidFill>
+                  <a:srgbClr val="0078D4"/>
+                </a:solidFill>
+                <a:latin typeface="Segoe UI" pitchFamily="34" charset="0"/>
+                <a:ea typeface="Segoe UI" pitchFamily="34" charset="-122"/>
+                <a:cs typeface="Segoe UI" pitchFamily="34" charset="-120"/>
+              </a:rPr>
+              <a:t>03</a:t>
+            </a:r>
+            <a:endParaRPr lang="en-US" sz="1700" dirty="0"/>
+          </a:p>
+        </p:txBody>
+      </p:sp>
+      <p:sp>
+        <p:nvSpPr>
+          <p:cNvPr id="12" name="Text 10"/>
+          <p:cNvSpPr/>
+          <p:nvPr/>
+        </p:nvSpPr>
+        <p:spPr>
+          <a:xfrm>
+            <a:off x="1325880" y="3712464"/>
+            <a:ext cx="10195560" cy="731520"/>
+          </a:xfrm>
+          <a:prstGeom prst="rect">
+            <a:avLst/>
+          </a:prstGeom>
+          <a:noFill/>
+          <a:ln/>
+        </p:spPr>
+        <p:txBody>
+          <a:bodyPr wrap="square" lIns="0" tIns="0" rIns="0" bIns="0" rtlCol="0" anchor="ctr"/>
+          <a:lstStyle/>
+          <a:p>
+            <a:pPr indent="0" marL="0">
+              <a:buNone/>
+            </a:pPr>
+            <a:r>
+              <a:rPr lang="en-US" sz="2000" dirty="0">
+                <a:solidFill>
+                  <a:srgbClr val="183449"/>
+                </a:solidFill>
+                <a:latin typeface="Segoe UI" pitchFamily="34" charset="0"/>
+                <a:ea typeface="Segoe UI" pitchFamily="34" charset="-122"/>
+                <a:cs typeface="Segoe UI" pitchFamily="34" charset="-120"/>
+              </a:rPr>
+              <a:t>The pinned runner uses initialization_parameters.deployment_name.</a:t>
+            </a:r>
+            <a:endParaRPr lang="en-US" sz="2000" dirty="0"/>
+          </a:p>
+        </p:txBody>
+      </p:sp>
+      <p:sp>
+        <p:nvSpPr>
+          <p:cNvPr id="13" name="Shape 11"/>
+          <p:cNvSpPr/>
+          <p:nvPr/>
+        </p:nvSpPr>
+        <p:spPr>
+          <a:xfrm>
+            <a:off x="1325880" y="4544568"/>
+            <a:ext cx="10149840" cy="0"/>
+          </a:xfrm>
+          <a:prstGeom prst="line">
+            <a:avLst/>
+          </a:prstGeom>
+          <a:noFill/>
+          <a:ln w="6350">
+            <a:solidFill>
+              <a:srgbClr val="DCE5ED"/>
+            </a:solidFill>
+            <a:prstDash val="solid"/>
+          </a:ln>
+        </p:spPr>
+      </p:sp>
+      <p:sp>
+        <p:nvSpPr>
+          <p:cNvPr id="14" name="Text 12"/>
+          <p:cNvSpPr/>
+          <p:nvPr/>
+        </p:nvSpPr>
+        <p:spPr>
+          <a:xfrm>
+            <a:off x="594360" y="4654296"/>
+            <a:ext cx="640080" cy="594360"/>
+          </a:xfrm>
+          <a:prstGeom prst="rect">
+            <a:avLst/>
+          </a:prstGeom>
+          <a:noFill/>
+          <a:ln/>
+        </p:spPr>
+        <p:txBody>
+          <a:bodyPr wrap="square" lIns="0" tIns="0" rIns="0" bIns="0" rtlCol="0" anchor="ctr"/>
+          <a:lstStyle/>
+          <a:p>
+            <a:pPr indent="0" marL="0">
+              <a:buNone/>
+            </a:pPr>
+            <a:r>
+              <a:rPr lang="en-US" sz="1700" b="1" dirty="0">
+                <a:solidFill>
+                  <a:srgbClr val="0078D4"/>
+                </a:solidFill>
+                <a:latin typeface="Segoe UI" pitchFamily="34" charset="0"/>
+                <a:ea typeface="Segoe UI" pitchFamily="34" charset="-122"/>
+                <a:cs typeface="Segoe UI" pitchFamily="34" charset="-120"/>
+              </a:rPr>
+              <a:t>04</a:t>
+            </a:r>
+            <a:endParaRPr lang="en-US" sz="1700" dirty="0"/>
+          </a:p>
+        </p:txBody>
+      </p:sp>
+      <p:sp>
+        <p:nvSpPr>
+          <p:cNvPr id="15" name="Text 13"/>
+          <p:cNvSpPr/>
+          <p:nvPr/>
+        </p:nvSpPr>
+        <p:spPr>
+          <a:xfrm>
+            <a:off x="1325880" y="4654296"/>
+            <a:ext cx="10195560" cy="731520"/>
+          </a:xfrm>
+          <a:prstGeom prst="rect">
+            <a:avLst/>
+          </a:prstGeom>
+          <a:noFill/>
+          <a:ln/>
+        </p:spPr>
+        <p:txBody>
+          <a:bodyPr wrap="square" lIns="0" tIns="0" rIns="0" bIns="0" rtlCol="0" anchor="ctr"/>
+          <a:lstStyle/>
+          <a:p>
+            <a:pPr indent="0" marL="0">
+              <a:buNone/>
+            </a:pPr>
+            <a:r>
+              <a:rPr lang="en-US" sz="2000" dirty="0">
+                <a:solidFill>
+                  <a:srgbClr val="183449"/>
+                </a:solidFill>
+                <a:latin typeface="Segoe UI" pitchFamily="34" charset="0"/>
+                <a:ea typeface="Segoe UI" pitchFamily="34" charset="-122"/>
+                <a:cs typeface="Segoe UI" pitchFamily="34" charset="-120"/>
+              </a:rPr>
+              <a:t>Task adherence receives task messages and normalized output items.</a:t>
+            </a:r>
+            <a:endParaRPr lang="en-US" sz="2000" dirty="0"/>
+          </a:p>
+        </p:txBody>
+      </p:sp>
+      <p:sp>
+        <p:nvSpPr>
+          <p:cNvPr id="16" name="Shape 14"/>
+          <p:cNvSpPr/>
+          <p:nvPr/>
+        </p:nvSpPr>
+        <p:spPr>
+          <a:xfrm>
+            <a:off x="1325880" y="5486400"/>
+            <a:ext cx="10149840" cy="0"/>
+          </a:xfrm>
+          <a:prstGeom prst="line">
+            <a:avLst/>
+          </a:prstGeom>
+          <a:noFill/>
+          <a:ln w="6350">
+            <a:solidFill>
+              <a:srgbClr val="DCE5ED"/>
+            </a:solidFill>
+            <a:prstDash val="solid"/>
+          </a:ln>
+        </p:spPr>
+      </p:sp>
+      <p:sp>
+        <p:nvSpPr>
+          <p:cNvPr id="17" name="Text 15">
+            <a:hlinkClick r:id="rId1" tooltip=""/>
           </p:cNvPr>
           <p:cNvSpPr/>
           <p:nvPr/>
@@ -8372,7 +8258,7 @@
                 <a:latin typeface="Segoe UI" pitchFamily="34" charset="0"/>
                 <a:ea typeface="Segoe UI" pitchFamily="34" charset="-122"/>
                 <a:cs typeface="Segoe UI" pitchFamily="34" charset="-120"/>
-                <a:hlinkClick r:id="rId3" invalidUrl="" action="" tgtFrame="" tooltip="" history="1" highlightClick="0" endSnd="0">
+                <a:hlinkClick r:id="rId1" invalidUrl="" action="" tgtFrame="" tooltip="" history="1" highlightClick="0" endSnd="0">
                   <a:extLst>
                     <a:ext uri="{A12FA001-AC4F-418D-AE19-62706E023703}">
                       <ahyp:hlinkClr xmlns:ahyp="http://schemas.microsoft.com/office/drawing/2018/hyperlinkcolor" val="tx"/>
@@ -8388,7 +8274,7 @@
       </p:sp>
       <p:sp>
         <p:nvSpPr>
-          <p:cNvPr id="9" name="Text 6"/>
+          <p:cNvPr id="18" name="Text 16"/>
           <p:cNvSpPr/>
           <p:nvPr/>
         </p:nvSpPr>
@@ -8419,7 +8305,7 @@
                 <a:ea typeface="Segoe UI" pitchFamily="34" charset="-122"/>
                 <a:cs typeface="Segoe UI" pitchFamily="34" charset="-120"/>
               </a:rPr>
-              <a:t>16 / 35</a:t>
+              <a:t>16 / 37</a:t>
             </a:r>
             <a:endParaRPr lang="en-US" sz="1000" dirty="0"/>
           </a:p>
@@ -8556,7 +8442,7 @@
                 <a:ea typeface="Segoe UI" pitchFamily="34" charset="-122"/>
                 <a:cs typeface="Segoe UI" pitchFamily="34" charset="-120"/>
               </a:rPr>
-              <a:t>Bilingual evaluation is not one averaged score</a:t>
+              <a:t>Three metrics, three different questions</a:t>
             </a:r>
             <a:endParaRPr lang="en-US" sz="2700" dirty="0"/>
           </a:p>
@@ -8634,7 +8520,7 @@
                 <a:ea typeface="Segoe UI" pitchFamily="34" charset="-122"/>
                 <a:cs typeface="Segoe UI" pitchFamily="34" charset="-120"/>
               </a:rPr>
-              <a:t>Convert one source into independent EN and FR runs.</a:t>
+              <a:t>Coherence: is this acknowledgement logically understandable?</a:t>
             </a:r>
             <a:endParaRPr lang="en-US" sz="2000" dirty="0"/>
           </a:p>
@@ -8735,7 +8621,7 @@
                 <a:ea typeface="Segoe UI" pitchFamily="34" charset="-122"/>
                 <a:cs typeface="Segoe UI" pitchFamily="34" charset="-120"/>
               </a:rPr>
-              <a:t>Keep the selected locale’s text as a string, not a bilingual map.</a:t>
+              <a:t>Groundedness: is it supported by independent provided facts?</a:t>
             </a:r>
             <a:endParaRPr lang="en-US" sz="2000" dirty="0"/>
           </a:p>
@@ -8836,7 +8722,7 @@
                 <a:ea typeface="Segoe UI" pitchFamily="34" charset="-122"/>
                 <a:cs typeface="Segoe UI" pitchFamily="34" charset="-120"/>
               </a:rPr>
-              <a:t>Inspect locale-specific failures and disclaimer requirements.</a:t>
+              <a:t>Task adherence: does it follow the bounded applicant task?</a:t>
             </a:r>
             <a:endParaRPr lang="en-US" sz="2000" dirty="0"/>
           </a:p>
@@ -8937,7 +8823,7 @@
                 <a:ea typeface="Segoe UI" pitchFamily="34" charset="-122"/>
                 <a:cs typeface="Segoe UI" pitchFamily="34" charset="-120"/>
               </a:rPr>
-              <a:t>A global average can hide a French-only regression.</a:t>
+              <a:t>None of these proves calculator, tool, persistence or RBAC behavior.</a:t>
             </a:r>
             <a:endParaRPr lang="en-US" sz="2000" dirty="0"/>
           </a:p>
@@ -9047,7 +8933,7 @@
                 <a:ea typeface="Segoe UI" pitchFamily="34" charset="-122"/>
                 <a:cs typeface="Segoe UI" pitchFamily="34" charset="-120"/>
               </a:rPr>
-              <a:t>17 / 35</a:t>
+              <a:t>17 / 37</a:t>
             </a:r>
             <a:endParaRPr lang="en-US" sz="1000" dirty="0"/>
           </a:p>
@@ -9184,77 +9070,102 @@
                 <a:ea typeface="Segoe UI" pitchFamily="34" charset="-122"/>
                 <a:cs typeface="Segoe UI" pitchFamily="34" charset="-120"/>
               </a:rPr>
-              <a:t>Provenance: a version label is not a pin</a:t>
+              <a:t>Groundedness: inspect the input contract</a:t>
             </a:r>
             <a:endParaRPr lang="en-US" sz="2700" dirty="0"/>
           </a:p>
         </p:txBody>
       </p:sp>
-      <p:sp>
-        <p:nvSpPr>
-          <p:cNvPr id="5" name="Text 3"/>
-          <p:cNvSpPr/>
-          <p:nvPr/>
-        </p:nvSpPr>
-        <p:spPr>
-          <a:xfrm>
-            <a:off x="594360" y="1828800"/>
-            <a:ext cx="640080" cy="594360"/>
-          </a:xfrm>
-          <a:prstGeom prst="rect">
-            <a:avLst/>
-          </a:prstGeom>
-          <a:noFill/>
-          <a:ln/>
-        </p:spPr>
-        <p:txBody>
-          <a:bodyPr wrap="square" lIns="0" tIns="0" rIns="0" bIns="0" rtlCol="0" anchor="ctr"/>
-          <a:lstStyle/>
-          <a:p>
-            <a:pPr indent="0" marL="0">
-              <a:buNone/>
-            </a:pPr>
-            <a:r>
-              <a:rPr lang="en-US" sz="1700" b="1" dirty="0">
-                <a:solidFill>
-                  <a:srgbClr val="0078D4"/>
-                </a:solidFill>
-                <a:latin typeface="Segoe UI" pitchFamily="34" charset="0"/>
-                <a:ea typeface="Segoe UI" pitchFamily="34" charset="-122"/>
-                <a:cs typeface="Segoe UI" pitchFamily="34" charset="-120"/>
-              </a:rPr>
-              <a:t>01</a:t>
-            </a:r>
-            <a:endParaRPr lang="en-US" sz="1700" dirty="0"/>
-          </a:p>
-        </p:txBody>
-      </p:sp>
-      <p:sp>
-        <p:nvSpPr>
-          <p:cNvPr id="6" name="Text 4"/>
-          <p:cNvSpPr/>
-          <p:nvPr/>
-        </p:nvSpPr>
-        <p:spPr>
-          <a:xfrm>
-            <a:off x="1325880" y="1828800"/>
-            <a:ext cx="10195560" cy="731520"/>
-          </a:xfrm>
-          <a:prstGeom prst="rect">
-            <a:avLst/>
-          </a:prstGeom>
-          <a:noFill/>
-          <a:ln/>
-        </p:spPr>
-        <p:txBody>
-          <a:bodyPr wrap="square" lIns="0" tIns="0" rIns="0" bIns="0" rtlCol="0" anchor="ctr"/>
-          <a:lstStyle/>
-          <a:p>
-            <a:pPr indent="0" marL="0">
-              <a:buNone/>
-            </a:pPr>
-            <a:r>
-              <a:rPr lang="en-US" sz="2000" dirty="0">
+      <p:pic>
+        <p:nvPicPr>
+          <p:cNvPr id="5" name="Image 0" descr="Groundedness catalog: input alternatives and ordinal 1-5 score.">
+            <a:hlinkClick r:id="rId2" tooltip=""/>
+          </p:cNvPr>
+          <p:cNvPicPr>
+            <a:picLocks noChangeAspect="1"/>
+          </p:cNvPicPr>
+          <p:nvPr/>
+        </p:nvPicPr>
+        <p:blipFill>
+          <a:blip r:embed="rId1"/>
+          <a:srcRect l="18206" r="202" t="53937" b="9924"/>
+          <a:stretch/>
+        </p:blipFill>
+        <p:spPr>
+          <a:xfrm>
+            <a:off x="548640" y="1874520"/>
+            <a:ext cx="11064240" cy="3063240"/>
+          </a:xfrm>
+          <a:prstGeom prst="rect">
+            <a:avLst/>
+          </a:prstGeom>
+        </p:spPr>
+      </p:pic>
+      <p:sp>
+        <p:nvSpPr>
+          <p:cNvPr id="6" name="Text 3"/>
+          <p:cNvSpPr/>
+          <p:nvPr/>
+        </p:nvSpPr>
+        <p:spPr>
+          <a:xfrm>
+            <a:off x="548640" y="5166360"/>
+            <a:ext cx="11064240" cy="411480"/>
+          </a:xfrm>
+          <a:prstGeom prst="rect">
+            <a:avLst/>
+          </a:prstGeom>
+          <a:noFill/>
+          <a:ln/>
+        </p:spPr>
+        <p:txBody>
+          <a:bodyPr wrap="square" lIns="0" tIns="0" rIns="0" bIns="0" rtlCol="0" anchor="ctr"/>
+          <a:lstStyle/>
+          <a:p>
+            <a:pPr indent="0" marL="0">
+              <a:buNone/>
+            </a:pPr>
+            <a:r>
+              <a:rPr lang="en-US" sz="1600" dirty="0">
+                <a:solidFill>
+                  <a:srgbClr val="526777"/>
+                </a:solidFill>
+                <a:latin typeface="Segoe UI" pitchFamily="34" charset="0"/>
+                <a:ea typeface="Segoe UI" pitchFamily="34" charset="-122"/>
+                <a:cs typeface="Segoe UI" pitchFamily="34" charset="-120"/>
+              </a:rPr>
+              <a:t>Staging catalog v18 | 2026-10-23 | Definition, not run results</a:t>
+            </a:r>
+            <a:endParaRPr lang="en-US" sz="1600" dirty="0"/>
+          </a:p>
+        </p:txBody>
+      </p:sp>
+      <p:sp>
+        <p:nvSpPr>
+          <p:cNvPr id="7" name="Text 4"/>
+          <p:cNvSpPr/>
+          <p:nvPr/>
+        </p:nvSpPr>
+        <p:spPr>
+          <a:xfrm>
+            <a:off x="548640" y="5623560"/>
+            <a:ext cx="11064240" cy="457200"/>
+          </a:xfrm>
+          <a:prstGeom prst="rect">
+            <a:avLst/>
+          </a:prstGeom>
+          <a:noFill/>
+          <a:ln/>
+        </p:spPr>
+        <p:txBody>
+          <a:bodyPr wrap="square" lIns="0" tIns="0" rIns="0" bIns="0" rtlCol="0" anchor="ctr"/>
+          <a:lstStyle/>
+          <a:p>
+            <a:pPr indent="0" marL="0">
+              <a:buNone/>
+            </a:pPr>
+            <a:r>
+              <a:rPr lang="en-US" sz="2000" b="1" dirty="0">
                 <a:solidFill>
                   <a:srgbClr val="183449"/>
                 </a:solidFill>
@@ -9262,7 +9173,7 @@
                 <a:ea typeface="Segoe UI" pitchFamily="34" charset="-122"/>
                 <a:cs typeface="Segoe UI" pitchFamily="34" charset="-120"/>
               </a:rPr>
-              <a:t>--version records the observed current deployment only.</a:t>
+              <a:t>Use independent trusted context, never the candidate answer.</a:t>
             </a:r>
             <a:endParaRPr lang="en-US" sz="2000" dirty="0"/>
           </a:p>
@@ -9270,334 +9181,8 @@
       </p:sp>
       <p:sp>
         <p:nvSpPr>
-          <p:cNvPr id="7" name="Shape 5"/>
-          <p:cNvSpPr/>
-          <p:nvPr/>
-        </p:nvSpPr>
-        <p:spPr>
-          <a:xfrm>
-            <a:off x="1325880" y="2660904"/>
-            <a:ext cx="10149840" cy="0"/>
-          </a:xfrm>
-          <a:prstGeom prst="line">
-            <a:avLst/>
-          </a:prstGeom>
-          <a:noFill/>
-          <a:ln w="6350">
-            <a:solidFill>
-              <a:srgbClr val="DCE5ED"/>
-            </a:solidFill>
-            <a:prstDash val="solid"/>
-          </a:ln>
-        </p:spPr>
-      </p:sp>
-      <p:sp>
-        <p:nvSpPr>
-          <p:cNvPr id="8" name="Text 6"/>
-          <p:cNvSpPr/>
-          <p:nvPr/>
-        </p:nvSpPr>
-        <p:spPr>
-          <a:xfrm>
-            <a:off x="594360" y="2770632"/>
-            <a:ext cx="640080" cy="594360"/>
-          </a:xfrm>
-          <a:prstGeom prst="rect">
-            <a:avLst/>
-          </a:prstGeom>
-          <a:noFill/>
-          <a:ln/>
-        </p:spPr>
-        <p:txBody>
-          <a:bodyPr wrap="square" lIns="0" tIns="0" rIns="0" bIns="0" rtlCol="0" anchor="ctr"/>
-          <a:lstStyle/>
-          <a:p>
-            <a:pPr indent="0" marL="0">
-              <a:buNone/>
-            </a:pPr>
-            <a:r>
-              <a:rPr lang="en-US" sz="1700" b="1" dirty="0">
-                <a:solidFill>
-                  <a:srgbClr val="0078D4"/>
-                </a:solidFill>
-                <a:latin typeface="Segoe UI" pitchFamily="34" charset="0"/>
-                <a:ea typeface="Segoe UI" pitchFamily="34" charset="-122"/>
-                <a:cs typeface="Segoe UI" pitchFamily="34" charset="-120"/>
-              </a:rPr>
-              <a:t>02</a:t>
-            </a:r>
-            <a:endParaRPr lang="en-US" sz="1700" dirty="0"/>
-          </a:p>
-        </p:txBody>
-      </p:sp>
-      <p:sp>
-        <p:nvSpPr>
-          <p:cNvPr id="9" name="Text 7"/>
-          <p:cNvSpPr/>
-          <p:nvPr/>
-        </p:nvSpPr>
-        <p:spPr>
-          <a:xfrm>
-            <a:off x="1325880" y="2770632"/>
-            <a:ext cx="10195560" cy="731520"/>
-          </a:xfrm>
-          <a:prstGeom prst="rect">
-            <a:avLst/>
-          </a:prstGeom>
-          <a:noFill/>
-          <a:ln/>
-        </p:spPr>
-        <p:txBody>
-          <a:bodyPr wrap="square" lIns="0" tIns="0" rIns="0" bIns="0" rtlCol="0" anchor="ctr"/>
-          <a:lstStyle/>
-          <a:p>
-            <a:pPr indent="0" marL="0">
-              <a:buNone/>
-            </a:pPr>
-            <a:r>
-              <a:rPr lang="en-US" sz="2000" dirty="0">
-                <a:solidFill>
-                  <a:srgbClr val="183449"/>
-                </a:solidFill>
-                <a:latin typeface="Segoe UI" pitchFamily="34" charset="0"/>
-                <a:ea typeface="Segoe UI" pitchFamily="34" charset="-122"/>
-                <a:cs typeface="Segoe UI" pitchFamily="34" charset="-120"/>
-              </a:rPr>
-              <a:t>Reserve a stable window and verify version before and after.</a:t>
-            </a:r>
-            <a:endParaRPr lang="en-US" sz="2000" dirty="0"/>
-          </a:p>
-        </p:txBody>
-      </p:sp>
-      <p:sp>
-        <p:nvSpPr>
-          <p:cNvPr id="10" name="Shape 8"/>
-          <p:cNvSpPr/>
-          <p:nvPr/>
-        </p:nvSpPr>
-        <p:spPr>
-          <a:xfrm>
-            <a:off x="1325880" y="3602736"/>
-            <a:ext cx="10149840" cy="0"/>
-          </a:xfrm>
-          <a:prstGeom prst="line">
-            <a:avLst/>
-          </a:prstGeom>
-          <a:noFill/>
-          <a:ln w="6350">
-            <a:solidFill>
-              <a:srgbClr val="DCE5ED"/>
-            </a:solidFill>
-            <a:prstDash val="solid"/>
-          </a:ln>
-        </p:spPr>
-      </p:sp>
-      <p:sp>
-        <p:nvSpPr>
-          <p:cNvPr id="11" name="Text 9"/>
-          <p:cNvSpPr/>
-          <p:nvPr/>
-        </p:nvSpPr>
-        <p:spPr>
-          <a:xfrm>
-            <a:off x="594360" y="3712464"/>
-            <a:ext cx="640080" cy="594360"/>
-          </a:xfrm>
-          <a:prstGeom prst="rect">
-            <a:avLst/>
-          </a:prstGeom>
-          <a:noFill/>
-          <a:ln/>
-        </p:spPr>
-        <p:txBody>
-          <a:bodyPr wrap="square" lIns="0" tIns="0" rIns="0" bIns="0" rtlCol="0" anchor="ctr"/>
-          <a:lstStyle/>
-          <a:p>
-            <a:pPr indent="0" marL="0">
-              <a:buNone/>
-            </a:pPr>
-            <a:r>
-              <a:rPr lang="en-US" sz="1700" b="1" dirty="0">
-                <a:solidFill>
-                  <a:srgbClr val="0078D4"/>
-                </a:solidFill>
-                <a:latin typeface="Segoe UI" pitchFamily="34" charset="0"/>
-                <a:ea typeface="Segoe UI" pitchFamily="34" charset="-122"/>
-                <a:cs typeface="Segoe UI" pitchFamily="34" charset="-120"/>
-              </a:rPr>
-              <a:t>03</a:t>
-            </a:r>
-            <a:endParaRPr lang="en-US" sz="1700" dirty="0"/>
-          </a:p>
-        </p:txBody>
-      </p:sp>
-      <p:sp>
-        <p:nvSpPr>
-          <p:cNvPr id="12" name="Text 10"/>
-          <p:cNvSpPr/>
-          <p:nvPr/>
-        </p:nvSpPr>
-        <p:spPr>
-          <a:xfrm>
-            <a:off x="1325880" y="3712464"/>
-            <a:ext cx="10195560" cy="731520"/>
-          </a:xfrm>
-          <a:prstGeom prst="rect">
-            <a:avLst/>
-          </a:prstGeom>
-          <a:noFill/>
-          <a:ln/>
-        </p:spPr>
-        <p:txBody>
-          <a:bodyPr wrap="square" lIns="0" tIns="0" rIns="0" bIns="0" rtlCol="0" anchor="ctr"/>
-          <a:lstStyle/>
-          <a:p>
-            <a:pPr indent="0" marL="0">
-              <a:buNone/>
-            </a:pPr>
-            <a:r>
-              <a:rPr lang="en-US" sz="2000" dirty="0">
-                <a:solidFill>
-                  <a:srgbClr val="183449"/>
-                </a:solidFill>
-                <a:latin typeface="Segoe UI" pitchFamily="34" charset="0"/>
-                <a:ea typeface="Segoe UI" pitchFamily="34" charset="-122"/>
-                <a:cs typeface="Segoe UI" pitchFamily="34" charset="-120"/>
-              </a:rPr>
-              <a:t>Freeze source, dataset, rubric, evaluator and judge-model versions.</a:t>
-            </a:r>
-            <a:endParaRPr lang="en-US" sz="2000" dirty="0"/>
-          </a:p>
-        </p:txBody>
-      </p:sp>
-      <p:sp>
-        <p:nvSpPr>
-          <p:cNvPr id="13" name="Shape 11"/>
-          <p:cNvSpPr/>
-          <p:nvPr/>
-        </p:nvSpPr>
-        <p:spPr>
-          <a:xfrm>
-            <a:off x="1325880" y="4544568"/>
-            <a:ext cx="10149840" cy="0"/>
-          </a:xfrm>
-          <a:prstGeom prst="line">
-            <a:avLst/>
-          </a:prstGeom>
-          <a:noFill/>
-          <a:ln w="6350">
-            <a:solidFill>
-              <a:srgbClr val="DCE5ED"/>
-            </a:solidFill>
-            <a:prstDash val="solid"/>
-          </a:ln>
-        </p:spPr>
-      </p:sp>
-      <p:sp>
-        <p:nvSpPr>
-          <p:cNvPr id="14" name="Text 12"/>
-          <p:cNvSpPr/>
-          <p:nvPr/>
-        </p:nvSpPr>
-        <p:spPr>
-          <a:xfrm>
-            <a:off x="594360" y="4654296"/>
-            <a:ext cx="640080" cy="594360"/>
-          </a:xfrm>
-          <a:prstGeom prst="rect">
-            <a:avLst/>
-          </a:prstGeom>
-          <a:noFill/>
-          <a:ln/>
-        </p:spPr>
-        <p:txBody>
-          <a:bodyPr wrap="square" lIns="0" tIns="0" rIns="0" bIns="0" rtlCol="0" anchor="ctr"/>
-          <a:lstStyle/>
-          <a:p>
-            <a:pPr indent="0" marL="0">
-              <a:buNone/>
-            </a:pPr>
-            <a:r>
-              <a:rPr lang="en-US" sz="1700" b="1" dirty="0">
-                <a:solidFill>
-                  <a:srgbClr val="0078D4"/>
-                </a:solidFill>
-                <a:latin typeface="Segoe UI" pitchFamily="34" charset="0"/>
-                <a:ea typeface="Segoe UI" pitchFamily="34" charset="-122"/>
-                <a:cs typeface="Segoe UI" pitchFamily="34" charset="-120"/>
-              </a:rPr>
-              <a:t>04</a:t>
-            </a:r>
-            <a:endParaRPr lang="en-US" sz="1700" dirty="0"/>
-          </a:p>
-        </p:txBody>
-      </p:sp>
-      <p:sp>
-        <p:nvSpPr>
-          <p:cNvPr id="15" name="Text 13"/>
-          <p:cNvSpPr/>
-          <p:nvPr/>
-        </p:nvSpPr>
-        <p:spPr>
-          <a:xfrm>
-            <a:off x="1325880" y="4654296"/>
-            <a:ext cx="10195560" cy="731520"/>
-          </a:xfrm>
-          <a:prstGeom prst="rect">
-            <a:avLst/>
-          </a:prstGeom>
-          <a:noFill/>
-          <a:ln/>
-        </p:spPr>
-        <p:txBody>
-          <a:bodyPr wrap="square" lIns="0" tIns="0" rIns="0" bIns="0" rtlCol="0" anchor="ctr"/>
-          <a:lstStyle/>
-          <a:p>
-            <a:pPr indent="0" marL="0">
-              <a:buNone/>
-            </a:pPr>
-            <a:r>
-              <a:rPr lang="en-US" sz="2000" dirty="0">
-                <a:solidFill>
-                  <a:srgbClr val="183449"/>
-                </a:solidFill>
-                <a:latin typeface="Segoe UI" pitchFamily="34" charset="0"/>
-                <a:ea typeface="Segoe UI" pitchFamily="34" charset="-122"/>
-                <a:cs typeface="Segoe UI" pitchFamily="34" charset="-120"/>
-              </a:rPr>
-              <a:t>Keep raw captures, response IDs, native run IDs and hashes.</a:t>
-            </a:r>
-            <a:endParaRPr lang="en-US" sz="2000" dirty="0"/>
-          </a:p>
-        </p:txBody>
-      </p:sp>
-      <p:sp>
-        <p:nvSpPr>
-          <p:cNvPr id="16" name="Shape 14"/>
-          <p:cNvSpPr/>
-          <p:nvPr/>
-        </p:nvSpPr>
-        <p:spPr>
-          <a:xfrm>
-            <a:off x="1325880" y="5486400"/>
-            <a:ext cx="10149840" cy="0"/>
-          </a:xfrm>
-          <a:prstGeom prst="line">
-            <a:avLst/>
-          </a:prstGeom>
-          <a:noFill/>
-          <a:ln w="6350">
-            <a:solidFill>
-              <a:srgbClr val="DCE5ED"/>
-            </a:solidFill>
-            <a:prstDash val="solid"/>
-          </a:ln>
-        </p:spPr>
-      </p:sp>
-      <p:sp>
-        <p:nvSpPr>
-          <p:cNvPr id="17" name="Text 15">
-            <a:hlinkClick r:id="rId1" tooltip=""/>
+          <p:cNvPr id="8" name="Text 5">
+            <a:hlinkClick r:id="rId3" tooltip=""/>
           </p:cNvPr>
           <p:cNvSpPr/>
           <p:nvPr/>
@@ -9628,7 +9213,7 @@
                 <a:latin typeface="Segoe UI" pitchFamily="34" charset="0"/>
                 <a:ea typeface="Segoe UI" pitchFamily="34" charset="-122"/>
                 <a:cs typeface="Segoe UI" pitchFamily="34" charset="-120"/>
-                <a:hlinkClick r:id="rId1" invalidUrl="" action="" tgtFrame="" tooltip="" history="1" highlightClick="0" endSnd="0">
+                <a:hlinkClick r:id="rId3" invalidUrl="" action="" tgtFrame="" tooltip="" history="1" highlightClick="0" endSnd="0">
                   <a:extLst>
                     <a:ext uri="{A12FA001-AC4F-418D-AE19-62706E023703}">
                       <ahyp:hlinkClr xmlns:ahyp="http://schemas.microsoft.com/office/drawing/2018/hyperlinkcolor" val="tx"/>
@@ -9644,7 +9229,7 @@
       </p:sp>
       <p:sp>
         <p:nvSpPr>
-          <p:cNvPr id="18" name="Text 16"/>
+          <p:cNvPr id="9" name="Text 6"/>
           <p:cNvSpPr/>
           <p:nvPr/>
         </p:nvSpPr>
@@ -9675,7 +9260,7 @@
                 <a:ea typeface="Segoe UI" pitchFamily="34" charset="-122"/>
                 <a:cs typeface="Segoe UI" pitchFamily="34" charset="-120"/>
               </a:rPr>
-              <a:t>18 / 35</a:t>
+              <a:t>18 / 37</a:t>
             </a:r>
             <a:endParaRPr lang="en-US" sz="1000" dirty="0"/>
           </a:p>
@@ -9812,7 +9397,7 @@
                 <a:ea typeface="Segoe UI" pitchFamily="34" charset="-122"/>
                 <a:cs typeface="Segoe UI" pitchFamily="34" charset="-120"/>
               </a:rPr>
-              <a:t>Completeness and quality are separate gates</a:t>
+              <a:t>Bilingual evaluation is not one averaged score</a:t>
             </a:r>
             <a:endParaRPr lang="en-US" sz="2700" dirty="0"/>
           </a:p>
@@ -9820,22 +9405,98 @@
       </p:sp>
       <p:sp>
         <p:nvSpPr>
-          <p:cNvPr id="5" name="Shape 3"/>
-          <p:cNvSpPr/>
-          <p:nvPr/>
-        </p:nvSpPr>
-        <p:spPr>
-          <a:xfrm>
-            <a:off x="548640" y="1874520"/>
-            <a:ext cx="5394960" cy="3886200"/>
-          </a:xfrm>
-          <a:prstGeom prst="rect">
-            <a:avLst/>
-          </a:prstGeom>
-          <a:solidFill>
-            <a:srgbClr val="EDF4FA"/>
-          </a:solidFill>
-          <a:ln w="12700">
+          <p:cNvPr id="5" name="Text 3"/>
+          <p:cNvSpPr/>
+          <p:nvPr/>
+        </p:nvSpPr>
+        <p:spPr>
+          <a:xfrm>
+            <a:off x="594360" y="1828800"/>
+            <a:ext cx="640080" cy="594360"/>
+          </a:xfrm>
+          <a:prstGeom prst="rect">
+            <a:avLst/>
+          </a:prstGeom>
+          <a:noFill/>
+          <a:ln/>
+        </p:spPr>
+        <p:txBody>
+          <a:bodyPr wrap="square" lIns="0" tIns="0" rIns="0" bIns="0" rtlCol="0" anchor="ctr"/>
+          <a:lstStyle/>
+          <a:p>
+            <a:pPr indent="0" marL="0">
+              <a:buNone/>
+            </a:pPr>
+            <a:r>
+              <a:rPr lang="en-US" sz="1700" b="1" dirty="0">
+                <a:solidFill>
+                  <a:srgbClr val="0078D4"/>
+                </a:solidFill>
+                <a:latin typeface="Segoe UI" pitchFamily="34" charset="0"/>
+                <a:ea typeface="Segoe UI" pitchFamily="34" charset="-122"/>
+                <a:cs typeface="Segoe UI" pitchFamily="34" charset="-120"/>
+              </a:rPr>
+              <a:t>01</a:t>
+            </a:r>
+            <a:endParaRPr lang="en-US" sz="1700" dirty="0"/>
+          </a:p>
+        </p:txBody>
+      </p:sp>
+      <p:sp>
+        <p:nvSpPr>
+          <p:cNvPr id="6" name="Text 4"/>
+          <p:cNvSpPr/>
+          <p:nvPr/>
+        </p:nvSpPr>
+        <p:spPr>
+          <a:xfrm>
+            <a:off x="1325880" y="1828800"/>
+            <a:ext cx="10195560" cy="731520"/>
+          </a:xfrm>
+          <a:prstGeom prst="rect">
+            <a:avLst/>
+          </a:prstGeom>
+          <a:noFill/>
+          <a:ln/>
+        </p:spPr>
+        <p:txBody>
+          <a:bodyPr wrap="square" lIns="0" tIns="0" rIns="0" bIns="0" rtlCol="0" anchor="ctr"/>
+          <a:lstStyle/>
+          <a:p>
+            <a:pPr indent="0" marL="0">
+              <a:buNone/>
+            </a:pPr>
+            <a:r>
+              <a:rPr lang="en-US" sz="2000" dirty="0">
+                <a:solidFill>
+                  <a:srgbClr val="183449"/>
+                </a:solidFill>
+                <a:latin typeface="Segoe UI" pitchFamily="34" charset="0"/>
+                <a:ea typeface="Segoe UI" pitchFamily="34" charset="-122"/>
+                <a:cs typeface="Segoe UI" pitchFamily="34" charset="-120"/>
+              </a:rPr>
+              <a:t>Convert one source into independent EN and FR runs.</a:t>
+            </a:r>
+            <a:endParaRPr lang="en-US" sz="2000" dirty="0"/>
+          </a:p>
+        </p:txBody>
+      </p:sp>
+      <p:sp>
+        <p:nvSpPr>
+          <p:cNvPr id="7" name="Shape 5"/>
+          <p:cNvSpPr/>
+          <p:nvPr/>
+        </p:nvSpPr>
+        <p:spPr>
+          <a:xfrm>
+            <a:off x="1325880" y="2660904"/>
+            <a:ext cx="10149840" cy="0"/>
+          </a:xfrm>
+          <a:prstGeom prst="line">
+            <a:avLst/>
+          </a:prstGeom>
+          <a:noFill/>
+          <a:ln w="6350">
             <a:solidFill>
               <a:srgbClr val="DCE5ED"/>
             </a:solidFill>
@@ -9845,30 +9506,30 @@
       </p:sp>
       <p:sp>
         <p:nvSpPr>
-          <p:cNvPr id="6" name="Text 4"/>
-          <p:cNvSpPr/>
-          <p:nvPr/>
-        </p:nvSpPr>
-        <p:spPr>
-          <a:xfrm>
-            <a:off x="822960" y="2148840"/>
-            <a:ext cx="4846320" cy="640080"/>
-          </a:xfrm>
-          <a:prstGeom prst="rect">
-            <a:avLst/>
-          </a:prstGeom>
-          <a:noFill/>
-          <a:ln/>
-        </p:spPr>
-        <p:txBody>
-          <a:bodyPr wrap="square" lIns="0" tIns="0" rIns="0" bIns="0" rtlCol="0" anchor="ctr"/>
-          <a:lstStyle/>
-          <a:p>
-            <a:pPr indent="0" marL="0">
-              <a:buNone/>
-            </a:pPr>
-            <a:r>
-              <a:rPr lang="en-US" sz="2300" b="1" dirty="0">
+          <p:cNvPr id="8" name="Text 6"/>
+          <p:cNvSpPr/>
+          <p:nvPr/>
+        </p:nvSpPr>
+        <p:spPr>
+          <a:xfrm>
+            <a:off x="594360" y="2770632"/>
+            <a:ext cx="640080" cy="594360"/>
+          </a:xfrm>
+          <a:prstGeom prst="rect">
+            <a:avLst/>
+          </a:prstGeom>
+          <a:noFill/>
+          <a:ln/>
+        </p:spPr>
+        <p:txBody>
+          <a:bodyPr wrap="square" lIns="0" tIns="0" rIns="0" bIns="0" rtlCol="0" anchor="ctr"/>
+          <a:lstStyle/>
+          <a:p>
+            <a:pPr indent="0" marL="0">
+              <a:buNone/>
+            </a:pPr>
+            <a:r>
+              <a:rPr lang="en-US" sz="1700" b="1" dirty="0">
                 <a:solidFill>
                   <a:srgbClr val="0078D4"/>
                 </a:solidFill>
@@ -9876,38 +9537,38 @@
                 <a:ea typeface="Segoe UI" pitchFamily="34" charset="-122"/>
                 <a:cs typeface="Segoe UI" pitchFamily="34" charset="-120"/>
               </a:rPr>
-              <a:t>Completeness</a:t>
-            </a:r>
-            <a:endParaRPr lang="en-US" sz="2300" dirty="0"/>
-          </a:p>
-        </p:txBody>
-      </p:sp>
-      <p:sp>
-        <p:nvSpPr>
-          <p:cNvPr id="7" name="Text 5"/>
-          <p:cNvSpPr/>
-          <p:nvPr/>
-        </p:nvSpPr>
-        <p:spPr>
-          <a:xfrm>
-            <a:off x="822960" y="3017520"/>
-            <a:ext cx="4846320" cy="594360"/>
-          </a:xfrm>
-          <a:prstGeom prst="rect">
-            <a:avLst/>
-          </a:prstGeom>
-          <a:noFill/>
-          <a:ln/>
-        </p:spPr>
-        <p:txBody>
-          <a:bodyPr wrap="square" lIns="0" tIns="0" rIns="0" bIns="0" rtlCol="0" anchor="ctr"/>
-          <a:lstStyle/>
-          <a:p>
-            <a:pPr indent="0" marL="0">
-              <a:buNone/>
-            </a:pPr>
-            <a:r>
-              <a:rPr lang="en-US" sz="1900" dirty="0">
+              <a:t>02</a:t>
+            </a:r>
+            <a:endParaRPr lang="en-US" sz="1700" dirty="0"/>
+          </a:p>
+        </p:txBody>
+      </p:sp>
+      <p:sp>
+        <p:nvSpPr>
+          <p:cNvPr id="9" name="Text 7"/>
+          <p:cNvSpPr/>
+          <p:nvPr/>
+        </p:nvSpPr>
+        <p:spPr>
+          <a:xfrm>
+            <a:off x="1325880" y="2770632"/>
+            <a:ext cx="10195560" cy="731520"/>
+          </a:xfrm>
+          <a:prstGeom prst="rect">
+            <a:avLst/>
+          </a:prstGeom>
+          <a:noFill/>
+          <a:ln/>
+        </p:spPr>
+        <p:txBody>
+          <a:bodyPr wrap="square" lIns="0" tIns="0" rIns="0" bIns="0" rtlCol="0" anchor="ctr"/>
+          <a:lstStyle/>
+          <a:p>
+            <a:pPr indent="0" marL="0">
+              <a:buNone/>
+            </a:pPr>
+            <a:r>
+              <a:rPr lang="en-US" sz="2000" dirty="0">
                 <a:solidFill>
                   <a:srgbClr val="183449"/>
                 </a:solidFill>
@@ -9915,87 +9576,9 @@
                 <a:ea typeface="Segoe UI" pitchFamily="34" charset="-122"/>
                 <a:cs typeface="Segoe UI" pitchFamily="34" charset="-120"/>
               </a:rPr>
-              <a:t>Terminal completed state</a:t>
-            </a:r>
-            <a:endParaRPr lang="en-US" sz="1900" dirty="0"/>
-          </a:p>
-        </p:txBody>
-      </p:sp>
-      <p:sp>
-        <p:nvSpPr>
-          <p:cNvPr id="8" name="Text 6"/>
-          <p:cNvSpPr/>
-          <p:nvPr/>
-        </p:nvSpPr>
-        <p:spPr>
-          <a:xfrm>
-            <a:off x="822960" y="3794760"/>
-            <a:ext cx="4846320" cy="594360"/>
-          </a:xfrm>
-          <a:prstGeom prst="rect">
-            <a:avLst/>
-          </a:prstGeom>
-          <a:noFill/>
-          <a:ln/>
-        </p:spPr>
-        <p:txBody>
-          <a:bodyPr wrap="square" lIns="0" tIns="0" rIns="0" bIns="0" rtlCol="0" anchor="ctr"/>
-          <a:lstStyle/>
-          <a:p>
-            <a:pPr indent="0" marL="0">
-              <a:buNone/>
-            </a:pPr>
-            <a:r>
-              <a:rPr lang="en-US" sz="1900" dirty="0">
-                <a:solidFill>
-                  <a:srgbClr val="183449"/>
-                </a:solidFill>
-                <a:latin typeface="Segoe UI" pitchFamily="34" charset="0"/>
-                <a:ea typeface="Segoe UI" pitchFamily="34" charset="-122"/>
-                <a:cs typeface="Segoe UI" pitchFamily="34" charset="-120"/>
-              </a:rPr>
-              <a:t>Expected unique items and metrics</a:t>
-            </a:r>
-            <a:endParaRPr lang="en-US" sz="1900" dirty="0"/>
-          </a:p>
-        </p:txBody>
-      </p:sp>
-      <p:sp>
-        <p:nvSpPr>
-          <p:cNvPr id="9" name="Text 7"/>
-          <p:cNvSpPr/>
-          <p:nvPr/>
-        </p:nvSpPr>
-        <p:spPr>
-          <a:xfrm>
-            <a:off x="822960" y="4572000"/>
-            <a:ext cx="4846320" cy="594360"/>
-          </a:xfrm>
-          <a:prstGeom prst="rect">
-            <a:avLst/>
-          </a:prstGeom>
-          <a:noFill/>
-          <a:ln/>
-        </p:spPr>
-        <p:txBody>
-          <a:bodyPr wrap="square" lIns="0" tIns="0" rIns="0" bIns="0" rtlCol="0" anchor="ctr"/>
-          <a:lstStyle/>
-          <a:p>
-            <a:pPr indent="0" marL="0">
-              <a:buNone/>
-            </a:pPr>
-            <a:r>
-              <a:rPr lang="en-US" sz="1900" dirty="0">
-                <a:solidFill>
-                  <a:srgbClr val="183449"/>
-                </a:solidFill>
-                <a:latin typeface="Segoe UI" pitchFamily="34" charset="0"/>
-                <a:ea typeface="Segoe UI" pitchFamily="34" charset="-122"/>
-                <a:cs typeface="Segoe UI" pitchFamily="34" charset="-120"/>
-              </a:rPr>
-              <a:t>No service errors or skipped rows</a:t>
-            </a:r>
-            <a:endParaRPr lang="en-US" sz="1900" dirty="0"/>
+              <a:t>Keep the selected locale’s text as a string, not a bilingual map.</a:t>
+            </a:r>
+            <a:endParaRPr lang="en-US" sz="2000" dirty="0"/>
           </a:p>
         </p:txBody>
       </p:sp>
@@ -10007,16 +9590,14 @@
         </p:nvSpPr>
         <p:spPr>
           <a:xfrm>
-            <a:off x="6217920" y="1874520"/>
-            <a:ext cx="5394960" cy="3886200"/>
-          </a:xfrm>
-          <a:prstGeom prst="rect">
-            <a:avLst/>
-          </a:prstGeom>
-          <a:solidFill>
-            <a:srgbClr val="EDF4FA"/>
-          </a:solidFill>
-          <a:ln w="12700">
+            <a:off x="1325880" y="3602736"/>
+            <a:ext cx="10149840" cy="0"/>
+          </a:xfrm>
+          <a:prstGeom prst="line">
+            <a:avLst/>
+          </a:prstGeom>
+          <a:noFill/>
+          <a:ln w="6350">
             <a:solidFill>
               <a:srgbClr val="DCE5ED"/>
             </a:solidFill>
@@ -10032,24 +9613,24 @@
         </p:nvSpPr>
         <p:spPr>
           <a:xfrm>
-            <a:off x="6492240" y="2148840"/>
-            <a:ext cx="4846320" cy="640080"/>
-          </a:xfrm>
-          <a:prstGeom prst="rect">
-            <a:avLst/>
-          </a:prstGeom>
-          <a:noFill/>
-          <a:ln/>
-        </p:spPr>
-        <p:txBody>
-          <a:bodyPr wrap="square" lIns="0" tIns="0" rIns="0" bIns="0" rtlCol="0" anchor="ctr"/>
-          <a:lstStyle/>
-          <a:p>
-            <a:pPr indent="0" marL="0">
-              <a:buNone/>
-            </a:pPr>
-            <a:r>
-              <a:rPr lang="en-US" sz="2300" b="1" dirty="0">
+            <a:off x="594360" y="3712464"/>
+            <a:ext cx="640080" cy="594360"/>
+          </a:xfrm>
+          <a:prstGeom prst="rect">
+            <a:avLst/>
+          </a:prstGeom>
+          <a:noFill/>
+          <a:ln/>
+        </p:spPr>
+        <p:txBody>
+          <a:bodyPr wrap="square" lIns="0" tIns="0" rIns="0" bIns="0" rtlCol="0" anchor="ctr"/>
+          <a:lstStyle/>
+          <a:p>
+            <a:pPr indent="0" marL="0">
+              <a:buNone/>
+            </a:pPr>
+            <a:r>
+              <a:rPr lang="en-US" sz="1700" b="1" dirty="0">
                 <a:solidFill>
                   <a:srgbClr val="0078D4"/>
                 </a:solidFill>
@@ -10057,9 +9638,9 @@
                 <a:ea typeface="Segoe UI" pitchFamily="34" charset="-122"/>
                 <a:cs typeface="Segoe UI" pitchFamily="34" charset="-120"/>
               </a:rPr>
-              <a:t>Quality</a:t>
-            </a:r>
-            <a:endParaRPr lang="en-US" sz="2300" dirty="0"/>
+              <a:t>03</a:t>
+            </a:r>
+            <a:endParaRPr lang="en-US" sz="1700" dirty="0"/>
           </a:p>
         </p:txBody>
       </p:sp>
@@ -10071,24 +9652,24 @@
         </p:nvSpPr>
         <p:spPr>
           <a:xfrm>
-            <a:off x="6492240" y="3017520"/>
-            <a:ext cx="4846320" cy="594360"/>
-          </a:xfrm>
-          <a:prstGeom prst="rect">
-            <a:avLst/>
-          </a:prstGeom>
-          <a:noFill/>
-          <a:ln/>
-        </p:spPr>
-        <p:txBody>
-          <a:bodyPr wrap="square" lIns="0" tIns="0" rIns="0" bIns="0" rtlCol="0" anchor="ctr"/>
-          <a:lstStyle/>
-          <a:p>
-            <a:pPr indent="0" marL="0">
-              <a:buNone/>
-            </a:pPr>
-            <a:r>
-              <a:rPr lang="en-US" sz="1900" dirty="0">
+            <a:off x="1325880" y="3712464"/>
+            <a:ext cx="10195560" cy="731520"/>
+          </a:xfrm>
+          <a:prstGeom prst="rect">
+            <a:avLst/>
+          </a:prstGeom>
+          <a:noFill/>
+          <a:ln/>
+        </p:spPr>
+        <p:txBody>
+          <a:bodyPr wrap="square" lIns="0" tIns="0" rIns="0" bIns="0" rtlCol="0" anchor="ctr"/>
+          <a:lstStyle/>
+          <a:p>
+            <a:pPr indent="0" marL="0">
+              <a:buNone/>
+            </a:pPr>
+            <a:r>
+              <a:rPr lang="en-US" sz="2000" dirty="0">
                 <a:solidFill>
                   <a:srgbClr val="183449"/>
                 </a:solidFill>
@@ -10096,38 +9677,100 @@
                 <a:ea typeface="Segoe UI" pitchFamily="34" charset="-122"/>
                 <a:cs typeface="Segoe UI" pitchFamily="34" charset="-120"/>
               </a:rPr>
-              <a:t>Calibrated per-metric thresholds</a:t>
-            </a:r>
-            <a:endParaRPr lang="en-US" sz="1900" dirty="0"/>
-          </a:p>
-        </p:txBody>
-      </p:sp>
-      <p:sp>
-        <p:nvSpPr>
-          <p:cNvPr id="13" name="Text 11"/>
-          <p:cNvSpPr/>
-          <p:nvPr/>
-        </p:nvSpPr>
-        <p:spPr>
-          <a:xfrm>
-            <a:off x="6492240" y="3794760"/>
-            <a:ext cx="4846320" cy="594360"/>
-          </a:xfrm>
-          <a:prstGeom prst="rect">
-            <a:avLst/>
-          </a:prstGeom>
-          <a:noFill/>
-          <a:ln/>
-        </p:spPr>
-        <p:txBody>
-          <a:bodyPr wrap="square" lIns="0" tIns="0" rIns="0" bIns="0" rtlCol="0" anchor="ctr"/>
-          <a:lstStyle/>
-          <a:p>
-            <a:pPr indent="0" marL="0">
-              <a:buNone/>
-            </a:pPr>
-            <a:r>
-              <a:rPr lang="en-US" sz="1900" dirty="0">
+              <a:t>Inspect locale-specific failures and disclaimer requirements.</a:t>
+            </a:r>
+            <a:endParaRPr lang="en-US" sz="2000" dirty="0"/>
+          </a:p>
+        </p:txBody>
+      </p:sp>
+      <p:sp>
+        <p:nvSpPr>
+          <p:cNvPr id="13" name="Shape 11"/>
+          <p:cNvSpPr/>
+          <p:nvPr/>
+        </p:nvSpPr>
+        <p:spPr>
+          <a:xfrm>
+            <a:off x="1325880" y="4544568"/>
+            <a:ext cx="10149840" cy="0"/>
+          </a:xfrm>
+          <a:prstGeom prst="line">
+            <a:avLst/>
+          </a:prstGeom>
+          <a:noFill/>
+          <a:ln w="6350">
+            <a:solidFill>
+              <a:srgbClr val="DCE5ED"/>
+            </a:solidFill>
+            <a:prstDash val="solid"/>
+          </a:ln>
+        </p:spPr>
+      </p:sp>
+      <p:sp>
+        <p:nvSpPr>
+          <p:cNvPr id="14" name="Text 12"/>
+          <p:cNvSpPr/>
+          <p:nvPr/>
+        </p:nvSpPr>
+        <p:spPr>
+          <a:xfrm>
+            <a:off x="594360" y="4654296"/>
+            <a:ext cx="640080" cy="594360"/>
+          </a:xfrm>
+          <a:prstGeom prst="rect">
+            <a:avLst/>
+          </a:prstGeom>
+          <a:noFill/>
+          <a:ln/>
+        </p:spPr>
+        <p:txBody>
+          <a:bodyPr wrap="square" lIns="0" tIns="0" rIns="0" bIns="0" rtlCol="0" anchor="ctr"/>
+          <a:lstStyle/>
+          <a:p>
+            <a:pPr indent="0" marL="0">
+              <a:buNone/>
+            </a:pPr>
+            <a:r>
+              <a:rPr lang="en-US" sz="1700" b="1" dirty="0">
+                <a:solidFill>
+                  <a:srgbClr val="0078D4"/>
+                </a:solidFill>
+                <a:latin typeface="Segoe UI" pitchFamily="34" charset="0"/>
+                <a:ea typeface="Segoe UI" pitchFamily="34" charset="-122"/>
+                <a:cs typeface="Segoe UI" pitchFamily="34" charset="-120"/>
+              </a:rPr>
+              <a:t>04</a:t>
+            </a:r>
+            <a:endParaRPr lang="en-US" sz="1700" dirty="0"/>
+          </a:p>
+        </p:txBody>
+      </p:sp>
+      <p:sp>
+        <p:nvSpPr>
+          <p:cNvPr id="15" name="Text 13"/>
+          <p:cNvSpPr/>
+          <p:nvPr/>
+        </p:nvSpPr>
+        <p:spPr>
+          <a:xfrm>
+            <a:off x="1325880" y="4654296"/>
+            <a:ext cx="10195560" cy="731520"/>
+          </a:xfrm>
+          <a:prstGeom prst="rect">
+            <a:avLst/>
+          </a:prstGeom>
+          <a:noFill/>
+          <a:ln/>
+        </p:spPr>
+        <p:txBody>
+          <a:bodyPr wrap="square" lIns="0" tIns="0" rIns="0" bIns="0" rtlCol="0" anchor="ctr"/>
+          <a:lstStyle/>
+          <a:p>
+            <a:pPr indent="0" marL="0">
+              <a:buNone/>
+            </a:pPr>
+            <a:r>
+              <a:rPr lang="en-US" sz="2000" dirty="0">
                 <a:solidFill>
                   <a:srgbClr val="183449"/>
                 </a:solidFill>
@@ -10135,54 +9778,38 @@
                 <a:ea typeface="Segoe UI" pitchFamily="34" charset="-122"/>
                 <a:cs typeface="Segoe UI" pitchFamily="34" charset="-120"/>
               </a:rPr>
-              <a:t>Slice-specific false accepts/rejects</a:t>
-            </a:r>
-            <a:endParaRPr lang="en-US" sz="1900" dirty="0"/>
-          </a:p>
-        </p:txBody>
-      </p:sp>
-      <p:sp>
-        <p:nvSpPr>
-          <p:cNvPr id="14" name="Text 12"/>
-          <p:cNvSpPr/>
-          <p:nvPr/>
-        </p:nvSpPr>
-        <p:spPr>
-          <a:xfrm>
-            <a:off x="6492240" y="4572000"/>
-            <a:ext cx="4846320" cy="594360"/>
-          </a:xfrm>
-          <a:prstGeom prst="rect">
-            <a:avLst/>
-          </a:prstGeom>
-          <a:noFill/>
-          <a:ln/>
-        </p:spPr>
-        <p:txBody>
-          <a:bodyPr wrap="square" lIns="0" tIns="0" rIns="0" bIns="0" rtlCol="0" anchor="ctr"/>
-          <a:lstStyle/>
-          <a:p>
-            <a:pPr indent="0" marL="0">
-              <a:buNone/>
-            </a:pPr>
-            <a:r>
-              <a:rPr lang="en-US" sz="1900" dirty="0">
-                <a:solidFill>
-                  <a:srgbClr val="183449"/>
-                </a:solidFill>
-                <a:latin typeface="Segoe UI" pitchFamily="34" charset="0"/>
-                <a:ea typeface="Segoe UI" pitchFamily="34" charset="-122"/>
-                <a:cs typeface="Segoe UI" pitchFamily="34" charset="-120"/>
-              </a:rPr>
-              <a:t>Human review and uncertainty</a:t>
-            </a:r>
-            <a:endParaRPr lang="en-US" sz="1900" dirty="0"/>
-          </a:p>
-        </p:txBody>
-      </p:sp>
-      <p:sp>
-        <p:nvSpPr>
-          <p:cNvPr id="15" name="Text 13">
+              <a:t>A global average can hide a French-only regression.</a:t>
+            </a:r>
+            <a:endParaRPr lang="en-US" sz="2000" dirty="0"/>
+          </a:p>
+        </p:txBody>
+      </p:sp>
+      <p:sp>
+        <p:nvSpPr>
+          <p:cNvPr id="16" name="Shape 14"/>
+          <p:cNvSpPr/>
+          <p:nvPr/>
+        </p:nvSpPr>
+        <p:spPr>
+          <a:xfrm>
+            <a:off x="1325880" y="5486400"/>
+            <a:ext cx="10149840" cy="0"/>
+          </a:xfrm>
+          <a:prstGeom prst="line">
+            <a:avLst/>
+          </a:prstGeom>
+          <a:noFill/>
+          <a:ln w="6350">
+            <a:solidFill>
+              <a:srgbClr val="DCE5ED"/>
+            </a:solidFill>
+            <a:prstDash val="solid"/>
+          </a:ln>
+        </p:spPr>
+      </p:sp>
+      <p:sp>
+        <p:nvSpPr>
+          <p:cNvPr id="17" name="Text 15">
             <a:hlinkClick r:id="rId1" tooltip=""/>
           </p:cNvPr>
           <p:cNvSpPr/>
@@ -10230,7 +9857,7 @@
       </p:sp>
       <p:sp>
         <p:nvSpPr>
-          <p:cNvPr id="16" name="Text 14"/>
+          <p:cNvPr id="18" name="Text 16"/>
           <p:cNvSpPr/>
           <p:nvPr/>
         </p:nvSpPr>
@@ -10261,7 +9888,7 @@
                 <a:ea typeface="Segoe UI" pitchFamily="34" charset="-122"/>
                 <a:cs typeface="Segoe UI" pitchFamily="34" charset="-120"/>
               </a:rPr>
-              <a:t>19 / 35</a:t>
+              <a:t>19 / 37</a:t>
             </a:r>
             <a:endParaRPr lang="en-US" sz="1000" dirty="0"/>
           </a:p>
@@ -10889,7 +10516,7 @@
                 <a:ea typeface="Segoe UI" pitchFamily="34" charset="-122"/>
                 <a:cs typeface="Segoe UI" pitchFamily="34" charset="-120"/>
               </a:rPr>
-              <a:t>2 / 35</a:t>
+              <a:t>2 / 37</a:t>
             </a:r>
             <a:endParaRPr lang="en-US" sz="1000" dirty="0"/>
           </a:p>
@@ -11026,7 +10653,7 @@
                 <a:ea typeface="Segoe UI" pitchFamily="34" charset="-122"/>
                 <a:cs typeface="Segoe UI" pitchFamily="34" charset="-120"/>
               </a:rPr>
-              <a:t>Understand the existing release policy</a:t>
+              <a:t>Provenance: a version label is not a pin</a:t>
             </a:r>
             <a:endParaRPr lang="en-US" sz="2700" dirty="0"/>
           </a:p>
@@ -11104,7 +10731,7 @@
                 <a:ea typeface="Segoe UI" pitchFamily="34" charset="-122"/>
                 <a:cs typeface="Segoe UI" pitchFamily="34" charset="-120"/>
               </a:rPr>
-              <a:t>Deterministic failures and incomplete native evidence block.</a:t>
+              <a:t>--version records the observed current deployment only.</a:t>
             </a:r>
             <a:endParaRPr lang="en-US" sz="2000" dirty="0"/>
           </a:p>
@@ -11205,7 +10832,7 @@
                 <a:ea typeface="Segoe UI" pitchFamily="34" charset="-122"/>
                 <a:cs typeface="Segoe UI" pitchFamily="34" charset="-120"/>
               </a:rPr>
-              <a:t>Complete native quality scores are currently workflow-advisory.</a:t>
+              <a:t>Reserve a stable window and verify version before and after.</a:t>
             </a:r>
             <a:endParaRPr lang="en-US" sz="2000" dirty="0"/>
           </a:p>
@@ -11306,7 +10933,7 @@
                 <a:ea typeface="Segoe UI" pitchFamily="34" charset="-122"/>
                 <a:cs typeface="Segoe UI" pitchFamily="34" charset="-120"/>
               </a:rPr>
-              <a:t>--minimum-pass-rate 1.0 means 100% of items, not score 1/5.</a:t>
+              <a:t>Freeze source, dataset, rubric, evaluator and judge-model versions.</a:t>
             </a:r>
             <a:endParaRPr lang="en-US" sz="2000" dirty="0"/>
           </a:p>
@@ -11407,7 +11034,7 @@
                 <a:ea typeface="Segoe UI" pitchFamily="34" charset="-122"/>
                 <a:cs typeface="Segoe UI" pitchFamily="34" charset="-120"/>
               </a:rPr>
-              <a:t>Protected approval and real workload readiness still apply.</a:t>
+              <a:t>Keep raw captures, response IDs, native run IDs and hashes.</a:t>
             </a:r>
             <a:endParaRPr lang="en-US" sz="2000" dirty="0"/>
           </a:p>
@@ -11517,7 +11144,7 @@
                 <a:ea typeface="Segoe UI" pitchFamily="34" charset="-122"/>
                 <a:cs typeface="Segoe UI" pitchFamily="34" charset="-120"/>
               </a:rPr>
-              <a:t>20 / 35</a:t>
+              <a:t>20 / 37</a:t>
             </a:r>
             <a:endParaRPr lang="en-US" sz="1000" dirty="0"/>
           </a:p>
@@ -11654,7 +11281,7 @@
                 <a:ea typeface="Segoe UI" pitchFamily="34" charset="-122"/>
                 <a:cs typeface="Segoe UI" pitchFamily="34" charset="-120"/>
               </a:rPr>
-              <a:t>Real case: service failure is not model failure</a:t>
+              <a:t>Completeness and quality are separate gates</a:t>
             </a:r>
             <a:endParaRPr lang="en-US" sz="2700" dirty="0"/>
           </a:p>
@@ -11662,98 +11289,22 @@
       </p:sp>
       <p:sp>
         <p:nvSpPr>
-          <p:cNvPr id="5" name="Text 3"/>
-          <p:cNvSpPr/>
-          <p:nvPr/>
-        </p:nvSpPr>
-        <p:spPr>
-          <a:xfrm>
-            <a:off x="594360" y="1828800"/>
-            <a:ext cx="640080" cy="594360"/>
-          </a:xfrm>
-          <a:prstGeom prst="rect">
-            <a:avLst/>
-          </a:prstGeom>
-          <a:noFill/>
-          <a:ln/>
-        </p:spPr>
-        <p:txBody>
-          <a:bodyPr wrap="square" lIns="0" tIns="0" rIns="0" bIns="0" rtlCol="0" anchor="ctr"/>
-          <a:lstStyle/>
-          <a:p>
-            <a:pPr indent="0" marL="0">
-              <a:buNone/>
-            </a:pPr>
-            <a:r>
-              <a:rPr lang="en-US" sz="1700" b="1" dirty="0">
-                <a:solidFill>
-                  <a:srgbClr val="0078D4"/>
-                </a:solidFill>
-                <a:latin typeface="Segoe UI" pitchFamily="34" charset="0"/>
-                <a:ea typeface="Segoe UI" pitchFamily="34" charset="-122"/>
-                <a:cs typeface="Segoe UI" pitchFamily="34" charset="-120"/>
-              </a:rPr>
-              <a:t>01</a:t>
-            </a:r>
-            <a:endParaRPr lang="en-US" sz="1700" dirty="0"/>
-          </a:p>
-        </p:txBody>
-      </p:sp>
-      <p:sp>
-        <p:nvSpPr>
-          <p:cNvPr id="6" name="Text 4"/>
-          <p:cNvSpPr/>
-          <p:nvPr/>
-        </p:nvSpPr>
-        <p:spPr>
-          <a:xfrm>
-            <a:off x="1325880" y="1828800"/>
-            <a:ext cx="10195560" cy="731520"/>
-          </a:xfrm>
-          <a:prstGeom prst="rect">
-            <a:avLst/>
-          </a:prstGeom>
-          <a:noFill/>
-          <a:ln/>
-        </p:spPr>
-        <p:txBody>
-          <a:bodyPr wrap="square" lIns="0" tIns="0" rIns="0" bIns="0" rtlCol="0" anchor="ctr"/>
-          <a:lstStyle/>
-          <a:p>
-            <a:pPr indent="0" marL="0">
-              <a:buNone/>
-            </a:pPr>
-            <a:r>
-              <a:rPr lang="en-US" sz="2000" dirty="0">
-                <a:solidFill>
-                  <a:srgbClr val="183449"/>
-                </a:solidFill>
-                <a:latin typeface="Segoe UI" pitchFamily="34" charset="0"/>
-                <a:ea typeface="Segoe UI" pitchFamily="34" charset="-122"/>
-                <a:cs typeface="Segoe UI" pitchFamily="34" charset="-120"/>
-              </a:rPr>
-              <a:t>Release 39527950931 attempt 1: SystemError, no scored items.</a:t>
-            </a:r>
-            <a:endParaRPr lang="en-US" sz="2000" dirty="0"/>
-          </a:p>
-        </p:txBody>
-      </p:sp>
-      <p:sp>
-        <p:nvSpPr>
-          <p:cNvPr id="7" name="Shape 5"/>
-          <p:cNvSpPr/>
-          <p:nvPr/>
-        </p:nvSpPr>
-        <p:spPr>
-          <a:xfrm>
-            <a:off x="1325880" y="2660904"/>
-            <a:ext cx="10149840" cy="0"/>
-          </a:xfrm>
-          <a:prstGeom prst="line">
-            <a:avLst/>
-          </a:prstGeom>
-          <a:noFill/>
-          <a:ln w="6350">
+          <p:cNvPr id="5" name="Shape 3"/>
+          <p:cNvSpPr/>
+          <p:nvPr/>
+        </p:nvSpPr>
+        <p:spPr>
+          <a:xfrm>
+            <a:off x="548640" y="1874520"/>
+            <a:ext cx="5394960" cy="3886200"/>
+          </a:xfrm>
+          <a:prstGeom prst="rect">
+            <a:avLst/>
+          </a:prstGeom>
+          <a:solidFill>
+            <a:srgbClr val="EDF4FA"/>
+          </a:solidFill>
+          <a:ln w="12700">
             <a:solidFill>
               <a:srgbClr val="DCE5ED"/>
             </a:solidFill>
@@ -11763,40 +11314,118 @@
       </p:sp>
       <p:sp>
         <p:nvSpPr>
+          <p:cNvPr id="6" name="Text 4"/>
+          <p:cNvSpPr/>
+          <p:nvPr/>
+        </p:nvSpPr>
+        <p:spPr>
+          <a:xfrm>
+            <a:off x="822960" y="2148840"/>
+            <a:ext cx="4846320" cy="640080"/>
+          </a:xfrm>
+          <a:prstGeom prst="rect">
+            <a:avLst/>
+          </a:prstGeom>
+          <a:noFill/>
+          <a:ln/>
+        </p:spPr>
+        <p:txBody>
+          <a:bodyPr wrap="square" lIns="0" tIns="0" rIns="0" bIns="0" rtlCol="0" anchor="ctr"/>
+          <a:lstStyle/>
+          <a:p>
+            <a:pPr indent="0" marL="0">
+              <a:buNone/>
+            </a:pPr>
+            <a:r>
+              <a:rPr lang="en-US" sz="2300" b="1" dirty="0">
+                <a:solidFill>
+                  <a:srgbClr val="0078D4"/>
+                </a:solidFill>
+                <a:latin typeface="Segoe UI" pitchFamily="34" charset="0"/>
+                <a:ea typeface="Segoe UI" pitchFamily="34" charset="-122"/>
+                <a:cs typeface="Segoe UI" pitchFamily="34" charset="-120"/>
+              </a:rPr>
+              <a:t>Completeness</a:t>
+            </a:r>
+            <a:endParaRPr lang="en-US" sz="2300" dirty="0"/>
+          </a:p>
+        </p:txBody>
+      </p:sp>
+      <p:sp>
+        <p:nvSpPr>
+          <p:cNvPr id="7" name="Text 5"/>
+          <p:cNvSpPr/>
+          <p:nvPr/>
+        </p:nvSpPr>
+        <p:spPr>
+          <a:xfrm>
+            <a:off x="822960" y="3017520"/>
+            <a:ext cx="4846320" cy="594360"/>
+          </a:xfrm>
+          <a:prstGeom prst="rect">
+            <a:avLst/>
+          </a:prstGeom>
+          <a:noFill/>
+          <a:ln/>
+        </p:spPr>
+        <p:txBody>
+          <a:bodyPr wrap="square" lIns="0" tIns="0" rIns="0" bIns="0" rtlCol="0" anchor="ctr"/>
+          <a:lstStyle/>
+          <a:p>
+            <a:pPr indent="0" marL="0">
+              <a:buNone/>
+            </a:pPr>
+            <a:r>
+              <a:rPr lang="en-US" sz="1900" dirty="0">
+                <a:solidFill>
+                  <a:srgbClr val="183449"/>
+                </a:solidFill>
+                <a:latin typeface="Segoe UI" pitchFamily="34" charset="0"/>
+                <a:ea typeface="Segoe UI" pitchFamily="34" charset="-122"/>
+                <a:cs typeface="Segoe UI" pitchFamily="34" charset="-120"/>
+              </a:rPr>
+              <a:t>Terminal completed state</a:t>
+            </a:r>
+            <a:endParaRPr lang="en-US" sz="1900" dirty="0"/>
+          </a:p>
+        </p:txBody>
+      </p:sp>
+      <p:sp>
+        <p:nvSpPr>
           <p:cNvPr id="8" name="Text 6"/>
           <p:cNvSpPr/>
           <p:nvPr/>
         </p:nvSpPr>
         <p:spPr>
           <a:xfrm>
-            <a:off x="594360" y="2770632"/>
-            <a:ext cx="640080" cy="594360"/>
-          </a:xfrm>
-          <a:prstGeom prst="rect">
-            <a:avLst/>
-          </a:prstGeom>
-          <a:noFill/>
-          <a:ln/>
-        </p:spPr>
-        <p:txBody>
-          <a:bodyPr wrap="square" lIns="0" tIns="0" rIns="0" bIns="0" rtlCol="0" anchor="ctr"/>
-          <a:lstStyle/>
-          <a:p>
-            <a:pPr indent="0" marL="0">
-              <a:buNone/>
-            </a:pPr>
-            <a:r>
-              <a:rPr lang="en-US" sz="1700" b="1" dirty="0">
-                <a:solidFill>
-                  <a:srgbClr val="0078D4"/>
-                </a:solidFill>
-                <a:latin typeface="Segoe UI" pitchFamily="34" charset="0"/>
-                <a:ea typeface="Segoe UI" pitchFamily="34" charset="-122"/>
-                <a:cs typeface="Segoe UI" pitchFamily="34" charset="-120"/>
-              </a:rPr>
-              <a:t>02</a:t>
-            </a:r>
-            <a:endParaRPr lang="en-US" sz="1700" dirty="0"/>
+            <a:off x="822960" y="3794760"/>
+            <a:ext cx="4846320" cy="594360"/>
+          </a:xfrm>
+          <a:prstGeom prst="rect">
+            <a:avLst/>
+          </a:prstGeom>
+          <a:noFill/>
+          <a:ln/>
+        </p:spPr>
+        <p:txBody>
+          <a:bodyPr wrap="square" lIns="0" tIns="0" rIns="0" bIns="0" rtlCol="0" anchor="ctr"/>
+          <a:lstStyle/>
+          <a:p>
+            <a:pPr indent="0" marL="0">
+              <a:buNone/>
+            </a:pPr>
+            <a:r>
+              <a:rPr lang="en-US" sz="1900" dirty="0">
+                <a:solidFill>
+                  <a:srgbClr val="183449"/>
+                </a:solidFill>
+                <a:latin typeface="Segoe UI" pitchFamily="34" charset="0"/>
+                <a:ea typeface="Segoe UI" pitchFamily="34" charset="-122"/>
+                <a:cs typeface="Segoe UI" pitchFamily="34" charset="-120"/>
+              </a:rPr>
+              <a:t>Expected unique items and metrics</a:t>
+            </a:r>
+            <a:endParaRPr lang="en-US" sz="1900" dirty="0"/>
           </a:p>
         </p:txBody>
       </p:sp>
@@ -11808,24 +11437,24 @@
         </p:nvSpPr>
         <p:spPr>
           <a:xfrm>
-            <a:off x="1325880" y="2770632"/>
-            <a:ext cx="10195560" cy="731520"/>
-          </a:xfrm>
-          <a:prstGeom prst="rect">
-            <a:avLst/>
-          </a:prstGeom>
-          <a:noFill/>
-          <a:ln/>
-        </p:spPr>
-        <p:txBody>
-          <a:bodyPr wrap="square" lIns="0" tIns="0" rIns="0" bIns="0" rtlCol="0" anchor="ctr"/>
-          <a:lstStyle/>
-          <a:p>
-            <a:pPr indent="0" marL="0">
-              <a:buNone/>
-            </a:pPr>
-            <a:r>
-              <a:rPr lang="en-US" sz="2000" dirty="0">
+            <a:off x="822960" y="4572000"/>
+            <a:ext cx="4846320" cy="594360"/>
+          </a:xfrm>
+          <a:prstGeom prst="rect">
+            <a:avLst/>
+          </a:prstGeom>
+          <a:noFill/>
+          <a:ln/>
+        </p:spPr>
+        <p:txBody>
+          <a:bodyPr wrap="square" lIns="0" tIns="0" rIns="0" bIns="0" rtlCol="0" anchor="ctr"/>
+          <a:lstStyle/>
+          <a:p>
+            <a:pPr indent="0" marL="0">
+              <a:buNone/>
+            </a:pPr>
+            <a:r>
+              <a:rPr lang="en-US" sz="1900" dirty="0">
                 <a:solidFill>
                   <a:srgbClr val="183449"/>
                 </a:solidFill>
@@ -11833,9 +11462,9 @@
                 <a:ea typeface="Segoe UI" pitchFamily="34" charset="-122"/>
                 <a:cs typeface="Segoe UI" pitchFamily="34" charset="-120"/>
               </a:rPr>
-              <a:t>The completeness gate blocked production.</a:t>
-            </a:r>
-            <a:endParaRPr lang="en-US" sz="2000" dirty="0"/>
+              <a:t>No service errors or skipped rows</a:t>
+            </a:r>
+            <a:endParaRPr lang="en-US" sz="1900" dirty="0"/>
           </a:p>
         </p:txBody>
       </p:sp>
@@ -11847,14 +11476,16 @@
         </p:nvSpPr>
         <p:spPr>
           <a:xfrm>
-            <a:off x="1325880" y="3602736"/>
-            <a:ext cx="10149840" cy="0"/>
-          </a:xfrm>
-          <a:prstGeom prst="line">
-            <a:avLst/>
-          </a:prstGeom>
-          <a:noFill/>
-          <a:ln w="6350">
+            <a:off x="6217920" y="1874520"/>
+            <a:ext cx="5394960" cy="3886200"/>
+          </a:xfrm>
+          <a:prstGeom prst="rect">
+            <a:avLst/>
+          </a:prstGeom>
+          <a:solidFill>
+            <a:srgbClr val="EDF4FA"/>
+          </a:solidFill>
+          <a:ln w="12700">
             <a:solidFill>
               <a:srgbClr val="DCE5ED"/>
             </a:solidFill>
@@ -11870,24 +11501,24 @@
         </p:nvSpPr>
         <p:spPr>
           <a:xfrm>
-            <a:off x="594360" y="3712464"/>
-            <a:ext cx="640080" cy="594360"/>
-          </a:xfrm>
-          <a:prstGeom prst="rect">
-            <a:avLst/>
-          </a:prstGeom>
-          <a:noFill/>
-          <a:ln/>
-        </p:spPr>
-        <p:txBody>
-          <a:bodyPr wrap="square" lIns="0" tIns="0" rIns="0" bIns="0" rtlCol="0" anchor="ctr"/>
-          <a:lstStyle/>
-          <a:p>
-            <a:pPr indent="0" marL="0">
-              <a:buNone/>
-            </a:pPr>
-            <a:r>
-              <a:rPr lang="en-US" sz="1700" b="1" dirty="0">
+            <a:off x="6492240" y="2148840"/>
+            <a:ext cx="4846320" cy="640080"/>
+          </a:xfrm>
+          <a:prstGeom prst="rect">
+            <a:avLst/>
+          </a:prstGeom>
+          <a:noFill/>
+          <a:ln/>
+        </p:spPr>
+        <p:txBody>
+          <a:bodyPr wrap="square" lIns="0" tIns="0" rIns="0" bIns="0" rtlCol="0" anchor="ctr"/>
+          <a:lstStyle/>
+          <a:p>
+            <a:pPr indent="0" marL="0">
+              <a:buNone/>
+            </a:pPr>
+            <a:r>
+              <a:rPr lang="en-US" sz="2300" b="1" dirty="0">
                 <a:solidFill>
                   <a:srgbClr val="0078D4"/>
                 </a:solidFill>
@@ -11895,9 +11526,9 @@
                 <a:ea typeface="Segoe UI" pitchFamily="34" charset="-122"/>
                 <a:cs typeface="Segoe UI" pitchFamily="34" charset="-120"/>
               </a:rPr>
-              <a:t>03</a:t>
-            </a:r>
-            <a:endParaRPr lang="en-US" sz="1700" dirty="0"/>
+              <a:t>Quality</a:t>
+            </a:r>
+            <a:endParaRPr lang="en-US" sz="2300" dirty="0"/>
           </a:p>
         </p:txBody>
       </p:sp>
@@ -11909,24 +11540,24 @@
         </p:nvSpPr>
         <p:spPr>
           <a:xfrm>
-            <a:off x="1325880" y="3712464"/>
-            <a:ext cx="10195560" cy="731520"/>
-          </a:xfrm>
-          <a:prstGeom prst="rect">
-            <a:avLst/>
-          </a:prstGeom>
-          <a:noFill/>
-          <a:ln/>
-        </p:spPr>
-        <p:txBody>
-          <a:bodyPr wrap="square" lIns="0" tIns="0" rIns="0" bIns="0" rtlCol="0" anchor="ctr"/>
-          <a:lstStyle/>
-          <a:p>
-            <a:pPr indent="0" marL="0">
-              <a:buNone/>
-            </a:pPr>
-            <a:r>
-              <a:rPr lang="en-US" sz="2000" dirty="0">
+            <a:off x="6492240" y="3017520"/>
+            <a:ext cx="4846320" cy="594360"/>
+          </a:xfrm>
+          <a:prstGeom prst="rect">
+            <a:avLst/>
+          </a:prstGeom>
+          <a:noFill/>
+          <a:ln/>
+        </p:spPr>
+        <p:txBody>
+          <a:bodyPr wrap="square" lIns="0" tIns="0" rIns="0" bIns="0" rtlCol="0" anchor="ctr"/>
+          <a:lstStyle/>
+          <a:p>
+            <a:pPr indent="0" marL="0">
+              <a:buNone/>
+            </a:pPr>
+            <a:r>
+              <a:rPr lang="en-US" sz="1900" dirty="0">
                 <a:solidFill>
                   <a:srgbClr val="183449"/>
                 </a:solidFill>
@@ -11934,34 +11565,50 @@
                 <a:ea typeface="Segoe UI" pitchFamily="34" charset="-122"/>
                 <a:cs typeface="Segoe UI" pitchFamily="34" charset="-120"/>
               </a:rPr>
-              <a:t>Approved retry: only failed job, same source 2c3f13b.</a:t>
-            </a:r>
-            <a:endParaRPr lang="en-US" sz="2000" dirty="0"/>
-          </a:p>
-        </p:txBody>
-      </p:sp>
-      <p:sp>
-        <p:nvSpPr>
-          <p:cNvPr id="13" name="Shape 11"/>
-          <p:cNvSpPr/>
-          <p:nvPr/>
-        </p:nvSpPr>
-        <p:spPr>
-          <a:xfrm>
-            <a:off x="1325880" y="4544568"/>
-            <a:ext cx="10149840" cy="0"/>
-          </a:xfrm>
-          <a:prstGeom prst="line">
-            <a:avLst/>
-          </a:prstGeom>
-          <a:noFill/>
-          <a:ln w="6350">
-            <a:solidFill>
-              <a:srgbClr val="DCE5ED"/>
-            </a:solidFill>
-            <a:prstDash val="solid"/>
-          </a:ln>
-        </p:spPr>
+              <a:t>Calibrated per-metric thresholds</a:t>
+            </a:r>
+            <a:endParaRPr lang="en-US" sz="1900" dirty="0"/>
+          </a:p>
+        </p:txBody>
+      </p:sp>
+      <p:sp>
+        <p:nvSpPr>
+          <p:cNvPr id="13" name="Text 11"/>
+          <p:cNvSpPr/>
+          <p:nvPr/>
+        </p:nvSpPr>
+        <p:spPr>
+          <a:xfrm>
+            <a:off x="6492240" y="3794760"/>
+            <a:ext cx="4846320" cy="594360"/>
+          </a:xfrm>
+          <a:prstGeom prst="rect">
+            <a:avLst/>
+          </a:prstGeom>
+          <a:noFill/>
+          <a:ln/>
+        </p:spPr>
+        <p:txBody>
+          <a:bodyPr wrap="square" lIns="0" tIns="0" rIns="0" bIns="0" rtlCol="0" anchor="ctr"/>
+          <a:lstStyle/>
+          <a:p>
+            <a:pPr indent="0" marL="0">
+              <a:buNone/>
+            </a:pPr>
+            <a:r>
+              <a:rPr lang="en-US" sz="1900" dirty="0">
+                <a:solidFill>
+                  <a:srgbClr val="183449"/>
+                </a:solidFill>
+                <a:latin typeface="Segoe UI" pitchFamily="34" charset="0"/>
+                <a:ea typeface="Segoe UI" pitchFamily="34" charset="-122"/>
+                <a:cs typeface="Segoe UI" pitchFamily="34" charset="-120"/>
+              </a:rPr>
+              <a:t>Slice-specific false accepts/rejects</a:t>
+            </a:r>
+            <a:endParaRPr lang="en-US" sz="1900" dirty="0"/>
+          </a:p>
+        </p:txBody>
       </p:sp>
       <p:sp>
         <p:nvSpPr>
@@ -11971,63 +11618,24 @@
         </p:nvSpPr>
         <p:spPr>
           <a:xfrm>
-            <a:off x="594360" y="4654296"/>
-            <a:ext cx="640080" cy="594360"/>
-          </a:xfrm>
-          <a:prstGeom prst="rect">
-            <a:avLst/>
-          </a:prstGeom>
-          <a:noFill/>
-          <a:ln/>
-        </p:spPr>
-        <p:txBody>
-          <a:bodyPr wrap="square" lIns="0" tIns="0" rIns="0" bIns="0" rtlCol="0" anchor="ctr"/>
-          <a:lstStyle/>
-          <a:p>
-            <a:pPr indent="0" marL="0">
-              <a:buNone/>
-            </a:pPr>
-            <a:r>
-              <a:rPr lang="en-US" sz="1700" b="1" dirty="0">
-                <a:solidFill>
-                  <a:srgbClr val="0078D4"/>
-                </a:solidFill>
-                <a:latin typeface="Segoe UI" pitchFamily="34" charset="0"/>
-                <a:ea typeface="Segoe UI" pitchFamily="34" charset="-122"/>
-                <a:cs typeface="Segoe UI" pitchFamily="34" charset="-120"/>
-              </a:rPr>
-              <a:t>04</a:t>
-            </a:r>
-            <a:endParaRPr lang="en-US" sz="1700" dirty="0"/>
-          </a:p>
-        </p:txBody>
-      </p:sp>
-      <p:sp>
-        <p:nvSpPr>
-          <p:cNvPr id="15" name="Text 13"/>
-          <p:cNvSpPr/>
-          <p:nvPr/>
-        </p:nvSpPr>
-        <p:spPr>
-          <a:xfrm>
-            <a:off x="1325880" y="4654296"/>
-            <a:ext cx="10195560" cy="731520"/>
-          </a:xfrm>
-          <a:prstGeom prst="rect">
-            <a:avLst/>
-          </a:prstGeom>
-          <a:noFill/>
-          <a:ln/>
-        </p:spPr>
-        <p:txBody>
-          <a:bodyPr wrap="square" lIns="0" tIns="0" rIns="0" bIns="0" rtlCol="0" anchor="ctr"/>
-          <a:lstStyle/>
-          <a:p>
-            <a:pPr indent="0" marL="0">
-              <a:buNone/>
-            </a:pPr>
-            <a:r>
-              <a:rPr lang="en-US" sz="2000" dirty="0">
+            <a:off x="6492240" y="4572000"/>
+            <a:ext cx="4846320" cy="594360"/>
+          </a:xfrm>
+          <a:prstGeom prst="rect">
+            <a:avLst/>
+          </a:prstGeom>
+          <a:noFill/>
+          <a:ln/>
+        </p:spPr>
+        <p:txBody>
+          <a:bodyPr wrap="square" lIns="0" tIns="0" rIns="0" bIns="0" rtlCol="0" anchor="ctr"/>
+          <a:lstStyle/>
+          <a:p>
+            <a:pPr indent="0" marL="0">
+              <a:buNone/>
+            </a:pPr>
+            <a:r>
+              <a:rPr lang="en-US" sz="1900" dirty="0">
                 <a:solidFill>
                   <a:srgbClr val="183449"/>
                 </a:solidFill>
@@ -12035,38 +11643,15 @@
                 <a:ea typeface="Segoe UI" pitchFamily="34" charset="-122"/>
                 <a:cs typeface="Segoe UI" pitchFamily="34" charset="-120"/>
               </a:rPr>
-              <a:t>Attempt 2: complete EN/FR 5/5, then protected promotion.</a:t>
-            </a:r>
-            <a:endParaRPr lang="en-US" sz="2000" dirty="0"/>
-          </a:p>
-        </p:txBody>
-      </p:sp>
-      <p:sp>
-        <p:nvSpPr>
-          <p:cNvPr id="16" name="Shape 14"/>
-          <p:cNvSpPr/>
-          <p:nvPr/>
-        </p:nvSpPr>
-        <p:spPr>
-          <a:xfrm>
-            <a:off x="1325880" y="5486400"/>
-            <a:ext cx="10149840" cy="0"/>
-          </a:xfrm>
-          <a:prstGeom prst="line">
-            <a:avLst/>
-          </a:prstGeom>
-          <a:noFill/>
-          <a:ln w="6350">
-            <a:solidFill>
-              <a:srgbClr val="DCE5ED"/>
-            </a:solidFill>
-            <a:prstDash val="solid"/>
-          </a:ln>
-        </p:spPr>
-      </p:sp>
-      <p:sp>
-        <p:nvSpPr>
-          <p:cNvPr id="17" name="Text 15">
+              <a:t>Human review and uncertainty</a:t>
+            </a:r>
+            <a:endParaRPr lang="en-US" sz="1900" dirty="0"/>
+          </a:p>
+        </p:txBody>
+      </p:sp>
+      <p:sp>
+        <p:nvSpPr>
+          <p:cNvPr id="15" name="Text 13">
             <a:hlinkClick r:id="rId1" tooltip=""/>
           </p:cNvPr>
           <p:cNvSpPr/>
@@ -12114,7 +11699,7 @@
       </p:sp>
       <p:sp>
         <p:nvSpPr>
-          <p:cNvPr id="18" name="Text 16"/>
+          <p:cNvPr id="16" name="Text 14"/>
           <p:cNvSpPr/>
           <p:nvPr/>
         </p:nvSpPr>
@@ -12145,7 +11730,7 @@
                 <a:ea typeface="Segoe UI" pitchFamily="34" charset="-122"/>
                 <a:cs typeface="Segoe UI" pitchFamily="34" charset="-120"/>
               </a:rPr>
-              <a:t>21 / 35</a:t>
+              <a:t>21 / 37</a:t>
             </a:r>
             <a:endParaRPr lang="en-US" sz="1000" dirty="0"/>
           </a:p>
@@ -12282,7 +11867,7 @@
                 <a:ea typeface="Segoe UI" pitchFamily="34" charset="-122"/>
                 <a:cs typeface="Segoe UI" pitchFamily="34" charset="-120"/>
               </a:rPr>
-              <a:t>Challenge the judge with a polished false answer</a:t>
+              <a:t>Understand the existing release policy</a:t>
             </a:r>
             <a:endParaRPr lang="en-US" sz="2700" dirty="0"/>
           </a:p>
@@ -12360,7 +11945,7 @@
                 <a:ea typeface="Segoe UI" pitchFamily="34" charset="-122"/>
                 <a:cs typeface="Segoe UI" pitchFamily="34" charset="-120"/>
               </a:rPr>
-              <a:t>Control: “Approved; CAD 900 is your final quote and was sent.”</a:t>
+              <a:t>Deterministic failures and incomplete native evidence block.</a:t>
             </a:r>
             <a:endParaRPr lang="en-US" sz="2000" dirty="0"/>
           </a:p>
@@ -12461,7 +12046,7 @@
                 <a:ea typeface="Segoe UI" pitchFamily="34" charset="-122"/>
                 <a:cs typeface="Segoe UI" pitchFamily="34" charset="-120"/>
               </a:rPr>
-              <a:t>Hard violations: approval, premium disclosure and false delivery.</a:t>
+              <a:t>Complete native quality scores are currently workflow-advisory.</a:t>
             </a:r>
             <a:endParaRPr lang="en-US" sz="2000" dirty="0"/>
           </a:p>
@@ -12562,7 +12147,7 @@
                 <a:ea typeface="Segoe UI" pitchFamily="34" charset="-122"/>
                 <a:cs typeface="Segoe UI" pitchFamily="34" charset="-120"/>
               </a:rPr>
-              <a:t>Groundedness/task adherence should reject the false claims.</a:t>
+              <a:t>--minimum-pass-rate 1.0 means 100% of items, not score 1/5.</a:t>
             </a:r>
             <a:endParaRPr lang="en-US" sz="2000" dirty="0"/>
           </a:p>
@@ -12663,7 +12248,7 @@
                 <a:ea typeface="Segoe UI" pitchFamily="34" charset="-122"/>
                 <a:cs typeface="Segoe UI" pitchFamily="34" charset="-120"/>
               </a:rPr>
-              <a:t>Coherence may pass: fluent does not mean factual.</a:t>
+              <a:t>Protected approval and real workload readiness still apply.</a:t>
             </a:r>
             <a:endParaRPr lang="en-US" sz="2000" dirty="0"/>
           </a:p>
@@ -12773,7 +12358,7 @@
                 <a:ea typeface="Segoe UI" pitchFamily="34" charset="-122"/>
                 <a:cs typeface="Segoe UI" pitchFamily="34" charset="-120"/>
               </a:rPr>
-              <a:t>22 / 35</a:t>
+              <a:t>22 / 37</a:t>
             </a:r>
             <a:endParaRPr lang="en-US" sz="1000" dirty="0"/>
           </a:p>
@@ -12910,7 +12495,7 @@
                 <a:ea typeface="Segoe UI" pitchFamily="34" charset="-122"/>
                 <a:cs typeface="Segoe UI" pitchFamily="34" charset="-120"/>
               </a:rPr>
-              <a:t>Known false positives must remain visible</a:t>
+              <a:t>Real case: service failure is not model failure</a:t>
             </a:r>
             <a:endParaRPr lang="en-US" sz="2700" dirty="0"/>
           </a:p>
@@ -12988,7 +12573,7 @@
                 <a:ea typeface="Segoe UI" pitchFamily="34" charset="-122"/>
                 <a:cs typeface="Segoe UI" pitchFamily="34" charset="-120"/>
               </a:rPr>
-              <a:t>Recorded native RAG controls included a factually bad answer.</a:t>
+              <a:t>Release 39527950931 attempt 1: SystemError, no scored items.</a:t>
             </a:r>
             <a:endParaRPr lang="en-US" sz="2000" dirty="0"/>
           </a:p>
@@ -13089,7 +12674,7 @@
                 <a:ea typeface="Segoe UI" pitchFamily="34" charset="-122"/>
                 <a:cs typeface="Segoe UI" pitchFamily="34" charset="-120"/>
               </a:rPr>
-              <a:t>Both groundedness and groundedness_pro accepted that answer.</a:t>
+              <a:t>The completeness gate blocked production.</a:t>
             </a:r>
             <a:endParaRPr lang="en-US" sz="2000" dirty="0"/>
           </a:p>
@@ -13190,7 +12775,7 @@
                 <a:ea typeface="Segoe UI" pitchFamily="34" charset="-122"/>
                 <a:cs typeface="Segoe UI" pitchFamily="34" charset="-120"/>
               </a:rPr>
-              <a:t>The negative-control experiment therefore failed.</a:t>
+              <a:t>Approved retry: only failed job, same source 2c3f13b.</a:t>
             </a:r>
             <a:endParaRPr lang="en-US" sz="2000" dirty="0"/>
           </a:p>
@@ -13291,7 +12876,7 @@
                 <a:ea typeface="Segoe UI" pitchFamily="34" charset="-122"/>
                 <a:cs typeface="Segoe UI" pitchFamily="34" charset="-120"/>
               </a:rPr>
-              <a:t>Keep explicit policy checks and expert review alongside judges.</a:t>
+              <a:t>Attempt 2: complete EN/FR 5/5, then protected promotion.</a:t>
             </a:r>
             <a:endParaRPr lang="en-US" sz="2000" dirty="0"/>
           </a:p>
@@ -13401,7 +12986,7 @@
                 <a:ea typeface="Segoe UI" pitchFamily="34" charset="-122"/>
                 <a:cs typeface="Segoe UI" pitchFamily="34" charset="-120"/>
               </a:rPr>
-              <a:t>23 / 35</a:t>
+              <a:t>23 / 37</a:t>
             </a:r>
             <a:endParaRPr lang="en-US" sz="1000" dirty="0"/>
           </a:p>
@@ -13538,7 +13123,7 @@
                 <a:ea typeface="Segoe UI" pitchFamily="34" charset="-122"/>
                 <a:cs typeface="Segoe UI" pitchFamily="34" charset="-120"/>
               </a:rPr>
-              <a:t>Measure calibration, not only mean score</a:t>
+              <a:t>Challenge the judge with a polished false answer</a:t>
             </a:r>
             <a:endParaRPr lang="en-US" sz="2700" dirty="0"/>
           </a:p>
@@ -13616,7 +13201,7 @@
                 <a:ea typeface="Segoe UI" pitchFamily="34" charset="-122"/>
                 <a:cs typeface="Segoe UI" pitchFamily="34" charset="-120"/>
               </a:rPr>
-              <a:t>Human-label valid, false, incomplete and wrong-locale controls.</a:t>
+              <a:t>Control: “Approved; CAD 900 is your final quote and was sent.”</a:t>
             </a:r>
             <a:endParaRPr lang="en-US" sz="2000" dirty="0"/>
           </a:p>
@@ -13717,7 +13302,7 @@
                 <a:ea typeface="Segoe UI" pitchFamily="34" charset="-122"/>
                 <a:cs typeface="Segoe UI" pitchFamily="34" charset="-120"/>
               </a:rPr>
-              <a:t>Count judge false accepts and false rejects by metric/slice.</a:t>
+              <a:t>Hard violations: approval, premium disclosure and false delivery.</a:t>
             </a:r>
             <a:endParaRPr lang="en-US" sz="2000" dirty="0"/>
           </a:p>
@@ -13818,7 +13403,7 @@
                 <a:ea typeface="Segoe UI" pitchFamily="34" charset="-122"/>
                 <a:cs typeface="Segoe UI" pitchFamily="34" charset="-120"/>
               </a:rPr>
-              <a:t>Inspect disagreements; blind candidate labels when feasible.</a:t>
+              <a:t>Groundedness/task adherence should reject the false claims.</a:t>
             </a:r>
             <a:endParaRPr lang="en-US" sz="2000" dirty="0"/>
           </a:p>
@@ -13919,7 +13504,7 @@
                 <a:ea typeface="Segoe UI" pitchFamily="34" charset="-122"/>
                 <a:cs typeface="Segoe UI" pitchFamily="34" charset="-120"/>
               </a:rPr>
-              <a:t>Retain rubric version, thresholds, model identity and failures.</a:t>
+              <a:t>Coherence may pass: fluent does not mean factual.</a:t>
             </a:r>
             <a:endParaRPr lang="en-US" sz="2000" dirty="0"/>
           </a:p>
@@ -14029,7 +13614,7 @@
                 <a:ea typeface="Segoe UI" pitchFamily="34" charset="-122"/>
                 <a:cs typeface="Segoe UI" pitchFamily="34" charset="-120"/>
               </a:rPr>
-              <a:t>24 / 35</a:t>
+              <a:t>24 / 37</a:t>
             </a:r>
             <a:endParaRPr lang="en-US" sz="1000" dirty="0"/>
           </a:p>
@@ -14166,7 +13751,7 @@
                 <a:ea typeface="Segoe UI" pitchFamily="34" charset="-122"/>
                 <a:cs typeface="Segoe UI" pitchFamily="34" charset="-120"/>
               </a:rPr>
-              <a:t>Two different repeated-trial experiments</a:t>
+              <a:t>Known false positives must remain visible</a:t>
             </a:r>
             <a:endParaRPr lang="en-US" sz="2700" dirty="0"/>
           </a:p>
@@ -14174,22 +13759,98 @@
       </p:sp>
       <p:sp>
         <p:nvSpPr>
-          <p:cNvPr id="5" name="Shape 3"/>
-          <p:cNvSpPr/>
-          <p:nvPr/>
-        </p:nvSpPr>
-        <p:spPr>
-          <a:xfrm>
-            <a:off x="548640" y="1874520"/>
-            <a:ext cx="5394960" cy="3886200"/>
-          </a:xfrm>
-          <a:prstGeom prst="rect">
-            <a:avLst/>
-          </a:prstGeom>
-          <a:solidFill>
-            <a:srgbClr val="EDF4FA"/>
-          </a:solidFill>
-          <a:ln w="12700">
+          <p:cNvPr id="5" name="Text 3"/>
+          <p:cNvSpPr/>
+          <p:nvPr/>
+        </p:nvSpPr>
+        <p:spPr>
+          <a:xfrm>
+            <a:off x="594360" y="1828800"/>
+            <a:ext cx="640080" cy="594360"/>
+          </a:xfrm>
+          <a:prstGeom prst="rect">
+            <a:avLst/>
+          </a:prstGeom>
+          <a:noFill/>
+          <a:ln/>
+        </p:spPr>
+        <p:txBody>
+          <a:bodyPr wrap="square" lIns="0" tIns="0" rIns="0" bIns="0" rtlCol="0" anchor="ctr"/>
+          <a:lstStyle/>
+          <a:p>
+            <a:pPr indent="0" marL="0">
+              <a:buNone/>
+            </a:pPr>
+            <a:r>
+              <a:rPr lang="en-US" sz="1700" b="1" dirty="0">
+                <a:solidFill>
+                  <a:srgbClr val="0078D4"/>
+                </a:solidFill>
+                <a:latin typeface="Segoe UI" pitchFamily="34" charset="0"/>
+                <a:ea typeface="Segoe UI" pitchFamily="34" charset="-122"/>
+                <a:cs typeface="Segoe UI" pitchFamily="34" charset="-120"/>
+              </a:rPr>
+              <a:t>01</a:t>
+            </a:r>
+            <a:endParaRPr lang="en-US" sz="1700" dirty="0"/>
+          </a:p>
+        </p:txBody>
+      </p:sp>
+      <p:sp>
+        <p:nvSpPr>
+          <p:cNvPr id="6" name="Text 4"/>
+          <p:cNvSpPr/>
+          <p:nvPr/>
+        </p:nvSpPr>
+        <p:spPr>
+          <a:xfrm>
+            <a:off x="1325880" y="1828800"/>
+            <a:ext cx="10195560" cy="731520"/>
+          </a:xfrm>
+          <a:prstGeom prst="rect">
+            <a:avLst/>
+          </a:prstGeom>
+          <a:noFill/>
+          <a:ln/>
+        </p:spPr>
+        <p:txBody>
+          <a:bodyPr wrap="square" lIns="0" tIns="0" rIns="0" bIns="0" rtlCol="0" anchor="ctr"/>
+          <a:lstStyle/>
+          <a:p>
+            <a:pPr indent="0" marL="0">
+              <a:buNone/>
+            </a:pPr>
+            <a:r>
+              <a:rPr lang="en-US" sz="2000" dirty="0">
+                <a:solidFill>
+                  <a:srgbClr val="183449"/>
+                </a:solidFill>
+                <a:latin typeface="Segoe UI" pitchFamily="34" charset="0"/>
+                <a:ea typeface="Segoe UI" pitchFamily="34" charset="-122"/>
+                <a:cs typeface="Segoe UI" pitchFamily="34" charset="-120"/>
+              </a:rPr>
+              <a:t>Recorded native RAG controls included a factually bad answer.</a:t>
+            </a:r>
+            <a:endParaRPr lang="en-US" sz="2000" dirty="0"/>
+          </a:p>
+        </p:txBody>
+      </p:sp>
+      <p:sp>
+        <p:nvSpPr>
+          <p:cNvPr id="7" name="Shape 5"/>
+          <p:cNvSpPr/>
+          <p:nvPr/>
+        </p:nvSpPr>
+        <p:spPr>
+          <a:xfrm>
+            <a:off x="1325880" y="2660904"/>
+            <a:ext cx="10149840" cy="0"/>
+          </a:xfrm>
+          <a:prstGeom prst="line">
+            <a:avLst/>
+          </a:prstGeom>
+          <a:noFill/>
+          <a:ln w="6350">
             <a:solidFill>
               <a:srgbClr val="DCE5ED"/>
             </a:solidFill>
@@ -14199,30 +13860,30 @@
       </p:sp>
       <p:sp>
         <p:nvSpPr>
-          <p:cNvPr id="6" name="Text 4"/>
-          <p:cNvSpPr/>
-          <p:nvPr/>
-        </p:nvSpPr>
-        <p:spPr>
-          <a:xfrm>
-            <a:off x="822960" y="2148840"/>
-            <a:ext cx="4846320" cy="640080"/>
-          </a:xfrm>
-          <a:prstGeom prst="rect">
-            <a:avLst/>
-          </a:prstGeom>
-          <a:noFill/>
-          <a:ln/>
-        </p:spPr>
-        <p:txBody>
-          <a:bodyPr wrap="square" lIns="0" tIns="0" rIns="0" bIns="0" rtlCol="0" anchor="ctr"/>
-          <a:lstStyle/>
-          <a:p>
-            <a:pPr indent="0" marL="0">
-              <a:buNone/>
-            </a:pPr>
-            <a:r>
-              <a:rPr lang="en-US" sz="2300" b="1" dirty="0">
+          <p:cNvPr id="8" name="Text 6"/>
+          <p:cNvSpPr/>
+          <p:nvPr/>
+        </p:nvSpPr>
+        <p:spPr>
+          <a:xfrm>
+            <a:off x="594360" y="2770632"/>
+            <a:ext cx="640080" cy="594360"/>
+          </a:xfrm>
+          <a:prstGeom prst="rect">
+            <a:avLst/>
+          </a:prstGeom>
+          <a:noFill/>
+          <a:ln/>
+        </p:spPr>
+        <p:txBody>
+          <a:bodyPr wrap="square" lIns="0" tIns="0" rIns="0" bIns="0" rtlCol="0" anchor="ctr"/>
+          <a:lstStyle/>
+          <a:p>
+            <a:pPr indent="0" marL="0">
+              <a:buNone/>
+            </a:pPr>
+            <a:r>
+              <a:rPr lang="en-US" sz="1700" b="1" dirty="0">
                 <a:solidFill>
                   <a:srgbClr val="0078D4"/>
                 </a:solidFill>
@@ -14230,38 +13891,38 @@
                 <a:ea typeface="Segoe UI" pitchFamily="34" charset="-122"/>
                 <a:cs typeface="Segoe UI" pitchFamily="34" charset="-120"/>
               </a:rPr>
-              <a:t>Generation variance</a:t>
-            </a:r>
-            <a:endParaRPr lang="en-US" sz="2300" dirty="0"/>
-          </a:p>
-        </p:txBody>
-      </p:sp>
-      <p:sp>
-        <p:nvSpPr>
-          <p:cNvPr id="7" name="Text 5"/>
-          <p:cNvSpPr/>
-          <p:nvPr/>
-        </p:nvSpPr>
-        <p:spPr>
-          <a:xfrm>
-            <a:off x="822960" y="3017520"/>
-            <a:ext cx="4846320" cy="594360"/>
-          </a:xfrm>
-          <a:prstGeom prst="rect">
-            <a:avLst/>
-          </a:prstGeom>
-          <a:noFill/>
-          <a:ln/>
-        </p:spPr>
-        <p:txBody>
-          <a:bodyPr wrap="square" lIns="0" tIns="0" rIns="0" bIns="0" rtlCol="0" anchor="ctr"/>
-          <a:lstStyle/>
-          <a:p>
-            <a:pPr indent="0" marL="0">
-              <a:buNone/>
-            </a:pPr>
-            <a:r>
-              <a:rPr lang="en-US" sz="1900" dirty="0">
+              <a:t>02</a:t>
+            </a:r>
+            <a:endParaRPr lang="en-US" sz="1700" dirty="0"/>
+          </a:p>
+        </p:txBody>
+      </p:sp>
+      <p:sp>
+        <p:nvSpPr>
+          <p:cNvPr id="9" name="Text 7"/>
+          <p:cNvSpPr/>
+          <p:nvPr/>
+        </p:nvSpPr>
+        <p:spPr>
+          <a:xfrm>
+            <a:off x="1325880" y="2770632"/>
+            <a:ext cx="10195560" cy="731520"/>
+          </a:xfrm>
+          <a:prstGeom prst="rect">
+            <a:avLst/>
+          </a:prstGeom>
+          <a:noFill/>
+          <a:ln/>
+        </p:spPr>
+        <p:txBody>
+          <a:bodyPr wrap="square" lIns="0" tIns="0" rIns="0" bIns="0" rtlCol="0" anchor="ctr"/>
+          <a:lstStyle/>
+          <a:p>
+            <a:pPr indent="0" marL="0">
+              <a:buNone/>
+            </a:pPr>
+            <a:r>
+              <a:rPr lang="en-US" sz="2000" dirty="0">
                 <a:solidFill>
                   <a:srgbClr val="183449"/>
                 </a:solidFill>
@@ -14269,87 +13930,9 @@
                 <a:ea typeface="Segoe UI" pitchFamily="34" charset="-122"/>
                 <a:cs typeface="Segoe UI" pitchFamily="34" charset="-120"/>
               </a:rPr>
-              <a:t>Same frozen cases and initial state</a:t>
-            </a:r>
-            <a:endParaRPr lang="en-US" sz="1900" dirty="0"/>
-          </a:p>
-        </p:txBody>
-      </p:sp>
-      <p:sp>
-        <p:nvSpPr>
-          <p:cNvPr id="8" name="Text 6"/>
-          <p:cNvSpPr/>
-          <p:nvPr/>
-        </p:nvSpPr>
-        <p:spPr>
-          <a:xfrm>
-            <a:off x="822960" y="3794760"/>
-            <a:ext cx="4846320" cy="594360"/>
-          </a:xfrm>
-          <a:prstGeom prst="rect">
-            <a:avLst/>
-          </a:prstGeom>
-          <a:noFill/>
-          <a:ln/>
-        </p:spPr>
-        <p:txBody>
-          <a:bodyPr wrap="square" lIns="0" tIns="0" rIns="0" bIns="0" rtlCol="0" anchor="ctr"/>
-          <a:lstStyle/>
-          <a:p>
-            <a:pPr indent="0" marL="0">
-              <a:buNone/>
-            </a:pPr>
-            <a:r>
-              <a:rPr lang="en-US" sz="1900" dirty="0">
-                <a:solidFill>
-                  <a:srgbClr val="183449"/>
-                </a:solidFill>
-                <a:latin typeface="Segoe UI" pitchFamily="34" charset="0"/>
-                <a:ea typeface="Segoe UI" pitchFamily="34" charset="-122"/>
-                <a:cs typeface="Segoe UI" pitchFamily="34" charset="-120"/>
-              </a:rPr>
-              <a:t>Capture fresh answers each trial</a:t>
-            </a:r>
-            <a:endParaRPr lang="en-US" sz="1900" dirty="0"/>
-          </a:p>
-        </p:txBody>
-      </p:sp>
-      <p:sp>
-        <p:nvSpPr>
-          <p:cNvPr id="9" name="Text 7"/>
-          <p:cNvSpPr/>
-          <p:nvPr/>
-        </p:nvSpPr>
-        <p:spPr>
-          <a:xfrm>
-            <a:off x="822960" y="4572000"/>
-            <a:ext cx="4846320" cy="594360"/>
-          </a:xfrm>
-          <a:prstGeom prst="rect">
-            <a:avLst/>
-          </a:prstGeom>
-          <a:noFill/>
-          <a:ln/>
-        </p:spPr>
-        <p:txBody>
-          <a:bodyPr wrap="square" lIns="0" tIns="0" rIns="0" bIns="0" rtlCol="0" anchor="ctr"/>
-          <a:lstStyle/>
-          <a:p>
-            <a:pPr indent="0" marL="0">
-              <a:buNone/>
-            </a:pPr>
-            <a:r>
-              <a:rPr lang="en-US" sz="1900" dirty="0">
-                <a:solidFill>
-                  <a:srgbClr val="183449"/>
-                </a:solidFill>
-                <a:latin typeface="Segoe UI" pitchFamily="34" charset="0"/>
-                <a:ea typeface="Segoe UI" pitchFamily="34" charset="-122"/>
-                <a:cs typeface="Segoe UI" pitchFamily="34" charset="-120"/>
-              </a:rPr>
-              <a:t>Then judge and retain every answer</a:t>
-            </a:r>
-            <a:endParaRPr lang="en-US" sz="1900" dirty="0"/>
+              <a:t>Both groundedness and groundedness_pro accepted that answer.</a:t>
+            </a:r>
+            <a:endParaRPr lang="en-US" sz="2000" dirty="0"/>
           </a:p>
         </p:txBody>
       </p:sp>
@@ -14361,16 +13944,14 @@
         </p:nvSpPr>
         <p:spPr>
           <a:xfrm>
-            <a:off x="6217920" y="1874520"/>
-            <a:ext cx="5394960" cy="3886200"/>
-          </a:xfrm>
-          <a:prstGeom prst="rect">
-            <a:avLst/>
-          </a:prstGeom>
-          <a:solidFill>
-            <a:srgbClr val="EDF4FA"/>
-          </a:solidFill>
-          <a:ln w="12700">
+            <a:off x="1325880" y="3602736"/>
+            <a:ext cx="10149840" cy="0"/>
+          </a:xfrm>
+          <a:prstGeom prst="line">
+            <a:avLst/>
+          </a:prstGeom>
+          <a:noFill/>
+          <a:ln w="6350">
             <a:solidFill>
               <a:srgbClr val="DCE5ED"/>
             </a:solidFill>
@@ -14386,24 +13967,24 @@
         </p:nvSpPr>
         <p:spPr>
           <a:xfrm>
-            <a:off x="6492240" y="2148840"/>
-            <a:ext cx="4846320" cy="640080"/>
-          </a:xfrm>
-          <a:prstGeom prst="rect">
-            <a:avLst/>
-          </a:prstGeom>
-          <a:noFill/>
-          <a:ln/>
-        </p:spPr>
-        <p:txBody>
-          <a:bodyPr wrap="square" lIns="0" tIns="0" rIns="0" bIns="0" rtlCol="0" anchor="ctr"/>
-          <a:lstStyle/>
-          <a:p>
-            <a:pPr indent="0" marL="0">
-              <a:buNone/>
-            </a:pPr>
-            <a:r>
-              <a:rPr lang="en-US" sz="2300" b="1" dirty="0">
+            <a:off x="594360" y="3712464"/>
+            <a:ext cx="640080" cy="594360"/>
+          </a:xfrm>
+          <a:prstGeom prst="rect">
+            <a:avLst/>
+          </a:prstGeom>
+          <a:noFill/>
+          <a:ln/>
+        </p:spPr>
+        <p:txBody>
+          <a:bodyPr wrap="square" lIns="0" tIns="0" rIns="0" bIns="0" rtlCol="0" anchor="ctr"/>
+          <a:lstStyle/>
+          <a:p>
+            <a:pPr indent="0" marL="0">
+              <a:buNone/>
+            </a:pPr>
+            <a:r>
+              <a:rPr lang="en-US" sz="1700" b="1" dirty="0">
                 <a:solidFill>
                   <a:srgbClr val="0078D4"/>
                 </a:solidFill>
@@ -14411,9 +13992,9 @@
                 <a:ea typeface="Segoe UI" pitchFamily="34" charset="-122"/>
                 <a:cs typeface="Segoe UI" pitchFamily="34" charset="-120"/>
               </a:rPr>
-              <a:t>Judge variance</a:t>
-            </a:r>
-            <a:endParaRPr lang="en-US" sz="2300" dirty="0"/>
+              <a:t>03</a:t>
+            </a:r>
+            <a:endParaRPr lang="en-US" sz="1700" dirty="0"/>
           </a:p>
         </p:txBody>
       </p:sp>
@@ -14425,24 +14006,24 @@
         </p:nvSpPr>
         <p:spPr>
           <a:xfrm>
-            <a:off x="6492240" y="3017520"/>
-            <a:ext cx="4846320" cy="594360"/>
-          </a:xfrm>
-          <a:prstGeom prst="rect">
-            <a:avLst/>
-          </a:prstGeom>
-          <a:noFill/>
-          <a:ln/>
-        </p:spPr>
-        <p:txBody>
-          <a:bodyPr wrap="square" lIns="0" tIns="0" rIns="0" bIns="0" rtlCol="0" anchor="ctr"/>
-          <a:lstStyle/>
-          <a:p>
-            <a:pPr indent="0" marL="0">
-              <a:buNone/>
-            </a:pPr>
-            <a:r>
-              <a:rPr lang="en-US" sz="1900" dirty="0">
+            <a:off x="1325880" y="3712464"/>
+            <a:ext cx="10195560" cy="731520"/>
+          </a:xfrm>
+          <a:prstGeom prst="rect">
+            <a:avLst/>
+          </a:prstGeom>
+          <a:noFill/>
+          <a:ln/>
+        </p:spPr>
+        <p:txBody>
+          <a:bodyPr wrap="square" lIns="0" tIns="0" rIns="0" bIns="0" rtlCol="0" anchor="ctr"/>
+          <a:lstStyle/>
+          <a:p>
+            <a:pPr indent="0" marL="0">
+              <a:buNone/>
+            </a:pPr>
+            <a:r>
+              <a:rPr lang="en-US" sz="2000" dirty="0">
                 <a:solidFill>
                   <a:srgbClr val="183449"/>
                 </a:solidFill>
@@ -14450,38 +14031,100 @@
                 <a:ea typeface="Segoe UI" pitchFamily="34" charset="-122"/>
                 <a:cs typeface="Segoe UI" pitchFamily="34" charset="-120"/>
               </a:rPr>
-              <a:t>Same immutable captured answers</a:t>
-            </a:r>
-            <a:endParaRPr lang="en-US" sz="1900" dirty="0"/>
-          </a:p>
-        </p:txBody>
-      </p:sp>
-      <p:sp>
-        <p:nvSpPr>
-          <p:cNvPr id="13" name="Text 11"/>
-          <p:cNvSpPr/>
-          <p:nvPr/>
-        </p:nvSpPr>
-        <p:spPr>
-          <a:xfrm>
-            <a:off x="6492240" y="3794760"/>
-            <a:ext cx="4846320" cy="594360"/>
-          </a:xfrm>
-          <a:prstGeom prst="rect">
-            <a:avLst/>
-          </a:prstGeom>
-          <a:noFill/>
-          <a:ln/>
-        </p:spPr>
-        <p:txBody>
-          <a:bodyPr wrap="square" lIns="0" tIns="0" rIns="0" bIns="0" rtlCol="0" anchor="ctr"/>
-          <a:lstStyle/>
-          <a:p>
-            <a:pPr indent="0" marL="0">
-              <a:buNone/>
-            </a:pPr>
-            <a:r>
-              <a:rPr lang="en-US" sz="1900" dirty="0">
+              <a:t>The negative-control experiment therefore failed.</a:t>
+            </a:r>
+            <a:endParaRPr lang="en-US" sz="2000" dirty="0"/>
+          </a:p>
+        </p:txBody>
+      </p:sp>
+      <p:sp>
+        <p:nvSpPr>
+          <p:cNvPr id="13" name="Shape 11"/>
+          <p:cNvSpPr/>
+          <p:nvPr/>
+        </p:nvSpPr>
+        <p:spPr>
+          <a:xfrm>
+            <a:off x="1325880" y="4544568"/>
+            <a:ext cx="10149840" cy="0"/>
+          </a:xfrm>
+          <a:prstGeom prst="line">
+            <a:avLst/>
+          </a:prstGeom>
+          <a:noFill/>
+          <a:ln w="6350">
+            <a:solidFill>
+              <a:srgbClr val="DCE5ED"/>
+            </a:solidFill>
+            <a:prstDash val="solid"/>
+          </a:ln>
+        </p:spPr>
+      </p:sp>
+      <p:sp>
+        <p:nvSpPr>
+          <p:cNvPr id="14" name="Text 12"/>
+          <p:cNvSpPr/>
+          <p:nvPr/>
+        </p:nvSpPr>
+        <p:spPr>
+          <a:xfrm>
+            <a:off x="594360" y="4654296"/>
+            <a:ext cx="640080" cy="594360"/>
+          </a:xfrm>
+          <a:prstGeom prst="rect">
+            <a:avLst/>
+          </a:prstGeom>
+          <a:noFill/>
+          <a:ln/>
+        </p:spPr>
+        <p:txBody>
+          <a:bodyPr wrap="square" lIns="0" tIns="0" rIns="0" bIns="0" rtlCol="0" anchor="ctr"/>
+          <a:lstStyle/>
+          <a:p>
+            <a:pPr indent="0" marL="0">
+              <a:buNone/>
+            </a:pPr>
+            <a:r>
+              <a:rPr lang="en-US" sz="1700" b="1" dirty="0">
+                <a:solidFill>
+                  <a:srgbClr val="0078D4"/>
+                </a:solidFill>
+                <a:latin typeface="Segoe UI" pitchFamily="34" charset="0"/>
+                <a:ea typeface="Segoe UI" pitchFamily="34" charset="-122"/>
+                <a:cs typeface="Segoe UI" pitchFamily="34" charset="-120"/>
+              </a:rPr>
+              <a:t>04</a:t>
+            </a:r>
+            <a:endParaRPr lang="en-US" sz="1700" dirty="0"/>
+          </a:p>
+        </p:txBody>
+      </p:sp>
+      <p:sp>
+        <p:nvSpPr>
+          <p:cNvPr id="15" name="Text 13"/>
+          <p:cNvSpPr/>
+          <p:nvPr/>
+        </p:nvSpPr>
+        <p:spPr>
+          <a:xfrm>
+            <a:off x="1325880" y="4654296"/>
+            <a:ext cx="10195560" cy="731520"/>
+          </a:xfrm>
+          <a:prstGeom prst="rect">
+            <a:avLst/>
+          </a:prstGeom>
+          <a:noFill/>
+          <a:ln/>
+        </p:spPr>
+        <p:txBody>
+          <a:bodyPr wrap="square" lIns="0" tIns="0" rIns="0" bIns="0" rtlCol="0" anchor="ctr"/>
+          <a:lstStyle/>
+          <a:p>
+            <a:pPr indent="0" marL="0">
+              <a:buNone/>
+            </a:pPr>
+            <a:r>
+              <a:rPr lang="en-US" sz="2000" dirty="0">
                 <a:solidFill>
                   <a:srgbClr val="183449"/>
                 </a:solidFill>
@@ -14489,54 +14132,38 @@
                 <a:ea typeface="Segoe UI" pitchFamily="34" charset="-122"/>
                 <a:cs typeface="Segoe UI" pitchFamily="34" charset="-120"/>
               </a:rPr>
-              <a:t>Call evaluate(), not capture()</a:t>
-            </a:r>
-            <a:endParaRPr lang="en-US" sz="1900" dirty="0"/>
-          </a:p>
-        </p:txBody>
-      </p:sp>
-      <p:sp>
-        <p:nvSpPr>
-          <p:cNvPr id="14" name="Text 12"/>
-          <p:cNvSpPr/>
-          <p:nvPr/>
-        </p:nvSpPr>
-        <p:spPr>
-          <a:xfrm>
-            <a:off x="6492240" y="4572000"/>
-            <a:ext cx="4846320" cy="594360"/>
-          </a:xfrm>
-          <a:prstGeom prst="rect">
-            <a:avLst/>
-          </a:prstGeom>
-          <a:noFill/>
-          <a:ln/>
-        </p:spPr>
-        <p:txBody>
-          <a:bodyPr wrap="square" lIns="0" tIns="0" rIns="0" bIns="0" rtlCol="0" anchor="ctr"/>
-          <a:lstStyle/>
-          <a:p>
-            <a:pPr indent="0" marL="0">
-              <a:buNone/>
-            </a:pPr>
-            <a:r>
-              <a:rPr lang="en-US" sz="1900" dirty="0">
-                <a:solidFill>
-                  <a:srgbClr val="183449"/>
-                </a:solidFill>
-                <a:latin typeface="Segoe UI" pitchFamily="34" charset="0"/>
-                <a:ea typeface="Segoe UI" pitchFamily="34" charset="-122"/>
-                <a:cs typeface="Segoe UI" pitchFamily="34" charset="-120"/>
-              </a:rPr>
-              <a:t>Record reused response provenance</a:t>
-            </a:r>
-            <a:endParaRPr lang="en-US" sz="1900" dirty="0"/>
-          </a:p>
-        </p:txBody>
-      </p:sp>
-      <p:sp>
-        <p:nvSpPr>
-          <p:cNvPr id="15" name="Text 13">
+              <a:t>Keep explicit policy checks and expert review alongside judges.</a:t>
+            </a:r>
+            <a:endParaRPr lang="en-US" sz="2000" dirty="0"/>
+          </a:p>
+        </p:txBody>
+      </p:sp>
+      <p:sp>
+        <p:nvSpPr>
+          <p:cNvPr id="16" name="Shape 14"/>
+          <p:cNvSpPr/>
+          <p:nvPr/>
+        </p:nvSpPr>
+        <p:spPr>
+          <a:xfrm>
+            <a:off x="1325880" y="5486400"/>
+            <a:ext cx="10149840" cy="0"/>
+          </a:xfrm>
+          <a:prstGeom prst="line">
+            <a:avLst/>
+          </a:prstGeom>
+          <a:noFill/>
+          <a:ln w="6350">
+            <a:solidFill>
+              <a:srgbClr val="DCE5ED"/>
+            </a:solidFill>
+            <a:prstDash val="solid"/>
+          </a:ln>
+        </p:spPr>
+      </p:sp>
+      <p:sp>
+        <p:nvSpPr>
+          <p:cNvPr id="17" name="Text 15">
             <a:hlinkClick r:id="rId1" tooltip=""/>
           </p:cNvPr>
           <p:cNvSpPr/>
@@ -14584,7 +14211,7 @@
       </p:sp>
       <p:sp>
         <p:nvSpPr>
-          <p:cNvPr id="16" name="Text 14"/>
+          <p:cNvPr id="18" name="Text 16"/>
           <p:cNvSpPr/>
           <p:nvPr/>
         </p:nvSpPr>
@@ -14615,7 +14242,7 @@
                 <a:ea typeface="Segoe UI" pitchFamily="34" charset="-122"/>
                 <a:cs typeface="Segoe UI" pitchFamily="34" charset="-120"/>
               </a:rPr>
-              <a:t>25 / 35</a:t>
+              <a:t>25 / 37</a:t>
             </a:r>
             <a:endParaRPr lang="en-US" sz="1000" dirty="0"/>
           </a:p>
@@ -14752,7 +14379,7 @@
                 <a:ea typeface="Segoe UI" pitchFamily="34" charset="-122"/>
                 <a:cs typeface="Segoe UI" pitchFamily="34" charset="-120"/>
               </a:rPr>
-              <a:t>5/5 does not establish perfection</a:t>
+              <a:t>Measure calibration, not only mean score</a:t>
             </a:r>
             <a:endParaRPr lang="en-US" sz="2700" dirty="0"/>
           </a:p>
@@ -14830,7 +14457,7 @@
                 <a:ea typeface="Segoe UI" pitchFamily="34" charset="-122"/>
                 <a:cs typeface="Segoe UI" pitchFamily="34" charset="-120"/>
               </a:rPr>
-              <a:t>Illustrative 95% Wilson interval for 5/5: about 0.57 to 1.00.</a:t>
+              <a:t>Human-label valid, false, incomplete and wrong-locale controls.</a:t>
             </a:r>
             <a:endParaRPr lang="en-US" sz="2000" dirty="0"/>
           </a:p>
@@ -14931,7 +14558,7 @@
                 <a:ea typeface="Segoe UI" pitchFamily="34" charset="-122"/>
                 <a:cs typeface="Segoe UI" pitchFamily="34" charset="-120"/>
               </a:rPr>
-              <a:t>That interval assumes independent Bernoulli observations.</a:t>
+              <a:t>Count judge false accepts and false rejects by metric/slice.</a:t>
             </a:r>
             <a:endParaRPr lang="en-US" sz="2000" dirty="0"/>
           </a:p>
@@ -15032,7 +14659,7 @@
                 <a:ea typeface="Segoe UI" pitchFamily="34" charset="-122"/>
                 <a:cs typeface="Segoe UI" pitchFamily="34" charset="-120"/>
               </a:rPr>
-              <a:t>Repeated grades of one case are correlated, not new customers.</a:t>
+              <a:t>Inspect disagreements; blind candidate labels when feasible.</a:t>
             </a:r>
             <a:endParaRPr lang="en-US" sz="2000" dirty="0"/>
           </a:p>
@@ -15133,7 +14760,7 @@
                 <a:ea typeface="Segoe UI" pitchFamily="34" charset="-122"/>
                 <a:cs typeface="Segoe UI" pitchFamily="34" charset="-120"/>
               </a:rPr>
-              <a:t>Report case-level uncertainty and rare-harm limitations.</a:t>
+              <a:t>Retain rubric version, thresholds, model identity and failures.</a:t>
             </a:r>
             <a:endParaRPr lang="en-US" sz="2000" dirty="0"/>
           </a:p>
@@ -15243,7 +14870,7 @@
                 <a:ea typeface="Segoe UI" pitchFamily="34" charset="-122"/>
                 <a:cs typeface="Segoe UI" pitchFamily="34" charset="-120"/>
               </a:rPr>
-              <a:t>26 / 35</a:t>
+              <a:t>26 / 37</a:t>
             </a:r>
             <a:endParaRPr lang="en-US" sz="1000" dirty="0"/>
           </a:p>
@@ -15380,7 +15007,7 @@
                 <a:ea typeface="Segoe UI" pitchFamily="34" charset="-122"/>
                 <a:cs typeface="Segoe UI" pitchFamily="34" charset="-120"/>
               </a:rPr>
-              <a:t>Compare candidates fairly</a:t>
+              <a:t>Two different repeated-trial experiments</a:t>
             </a:r>
             <a:endParaRPr lang="en-US" sz="2700" dirty="0"/>
           </a:p>
@@ -15388,98 +15015,22 @@
       </p:sp>
       <p:sp>
         <p:nvSpPr>
-          <p:cNvPr id="5" name="Text 3"/>
-          <p:cNvSpPr/>
-          <p:nvPr/>
-        </p:nvSpPr>
-        <p:spPr>
-          <a:xfrm>
-            <a:off x="594360" y="1828800"/>
-            <a:ext cx="640080" cy="594360"/>
-          </a:xfrm>
-          <a:prstGeom prst="rect">
-            <a:avLst/>
-          </a:prstGeom>
-          <a:noFill/>
-          <a:ln/>
-        </p:spPr>
-        <p:txBody>
-          <a:bodyPr wrap="square" lIns="0" tIns="0" rIns="0" bIns="0" rtlCol="0" anchor="ctr"/>
-          <a:lstStyle/>
-          <a:p>
-            <a:pPr indent="0" marL="0">
-              <a:buNone/>
-            </a:pPr>
-            <a:r>
-              <a:rPr lang="en-US" sz="1700" b="1" dirty="0">
-                <a:solidFill>
-                  <a:srgbClr val="0078D4"/>
-                </a:solidFill>
-                <a:latin typeface="Segoe UI" pitchFamily="34" charset="0"/>
-                <a:ea typeface="Segoe UI" pitchFamily="34" charset="-122"/>
-                <a:cs typeface="Segoe UI" pitchFamily="34" charset="-120"/>
-              </a:rPr>
-              <a:t>01</a:t>
-            </a:r>
-            <a:endParaRPr lang="en-US" sz="1700" dirty="0"/>
-          </a:p>
-        </p:txBody>
-      </p:sp>
-      <p:sp>
-        <p:nvSpPr>
-          <p:cNvPr id="6" name="Text 4"/>
-          <p:cNvSpPr/>
-          <p:nvPr/>
-        </p:nvSpPr>
-        <p:spPr>
-          <a:xfrm>
-            <a:off x="1325880" y="1828800"/>
-            <a:ext cx="10195560" cy="731520"/>
-          </a:xfrm>
-          <a:prstGeom prst="rect">
-            <a:avLst/>
-          </a:prstGeom>
-          <a:noFill/>
-          <a:ln/>
-        </p:spPr>
-        <p:txBody>
-          <a:bodyPr wrap="square" lIns="0" tIns="0" rIns="0" bIns="0" rtlCol="0" anchor="ctr"/>
-          <a:lstStyle/>
-          <a:p>
-            <a:pPr indent="0" marL="0">
-              <a:buNone/>
-            </a:pPr>
-            <a:r>
-              <a:rPr lang="en-US" sz="2000" dirty="0">
-                <a:solidFill>
-                  <a:srgbClr val="183449"/>
-                </a:solidFill>
-                <a:latin typeface="Segoe UI" pitchFamily="34" charset="0"/>
-                <a:ea typeface="Segoe UI" pitchFamily="34" charset="-122"/>
-                <a:cs typeface="Segoe UI" pitchFamily="34" charset="-120"/>
-              </a:rPr>
-              <a:t>Pair by stable case ID, locale, trial and controlled initial state.</a:t>
-            </a:r>
-            <a:endParaRPr lang="en-US" sz="2000" dirty="0"/>
-          </a:p>
-        </p:txBody>
-      </p:sp>
-      <p:sp>
-        <p:nvSpPr>
-          <p:cNvPr id="7" name="Shape 5"/>
-          <p:cNvSpPr/>
-          <p:nvPr/>
-        </p:nvSpPr>
-        <p:spPr>
-          <a:xfrm>
-            <a:off x="1325880" y="2660904"/>
-            <a:ext cx="10149840" cy="0"/>
-          </a:xfrm>
-          <a:prstGeom prst="line">
-            <a:avLst/>
-          </a:prstGeom>
-          <a:noFill/>
-          <a:ln w="6350">
+          <p:cNvPr id="5" name="Shape 3"/>
+          <p:cNvSpPr/>
+          <p:nvPr/>
+        </p:nvSpPr>
+        <p:spPr>
+          <a:xfrm>
+            <a:off x="548640" y="1874520"/>
+            <a:ext cx="5394960" cy="3886200"/>
+          </a:xfrm>
+          <a:prstGeom prst="rect">
+            <a:avLst/>
+          </a:prstGeom>
+          <a:solidFill>
+            <a:srgbClr val="EDF4FA"/>
+          </a:solidFill>
+          <a:ln w="12700">
             <a:solidFill>
               <a:srgbClr val="DCE5ED"/>
             </a:solidFill>
@@ -15489,40 +15040,118 @@
       </p:sp>
       <p:sp>
         <p:nvSpPr>
+          <p:cNvPr id="6" name="Text 4"/>
+          <p:cNvSpPr/>
+          <p:nvPr/>
+        </p:nvSpPr>
+        <p:spPr>
+          <a:xfrm>
+            <a:off x="822960" y="2148840"/>
+            <a:ext cx="4846320" cy="640080"/>
+          </a:xfrm>
+          <a:prstGeom prst="rect">
+            <a:avLst/>
+          </a:prstGeom>
+          <a:noFill/>
+          <a:ln/>
+        </p:spPr>
+        <p:txBody>
+          <a:bodyPr wrap="square" lIns="0" tIns="0" rIns="0" bIns="0" rtlCol="0" anchor="ctr"/>
+          <a:lstStyle/>
+          <a:p>
+            <a:pPr indent="0" marL="0">
+              <a:buNone/>
+            </a:pPr>
+            <a:r>
+              <a:rPr lang="en-US" sz="2300" b="1" dirty="0">
+                <a:solidFill>
+                  <a:srgbClr val="0078D4"/>
+                </a:solidFill>
+                <a:latin typeface="Segoe UI" pitchFamily="34" charset="0"/>
+                <a:ea typeface="Segoe UI" pitchFamily="34" charset="-122"/>
+                <a:cs typeface="Segoe UI" pitchFamily="34" charset="-120"/>
+              </a:rPr>
+              <a:t>Generation variance</a:t>
+            </a:r>
+            <a:endParaRPr lang="en-US" sz="2300" dirty="0"/>
+          </a:p>
+        </p:txBody>
+      </p:sp>
+      <p:sp>
+        <p:nvSpPr>
+          <p:cNvPr id="7" name="Text 5"/>
+          <p:cNvSpPr/>
+          <p:nvPr/>
+        </p:nvSpPr>
+        <p:spPr>
+          <a:xfrm>
+            <a:off x="822960" y="3017520"/>
+            <a:ext cx="4846320" cy="594360"/>
+          </a:xfrm>
+          <a:prstGeom prst="rect">
+            <a:avLst/>
+          </a:prstGeom>
+          <a:noFill/>
+          <a:ln/>
+        </p:spPr>
+        <p:txBody>
+          <a:bodyPr wrap="square" lIns="0" tIns="0" rIns="0" bIns="0" rtlCol="0" anchor="ctr"/>
+          <a:lstStyle/>
+          <a:p>
+            <a:pPr indent="0" marL="0">
+              <a:buNone/>
+            </a:pPr>
+            <a:r>
+              <a:rPr lang="en-US" sz="1900" dirty="0">
+                <a:solidFill>
+                  <a:srgbClr val="183449"/>
+                </a:solidFill>
+                <a:latin typeface="Segoe UI" pitchFamily="34" charset="0"/>
+                <a:ea typeface="Segoe UI" pitchFamily="34" charset="-122"/>
+                <a:cs typeface="Segoe UI" pitchFamily="34" charset="-120"/>
+              </a:rPr>
+              <a:t>Same frozen cases and initial state</a:t>
+            </a:r>
+            <a:endParaRPr lang="en-US" sz="1900" dirty="0"/>
+          </a:p>
+        </p:txBody>
+      </p:sp>
+      <p:sp>
+        <p:nvSpPr>
           <p:cNvPr id="8" name="Text 6"/>
           <p:cNvSpPr/>
           <p:nvPr/>
         </p:nvSpPr>
         <p:spPr>
           <a:xfrm>
-            <a:off x="594360" y="2770632"/>
-            <a:ext cx="640080" cy="594360"/>
-          </a:xfrm>
-          <a:prstGeom prst="rect">
-            <a:avLst/>
-          </a:prstGeom>
-          <a:noFill/>
-          <a:ln/>
-        </p:spPr>
-        <p:txBody>
-          <a:bodyPr wrap="square" lIns="0" tIns="0" rIns="0" bIns="0" rtlCol="0" anchor="ctr"/>
-          <a:lstStyle/>
-          <a:p>
-            <a:pPr indent="0" marL="0">
-              <a:buNone/>
-            </a:pPr>
-            <a:r>
-              <a:rPr lang="en-US" sz="1700" b="1" dirty="0">
-                <a:solidFill>
-                  <a:srgbClr val="0078D4"/>
-                </a:solidFill>
-                <a:latin typeface="Segoe UI" pitchFamily="34" charset="0"/>
-                <a:ea typeface="Segoe UI" pitchFamily="34" charset="-122"/>
-                <a:cs typeface="Segoe UI" pitchFamily="34" charset="-120"/>
-              </a:rPr>
-              <a:t>02</a:t>
-            </a:r>
-            <a:endParaRPr lang="en-US" sz="1700" dirty="0"/>
+            <a:off x="822960" y="3794760"/>
+            <a:ext cx="4846320" cy="594360"/>
+          </a:xfrm>
+          <a:prstGeom prst="rect">
+            <a:avLst/>
+          </a:prstGeom>
+          <a:noFill/>
+          <a:ln/>
+        </p:spPr>
+        <p:txBody>
+          <a:bodyPr wrap="square" lIns="0" tIns="0" rIns="0" bIns="0" rtlCol="0" anchor="ctr"/>
+          <a:lstStyle/>
+          <a:p>
+            <a:pPr indent="0" marL="0">
+              <a:buNone/>
+            </a:pPr>
+            <a:r>
+              <a:rPr lang="en-US" sz="1900" dirty="0">
+                <a:solidFill>
+                  <a:srgbClr val="183449"/>
+                </a:solidFill>
+                <a:latin typeface="Segoe UI" pitchFamily="34" charset="0"/>
+                <a:ea typeface="Segoe UI" pitchFamily="34" charset="-122"/>
+                <a:cs typeface="Segoe UI" pitchFamily="34" charset="-120"/>
+              </a:rPr>
+              <a:t>Capture fresh answers each trial</a:t>
+            </a:r>
+            <a:endParaRPr lang="en-US" sz="1900" dirty="0"/>
           </a:p>
         </p:txBody>
       </p:sp>
@@ -15534,24 +15163,24 @@
         </p:nvSpPr>
         <p:spPr>
           <a:xfrm>
-            <a:off x="1325880" y="2770632"/>
-            <a:ext cx="10195560" cy="731520"/>
-          </a:xfrm>
-          <a:prstGeom prst="rect">
-            <a:avLst/>
-          </a:prstGeom>
-          <a:noFill/>
-          <a:ln/>
-        </p:spPr>
-        <p:txBody>
-          <a:bodyPr wrap="square" lIns="0" tIns="0" rIns="0" bIns="0" rtlCol="0" anchor="ctr"/>
-          <a:lstStyle/>
-          <a:p>
-            <a:pPr indent="0" marL="0">
-              <a:buNone/>
-            </a:pPr>
-            <a:r>
-              <a:rPr lang="en-US" sz="2000" dirty="0">
+            <a:off x="822960" y="4572000"/>
+            <a:ext cx="4846320" cy="594360"/>
+          </a:xfrm>
+          <a:prstGeom prst="rect">
+            <a:avLst/>
+          </a:prstGeom>
+          <a:noFill/>
+          <a:ln/>
+        </p:spPr>
+        <p:txBody>
+          <a:bodyPr wrap="square" lIns="0" tIns="0" rIns="0" bIns="0" rtlCol="0" anchor="ctr"/>
+          <a:lstStyle/>
+          <a:p>
+            <a:pPr indent="0" marL="0">
+              <a:buNone/>
+            </a:pPr>
+            <a:r>
+              <a:rPr lang="en-US" sz="1900" dirty="0">
                 <a:solidFill>
                   <a:srgbClr val="183449"/>
                 </a:solidFill>
@@ -15559,9 +15188,9 @@
                 <a:ea typeface="Segoe UI" pitchFamily="34" charset="-122"/>
                 <a:cs typeface="Segoe UI" pitchFamily="34" charset="-120"/>
               </a:rPr>
-              <a:t>Freeze independent facts, rubric, evaluator and judge-model version.</a:t>
-            </a:r>
-            <a:endParaRPr lang="en-US" sz="2000" dirty="0"/>
+              <a:t>Then judge and retain every answer</a:t>
+            </a:r>
+            <a:endParaRPr lang="en-US" sz="1900" dirty="0"/>
           </a:p>
         </p:txBody>
       </p:sp>
@@ -15573,14 +15202,16 @@
         </p:nvSpPr>
         <p:spPr>
           <a:xfrm>
-            <a:off x="1325880" y="3602736"/>
-            <a:ext cx="10149840" cy="0"/>
-          </a:xfrm>
-          <a:prstGeom prst="line">
-            <a:avLst/>
-          </a:prstGeom>
-          <a:noFill/>
-          <a:ln w="6350">
+            <a:off x="6217920" y="1874520"/>
+            <a:ext cx="5394960" cy="3886200"/>
+          </a:xfrm>
+          <a:prstGeom prst="rect">
+            <a:avLst/>
+          </a:prstGeom>
+          <a:solidFill>
+            <a:srgbClr val="EDF4FA"/>
+          </a:solidFill>
+          <a:ln w="12700">
             <a:solidFill>
               <a:srgbClr val="DCE5ED"/>
             </a:solidFill>
@@ -15596,24 +15227,24 @@
         </p:nvSpPr>
         <p:spPr>
           <a:xfrm>
-            <a:off x="594360" y="3712464"/>
-            <a:ext cx="640080" cy="594360"/>
-          </a:xfrm>
-          <a:prstGeom prst="rect">
-            <a:avLst/>
-          </a:prstGeom>
-          <a:noFill/>
-          <a:ln/>
-        </p:spPr>
-        <p:txBody>
-          <a:bodyPr wrap="square" lIns="0" tIns="0" rIns="0" bIns="0" rtlCol="0" anchor="ctr"/>
-          <a:lstStyle/>
-          <a:p>
-            <a:pPr indent="0" marL="0">
-              <a:buNone/>
-            </a:pPr>
-            <a:r>
-              <a:rPr lang="en-US" sz="1700" b="1" dirty="0">
+            <a:off x="6492240" y="2148840"/>
+            <a:ext cx="4846320" cy="640080"/>
+          </a:xfrm>
+          <a:prstGeom prst="rect">
+            <a:avLst/>
+          </a:prstGeom>
+          <a:noFill/>
+          <a:ln/>
+        </p:spPr>
+        <p:txBody>
+          <a:bodyPr wrap="square" lIns="0" tIns="0" rIns="0" bIns="0" rtlCol="0" anchor="ctr"/>
+          <a:lstStyle/>
+          <a:p>
+            <a:pPr indent="0" marL="0">
+              <a:buNone/>
+            </a:pPr>
+            <a:r>
+              <a:rPr lang="en-US" sz="2300" b="1" dirty="0">
                 <a:solidFill>
                   <a:srgbClr val="0078D4"/>
                 </a:solidFill>
@@ -15621,9 +15252,9 @@
                 <a:ea typeface="Segoe UI" pitchFamily="34" charset="-122"/>
                 <a:cs typeface="Segoe UI" pitchFamily="34" charset="-120"/>
               </a:rPr>
-              <a:t>03</a:t>
-            </a:r>
-            <a:endParaRPr lang="en-US" sz="1700" dirty="0"/>
+              <a:t>Judge variance</a:t>
+            </a:r>
+            <a:endParaRPr lang="en-US" sz="2300" dirty="0"/>
           </a:p>
         </p:txBody>
       </p:sp>
@@ -15635,24 +15266,24 @@
         </p:nvSpPr>
         <p:spPr>
           <a:xfrm>
-            <a:off x="1325880" y="3712464"/>
-            <a:ext cx="10195560" cy="731520"/>
-          </a:xfrm>
-          <a:prstGeom prst="rect">
-            <a:avLst/>
-          </a:prstGeom>
-          <a:noFill/>
-          <a:ln/>
-        </p:spPr>
-        <p:txBody>
-          <a:bodyPr wrap="square" lIns="0" tIns="0" rIns="0" bIns="0" rtlCol="0" anchor="ctr"/>
-          <a:lstStyle/>
-          <a:p>
-            <a:pPr indent="0" marL="0">
-              <a:buNone/>
-            </a:pPr>
-            <a:r>
-              <a:rPr lang="en-US" sz="2000" dirty="0">
+            <a:off x="6492240" y="3017520"/>
+            <a:ext cx="4846320" cy="594360"/>
+          </a:xfrm>
+          <a:prstGeom prst="rect">
+            <a:avLst/>
+          </a:prstGeom>
+          <a:noFill/>
+          <a:ln/>
+        </p:spPr>
+        <p:txBody>
+          <a:bodyPr wrap="square" lIns="0" tIns="0" rIns="0" bIns="0" rtlCol="0" anchor="ctr"/>
+          <a:lstStyle/>
+          <a:p>
+            <a:pPr indent="0" marL="0">
+              <a:buNone/>
+            </a:pPr>
+            <a:r>
+              <a:rPr lang="en-US" sz="1900" dirty="0">
                 <a:solidFill>
                   <a:srgbClr val="183449"/>
                 </a:solidFill>
@@ -15660,34 +15291,50 @@
                 <a:ea typeface="Segoe UI" pitchFamily="34" charset="-122"/>
                 <a:cs typeface="Segoe UI" pitchFamily="34" charset="-120"/>
               </a:rPr>
-              <a:t>Inspect pass-to-fail transitions, effect size and uncertainty.</a:t>
-            </a:r>
-            <a:endParaRPr lang="en-US" sz="2000" dirty="0"/>
-          </a:p>
-        </p:txBody>
-      </p:sp>
-      <p:sp>
-        <p:nvSpPr>
-          <p:cNvPr id="13" name="Shape 11"/>
-          <p:cNvSpPr/>
-          <p:nvPr/>
-        </p:nvSpPr>
-        <p:spPr>
-          <a:xfrm>
-            <a:off x="1325880" y="4544568"/>
-            <a:ext cx="10149840" cy="0"/>
-          </a:xfrm>
-          <a:prstGeom prst="line">
-            <a:avLst/>
-          </a:prstGeom>
-          <a:noFill/>
-          <a:ln w="6350">
-            <a:solidFill>
-              <a:srgbClr val="DCE5ED"/>
-            </a:solidFill>
-            <a:prstDash val="solid"/>
-          </a:ln>
-        </p:spPr>
+              <a:t>Same immutable captured answers</a:t>
+            </a:r>
+            <a:endParaRPr lang="en-US" sz="1900" dirty="0"/>
+          </a:p>
+        </p:txBody>
+      </p:sp>
+      <p:sp>
+        <p:nvSpPr>
+          <p:cNvPr id="13" name="Text 11"/>
+          <p:cNvSpPr/>
+          <p:nvPr/>
+        </p:nvSpPr>
+        <p:spPr>
+          <a:xfrm>
+            <a:off x="6492240" y="3794760"/>
+            <a:ext cx="4846320" cy="594360"/>
+          </a:xfrm>
+          <a:prstGeom prst="rect">
+            <a:avLst/>
+          </a:prstGeom>
+          <a:noFill/>
+          <a:ln/>
+        </p:spPr>
+        <p:txBody>
+          <a:bodyPr wrap="square" lIns="0" tIns="0" rIns="0" bIns="0" rtlCol="0" anchor="ctr"/>
+          <a:lstStyle/>
+          <a:p>
+            <a:pPr indent="0" marL="0">
+              <a:buNone/>
+            </a:pPr>
+            <a:r>
+              <a:rPr lang="en-US" sz="1900" dirty="0">
+                <a:solidFill>
+                  <a:srgbClr val="183449"/>
+                </a:solidFill>
+                <a:latin typeface="Segoe UI" pitchFamily="34" charset="0"/>
+                <a:ea typeface="Segoe UI" pitchFamily="34" charset="-122"/>
+                <a:cs typeface="Segoe UI" pitchFamily="34" charset="-120"/>
+              </a:rPr>
+              <a:t>Call evaluate(), not capture()</a:t>
+            </a:r>
+            <a:endParaRPr lang="en-US" sz="1900" dirty="0"/>
+          </a:p>
+        </p:txBody>
       </p:sp>
       <p:sp>
         <p:nvSpPr>
@@ -15697,63 +15344,24 @@
         </p:nvSpPr>
         <p:spPr>
           <a:xfrm>
-            <a:off x="594360" y="4654296"/>
-            <a:ext cx="640080" cy="594360"/>
-          </a:xfrm>
-          <a:prstGeom prst="rect">
-            <a:avLst/>
-          </a:prstGeom>
-          <a:noFill/>
-          <a:ln/>
-        </p:spPr>
-        <p:txBody>
-          <a:bodyPr wrap="square" lIns="0" tIns="0" rIns="0" bIns="0" rtlCol="0" anchor="ctr"/>
-          <a:lstStyle/>
-          <a:p>
-            <a:pPr indent="0" marL="0">
-              <a:buNone/>
-            </a:pPr>
-            <a:r>
-              <a:rPr lang="en-US" sz="1700" b="1" dirty="0">
-                <a:solidFill>
-                  <a:srgbClr val="0078D4"/>
-                </a:solidFill>
-                <a:latin typeface="Segoe UI" pitchFamily="34" charset="0"/>
-                <a:ea typeface="Segoe UI" pitchFamily="34" charset="-122"/>
-                <a:cs typeface="Segoe UI" pitchFamily="34" charset="-120"/>
-              </a:rPr>
-              <a:t>04</a:t>
-            </a:r>
-            <a:endParaRPr lang="en-US" sz="1700" dirty="0"/>
-          </a:p>
-        </p:txBody>
-      </p:sp>
-      <p:sp>
-        <p:nvSpPr>
-          <p:cNvPr id="15" name="Text 13"/>
-          <p:cNvSpPr/>
-          <p:nvPr/>
-        </p:nvSpPr>
-        <p:spPr>
-          <a:xfrm>
-            <a:off x="1325880" y="4654296"/>
-            <a:ext cx="10195560" cy="731520"/>
-          </a:xfrm>
-          <a:prstGeom prst="rect">
-            <a:avLst/>
-          </a:prstGeom>
-          <a:noFill/>
-          <a:ln/>
-        </p:spPr>
-        <p:txBody>
-          <a:bodyPr wrap="square" lIns="0" tIns="0" rIns="0" bIns="0" rtlCol="0" anchor="ctr"/>
-          <a:lstStyle/>
-          <a:p>
-            <a:pPr indent="0" marL="0">
-              <a:buNone/>
-            </a:pPr>
-            <a:r>
-              <a:rPr lang="en-US" sz="2000" dirty="0">
+            <a:off x="6492240" y="4572000"/>
+            <a:ext cx="4846320" cy="594360"/>
+          </a:xfrm>
+          <a:prstGeom prst="rect">
+            <a:avLst/>
+          </a:prstGeom>
+          <a:noFill/>
+          <a:ln/>
+        </p:spPr>
+        <p:txBody>
+          <a:bodyPr wrap="square" lIns="0" tIns="0" rIns="0" bIns="0" rtlCol="0" anchor="ctr"/>
+          <a:lstStyle/>
+          <a:p>
+            <a:pPr indent="0" marL="0">
+              <a:buNone/>
+            </a:pPr>
+            <a:r>
+              <a:rPr lang="en-US" sz="1900" dirty="0">
                 <a:solidFill>
                   <a:srgbClr val="183449"/>
                 </a:solidFill>
@@ -15761,38 +15369,15 @@
                 <a:ea typeface="Segoe UI" pitchFamily="34" charset="-122"/>
                 <a:cs typeface="Segoe UI" pitchFamily="34" charset="-120"/>
               </a:rPr>
-              <a:t>Changed dataset or evaluator means rebaseline, not improvement.</a:t>
-            </a:r>
-            <a:endParaRPr lang="en-US" sz="2000" dirty="0"/>
-          </a:p>
-        </p:txBody>
-      </p:sp>
-      <p:sp>
-        <p:nvSpPr>
-          <p:cNvPr id="16" name="Shape 14"/>
-          <p:cNvSpPr/>
-          <p:nvPr/>
-        </p:nvSpPr>
-        <p:spPr>
-          <a:xfrm>
-            <a:off x="1325880" y="5486400"/>
-            <a:ext cx="10149840" cy="0"/>
-          </a:xfrm>
-          <a:prstGeom prst="line">
-            <a:avLst/>
-          </a:prstGeom>
-          <a:noFill/>
-          <a:ln w="6350">
-            <a:solidFill>
-              <a:srgbClr val="DCE5ED"/>
-            </a:solidFill>
-            <a:prstDash val="solid"/>
-          </a:ln>
-        </p:spPr>
-      </p:sp>
-      <p:sp>
-        <p:nvSpPr>
-          <p:cNvPr id="17" name="Text 15">
+              <a:t>Record reused response provenance</a:t>
+            </a:r>
+            <a:endParaRPr lang="en-US" sz="1900" dirty="0"/>
+          </a:p>
+        </p:txBody>
+      </p:sp>
+      <p:sp>
+        <p:nvSpPr>
+          <p:cNvPr id="15" name="Text 13">
             <a:hlinkClick r:id="rId1" tooltip=""/>
           </p:cNvPr>
           <p:cNvSpPr/>
@@ -15840,7 +15425,7 @@
       </p:sp>
       <p:sp>
         <p:nvSpPr>
-          <p:cNvPr id="18" name="Text 16"/>
+          <p:cNvPr id="16" name="Text 14"/>
           <p:cNvSpPr/>
           <p:nvPr/>
         </p:nvSpPr>
@@ -15871,7 +15456,7 @@
                 <a:ea typeface="Segoe UI" pitchFamily="34" charset="-122"/>
                 <a:cs typeface="Segoe UI" pitchFamily="34" charset="-120"/>
               </a:rPr>
-              <a:t>27 / 35</a:t>
+              <a:t>27 / 37</a:t>
             </a:r>
             <a:endParaRPr lang="en-US" sz="1000" dirty="0"/>
           </a:p>
@@ -16008,7 +15593,7 @@
                 <a:ea typeface="Segoe UI" pitchFamily="34" charset="-122"/>
                 <a:cs typeface="Segoe UI" pitchFamily="34" charset="-120"/>
               </a:rPr>
-              <a:t>Spend where it buys useful evidence</a:t>
+              <a:t>5/5 does not establish perfection</a:t>
             </a:r>
             <a:endParaRPr lang="en-US" sz="2700" dirty="0"/>
           </a:p>
@@ -16086,7 +15671,7 @@
                 <a:ea typeface="Segoe UI" pitchFamily="34" charset="-122"/>
                 <a:cs typeface="Segoe UI" pitchFamily="34" charset="-120"/>
               </a:rPr>
-              <a:t>Run local contracts and the golden gate before paid judges.</a:t>
+              <a:t>Illustrative 95% Wilson interval for 5/5: about 0.57 to 1.00.</a:t>
             </a:r>
             <a:endParaRPr lang="en-US" sz="2000" dirty="0"/>
           </a:p>
@@ -16187,7 +15772,7 @@
                 <a:ea typeface="Segoe UI" pitchFamily="34" charset="-122"/>
                 <a:cs typeface="Segoe UI" pitchFamily="34" charset="-120"/>
               </a:rPr>
-              <a:t>Pilot: 5 cases × 2 locales × 1 trial × 3 metrics = 30 judgments.</a:t>
+              <a:t>That interval assumes independent Bernoulli observations.</a:t>
             </a:r>
             <a:endParaRPr lang="en-US" sz="2000" dirty="0"/>
           </a:p>
@@ -16288,7 +15873,7 @@
                 <a:ea typeface="Segoe UI" pitchFamily="34" charset="-122"/>
                 <a:cs typeface="Segoe UI" pitchFamily="34" charset="-120"/>
               </a:rPr>
-              <a:t>More trials, long contexts and evaluator retries increase cost.</a:t>
+              <a:t>Repeated grades of one case are correlated, not new customers.</a:t>
             </a:r>
             <a:endParaRPr lang="en-US" sz="2000" dirty="0"/>
           </a:p>
@@ -16389,7 +15974,7 @@
                 <a:ea typeface="Segoe UI" pitchFamily="34" charset="-122"/>
                 <a:cs typeface="Segoe UI" pitchFamily="34" charset="-120"/>
               </a:rPr>
-              <a:t>Reuse captures for judge experiments; bound concurrency and budget.</a:t>
+              <a:t>Report case-level uncertainty and rare-harm limitations.</a:t>
             </a:r>
             <a:endParaRPr lang="en-US" sz="2000" dirty="0"/>
           </a:p>
@@ -16499,7 +16084,7 @@
                 <a:ea typeface="Segoe UI" pitchFamily="34" charset="-122"/>
                 <a:cs typeface="Segoe UI" pitchFamily="34" charset="-120"/>
               </a:rPr>
-              <a:t>28 / 35</a:t>
+              <a:t>28 / 37</a:t>
             </a:r>
             <a:endParaRPr lang="en-US" sz="1000" dirty="0"/>
           </a:p>
@@ -16636,7 +16221,7 @@
                 <a:ea typeface="Segoe UI" pitchFamily="34" charset="-122"/>
                 <a:cs typeface="Segoe UI" pitchFamily="34" charset="-120"/>
               </a:rPr>
-              <a:t>Stateful regression: the revision workflow</a:t>
+              <a:t>Compare candidates fairly</a:t>
             </a:r>
             <a:endParaRPr lang="en-US" sz="2700" dirty="0"/>
           </a:p>
@@ -16644,22 +16229,98 @@
       </p:sp>
       <p:sp>
         <p:nvSpPr>
-          <p:cNvPr id="5" name="Shape 3"/>
-          <p:cNvSpPr/>
-          <p:nvPr/>
-        </p:nvSpPr>
-        <p:spPr>
-          <a:xfrm>
-            <a:off x="548640" y="1920240"/>
-            <a:ext cx="5394960" cy="1417320"/>
-          </a:xfrm>
-          <a:prstGeom prst="rect">
-            <a:avLst/>
-          </a:prstGeom>
-          <a:solidFill>
-            <a:srgbClr val="EDF4FA"/>
-          </a:solidFill>
-          <a:ln w="12700">
+          <p:cNvPr id="5" name="Text 3"/>
+          <p:cNvSpPr/>
+          <p:nvPr/>
+        </p:nvSpPr>
+        <p:spPr>
+          <a:xfrm>
+            <a:off x="594360" y="1828800"/>
+            <a:ext cx="640080" cy="594360"/>
+          </a:xfrm>
+          <a:prstGeom prst="rect">
+            <a:avLst/>
+          </a:prstGeom>
+          <a:noFill/>
+          <a:ln/>
+        </p:spPr>
+        <p:txBody>
+          <a:bodyPr wrap="square" lIns="0" tIns="0" rIns="0" bIns="0" rtlCol="0" anchor="ctr"/>
+          <a:lstStyle/>
+          <a:p>
+            <a:pPr indent="0" marL="0">
+              <a:buNone/>
+            </a:pPr>
+            <a:r>
+              <a:rPr lang="en-US" sz="1700" b="1" dirty="0">
+                <a:solidFill>
+                  <a:srgbClr val="0078D4"/>
+                </a:solidFill>
+                <a:latin typeface="Segoe UI" pitchFamily="34" charset="0"/>
+                <a:ea typeface="Segoe UI" pitchFamily="34" charset="-122"/>
+                <a:cs typeface="Segoe UI" pitchFamily="34" charset="-120"/>
+              </a:rPr>
+              <a:t>01</a:t>
+            </a:r>
+            <a:endParaRPr lang="en-US" sz="1700" dirty="0"/>
+          </a:p>
+        </p:txBody>
+      </p:sp>
+      <p:sp>
+        <p:nvSpPr>
+          <p:cNvPr id="6" name="Text 4"/>
+          <p:cNvSpPr/>
+          <p:nvPr/>
+        </p:nvSpPr>
+        <p:spPr>
+          <a:xfrm>
+            <a:off x="1325880" y="1828800"/>
+            <a:ext cx="10195560" cy="731520"/>
+          </a:xfrm>
+          <a:prstGeom prst="rect">
+            <a:avLst/>
+          </a:prstGeom>
+          <a:noFill/>
+          <a:ln/>
+        </p:spPr>
+        <p:txBody>
+          <a:bodyPr wrap="square" lIns="0" tIns="0" rIns="0" bIns="0" rtlCol="0" anchor="ctr"/>
+          <a:lstStyle/>
+          <a:p>
+            <a:pPr indent="0" marL="0">
+              <a:buNone/>
+            </a:pPr>
+            <a:r>
+              <a:rPr lang="en-US" sz="2000" dirty="0">
+                <a:solidFill>
+                  <a:srgbClr val="183449"/>
+                </a:solidFill>
+                <a:latin typeface="Segoe UI" pitchFamily="34" charset="0"/>
+                <a:ea typeface="Segoe UI" pitchFamily="34" charset="-122"/>
+                <a:cs typeface="Segoe UI" pitchFamily="34" charset="-120"/>
+              </a:rPr>
+              <a:t>Pair by stable case ID, locale, trial and controlled initial state.</a:t>
+            </a:r>
+            <a:endParaRPr lang="en-US" sz="2000" dirty="0"/>
+          </a:p>
+        </p:txBody>
+      </p:sp>
+      <p:sp>
+        <p:nvSpPr>
+          <p:cNvPr id="7" name="Shape 5"/>
+          <p:cNvSpPr/>
+          <p:nvPr/>
+        </p:nvSpPr>
+        <p:spPr>
+          <a:xfrm>
+            <a:off x="1325880" y="2660904"/>
+            <a:ext cx="10149840" cy="0"/>
+          </a:xfrm>
+          <a:prstGeom prst="line">
+            <a:avLst/>
+          </a:prstGeom>
+          <a:noFill/>
+          <a:ln w="6350">
             <a:solidFill>
               <a:srgbClr val="DCE5ED"/>
             </a:solidFill>
@@ -16669,30 +16330,30 @@
       </p:sp>
       <p:sp>
         <p:nvSpPr>
-          <p:cNvPr id="6" name="Text 4"/>
-          <p:cNvSpPr/>
-          <p:nvPr/>
-        </p:nvSpPr>
-        <p:spPr>
-          <a:xfrm>
-            <a:off x="777240" y="2103120"/>
-            <a:ext cx="640080" cy="411480"/>
-          </a:xfrm>
-          <a:prstGeom prst="rect">
-            <a:avLst/>
-          </a:prstGeom>
-          <a:noFill/>
-          <a:ln/>
-        </p:spPr>
-        <p:txBody>
-          <a:bodyPr wrap="square" lIns="0" tIns="0" rIns="0" bIns="0" rtlCol="0" anchor="ctr"/>
-          <a:lstStyle/>
-          <a:p>
-            <a:pPr indent="0" marL="0">
-              <a:buNone/>
-            </a:pPr>
-            <a:r>
-              <a:rPr lang="en-US" sz="2500" b="1" dirty="0">
+          <p:cNvPr id="8" name="Text 6"/>
+          <p:cNvSpPr/>
+          <p:nvPr/>
+        </p:nvSpPr>
+        <p:spPr>
+          <a:xfrm>
+            <a:off x="594360" y="2770632"/>
+            <a:ext cx="640080" cy="594360"/>
+          </a:xfrm>
+          <a:prstGeom prst="rect">
+            <a:avLst/>
+          </a:prstGeom>
+          <a:noFill/>
+          <a:ln/>
+        </p:spPr>
+        <p:txBody>
+          <a:bodyPr wrap="square" lIns="0" tIns="0" rIns="0" bIns="0" rtlCol="0" anchor="ctr"/>
+          <a:lstStyle/>
+          <a:p>
+            <a:pPr indent="0" marL="0">
+              <a:buNone/>
+            </a:pPr>
+            <a:r>
+              <a:rPr lang="en-US" sz="1700" b="1" dirty="0">
                 <a:solidFill>
                   <a:srgbClr val="0078D4"/>
                 </a:solidFill>
@@ -16700,38 +16361,38 @@
                 <a:ea typeface="Segoe UI" pitchFamily="34" charset="-122"/>
                 <a:cs typeface="Segoe UI" pitchFamily="34" charset="-120"/>
               </a:rPr>
-              <a:t>01</a:t>
-            </a:r>
-            <a:endParaRPr lang="en-US" sz="2500" dirty="0"/>
-          </a:p>
-        </p:txBody>
-      </p:sp>
-      <p:sp>
-        <p:nvSpPr>
-          <p:cNvPr id="7" name="Text 5"/>
-          <p:cNvSpPr/>
-          <p:nvPr/>
-        </p:nvSpPr>
-        <p:spPr>
-          <a:xfrm>
-            <a:off x="1508760" y="2103120"/>
-            <a:ext cx="4114800" cy="1051560"/>
-          </a:xfrm>
-          <a:prstGeom prst="rect">
-            <a:avLst/>
-          </a:prstGeom>
-          <a:noFill/>
-          <a:ln/>
-        </p:spPr>
-        <p:txBody>
-          <a:bodyPr wrap="square" lIns="0" tIns="0" rIns="0" bIns="0" rtlCol="0" anchor="ctr"/>
-          <a:lstStyle/>
-          <a:p>
-            <a:pPr indent="0" marL="0">
-              <a:buNone/>
-            </a:pPr>
-            <a:r>
-              <a:rPr lang="en-US" sz="2100" b="1" dirty="0">
+              <a:t>02</a:t>
+            </a:r>
+            <a:endParaRPr lang="en-US" sz="1700" dirty="0"/>
+          </a:p>
+        </p:txBody>
+      </p:sp>
+      <p:sp>
+        <p:nvSpPr>
+          <p:cNvPr id="9" name="Text 7"/>
+          <p:cNvSpPr/>
+          <p:nvPr/>
+        </p:nvSpPr>
+        <p:spPr>
+          <a:xfrm>
+            <a:off x="1325880" y="2770632"/>
+            <a:ext cx="10195560" cy="731520"/>
+          </a:xfrm>
+          <a:prstGeom prst="rect">
+            <a:avLst/>
+          </a:prstGeom>
+          <a:noFill/>
+          <a:ln/>
+        </p:spPr>
+        <p:txBody>
+          <a:bodyPr wrap="square" lIns="0" tIns="0" rIns="0" bIns="0" rtlCol="0" anchor="ctr"/>
+          <a:lstStyle/>
+          <a:p>
+            <a:pPr indent="0" marL="0">
+              <a:buNone/>
+            </a:pPr>
+            <a:r>
+              <a:rPr lang="en-US" sz="2000" dirty="0">
                 <a:solidFill>
                   <a:srgbClr val="183449"/>
                 </a:solidFill>
@@ -16739,30 +16400,28 @@
                 <a:ea typeface="Segoe UI" pitchFamily="34" charset="-122"/>
                 <a:cs typeface="Segoe UI" pitchFamily="34" charset="-120"/>
               </a:rPr>
-              <a:t>Return pending case to DRAFT rev 2</a:t>
-            </a:r>
-            <a:endParaRPr lang="en-US" sz="2100" dirty="0"/>
-          </a:p>
-        </p:txBody>
-      </p:sp>
-      <p:sp>
-        <p:nvSpPr>
-          <p:cNvPr id="8" name="Shape 6"/>
-          <p:cNvSpPr/>
-          <p:nvPr/>
-        </p:nvSpPr>
-        <p:spPr>
-          <a:xfrm>
-            <a:off x="6217920" y="1920240"/>
-            <a:ext cx="5394960" cy="1417320"/>
-          </a:xfrm>
-          <a:prstGeom prst="rect">
-            <a:avLst/>
-          </a:prstGeom>
-          <a:solidFill>
-            <a:srgbClr val="EDF4FA"/>
-          </a:solidFill>
-          <a:ln w="12700">
+              <a:t>Freeze independent facts, rubric, evaluator and judge-model version.</a:t>
+            </a:r>
+            <a:endParaRPr lang="en-US" sz="2000" dirty="0"/>
+          </a:p>
+        </p:txBody>
+      </p:sp>
+      <p:sp>
+        <p:nvSpPr>
+          <p:cNvPr id="10" name="Shape 8"/>
+          <p:cNvSpPr/>
+          <p:nvPr/>
+        </p:nvSpPr>
+        <p:spPr>
+          <a:xfrm>
+            <a:off x="1325880" y="3602736"/>
+            <a:ext cx="10149840" cy="0"/>
+          </a:xfrm>
+          <a:prstGeom prst="line">
+            <a:avLst/>
+          </a:prstGeom>
+          <a:noFill/>
+          <a:ln w="6350">
             <a:solidFill>
               <a:srgbClr val="DCE5ED"/>
             </a:solidFill>
@@ -16772,30 +16431,30 @@
       </p:sp>
       <p:sp>
         <p:nvSpPr>
-          <p:cNvPr id="9" name="Text 7"/>
-          <p:cNvSpPr/>
-          <p:nvPr/>
-        </p:nvSpPr>
-        <p:spPr>
-          <a:xfrm>
-            <a:off x="6446520" y="2103120"/>
-            <a:ext cx="640080" cy="411480"/>
-          </a:xfrm>
-          <a:prstGeom prst="rect">
-            <a:avLst/>
-          </a:prstGeom>
-          <a:noFill/>
-          <a:ln/>
-        </p:spPr>
-        <p:txBody>
-          <a:bodyPr wrap="square" lIns="0" tIns="0" rIns="0" bIns="0" rtlCol="0" anchor="ctr"/>
-          <a:lstStyle/>
-          <a:p>
-            <a:pPr indent="0" marL="0">
-              <a:buNone/>
-            </a:pPr>
-            <a:r>
-              <a:rPr lang="en-US" sz="2500" b="1" dirty="0">
+          <p:cNvPr id="11" name="Text 9"/>
+          <p:cNvSpPr/>
+          <p:nvPr/>
+        </p:nvSpPr>
+        <p:spPr>
+          <a:xfrm>
+            <a:off x="594360" y="3712464"/>
+            <a:ext cx="640080" cy="594360"/>
+          </a:xfrm>
+          <a:prstGeom prst="rect">
+            <a:avLst/>
+          </a:prstGeom>
+          <a:noFill/>
+          <a:ln/>
+        </p:spPr>
+        <p:txBody>
+          <a:bodyPr wrap="square" lIns="0" tIns="0" rIns="0" bIns="0" rtlCol="0" anchor="ctr"/>
+          <a:lstStyle/>
+          <a:p>
+            <a:pPr indent="0" marL="0">
+              <a:buNone/>
+            </a:pPr>
+            <a:r>
+              <a:rPr lang="en-US" sz="1700" b="1" dirty="0">
                 <a:solidFill>
                   <a:srgbClr val="0078D4"/>
                 </a:solidFill>
@@ -16803,38 +16462,38 @@
                 <a:ea typeface="Segoe UI" pitchFamily="34" charset="-122"/>
                 <a:cs typeface="Segoe UI" pitchFamily="34" charset="-120"/>
               </a:rPr>
-              <a:t>02</a:t>
-            </a:r>
-            <a:endParaRPr lang="en-US" sz="2500" dirty="0"/>
-          </a:p>
-        </p:txBody>
-      </p:sp>
-      <p:sp>
-        <p:nvSpPr>
-          <p:cNvPr id="10" name="Text 8"/>
-          <p:cNvSpPr/>
-          <p:nvPr/>
-        </p:nvSpPr>
-        <p:spPr>
-          <a:xfrm>
-            <a:off x="7178040" y="2103120"/>
-            <a:ext cx="4114800" cy="1051560"/>
-          </a:xfrm>
-          <a:prstGeom prst="rect">
-            <a:avLst/>
-          </a:prstGeom>
-          <a:noFill/>
-          <a:ln/>
-        </p:spPr>
-        <p:txBody>
-          <a:bodyPr wrap="square" lIns="0" tIns="0" rIns="0" bIns="0" rtlCol="0" anchor="ctr"/>
-          <a:lstStyle/>
-          <a:p>
-            <a:pPr indent="0" marL="0">
-              <a:buNone/>
-            </a:pPr>
-            <a:r>
-              <a:rPr lang="en-US" sz="2100" b="1" dirty="0">
+              <a:t>03</a:t>
+            </a:r>
+            <a:endParaRPr lang="en-US" sz="1700" dirty="0"/>
+          </a:p>
+        </p:txBody>
+      </p:sp>
+      <p:sp>
+        <p:nvSpPr>
+          <p:cNvPr id="12" name="Text 10"/>
+          <p:cNvSpPr/>
+          <p:nvPr/>
+        </p:nvSpPr>
+        <p:spPr>
+          <a:xfrm>
+            <a:off x="1325880" y="3712464"/>
+            <a:ext cx="10195560" cy="731520"/>
+          </a:xfrm>
+          <a:prstGeom prst="rect">
+            <a:avLst/>
+          </a:prstGeom>
+          <a:noFill/>
+          <a:ln/>
+        </p:spPr>
+        <p:txBody>
+          <a:bodyPr wrap="square" lIns="0" tIns="0" rIns="0" bIns="0" rtlCol="0" anchor="ctr"/>
+          <a:lstStyle/>
+          <a:p>
+            <a:pPr indent="0" marL="0">
+              <a:buNone/>
+            </a:pPr>
+            <a:r>
+              <a:rPr lang="en-US" sz="2000" dirty="0">
                 <a:solidFill>
                   <a:srgbClr val="183449"/>
                 </a:solidFill>
@@ -16842,30 +16501,28 @@
                 <a:ea typeface="Segoe UI" pitchFamily="34" charset="-122"/>
                 <a:cs typeface="Segoe UI" pitchFamily="34" charset="-120"/>
               </a:rPr>
-              <a:t>Confirm active / DRAFT queue visibility</a:t>
-            </a:r>
-            <a:endParaRPr lang="en-US" sz="2100" dirty="0"/>
-          </a:p>
-        </p:txBody>
-      </p:sp>
-      <p:sp>
-        <p:nvSpPr>
-          <p:cNvPr id="11" name="Shape 9"/>
-          <p:cNvSpPr/>
-          <p:nvPr/>
-        </p:nvSpPr>
-        <p:spPr>
-          <a:xfrm>
-            <a:off x="548640" y="3749040"/>
-            <a:ext cx="5394960" cy="1417320"/>
-          </a:xfrm>
-          <a:prstGeom prst="rect">
-            <a:avLst/>
-          </a:prstGeom>
-          <a:solidFill>
-            <a:srgbClr val="EDF4FA"/>
-          </a:solidFill>
-          <a:ln w="12700">
+              <a:t>Inspect pass-to-fail transitions, effect size and uncertainty.</a:t>
+            </a:r>
+            <a:endParaRPr lang="en-US" sz="2000" dirty="0"/>
+          </a:p>
+        </p:txBody>
+      </p:sp>
+      <p:sp>
+        <p:nvSpPr>
+          <p:cNvPr id="13" name="Shape 11"/>
+          <p:cNvSpPr/>
+          <p:nvPr/>
+        </p:nvSpPr>
+        <p:spPr>
+          <a:xfrm>
+            <a:off x="1325880" y="4544568"/>
+            <a:ext cx="10149840" cy="0"/>
+          </a:xfrm>
+          <a:prstGeom prst="line">
+            <a:avLst/>
+          </a:prstGeom>
+          <a:noFill/>
+          <a:ln w="6350">
             <a:solidFill>
               <a:srgbClr val="DCE5ED"/>
             </a:solidFill>
@@ -16875,30 +16532,30 @@
       </p:sp>
       <p:sp>
         <p:nvSpPr>
-          <p:cNvPr id="12" name="Text 10"/>
-          <p:cNvSpPr/>
-          <p:nvPr/>
-        </p:nvSpPr>
-        <p:spPr>
-          <a:xfrm>
-            <a:off x="777240" y="3931920"/>
-            <a:ext cx="640080" cy="411480"/>
-          </a:xfrm>
-          <a:prstGeom prst="rect">
-            <a:avLst/>
-          </a:prstGeom>
-          <a:noFill/>
-          <a:ln/>
-        </p:spPr>
-        <p:txBody>
-          <a:bodyPr wrap="square" lIns="0" tIns="0" rIns="0" bIns="0" rtlCol="0" anchor="ctr"/>
-          <a:lstStyle/>
-          <a:p>
-            <a:pPr indent="0" marL="0">
-              <a:buNone/>
-            </a:pPr>
-            <a:r>
-              <a:rPr lang="en-US" sz="2500" b="1" dirty="0">
+          <p:cNvPr id="14" name="Text 12"/>
+          <p:cNvSpPr/>
+          <p:nvPr/>
+        </p:nvSpPr>
+        <p:spPr>
+          <a:xfrm>
+            <a:off x="594360" y="4654296"/>
+            <a:ext cx="640080" cy="594360"/>
+          </a:xfrm>
+          <a:prstGeom prst="rect">
+            <a:avLst/>
+          </a:prstGeom>
+          <a:noFill/>
+          <a:ln/>
+        </p:spPr>
+        <p:txBody>
+          <a:bodyPr wrap="square" lIns="0" tIns="0" rIns="0" bIns="0" rtlCol="0" anchor="ctr"/>
+          <a:lstStyle/>
+          <a:p>
+            <a:pPr indent="0" marL="0">
+              <a:buNone/>
+            </a:pPr>
+            <a:r>
+              <a:rPr lang="en-US" sz="1700" b="1" dirty="0">
                 <a:solidFill>
                   <a:srgbClr val="0078D4"/>
                 </a:solidFill>
@@ -16906,38 +16563,38 @@
                 <a:ea typeface="Segoe UI" pitchFamily="34" charset="-122"/>
                 <a:cs typeface="Segoe UI" pitchFamily="34" charset="-120"/>
               </a:rPr>
-              <a:t>03</a:t>
-            </a:r>
-            <a:endParaRPr lang="en-US" sz="2500" dirty="0"/>
-          </a:p>
-        </p:txBody>
-      </p:sp>
-      <p:sp>
-        <p:nvSpPr>
-          <p:cNvPr id="13" name="Text 11"/>
-          <p:cNvSpPr/>
-          <p:nvPr/>
-        </p:nvSpPr>
-        <p:spPr>
-          <a:xfrm>
-            <a:off x="1508760" y="3931920"/>
-            <a:ext cx="4114800" cy="1051560"/>
-          </a:xfrm>
-          <a:prstGeom prst="rect">
-            <a:avLst/>
-          </a:prstGeom>
-          <a:noFill/>
-          <a:ln/>
-        </p:spPr>
-        <p:txBody>
-          <a:bodyPr wrap="square" lIns="0" tIns="0" rIns="0" bIns="0" rtlCol="0" anchor="ctr"/>
-          <a:lstStyle/>
-          <a:p>
-            <a:pPr indent="0" marL="0">
-              <a:buNone/>
-            </a:pPr>
-            <a:r>
-              <a:rPr lang="en-US" sz="2100" b="1" dirty="0">
+              <a:t>04</a:t>
+            </a:r>
+            <a:endParaRPr lang="en-US" sz="1700" dirty="0"/>
+          </a:p>
+        </p:txBody>
+      </p:sp>
+      <p:sp>
+        <p:nvSpPr>
+          <p:cNvPr id="15" name="Text 13"/>
+          <p:cNvSpPr/>
+          <p:nvPr/>
+        </p:nvSpPr>
+        <p:spPr>
+          <a:xfrm>
+            <a:off x="1325880" y="4654296"/>
+            <a:ext cx="10195560" cy="731520"/>
+          </a:xfrm>
+          <a:prstGeom prst="rect">
+            <a:avLst/>
+          </a:prstGeom>
+          <a:noFill/>
+          <a:ln/>
+        </p:spPr>
+        <p:txBody>
+          <a:bodyPr wrap="square" lIns="0" tIns="0" rIns="0" bIns="0" rtlCol="0" anchor="ctr"/>
+          <a:lstStyle/>
+          <a:p>
+            <a:pPr indent="0" marL="0">
+              <a:buNone/>
+            </a:pPr>
+            <a:r>
+              <a:rPr lang="en-US" sz="2000" dirty="0">
                 <a:solidFill>
                   <a:srgbClr val="183449"/>
                 </a:solidFill>
@@ -16945,114 +16602,34 @@
                 <a:ea typeface="Segoe UI" pitchFamily="34" charset="-122"/>
                 <a:cs typeface="Segoe UI" pitchFamily="34" charset="-120"/>
               </a:rPr>
-              <a:t>Correct + prepare through native agent</a:t>
-            </a:r>
-            <a:endParaRPr lang="en-US" sz="2100" dirty="0"/>
-          </a:p>
-        </p:txBody>
-      </p:sp>
-      <p:sp>
-        <p:nvSpPr>
-          <p:cNvPr id="14" name="Shape 12"/>
-          <p:cNvSpPr/>
-          <p:nvPr/>
-        </p:nvSpPr>
-        <p:spPr>
-          <a:xfrm>
-            <a:off x="6217920" y="3749040"/>
-            <a:ext cx="5394960" cy="1417320"/>
-          </a:xfrm>
-          <a:prstGeom prst="rect">
-            <a:avLst/>
-          </a:prstGeom>
-          <a:solidFill>
-            <a:srgbClr val="EDF4FA"/>
-          </a:solidFill>
-          <a:ln w="12700">
+              <a:t>Changed dataset or evaluator means rebaseline, not improvement.</a:t>
+            </a:r>
+            <a:endParaRPr lang="en-US" sz="2000" dirty="0"/>
+          </a:p>
+        </p:txBody>
+      </p:sp>
+      <p:sp>
+        <p:nvSpPr>
+          <p:cNvPr id="16" name="Shape 14"/>
+          <p:cNvSpPr/>
+          <p:nvPr/>
+        </p:nvSpPr>
+        <p:spPr>
+          <a:xfrm>
+            <a:off x="1325880" y="5486400"/>
+            <a:ext cx="10149840" cy="0"/>
+          </a:xfrm>
+          <a:prstGeom prst="line">
+            <a:avLst/>
+          </a:prstGeom>
+          <a:noFill/>
+          <a:ln w="6350">
             <a:solidFill>
               <a:srgbClr val="DCE5ED"/>
             </a:solidFill>
             <a:prstDash val="solid"/>
           </a:ln>
         </p:spPr>
-      </p:sp>
-      <p:sp>
-        <p:nvSpPr>
-          <p:cNvPr id="15" name="Text 13"/>
-          <p:cNvSpPr/>
-          <p:nvPr/>
-        </p:nvSpPr>
-        <p:spPr>
-          <a:xfrm>
-            <a:off x="6446520" y="3931920"/>
-            <a:ext cx="640080" cy="411480"/>
-          </a:xfrm>
-          <a:prstGeom prst="rect">
-            <a:avLst/>
-          </a:prstGeom>
-          <a:noFill/>
-          <a:ln/>
-        </p:spPr>
-        <p:txBody>
-          <a:bodyPr wrap="square" lIns="0" tIns="0" rIns="0" bIns="0" rtlCol="0" anchor="ctr"/>
-          <a:lstStyle/>
-          <a:p>
-            <a:pPr indent="0" marL="0">
-              <a:buNone/>
-            </a:pPr>
-            <a:r>
-              <a:rPr lang="en-US" sz="2500" b="1" dirty="0">
-                <a:solidFill>
-                  <a:srgbClr val="0078D4"/>
-                </a:solidFill>
-                <a:latin typeface="Segoe UI" pitchFamily="34" charset="0"/>
-                <a:ea typeface="Segoe UI" pitchFamily="34" charset="-122"/>
-                <a:cs typeface="Segoe UI" pitchFamily="34" charset="-120"/>
-              </a:rPr>
-              <a:t>04</a:t>
-            </a:r>
-            <a:endParaRPr lang="en-US" sz="2500" dirty="0"/>
-          </a:p>
-        </p:txBody>
-      </p:sp>
-      <p:sp>
-        <p:nvSpPr>
-          <p:cNvPr id="16" name="Text 14"/>
-          <p:cNvSpPr/>
-          <p:nvPr/>
-        </p:nvSpPr>
-        <p:spPr>
-          <a:xfrm>
-            <a:off x="7178040" y="3931920"/>
-            <a:ext cx="4114800" cy="1051560"/>
-          </a:xfrm>
-          <a:prstGeom prst="rect">
-            <a:avLst/>
-          </a:prstGeom>
-          <a:noFill/>
-          <a:ln/>
-        </p:spPr>
-        <p:txBody>
-          <a:bodyPr wrap="square" lIns="0" tIns="0" rIns="0" bIns="0" rtlCol="0" anchor="ctr"/>
-          <a:lstStyle/>
-          <a:p>
-            <a:pPr indent="0" marL="0">
-              <a:buNone/>
-            </a:pPr>
-            <a:r>
-              <a:rPr lang="en-US" sz="2100" b="1" dirty="0">
-                <a:solidFill>
-                  <a:srgbClr val="183449"/>
-                </a:solidFill>
-                <a:latin typeface="Segoe UI" pitchFamily="34" charset="0"/>
-                <a:ea typeface="Segoe UI" pitchFamily="34" charset="-122"/>
-                <a:cs typeface="Segoe UI" pitchFamily="34" charset="-120"/>
-              </a:rPr>
-              <a:t>Match audit; reject self-approval</a:t>
-            </a:r>
-            <a:endParaRPr lang="en-US" sz="2100" dirty="0"/>
-          </a:p>
-        </p:txBody>
       </p:sp>
       <p:sp>
         <p:nvSpPr>
@@ -17135,7 +16712,7 @@
                 <a:ea typeface="Segoe UI" pitchFamily="34" charset="-122"/>
                 <a:cs typeface="Segoe UI" pitchFamily="34" charset="-120"/>
               </a:rPr>
-              <a:t>29 / 35</a:t>
+              <a:t>29 / 37</a:t>
             </a:r>
             <a:endParaRPr lang="en-US" sz="1000" dirty="0"/>
           </a:p>
@@ -17771,7 +17348,7 @@
                 <a:ea typeface="Segoe UI" pitchFamily="34" charset="-122"/>
                 <a:cs typeface="Segoe UI" pitchFamily="34" charset="-120"/>
               </a:rPr>
-              <a:t>3 / 35</a:t>
+              <a:t>3 / 37</a:t>
             </a:r>
             <a:endParaRPr lang="en-US" sz="1000" dirty="0"/>
           </a:p>
@@ -17908,7 +17485,7 @@
                 <a:ea typeface="Segoe UI" pitchFamily="34" charset="-122"/>
                 <a:cs typeface="Segoe UI" pitchFamily="34" charset="-120"/>
               </a:rPr>
-              <a:t>Trajectory evaluation needs real trajectory evidence</a:t>
+              <a:t>Spend where it buys useful evidence</a:t>
             </a:r>
             <a:endParaRPr lang="en-US" sz="2700" dirty="0"/>
           </a:p>
@@ -17986,7 +17563,7 @@
                 <a:ea typeface="Segoe UI" pitchFamily="34" charset="-122"/>
                 <a:cs typeface="Segoe UI" pitchFamily="34" charset="-120"/>
               </a:rPr>
-              <a:t>Outcome quality and process correctness are different questions.</a:t>
+              <a:t>Run local contracts and the golden gate before paid judges.</a:t>
             </a:r>
             <a:endParaRPr lang="en-US" sz="2000" dirty="0"/>
           </a:p>
@@ -18087,7 +17664,7 @@
                 <a:ea typeface="Segoe UI" pitchFamily="34" charset="-122"/>
                 <a:cs typeface="Segoe UI" pitchFamily="34" charset="-120"/>
               </a:rPr>
-              <a:t>Tool selection/arguments require compatible actual tool traces.</a:t>
+              <a:t>Pilot: 5 cases × 2 locales × 1 trial × 3 metrics = 30 judgments.</a:t>
             </a:r>
             <a:endParaRPr lang="en-US" sz="2000" dirty="0"/>
           </a:p>
@@ -18188,7 +17765,7 @@
                 <a:ea typeface="Segoe UI" pitchFamily="34" charset="-122"/>
                 <a:cs typeface="Segoe UI" pitchFamily="34" charset="-120"/>
               </a:rPr>
-              <a:t>Real quote stages: INTAKE, REFERENCE_LOOKUP, COMPOSITION.</a:t>
+              <a:t>More trials, long contexts and evaluator retries increase cost.</a:t>
             </a:r>
             <a:endParaRPr lang="en-US" sz="2000" dirty="0"/>
           </a:p>
@@ -18289,7 +17866,7 @@
                 <a:ea typeface="Segoe UI" pitchFamily="34" charset="-122"/>
                 <a:cs typeface="Segoe UI" pitchFamily="34" charset="-120"/>
               </a:rPr>
-              <a:t>Requested trace ID or final text alone does not prove ingestion.</a:t>
+              <a:t>Reuse captures for judge experiments; bound concurrency and budget.</a:t>
             </a:r>
             <a:endParaRPr lang="en-US" sz="2000" dirty="0"/>
           </a:p>
@@ -18399,7 +17976,7 @@
                 <a:ea typeface="Segoe UI" pitchFamily="34" charset="-122"/>
                 <a:cs typeface="Segoe UI" pitchFamily="34" charset="-120"/>
               </a:rPr>
-              <a:t>30 / 35</a:t>
+              <a:t>30 / 37</a:t>
             </a:r>
             <a:endParaRPr lang="en-US" sz="1000" dirty="0"/>
           </a:p>
@@ -18536,7 +18113,7 @@
                 <a:ea typeface="Segoe UI" pitchFamily="34" charset="-122"/>
                 <a:cs typeface="Segoe UI" pitchFamily="34" charset="-120"/>
               </a:rPr>
-              <a:t>Operate two scorecards, not one</a:t>
+              <a:t>Stateful regression: the revision workflow</a:t>
             </a:r>
             <a:endParaRPr lang="en-US" sz="2700" dirty="0"/>
           </a:p>
@@ -18544,98 +18121,22 @@
       </p:sp>
       <p:sp>
         <p:nvSpPr>
-          <p:cNvPr id="5" name="Text 3"/>
-          <p:cNvSpPr/>
-          <p:nvPr/>
-        </p:nvSpPr>
-        <p:spPr>
-          <a:xfrm>
-            <a:off x="594360" y="1828800"/>
-            <a:ext cx="640080" cy="594360"/>
-          </a:xfrm>
-          <a:prstGeom prst="rect">
-            <a:avLst/>
-          </a:prstGeom>
-          <a:noFill/>
-          <a:ln/>
-        </p:spPr>
-        <p:txBody>
-          <a:bodyPr wrap="square" lIns="0" tIns="0" rIns="0" bIns="0" rtlCol="0" anchor="ctr"/>
-          <a:lstStyle/>
-          <a:p>
-            <a:pPr indent="0" marL="0">
-              <a:buNone/>
-            </a:pPr>
-            <a:r>
-              <a:rPr lang="en-US" sz="1700" b="1" dirty="0">
-                <a:solidFill>
-                  <a:srgbClr val="0078D4"/>
-                </a:solidFill>
-                <a:latin typeface="Segoe UI" pitchFamily="34" charset="0"/>
-                <a:ea typeface="Segoe UI" pitchFamily="34" charset="-122"/>
-                <a:cs typeface="Segoe UI" pitchFamily="34" charset="-120"/>
-              </a:rPr>
-              <a:t>01</a:t>
-            </a:r>
-            <a:endParaRPr lang="en-US" sz="1700" dirty="0"/>
-          </a:p>
-        </p:txBody>
-      </p:sp>
-      <p:sp>
-        <p:nvSpPr>
-          <p:cNvPr id="6" name="Text 4"/>
-          <p:cNvSpPr/>
-          <p:nvPr/>
-        </p:nvSpPr>
-        <p:spPr>
-          <a:xfrm>
-            <a:off x="1325880" y="1828800"/>
-            <a:ext cx="10195560" cy="731520"/>
-          </a:xfrm>
-          <a:prstGeom prst="rect">
-            <a:avLst/>
-          </a:prstGeom>
-          <a:noFill/>
-          <a:ln/>
-        </p:spPr>
-        <p:txBody>
-          <a:bodyPr wrap="square" lIns="0" tIns="0" rIns="0" bIns="0" rtlCol="0" anchor="ctr"/>
-          <a:lstStyle/>
-          <a:p>
-            <a:pPr indent="0" marL="0">
-              <a:buNone/>
-            </a:pPr>
-            <a:r>
-              <a:rPr lang="en-US" sz="2000" dirty="0">
-                <a:solidFill>
-                  <a:srgbClr val="183449"/>
-                </a:solidFill>
-                <a:latin typeface="Segoe UI" pitchFamily="34" charset="0"/>
-                <a:ea typeface="Segoe UI" pitchFamily="34" charset="-122"/>
-                <a:cs typeface="Segoe UI" pitchFamily="34" charset="-120"/>
-              </a:rPr>
-              <a:t>Service: availability, latency, 401/403, quota, timeouts, cost.</a:t>
-            </a:r>
-            <a:endParaRPr lang="en-US" sz="2000" dirty="0"/>
-          </a:p>
-        </p:txBody>
-      </p:sp>
-      <p:sp>
-        <p:nvSpPr>
-          <p:cNvPr id="7" name="Shape 5"/>
-          <p:cNvSpPr/>
-          <p:nvPr/>
-        </p:nvSpPr>
-        <p:spPr>
-          <a:xfrm>
-            <a:off x="1325880" y="2660904"/>
-            <a:ext cx="10149840" cy="0"/>
-          </a:xfrm>
-          <a:prstGeom prst="line">
-            <a:avLst/>
-          </a:prstGeom>
-          <a:noFill/>
-          <a:ln w="6350">
+          <p:cNvPr id="5" name="Shape 3"/>
+          <p:cNvSpPr/>
+          <p:nvPr/>
+        </p:nvSpPr>
+        <p:spPr>
+          <a:xfrm>
+            <a:off x="548640" y="1920240"/>
+            <a:ext cx="5394960" cy="1417320"/>
+          </a:xfrm>
+          <a:prstGeom prst="rect">
+            <a:avLst/>
+          </a:prstGeom>
+          <a:solidFill>
+            <a:srgbClr val="EDF4FA"/>
+          </a:solidFill>
+          <a:ln w="12700">
             <a:solidFill>
               <a:srgbClr val="DCE5ED"/>
             </a:solidFill>
@@ -18645,30 +18146,30 @@
       </p:sp>
       <p:sp>
         <p:nvSpPr>
-          <p:cNvPr id="8" name="Text 6"/>
-          <p:cNvSpPr/>
-          <p:nvPr/>
-        </p:nvSpPr>
-        <p:spPr>
-          <a:xfrm>
-            <a:off x="594360" y="2770632"/>
-            <a:ext cx="640080" cy="594360"/>
-          </a:xfrm>
-          <a:prstGeom prst="rect">
-            <a:avLst/>
-          </a:prstGeom>
-          <a:noFill/>
-          <a:ln/>
-        </p:spPr>
-        <p:txBody>
-          <a:bodyPr wrap="square" lIns="0" tIns="0" rIns="0" bIns="0" rtlCol="0" anchor="ctr"/>
-          <a:lstStyle/>
-          <a:p>
-            <a:pPr indent="0" marL="0">
-              <a:buNone/>
-            </a:pPr>
-            <a:r>
-              <a:rPr lang="en-US" sz="1700" b="1" dirty="0">
+          <p:cNvPr id="6" name="Text 4"/>
+          <p:cNvSpPr/>
+          <p:nvPr/>
+        </p:nvSpPr>
+        <p:spPr>
+          <a:xfrm>
+            <a:off x="777240" y="2103120"/>
+            <a:ext cx="640080" cy="411480"/>
+          </a:xfrm>
+          <a:prstGeom prst="rect">
+            <a:avLst/>
+          </a:prstGeom>
+          <a:noFill/>
+          <a:ln/>
+        </p:spPr>
+        <p:txBody>
+          <a:bodyPr wrap="square" lIns="0" tIns="0" rIns="0" bIns="0" rtlCol="0" anchor="ctr"/>
+          <a:lstStyle/>
+          <a:p>
+            <a:pPr indent="0" marL="0">
+              <a:buNone/>
+            </a:pPr>
+            <a:r>
+              <a:rPr lang="en-US" sz="2500" b="1" dirty="0">
                 <a:solidFill>
                   <a:srgbClr val="0078D4"/>
                 </a:solidFill>
@@ -18676,38 +18177,38 @@
                 <a:ea typeface="Segoe UI" pitchFamily="34" charset="-122"/>
                 <a:cs typeface="Segoe UI" pitchFamily="34" charset="-120"/>
               </a:rPr>
-              <a:t>02</a:t>
-            </a:r>
-            <a:endParaRPr lang="en-US" sz="1700" dirty="0"/>
-          </a:p>
-        </p:txBody>
-      </p:sp>
-      <p:sp>
-        <p:nvSpPr>
-          <p:cNvPr id="9" name="Text 7"/>
-          <p:cNvSpPr/>
-          <p:nvPr/>
-        </p:nvSpPr>
-        <p:spPr>
-          <a:xfrm>
-            <a:off x="1325880" y="2770632"/>
-            <a:ext cx="10195560" cy="731520"/>
-          </a:xfrm>
-          <a:prstGeom prst="rect">
-            <a:avLst/>
-          </a:prstGeom>
-          <a:noFill/>
-          <a:ln/>
-        </p:spPr>
-        <p:txBody>
-          <a:bodyPr wrap="square" lIns="0" tIns="0" rIns="0" bIns="0" rtlCol="0" anchor="ctr"/>
-          <a:lstStyle/>
-          <a:p>
-            <a:pPr indent="0" marL="0">
-              <a:buNone/>
-            </a:pPr>
-            <a:r>
-              <a:rPr lang="en-US" sz="2000" dirty="0">
+              <a:t>01</a:t>
+            </a:r>
+            <a:endParaRPr lang="en-US" sz="2500" dirty="0"/>
+          </a:p>
+        </p:txBody>
+      </p:sp>
+      <p:sp>
+        <p:nvSpPr>
+          <p:cNvPr id="7" name="Text 5"/>
+          <p:cNvSpPr/>
+          <p:nvPr/>
+        </p:nvSpPr>
+        <p:spPr>
+          <a:xfrm>
+            <a:off x="1508760" y="2103120"/>
+            <a:ext cx="4114800" cy="1051560"/>
+          </a:xfrm>
+          <a:prstGeom prst="rect">
+            <a:avLst/>
+          </a:prstGeom>
+          <a:noFill/>
+          <a:ln/>
+        </p:spPr>
+        <p:txBody>
+          <a:bodyPr wrap="square" lIns="0" tIns="0" rIns="0" bIns="0" rtlCol="0" anchor="ctr"/>
+          <a:lstStyle/>
+          <a:p>
+            <a:pPr indent="0" marL="0">
+              <a:buNone/>
+            </a:pPr>
+            <a:r>
+              <a:rPr lang="en-US" sz="2100" b="1" dirty="0">
                 <a:solidFill>
                   <a:srgbClr val="183449"/>
                 </a:solidFill>
@@ -18715,28 +18216,30 @@
                 <a:ea typeface="Segoe UI" pitchFamily="34" charset="-122"/>
                 <a:cs typeface="Segoe UI" pitchFamily="34" charset="-120"/>
               </a:rPr>
-              <a:t>Quality: grounding, adherence, locale slices and human overrides.</a:t>
-            </a:r>
-            <a:endParaRPr lang="en-US" sz="2000" dirty="0"/>
-          </a:p>
-        </p:txBody>
-      </p:sp>
-      <p:sp>
-        <p:nvSpPr>
-          <p:cNvPr id="10" name="Shape 8"/>
-          <p:cNvSpPr/>
-          <p:nvPr/>
-        </p:nvSpPr>
-        <p:spPr>
-          <a:xfrm>
-            <a:off x="1325880" y="3602736"/>
-            <a:ext cx="10149840" cy="0"/>
-          </a:xfrm>
-          <a:prstGeom prst="line">
-            <a:avLst/>
-          </a:prstGeom>
-          <a:noFill/>
-          <a:ln w="6350">
+              <a:t>Return pending case to DRAFT rev 2</a:t>
+            </a:r>
+            <a:endParaRPr lang="en-US" sz="2100" dirty="0"/>
+          </a:p>
+        </p:txBody>
+      </p:sp>
+      <p:sp>
+        <p:nvSpPr>
+          <p:cNvPr id="8" name="Shape 6"/>
+          <p:cNvSpPr/>
+          <p:nvPr/>
+        </p:nvSpPr>
+        <p:spPr>
+          <a:xfrm>
+            <a:off x="6217920" y="1920240"/>
+            <a:ext cx="5394960" cy="1417320"/>
+          </a:xfrm>
+          <a:prstGeom prst="rect">
+            <a:avLst/>
+          </a:prstGeom>
+          <a:solidFill>
+            <a:srgbClr val="EDF4FA"/>
+          </a:solidFill>
+          <a:ln w="12700">
             <a:solidFill>
               <a:srgbClr val="DCE5ED"/>
             </a:solidFill>
@@ -18746,30 +18249,30 @@
       </p:sp>
       <p:sp>
         <p:nvSpPr>
-          <p:cNvPr id="11" name="Text 9"/>
-          <p:cNvSpPr/>
-          <p:nvPr/>
-        </p:nvSpPr>
-        <p:spPr>
-          <a:xfrm>
-            <a:off x="594360" y="3712464"/>
-            <a:ext cx="640080" cy="594360"/>
-          </a:xfrm>
-          <a:prstGeom prst="rect">
-            <a:avLst/>
-          </a:prstGeom>
-          <a:noFill/>
-          <a:ln/>
-        </p:spPr>
-        <p:txBody>
-          <a:bodyPr wrap="square" lIns="0" tIns="0" rIns="0" bIns="0" rtlCol="0" anchor="ctr"/>
-          <a:lstStyle/>
-          <a:p>
-            <a:pPr indent="0" marL="0">
-              <a:buNone/>
-            </a:pPr>
-            <a:r>
-              <a:rPr lang="en-US" sz="1700" b="1" dirty="0">
+          <p:cNvPr id="9" name="Text 7"/>
+          <p:cNvSpPr/>
+          <p:nvPr/>
+        </p:nvSpPr>
+        <p:spPr>
+          <a:xfrm>
+            <a:off x="6446520" y="2103120"/>
+            <a:ext cx="640080" cy="411480"/>
+          </a:xfrm>
+          <a:prstGeom prst="rect">
+            <a:avLst/>
+          </a:prstGeom>
+          <a:noFill/>
+          <a:ln/>
+        </p:spPr>
+        <p:txBody>
+          <a:bodyPr wrap="square" lIns="0" tIns="0" rIns="0" bIns="0" rtlCol="0" anchor="ctr"/>
+          <a:lstStyle/>
+          <a:p>
+            <a:pPr indent="0" marL="0">
+              <a:buNone/>
+            </a:pPr>
+            <a:r>
+              <a:rPr lang="en-US" sz="2500" b="1" dirty="0">
                 <a:solidFill>
                   <a:srgbClr val="0078D4"/>
                 </a:solidFill>
@@ -18777,38 +18280,38 @@
                 <a:ea typeface="Segoe UI" pitchFamily="34" charset="-122"/>
                 <a:cs typeface="Segoe UI" pitchFamily="34" charset="-120"/>
               </a:rPr>
-              <a:t>03</a:t>
-            </a:r>
-            <a:endParaRPr lang="en-US" sz="1700" dirty="0"/>
-          </a:p>
-        </p:txBody>
-      </p:sp>
-      <p:sp>
-        <p:nvSpPr>
-          <p:cNvPr id="12" name="Text 10"/>
-          <p:cNvSpPr/>
-          <p:nvPr/>
-        </p:nvSpPr>
-        <p:spPr>
-          <a:xfrm>
-            <a:off x="1325880" y="3712464"/>
-            <a:ext cx="10195560" cy="731520"/>
-          </a:xfrm>
-          <a:prstGeom prst="rect">
-            <a:avLst/>
-          </a:prstGeom>
-          <a:noFill/>
-          <a:ln/>
-        </p:spPr>
-        <p:txBody>
-          <a:bodyPr wrap="square" lIns="0" tIns="0" rIns="0" bIns="0" rtlCol="0" anchor="ctr"/>
-          <a:lstStyle/>
-          <a:p>
-            <a:pPr indent="0" marL="0">
-              <a:buNone/>
-            </a:pPr>
-            <a:r>
-              <a:rPr lang="en-US" sz="2000" dirty="0">
+              <a:t>02</a:t>
+            </a:r>
+            <a:endParaRPr lang="en-US" sz="2500" dirty="0"/>
+          </a:p>
+        </p:txBody>
+      </p:sp>
+      <p:sp>
+        <p:nvSpPr>
+          <p:cNvPr id="10" name="Text 8"/>
+          <p:cNvSpPr/>
+          <p:nvPr/>
+        </p:nvSpPr>
+        <p:spPr>
+          <a:xfrm>
+            <a:off x="7178040" y="2103120"/>
+            <a:ext cx="4114800" cy="1051560"/>
+          </a:xfrm>
+          <a:prstGeom prst="rect">
+            <a:avLst/>
+          </a:prstGeom>
+          <a:noFill/>
+          <a:ln/>
+        </p:spPr>
+        <p:txBody>
+          <a:bodyPr wrap="square" lIns="0" tIns="0" rIns="0" bIns="0" rtlCol="0" anchor="ctr"/>
+          <a:lstStyle/>
+          <a:p>
+            <a:pPr indent="0" marL="0">
+              <a:buNone/>
+            </a:pPr>
+            <a:r>
+              <a:rPr lang="en-US" sz="2100" b="1" dirty="0">
                 <a:solidFill>
                   <a:srgbClr val="183449"/>
                 </a:solidFill>
@@ -18816,28 +18319,30 @@
                 <a:ea typeface="Segoe UI" pitchFamily="34" charset="-122"/>
                 <a:cs typeface="Segoe UI" pitchFamily="34" charset="-120"/>
               </a:rPr>
-              <a:t>Safety: deterministic policy violations and role boundaries.</a:t>
-            </a:r>
-            <a:endParaRPr lang="en-US" sz="2000" dirty="0"/>
-          </a:p>
-        </p:txBody>
-      </p:sp>
-      <p:sp>
-        <p:nvSpPr>
-          <p:cNvPr id="13" name="Shape 11"/>
-          <p:cNvSpPr/>
-          <p:nvPr/>
-        </p:nvSpPr>
-        <p:spPr>
-          <a:xfrm>
-            <a:off x="1325880" y="4544568"/>
-            <a:ext cx="10149840" cy="0"/>
-          </a:xfrm>
-          <a:prstGeom prst="line">
-            <a:avLst/>
-          </a:prstGeom>
-          <a:noFill/>
-          <a:ln w="6350">
+              <a:t>Confirm active / DRAFT queue visibility</a:t>
+            </a:r>
+            <a:endParaRPr lang="en-US" sz="2100" dirty="0"/>
+          </a:p>
+        </p:txBody>
+      </p:sp>
+      <p:sp>
+        <p:nvSpPr>
+          <p:cNvPr id="11" name="Shape 9"/>
+          <p:cNvSpPr/>
+          <p:nvPr/>
+        </p:nvSpPr>
+        <p:spPr>
+          <a:xfrm>
+            <a:off x="548640" y="3749040"/>
+            <a:ext cx="5394960" cy="1417320"/>
+          </a:xfrm>
+          <a:prstGeom prst="rect">
+            <a:avLst/>
+          </a:prstGeom>
+          <a:solidFill>
+            <a:srgbClr val="EDF4FA"/>
+          </a:solidFill>
+          <a:ln w="12700">
             <a:solidFill>
               <a:srgbClr val="DCE5ED"/>
             </a:solidFill>
@@ -18847,30 +18352,30 @@
       </p:sp>
       <p:sp>
         <p:nvSpPr>
-          <p:cNvPr id="14" name="Text 12"/>
-          <p:cNvSpPr/>
-          <p:nvPr/>
-        </p:nvSpPr>
-        <p:spPr>
-          <a:xfrm>
-            <a:off x="594360" y="4654296"/>
-            <a:ext cx="640080" cy="594360"/>
-          </a:xfrm>
-          <a:prstGeom prst="rect">
-            <a:avLst/>
-          </a:prstGeom>
-          <a:noFill/>
-          <a:ln/>
-        </p:spPr>
-        <p:txBody>
-          <a:bodyPr wrap="square" lIns="0" tIns="0" rIns="0" bIns="0" rtlCol="0" anchor="ctr"/>
-          <a:lstStyle/>
-          <a:p>
-            <a:pPr indent="0" marL="0">
-              <a:buNone/>
-            </a:pPr>
-            <a:r>
-              <a:rPr lang="en-US" sz="1700" b="1" dirty="0">
+          <p:cNvPr id="12" name="Text 10"/>
+          <p:cNvSpPr/>
+          <p:nvPr/>
+        </p:nvSpPr>
+        <p:spPr>
+          <a:xfrm>
+            <a:off x="777240" y="3931920"/>
+            <a:ext cx="640080" cy="411480"/>
+          </a:xfrm>
+          <a:prstGeom prst="rect">
+            <a:avLst/>
+          </a:prstGeom>
+          <a:noFill/>
+          <a:ln/>
+        </p:spPr>
+        <p:txBody>
+          <a:bodyPr wrap="square" lIns="0" tIns="0" rIns="0" bIns="0" rtlCol="0" anchor="ctr"/>
+          <a:lstStyle/>
+          <a:p>
+            <a:pPr indent="0" marL="0">
+              <a:buNone/>
+            </a:pPr>
+            <a:r>
+              <a:rPr lang="en-US" sz="2500" b="1" dirty="0">
                 <a:solidFill>
                   <a:srgbClr val="0078D4"/>
                 </a:solidFill>
@@ -18878,38 +18383,38 @@
                 <a:ea typeface="Segoe UI" pitchFamily="34" charset="-122"/>
                 <a:cs typeface="Segoe UI" pitchFamily="34" charset="-120"/>
               </a:rPr>
-              <a:t>04</a:t>
-            </a:r>
-            <a:endParaRPr lang="en-US" sz="1700" dirty="0"/>
-          </a:p>
-        </p:txBody>
-      </p:sp>
-      <p:sp>
-        <p:nvSpPr>
-          <p:cNvPr id="15" name="Text 13"/>
-          <p:cNvSpPr/>
-          <p:nvPr/>
-        </p:nvSpPr>
-        <p:spPr>
-          <a:xfrm>
-            <a:off x="1325880" y="4654296"/>
-            <a:ext cx="10195560" cy="731520"/>
-          </a:xfrm>
-          <a:prstGeom prst="rect">
-            <a:avLst/>
-          </a:prstGeom>
-          <a:noFill/>
-          <a:ln/>
-        </p:spPr>
-        <p:txBody>
-          <a:bodyPr wrap="square" lIns="0" tIns="0" rIns="0" bIns="0" rtlCol="0" anchor="ctr"/>
-          <a:lstStyle/>
-          <a:p>
-            <a:pPr indent="0" marL="0">
-              <a:buNone/>
-            </a:pPr>
-            <a:r>
-              <a:rPr lang="en-US" sz="2000" dirty="0">
+              <a:t>03</a:t>
+            </a:r>
+            <a:endParaRPr lang="en-US" sz="2500" dirty="0"/>
+          </a:p>
+        </p:txBody>
+      </p:sp>
+      <p:sp>
+        <p:nvSpPr>
+          <p:cNvPr id="13" name="Text 11"/>
+          <p:cNvSpPr/>
+          <p:nvPr/>
+        </p:nvSpPr>
+        <p:spPr>
+          <a:xfrm>
+            <a:off x="1508760" y="3931920"/>
+            <a:ext cx="4114800" cy="1051560"/>
+          </a:xfrm>
+          <a:prstGeom prst="rect">
+            <a:avLst/>
+          </a:prstGeom>
+          <a:noFill/>
+          <a:ln/>
+        </p:spPr>
+        <p:txBody>
+          <a:bodyPr wrap="square" lIns="0" tIns="0" rIns="0" bIns="0" rtlCol="0" anchor="ctr"/>
+          <a:lstStyle/>
+          <a:p>
+            <a:pPr indent="0" marL="0">
+              <a:buNone/>
+            </a:pPr>
+            <a:r>
+              <a:rPr lang="en-US" sz="2100" b="1" dirty="0">
                 <a:solidFill>
                   <a:srgbClr val="183449"/>
                 </a:solidFill>
@@ -18917,34 +18422,114 @@
                 <a:ea typeface="Segoe UI" pitchFamily="34" charset="-122"/>
                 <a:cs typeface="Segoe UI" pitchFamily="34" charset="-120"/>
               </a:rPr>
-              <a:t>Review drift and turn verified incidents into new test cases.</a:t>
-            </a:r>
-            <a:endParaRPr lang="en-US" sz="2000" dirty="0"/>
-          </a:p>
-        </p:txBody>
-      </p:sp>
-      <p:sp>
-        <p:nvSpPr>
-          <p:cNvPr id="16" name="Shape 14"/>
-          <p:cNvSpPr/>
-          <p:nvPr/>
-        </p:nvSpPr>
-        <p:spPr>
-          <a:xfrm>
-            <a:off x="1325880" y="5486400"/>
-            <a:ext cx="10149840" cy="0"/>
-          </a:xfrm>
-          <a:prstGeom prst="line">
-            <a:avLst/>
-          </a:prstGeom>
-          <a:noFill/>
-          <a:ln w="6350">
+              <a:t>Correct + prepare through native agent</a:t>
+            </a:r>
+            <a:endParaRPr lang="en-US" sz="2100" dirty="0"/>
+          </a:p>
+        </p:txBody>
+      </p:sp>
+      <p:sp>
+        <p:nvSpPr>
+          <p:cNvPr id="14" name="Shape 12"/>
+          <p:cNvSpPr/>
+          <p:nvPr/>
+        </p:nvSpPr>
+        <p:spPr>
+          <a:xfrm>
+            <a:off x="6217920" y="3749040"/>
+            <a:ext cx="5394960" cy="1417320"/>
+          </a:xfrm>
+          <a:prstGeom prst="rect">
+            <a:avLst/>
+          </a:prstGeom>
+          <a:solidFill>
+            <a:srgbClr val="EDF4FA"/>
+          </a:solidFill>
+          <a:ln w="12700">
             <a:solidFill>
               <a:srgbClr val="DCE5ED"/>
             </a:solidFill>
             <a:prstDash val="solid"/>
           </a:ln>
         </p:spPr>
+      </p:sp>
+      <p:sp>
+        <p:nvSpPr>
+          <p:cNvPr id="15" name="Text 13"/>
+          <p:cNvSpPr/>
+          <p:nvPr/>
+        </p:nvSpPr>
+        <p:spPr>
+          <a:xfrm>
+            <a:off x="6446520" y="3931920"/>
+            <a:ext cx="640080" cy="411480"/>
+          </a:xfrm>
+          <a:prstGeom prst="rect">
+            <a:avLst/>
+          </a:prstGeom>
+          <a:noFill/>
+          <a:ln/>
+        </p:spPr>
+        <p:txBody>
+          <a:bodyPr wrap="square" lIns="0" tIns="0" rIns="0" bIns="0" rtlCol="0" anchor="ctr"/>
+          <a:lstStyle/>
+          <a:p>
+            <a:pPr indent="0" marL="0">
+              <a:buNone/>
+            </a:pPr>
+            <a:r>
+              <a:rPr lang="en-US" sz="2500" b="1" dirty="0">
+                <a:solidFill>
+                  <a:srgbClr val="0078D4"/>
+                </a:solidFill>
+                <a:latin typeface="Segoe UI" pitchFamily="34" charset="0"/>
+                <a:ea typeface="Segoe UI" pitchFamily="34" charset="-122"/>
+                <a:cs typeface="Segoe UI" pitchFamily="34" charset="-120"/>
+              </a:rPr>
+              <a:t>04</a:t>
+            </a:r>
+            <a:endParaRPr lang="en-US" sz="2500" dirty="0"/>
+          </a:p>
+        </p:txBody>
+      </p:sp>
+      <p:sp>
+        <p:nvSpPr>
+          <p:cNvPr id="16" name="Text 14"/>
+          <p:cNvSpPr/>
+          <p:nvPr/>
+        </p:nvSpPr>
+        <p:spPr>
+          <a:xfrm>
+            <a:off x="7178040" y="3931920"/>
+            <a:ext cx="4114800" cy="1051560"/>
+          </a:xfrm>
+          <a:prstGeom prst="rect">
+            <a:avLst/>
+          </a:prstGeom>
+          <a:noFill/>
+          <a:ln/>
+        </p:spPr>
+        <p:txBody>
+          <a:bodyPr wrap="square" lIns="0" tIns="0" rIns="0" bIns="0" rtlCol="0" anchor="ctr"/>
+          <a:lstStyle/>
+          <a:p>
+            <a:pPr indent="0" marL="0">
+              <a:buNone/>
+            </a:pPr>
+            <a:r>
+              <a:rPr lang="en-US" sz="2100" b="1" dirty="0">
+                <a:solidFill>
+                  <a:srgbClr val="183449"/>
+                </a:solidFill>
+                <a:latin typeface="Segoe UI" pitchFamily="34" charset="0"/>
+                <a:ea typeface="Segoe UI" pitchFamily="34" charset="-122"/>
+                <a:cs typeface="Segoe UI" pitchFamily="34" charset="-120"/>
+              </a:rPr>
+              <a:t>Match audit; reject self-approval</a:t>
+            </a:r>
+            <a:endParaRPr lang="en-US" sz="2100" dirty="0"/>
+          </a:p>
+        </p:txBody>
       </p:sp>
       <p:sp>
         <p:nvSpPr>
@@ -19027,7 +18612,7 @@
                 <a:ea typeface="Segoe UI" pitchFamily="34" charset="-122"/>
                 <a:cs typeface="Segoe UI" pitchFamily="34" charset="-120"/>
               </a:rPr>
-              <a:t>31 / 35</a:t>
+              <a:t>31 / 37</a:t>
             </a:r>
             <a:endParaRPr lang="en-US" sz="1000" dirty="0"/>
           </a:p>
@@ -19164,7 +18749,7 @@
                 <a:ea typeface="Segoe UI" pitchFamily="34" charset="-122"/>
                 <a:cs typeface="Segoe UI" pitchFamily="34" charset="-120"/>
               </a:rPr>
-              <a:t>Your release recommendation</a:t>
+              <a:t>Trajectory evaluation needs real trajectory evidence</a:t>
             </a:r>
             <a:endParaRPr lang="en-US" sz="2700" dirty="0"/>
           </a:p>
@@ -19242,7 +18827,7 @@
                 <a:ea typeface="Segoe UI" pitchFamily="34" charset="-122"/>
                 <a:cs typeface="Segoe UI" pitchFamily="34" charset="-120"/>
               </a:rPr>
-              <a:t>Name the exact source, dataset, state, model and evaluator identities.</a:t>
+              <a:t>Outcome quality and process correctness are different questions.</a:t>
             </a:r>
             <a:endParaRPr lang="en-US" sz="2000" dirty="0"/>
           </a:p>
@@ -19343,7 +18928,7 @@
                 <a:ea typeface="Segoe UI" pitchFamily="34" charset="-122"/>
                 <a:cs typeface="Segoe UI" pitchFamily="34" charset="-120"/>
               </a:rPr>
-              <a:t>Report hard checks, completeness, quality, controls and uncertainty.</a:t>
+              <a:t>Tool selection/arguments require compatible actual tool traces.</a:t>
             </a:r>
             <a:endParaRPr lang="en-US" sz="2000" dirty="0"/>
           </a:p>
@@ -19444,7 +19029,7 @@
                 <a:ea typeface="Segoe UI" pitchFamily="34" charset="-122"/>
                 <a:cs typeface="Segoe UI" pitchFamily="34" charset="-120"/>
               </a:rPr>
-              <a:t>List unmeasured dimensions, cost, faults and remaining risks.</a:t>
+              <a:t>Real quote stages: INTAKE, REFERENCE_LOOKUP, COMPOSITION.</a:t>
             </a:r>
             <a:endParaRPr lang="en-US" sz="2000" dirty="0"/>
           </a:p>
@@ -19545,7 +19130,7 @@
                 <a:ea typeface="Segoe UI" pitchFamily="34" charset="-122"/>
                 <a:cs typeface="Segoe UI" pitchFamily="34" charset="-120"/>
               </a:rPr>
-              <a:t>Approve, block or request evidence with an accountable owner.</a:t>
+              <a:t>Requested trace ID or final text alone does not prove ingestion.</a:t>
             </a:r>
             <a:endParaRPr lang="en-US" sz="2000" dirty="0"/>
           </a:p>
@@ -19655,7 +19240,7 @@
                 <a:ea typeface="Segoe UI" pitchFamily="34" charset="-122"/>
                 <a:cs typeface="Segoe UI" pitchFamily="34" charset="-120"/>
               </a:rPr>
-              <a:t>32 / 35</a:t>
+              <a:t>32 / 37</a:t>
             </a:r>
             <a:endParaRPr lang="en-US" sz="1000" dirty="0"/>
           </a:p>
@@ -19792,7 +19377,7 @@
                 <a:ea typeface="Segoe UI" pitchFamily="34" charset="-122"/>
                 <a:cs typeface="Segoe UI" pitchFamily="34" charset="-120"/>
               </a:rPr>
-              <a:t>Discussion: which candidate can ship?</a:t>
+              <a:t>Operate two scorecards, not one</a:t>
             </a:r>
             <a:endParaRPr lang="en-US" sz="2700" dirty="0"/>
           </a:p>
@@ -19870,7 +19455,7 @@
                 <a:ea typeface="Segoe UI" pitchFamily="34" charset="-122"/>
                 <a:cs typeface="Segoe UI" pitchFamily="34" charset="-120"/>
               </a:rPr>
-              <a:t>A: 100% judge scores, but self-approval succeeds.</a:t>
+              <a:t>Service: availability, latency, 401/403, quota, timeouts, cost.</a:t>
             </a:r>
             <a:endParaRPr lang="en-US" sz="2000" dirty="0"/>
           </a:p>
@@ -19971,7 +19556,7 @@
                 <a:ea typeface="Segoe UI" pitchFamily="34" charset="-122"/>
                 <a:cs typeface="Segoe UI" pitchFamily="34" charset="-120"/>
               </a:rPr>
-              <a:t>B: all hard tests pass, native run has zero scored items.</a:t>
+              <a:t>Quality: grounding, adherence, locale slices and human overrides.</a:t>
             </a:r>
             <a:endParaRPr lang="en-US" sz="2000" dirty="0"/>
           </a:p>
@@ -20072,7 +19657,7 @@
                 <a:ea typeface="Segoe UI" pitchFamily="34" charset="-122"/>
                 <a:cs typeface="Segoe UI" pitchFamily="34" charset="-120"/>
               </a:rPr>
-              <a:t>C: complete calibrated results, one known high-risk false accept.</a:t>
+              <a:t>Safety: deterministic policy violations and role boundaries.</a:t>
             </a:r>
             <a:endParaRPr lang="en-US" sz="2000" dirty="0"/>
           </a:p>
@@ -20173,7 +19758,7 @@
                 <a:ea typeface="Segoe UI" pitchFamily="34" charset="-122"/>
                 <a:cs typeface="Segoe UI" pitchFamily="34" charset="-120"/>
               </a:rPr>
-              <a:t>D: complete evidence, stable slices, reviewed risks and approval.</a:t>
+              <a:t>Review drift and turn verified incidents into new test cases.</a:t>
             </a:r>
             <a:endParaRPr lang="en-US" sz="2000" dirty="0"/>
           </a:p>
@@ -20283,7 +19868,7 @@
                 <a:ea typeface="Segoe UI" pitchFamily="34" charset="-122"/>
                 <a:cs typeface="Segoe UI" pitchFamily="34" charset="-120"/>
               </a:rPr>
-              <a:t>33 / 35</a:t>
+              <a:t>33 / 37</a:t>
             </a:r>
             <a:endParaRPr lang="en-US" sz="1000" dirty="0"/>
           </a:p>
@@ -20420,7 +20005,7 @@
                 <a:ea typeface="Segoe UI" pitchFamily="34" charset="-122"/>
                 <a:cs typeface="Segoe UI" pitchFamily="34" charset="-120"/>
               </a:rPr>
-              <a:t>Debrief: what non-regression really means</a:t>
+              <a:t>Your release recommendation</a:t>
             </a:r>
             <a:endParaRPr lang="en-US" sz="2700" dirty="0"/>
           </a:p>
@@ -20498,7 +20083,7 @@
                 <a:ea typeface="Segoe UI" pitchFamily="34" charset="-122"/>
                 <a:cs typeface="Segoe UI" pitchFamily="34" charset="-120"/>
               </a:rPr>
-              <a:t>State the measured contract and conditions, not “cannot regress.”</a:t>
+              <a:t>Name the exact source, dataset, state, model and evaluator identities.</a:t>
             </a:r>
             <a:endParaRPr lang="en-US" sz="2000" dirty="0"/>
           </a:p>
@@ -20599,7 +20184,7 @@
                 <a:ea typeface="Segoe UI" pitchFamily="34" charset="-122"/>
                 <a:cs typeface="Segoe UI" pitchFamily="34" charset="-120"/>
               </a:rPr>
-              <a:t>Keep exact tests and semantic judgments complementary.</a:t>
+              <a:t>Report hard checks, completeness, quality, controls and uncertainty.</a:t>
             </a:r>
             <a:endParaRPr lang="en-US" sz="2000" dirty="0"/>
           </a:p>
@@ -20700,7 +20285,7 @@
                 <a:ea typeface="Segoe UI" pitchFamily="34" charset="-122"/>
                 <a:cs typeface="Segoe UI" pitchFamily="34" charset="-120"/>
               </a:rPr>
-              <a:t>Preserve failed controls and operational failure attempts.</a:t>
+              <a:t>List unmeasured dimensions, cost, faults and remaining risks.</a:t>
             </a:r>
             <a:endParaRPr lang="en-US" sz="2000" dirty="0"/>
           </a:p>
@@ -20801,7 +20386,7 @@
                 <a:ea typeface="Segoe UI" pitchFamily="34" charset="-122"/>
                 <a:cs typeface="Segoe UI" pitchFamily="34" charset="-120"/>
               </a:rPr>
-              <a:t>Improve coverage, calibration and monitoring as the system evolves.</a:t>
+              <a:t>Approve, block or request evidence with an accountable owner.</a:t>
             </a:r>
             <a:endParaRPr lang="en-US" sz="2000" dirty="0"/>
           </a:p>
@@ -20911,7 +20496,7 @@
                 <a:ea typeface="Segoe UI" pitchFamily="34" charset="-122"/>
                 <a:cs typeface="Segoe UI" pitchFamily="34" charset="-120"/>
               </a:rPr>
-              <a:t>34 / 35</a:t>
+              <a:t>34 / 37</a:t>
             </a:r>
             <a:endParaRPr lang="en-US" sz="1000" dirty="0"/>
           </a:p>
@@ -21048,7 +20633,7 @@
                 <a:ea typeface="Segoe UI" pitchFamily="34" charset="-122"/>
                 <a:cs typeface="Segoe UI" pitchFamily="34" charset="-120"/>
               </a:rPr>
-              <a:t>Take the lab, guide and evidence with you</a:t>
+              <a:t>Discussion: which candidate can ship?</a:t>
             </a:r>
             <a:endParaRPr lang="en-US" sz="2700" dirty="0"/>
           </a:p>
@@ -21126,7 +20711,7 @@
                 <a:ea typeface="Segoe UI" pitchFamily="34" charset="-122"/>
                 <a:cs typeface="Segoe UI" pitchFamily="34" charset="-120"/>
               </a:rPr>
-              <a:t>Lab 19: ten progressive hands-on exercises with runnable commands.</a:t>
+              <a:t>A: 100% judge scores, but self-approval succeeds.</a:t>
             </a:r>
             <a:endParaRPr lang="en-US" sz="2000" dirty="0"/>
           </a:p>
@@ -21227,7 +20812,7 @@
                 <a:ea typeface="Segoe UI" pitchFamily="34" charset="-122"/>
                 <a:cs typeface="Segoe UI" pitchFamily="34" charset="-120"/>
               </a:rPr>
-              <a:t>Guide: portal steps, SDK mappings, policies and troubleshooting.</a:t>
+              <a:t>B: all hard tests pass, native run has zero scored items.</a:t>
             </a:r>
             <a:endParaRPr lang="en-US" sz="2000" dirty="0"/>
           </a:p>
@@ -21328,7 +20913,7 @@
                 <a:ea typeface="Segoe UI" pitchFamily="34" charset="-122"/>
                 <a:cs typeface="Segoe UI" pitchFamily="34" charset="-120"/>
               </a:rPr>
-              <a:t>Deck: editable EN/FR PowerPoint with instructor notes.</a:t>
+              <a:t>C: complete calibrated results, one known high-risk false accept.</a:t>
             </a:r>
             <a:endParaRPr lang="en-US" sz="2000" dirty="0"/>
           </a:p>
@@ -21429,7 +21014,7 @@
                 <a:ea typeface="Segoe UI" pitchFamily="34" charset="-122"/>
                 <a:cs typeface="Segoe UI" pitchFamily="34" charset="-120"/>
               </a:rPr>
-              <a:t>Sources: official Microsoft Learn links in these notes.</a:t>
+              <a:t>D: complete evidence, stable slices, reviewed risks and approval.</a:t>
             </a:r>
             <a:endParaRPr lang="en-US" sz="2000" dirty="0"/>
           </a:p>
@@ -21539,7 +21124,1263 @@
                 <a:ea typeface="Segoe UI" pitchFamily="34" charset="-122"/>
                 <a:cs typeface="Segoe UI" pitchFamily="34" charset="-120"/>
               </a:rPr>
-              <a:t>35 / 35</a:t>
+              <a:t>35 / 37</a:t>
+            </a:r>
+            <a:endParaRPr lang="en-US" sz="1000" dirty="0"/>
+          </a:p>
+        </p:txBody>
+      </p:sp>
+    </p:spTree>
+  </p:cSld>
+  <p:clrMapOvr>
+    <a:masterClrMapping/>
+  </p:clrMapOvr>
+</p:sld>
+</file>
+
+<file path=ppt/slides/slide36.xml><?xml version="1.0" encoding="utf-8"?>
+<p:sld xmlns:a="http://schemas.openxmlformats.org/drawingml/2006/main" xmlns:r="http://schemas.openxmlformats.org/officeDocument/2006/relationships" xmlns:p="http://schemas.openxmlformats.org/presentationml/2006/main">
+  <p:cSld name="Slide 36">
+    <p:bg>
+      <p:bgPr>
+        <a:solidFill>
+          <a:srgbClr val="FAFBFC"/>
+        </a:solidFill>
+      </p:bgPr>
+    </p:bg>
+    <p:spTree>
+      <p:nvGrpSpPr>
+        <p:cNvPr id="1" name=""/>
+        <p:cNvGrpSpPr/>
+        <p:nvPr/>
+      </p:nvGrpSpPr>
+      <p:grpSpPr>
+        <a:xfrm>
+          <a:off x="0" y="0"/>
+          <a:ext cx="0" cy="0"/>
+          <a:chOff x="0" y="0"/>
+          <a:chExt cx="0" cy="0"/>
+        </a:xfrm>
+      </p:grpSpPr>
+      <p:sp>
+        <p:nvSpPr>
+          <p:cNvPr id="2" name="Shape 0"/>
+          <p:cNvSpPr/>
+          <p:nvPr/>
+        </p:nvSpPr>
+        <p:spPr>
+          <a:xfrm>
+            <a:off x="0" y="0"/>
+            <a:ext cx="12191695" cy="82296"/>
+          </a:xfrm>
+          <a:prstGeom prst="rect">
+            <a:avLst/>
+          </a:prstGeom>
+          <a:solidFill>
+            <a:srgbClr val="0078D4"/>
+          </a:solidFill>
+          <a:ln w="12700">
+            <a:solidFill>
+              <a:srgbClr val="333333">
+                <a:alpha val="0"/>
+              </a:srgbClr>
+            </a:solidFill>
+            <a:prstDash val="solid"/>
+          </a:ln>
+        </p:spPr>
+      </p:sp>
+      <p:sp>
+        <p:nvSpPr>
+          <p:cNvPr id="3" name="Text 1"/>
+          <p:cNvSpPr/>
+          <p:nvPr/>
+        </p:nvSpPr>
+        <p:spPr>
+          <a:xfrm>
+            <a:off x="548640" y="320040"/>
+            <a:ext cx="11064240" cy="274320"/>
+          </a:xfrm>
+          <a:prstGeom prst="rect">
+            <a:avLst/>
+          </a:prstGeom>
+          <a:noFill/>
+          <a:ln/>
+        </p:spPr>
+        <p:txBody>
+          <a:bodyPr wrap="square" lIns="0" tIns="0" rIns="0" bIns="0" rtlCol="0" anchor="ctr"/>
+          <a:lstStyle/>
+          <a:p>
+            <a:pPr indent="0" marL="0">
+              <a:buNone/>
+            </a:pPr>
+            <a:r>
+              <a:rPr lang="en-US" sz="1100" b="1" dirty="0">
+                <a:solidFill>
+                  <a:srgbClr val="0078D4"/>
+                </a:solidFill>
+                <a:latin typeface="Segoe UI" pitchFamily="34" charset="0"/>
+                <a:ea typeface="Segoe UI" pitchFamily="34" charset="-122"/>
+                <a:cs typeface="Segoe UI" pitchFamily="34" charset="-120"/>
+              </a:rPr>
+              <a:t>FOUNDRY / EVALUATION ENGINEERING</a:t>
+            </a:r>
+            <a:endParaRPr lang="en-US" sz="1100" dirty="0"/>
+          </a:p>
+        </p:txBody>
+      </p:sp>
+      <p:sp>
+        <p:nvSpPr>
+          <p:cNvPr id="4" name="Text 2"/>
+          <p:cNvSpPr/>
+          <p:nvPr/>
+        </p:nvSpPr>
+        <p:spPr>
+          <a:xfrm>
+            <a:off x="548640" y="777240"/>
+            <a:ext cx="11064240" cy="822960"/>
+          </a:xfrm>
+          <a:prstGeom prst="rect">
+            <a:avLst/>
+          </a:prstGeom>
+          <a:noFill/>
+          <a:ln/>
+        </p:spPr>
+        <p:txBody>
+          <a:bodyPr wrap="square" lIns="0" tIns="0" rIns="0" bIns="0" rtlCol="0" anchor="ctr"/>
+          <a:lstStyle/>
+          <a:p>
+            <a:pPr indent="0" marL="0">
+              <a:buNone/>
+            </a:pPr>
+            <a:r>
+              <a:rPr lang="en-US" sz="2700" b="1" dirty="0">
+                <a:solidFill>
+                  <a:srgbClr val="001B3D"/>
+                </a:solidFill>
+                <a:latin typeface="Segoe UI" pitchFamily="34" charset="0"/>
+                <a:ea typeface="Segoe UI" pitchFamily="34" charset="-122"/>
+                <a:cs typeface="Segoe UI" pitchFamily="34" charset="-120"/>
+              </a:rPr>
+              <a:t>Debrief: what non-regression really means</a:t>
+            </a:r>
+            <a:endParaRPr lang="en-US" sz="2700" dirty="0"/>
+          </a:p>
+        </p:txBody>
+      </p:sp>
+      <p:sp>
+        <p:nvSpPr>
+          <p:cNvPr id="5" name="Text 3"/>
+          <p:cNvSpPr/>
+          <p:nvPr/>
+        </p:nvSpPr>
+        <p:spPr>
+          <a:xfrm>
+            <a:off x="594360" y="1828800"/>
+            <a:ext cx="640080" cy="594360"/>
+          </a:xfrm>
+          <a:prstGeom prst="rect">
+            <a:avLst/>
+          </a:prstGeom>
+          <a:noFill/>
+          <a:ln/>
+        </p:spPr>
+        <p:txBody>
+          <a:bodyPr wrap="square" lIns="0" tIns="0" rIns="0" bIns="0" rtlCol="0" anchor="ctr"/>
+          <a:lstStyle/>
+          <a:p>
+            <a:pPr indent="0" marL="0">
+              <a:buNone/>
+            </a:pPr>
+            <a:r>
+              <a:rPr lang="en-US" sz="1700" b="1" dirty="0">
+                <a:solidFill>
+                  <a:srgbClr val="0078D4"/>
+                </a:solidFill>
+                <a:latin typeface="Segoe UI" pitchFamily="34" charset="0"/>
+                <a:ea typeface="Segoe UI" pitchFamily="34" charset="-122"/>
+                <a:cs typeface="Segoe UI" pitchFamily="34" charset="-120"/>
+              </a:rPr>
+              <a:t>01</a:t>
+            </a:r>
+            <a:endParaRPr lang="en-US" sz="1700" dirty="0"/>
+          </a:p>
+        </p:txBody>
+      </p:sp>
+      <p:sp>
+        <p:nvSpPr>
+          <p:cNvPr id="6" name="Text 4"/>
+          <p:cNvSpPr/>
+          <p:nvPr/>
+        </p:nvSpPr>
+        <p:spPr>
+          <a:xfrm>
+            <a:off x="1325880" y="1828800"/>
+            <a:ext cx="10195560" cy="731520"/>
+          </a:xfrm>
+          <a:prstGeom prst="rect">
+            <a:avLst/>
+          </a:prstGeom>
+          <a:noFill/>
+          <a:ln/>
+        </p:spPr>
+        <p:txBody>
+          <a:bodyPr wrap="square" lIns="0" tIns="0" rIns="0" bIns="0" rtlCol="0" anchor="ctr"/>
+          <a:lstStyle/>
+          <a:p>
+            <a:pPr indent="0" marL="0">
+              <a:buNone/>
+            </a:pPr>
+            <a:r>
+              <a:rPr lang="en-US" sz="2000" dirty="0">
+                <a:solidFill>
+                  <a:srgbClr val="183449"/>
+                </a:solidFill>
+                <a:latin typeface="Segoe UI" pitchFamily="34" charset="0"/>
+                <a:ea typeface="Segoe UI" pitchFamily="34" charset="-122"/>
+                <a:cs typeface="Segoe UI" pitchFamily="34" charset="-120"/>
+              </a:rPr>
+              <a:t>State the measured contract and conditions, not “cannot regress.”</a:t>
+            </a:r>
+            <a:endParaRPr lang="en-US" sz="2000" dirty="0"/>
+          </a:p>
+        </p:txBody>
+      </p:sp>
+      <p:sp>
+        <p:nvSpPr>
+          <p:cNvPr id="7" name="Shape 5"/>
+          <p:cNvSpPr/>
+          <p:nvPr/>
+        </p:nvSpPr>
+        <p:spPr>
+          <a:xfrm>
+            <a:off x="1325880" y="2660904"/>
+            <a:ext cx="10149840" cy="0"/>
+          </a:xfrm>
+          <a:prstGeom prst="line">
+            <a:avLst/>
+          </a:prstGeom>
+          <a:noFill/>
+          <a:ln w="6350">
+            <a:solidFill>
+              <a:srgbClr val="DCE5ED"/>
+            </a:solidFill>
+            <a:prstDash val="solid"/>
+          </a:ln>
+        </p:spPr>
+      </p:sp>
+      <p:sp>
+        <p:nvSpPr>
+          <p:cNvPr id="8" name="Text 6"/>
+          <p:cNvSpPr/>
+          <p:nvPr/>
+        </p:nvSpPr>
+        <p:spPr>
+          <a:xfrm>
+            <a:off x="594360" y="2770632"/>
+            <a:ext cx="640080" cy="594360"/>
+          </a:xfrm>
+          <a:prstGeom prst="rect">
+            <a:avLst/>
+          </a:prstGeom>
+          <a:noFill/>
+          <a:ln/>
+        </p:spPr>
+        <p:txBody>
+          <a:bodyPr wrap="square" lIns="0" tIns="0" rIns="0" bIns="0" rtlCol="0" anchor="ctr"/>
+          <a:lstStyle/>
+          <a:p>
+            <a:pPr indent="0" marL="0">
+              <a:buNone/>
+            </a:pPr>
+            <a:r>
+              <a:rPr lang="en-US" sz="1700" b="1" dirty="0">
+                <a:solidFill>
+                  <a:srgbClr val="0078D4"/>
+                </a:solidFill>
+                <a:latin typeface="Segoe UI" pitchFamily="34" charset="0"/>
+                <a:ea typeface="Segoe UI" pitchFamily="34" charset="-122"/>
+                <a:cs typeface="Segoe UI" pitchFamily="34" charset="-120"/>
+              </a:rPr>
+              <a:t>02</a:t>
+            </a:r>
+            <a:endParaRPr lang="en-US" sz="1700" dirty="0"/>
+          </a:p>
+        </p:txBody>
+      </p:sp>
+      <p:sp>
+        <p:nvSpPr>
+          <p:cNvPr id="9" name="Text 7"/>
+          <p:cNvSpPr/>
+          <p:nvPr/>
+        </p:nvSpPr>
+        <p:spPr>
+          <a:xfrm>
+            <a:off x="1325880" y="2770632"/>
+            <a:ext cx="10195560" cy="731520"/>
+          </a:xfrm>
+          <a:prstGeom prst="rect">
+            <a:avLst/>
+          </a:prstGeom>
+          <a:noFill/>
+          <a:ln/>
+        </p:spPr>
+        <p:txBody>
+          <a:bodyPr wrap="square" lIns="0" tIns="0" rIns="0" bIns="0" rtlCol="0" anchor="ctr"/>
+          <a:lstStyle/>
+          <a:p>
+            <a:pPr indent="0" marL="0">
+              <a:buNone/>
+            </a:pPr>
+            <a:r>
+              <a:rPr lang="en-US" sz="2000" dirty="0">
+                <a:solidFill>
+                  <a:srgbClr val="183449"/>
+                </a:solidFill>
+                <a:latin typeface="Segoe UI" pitchFamily="34" charset="0"/>
+                <a:ea typeface="Segoe UI" pitchFamily="34" charset="-122"/>
+                <a:cs typeface="Segoe UI" pitchFamily="34" charset="-120"/>
+              </a:rPr>
+              <a:t>Keep exact tests and semantic judgments complementary.</a:t>
+            </a:r>
+            <a:endParaRPr lang="en-US" sz="2000" dirty="0"/>
+          </a:p>
+        </p:txBody>
+      </p:sp>
+      <p:sp>
+        <p:nvSpPr>
+          <p:cNvPr id="10" name="Shape 8"/>
+          <p:cNvSpPr/>
+          <p:nvPr/>
+        </p:nvSpPr>
+        <p:spPr>
+          <a:xfrm>
+            <a:off x="1325880" y="3602736"/>
+            <a:ext cx="10149840" cy="0"/>
+          </a:xfrm>
+          <a:prstGeom prst="line">
+            <a:avLst/>
+          </a:prstGeom>
+          <a:noFill/>
+          <a:ln w="6350">
+            <a:solidFill>
+              <a:srgbClr val="DCE5ED"/>
+            </a:solidFill>
+            <a:prstDash val="solid"/>
+          </a:ln>
+        </p:spPr>
+      </p:sp>
+      <p:sp>
+        <p:nvSpPr>
+          <p:cNvPr id="11" name="Text 9"/>
+          <p:cNvSpPr/>
+          <p:nvPr/>
+        </p:nvSpPr>
+        <p:spPr>
+          <a:xfrm>
+            <a:off x="594360" y="3712464"/>
+            <a:ext cx="640080" cy="594360"/>
+          </a:xfrm>
+          <a:prstGeom prst="rect">
+            <a:avLst/>
+          </a:prstGeom>
+          <a:noFill/>
+          <a:ln/>
+        </p:spPr>
+        <p:txBody>
+          <a:bodyPr wrap="square" lIns="0" tIns="0" rIns="0" bIns="0" rtlCol="0" anchor="ctr"/>
+          <a:lstStyle/>
+          <a:p>
+            <a:pPr indent="0" marL="0">
+              <a:buNone/>
+            </a:pPr>
+            <a:r>
+              <a:rPr lang="en-US" sz="1700" b="1" dirty="0">
+                <a:solidFill>
+                  <a:srgbClr val="0078D4"/>
+                </a:solidFill>
+                <a:latin typeface="Segoe UI" pitchFamily="34" charset="0"/>
+                <a:ea typeface="Segoe UI" pitchFamily="34" charset="-122"/>
+                <a:cs typeface="Segoe UI" pitchFamily="34" charset="-120"/>
+              </a:rPr>
+              <a:t>03</a:t>
+            </a:r>
+            <a:endParaRPr lang="en-US" sz="1700" dirty="0"/>
+          </a:p>
+        </p:txBody>
+      </p:sp>
+      <p:sp>
+        <p:nvSpPr>
+          <p:cNvPr id="12" name="Text 10"/>
+          <p:cNvSpPr/>
+          <p:nvPr/>
+        </p:nvSpPr>
+        <p:spPr>
+          <a:xfrm>
+            <a:off x="1325880" y="3712464"/>
+            <a:ext cx="10195560" cy="731520"/>
+          </a:xfrm>
+          <a:prstGeom prst="rect">
+            <a:avLst/>
+          </a:prstGeom>
+          <a:noFill/>
+          <a:ln/>
+        </p:spPr>
+        <p:txBody>
+          <a:bodyPr wrap="square" lIns="0" tIns="0" rIns="0" bIns="0" rtlCol="0" anchor="ctr"/>
+          <a:lstStyle/>
+          <a:p>
+            <a:pPr indent="0" marL="0">
+              <a:buNone/>
+            </a:pPr>
+            <a:r>
+              <a:rPr lang="en-US" sz="2000" dirty="0">
+                <a:solidFill>
+                  <a:srgbClr val="183449"/>
+                </a:solidFill>
+                <a:latin typeface="Segoe UI" pitchFamily="34" charset="0"/>
+                <a:ea typeface="Segoe UI" pitchFamily="34" charset="-122"/>
+                <a:cs typeface="Segoe UI" pitchFamily="34" charset="-120"/>
+              </a:rPr>
+              <a:t>Preserve failed controls and operational failure attempts.</a:t>
+            </a:r>
+            <a:endParaRPr lang="en-US" sz="2000" dirty="0"/>
+          </a:p>
+        </p:txBody>
+      </p:sp>
+      <p:sp>
+        <p:nvSpPr>
+          <p:cNvPr id="13" name="Shape 11"/>
+          <p:cNvSpPr/>
+          <p:nvPr/>
+        </p:nvSpPr>
+        <p:spPr>
+          <a:xfrm>
+            <a:off x="1325880" y="4544568"/>
+            <a:ext cx="10149840" cy="0"/>
+          </a:xfrm>
+          <a:prstGeom prst="line">
+            <a:avLst/>
+          </a:prstGeom>
+          <a:noFill/>
+          <a:ln w="6350">
+            <a:solidFill>
+              <a:srgbClr val="DCE5ED"/>
+            </a:solidFill>
+            <a:prstDash val="solid"/>
+          </a:ln>
+        </p:spPr>
+      </p:sp>
+      <p:sp>
+        <p:nvSpPr>
+          <p:cNvPr id="14" name="Text 12"/>
+          <p:cNvSpPr/>
+          <p:nvPr/>
+        </p:nvSpPr>
+        <p:spPr>
+          <a:xfrm>
+            <a:off x="594360" y="4654296"/>
+            <a:ext cx="640080" cy="594360"/>
+          </a:xfrm>
+          <a:prstGeom prst="rect">
+            <a:avLst/>
+          </a:prstGeom>
+          <a:noFill/>
+          <a:ln/>
+        </p:spPr>
+        <p:txBody>
+          <a:bodyPr wrap="square" lIns="0" tIns="0" rIns="0" bIns="0" rtlCol="0" anchor="ctr"/>
+          <a:lstStyle/>
+          <a:p>
+            <a:pPr indent="0" marL="0">
+              <a:buNone/>
+            </a:pPr>
+            <a:r>
+              <a:rPr lang="en-US" sz="1700" b="1" dirty="0">
+                <a:solidFill>
+                  <a:srgbClr val="0078D4"/>
+                </a:solidFill>
+                <a:latin typeface="Segoe UI" pitchFamily="34" charset="0"/>
+                <a:ea typeface="Segoe UI" pitchFamily="34" charset="-122"/>
+                <a:cs typeface="Segoe UI" pitchFamily="34" charset="-120"/>
+              </a:rPr>
+              <a:t>04</a:t>
+            </a:r>
+            <a:endParaRPr lang="en-US" sz="1700" dirty="0"/>
+          </a:p>
+        </p:txBody>
+      </p:sp>
+      <p:sp>
+        <p:nvSpPr>
+          <p:cNvPr id="15" name="Text 13"/>
+          <p:cNvSpPr/>
+          <p:nvPr/>
+        </p:nvSpPr>
+        <p:spPr>
+          <a:xfrm>
+            <a:off x="1325880" y="4654296"/>
+            <a:ext cx="10195560" cy="731520"/>
+          </a:xfrm>
+          <a:prstGeom prst="rect">
+            <a:avLst/>
+          </a:prstGeom>
+          <a:noFill/>
+          <a:ln/>
+        </p:spPr>
+        <p:txBody>
+          <a:bodyPr wrap="square" lIns="0" tIns="0" rIns="0" bIns="0" rtlCol="0" anchor="ctr"/>
+          <a:lstStyle/>
+          <a:p>
+            <a:pPr indent="0" marL="0">
+              <a:buNone/>
+            </a:pPr>
+            <a:r>
+              <a:rPr lang="en-US" sz="2000" dirty="0">
+                <a:solidFill>
+                  <a:srgbClr val="183449"/>
+                </a:solidFill>
+                <a:latin typeface="Segoe UI" pitchFamily="34" charset="0"/>
+                <a:ea typeface="Segoe UI" pitchFamily="34" charset="-122"/>
+                <a:cs typeface="Segoe UI" pitchFamily="34" charset="-120"/>
+              </a:rPr>
+              <a:t>Improve coverage, calibration and monitoring as the system evolves.</a:t>
+            </a:r>
+            <a:endParaRPr lang="en-US" sz="2000" dirty="0"/>
+          </a:p>
+        </p:txBody>
+      </p:sp>
+      <p:sp>
+        <p:nvSpPr>
+          <p:cNvPr id="16" name="Shape 14"/>
+          <p:cNvSpPr/>
+          <p:nvPr/>
+        </p:nvSpPr>
+        <p:spPr>
+          <a:xfrm>
+            <a:off x="1325880" y="5486400"/>
+            <a:ext cx="10149840" cy="0"/>
+          </a:xfrm>
+          <a:prstGeom prst="line">
+            <a:avLst/>
+          </a:prstGeom>
+          <a:noFill/>
+          <a:ln w="6350">
+            <a:solidFill>
+              <a:srgbClr val="DCE5ED"/>
+            </a:solidFill>
+            <a:prstDash val="solid"/>
+          </a:ln>
+        </p:spPr>
+      </p:sp>
+      <p:sp>
+        <p:nvSpPr>
+          <p:cNvPr id="17" name="Text 15">
+            <a:hlinkClick r:id="rId1" tooltip=""/>
+          </p:cNvPr>
+          <p:cNvSpPr/>
+          <p:nvPr/>
+        </p:nvSpPr>
+        <p:spPr>
+          <a:xfrm>
+            <a:off x="548640" y="6419088"/>
+            <a:ext cx="9784080" cy="210312"/>
+          </a:xfrm>
+          <a:prstGeom prst="rect">
+            <a:avLst/>
+          </a:prstGeom>
+          <a:noFill/>
+          <a:ln/>
+        </p:spPr>
+        <p:txBody>
+          <a:bodyPr wrap="square" lIns="0" tIns="0" rIns="0" bIns="0" rtlCol="0" anchor="ctr"/>
+          <a:lstStyle/>
+          <a:p>
+            <a:pPr indent="0" marL="0">
+              <a:buNone/>
+            </a:pPr>
+            <a:r>
+              <a:rPr lang="en-US" sz="1000" u="sng" dirty="0">
+                <a:solidFill>
+                  <a:srgbClr val="526777"/>
+                </a:solidFill>
+                <a:latin typeface="Segoe UI" pitchFamily="34" charset="0"/>
+                <a:ea typeface="Segoe UI" pitchFamily="34" charset="-122"/>
+                <a:cs typeface="Segoe UI" pitchFamily="34" charset="-120"/>
+                <a:hlinkClick r:id="rId1" invalidUrl="" action="" tgtFrame="" tooltip="" history="1" highlightClick="0" endSnd="0">
+                  <a:extLst>
+                    <a:ext uri="{A12FA001-AC4F-418D-AE19-62706E023703}">
+                      <ahyp:hlinkClr xmlns:ahyp="http://schemas.microsoft.com/office/drawing/2018/hyperlinkcolor" val="tx"/>
+                    </a:ext>
+                  </a:extLst>
+                </a:hlinkClick>
+              </a:rPr>
+              <a:t>Synthetic training only | Guide + Lab 19</a:t>
+            </a:r>
+            <a:endParaRPr lang="en-US" sz="1000" dirty="0"/>
+          </a:p>
+        </p:txBody>
+      </p:sp>
+      <p:sp>
+        <p:nvSpPr>
+          <p:cNvPr id="18" name="Text 16"/>
+          <p:cNvSpPr/>
+          <p:nvPr/>
+        </p:nvSpPr>
+        <p:spPr>
+          <a:xfrm>
+            <a:off x="10515600" y="6419088"/>
+            <a:ext cx="1097280" cy="210312"/>
+          </a:xfrm>
+          <a:prstGeom prst="rect">
+            <a:avLst/>
+          </a:prstGeom>
+          <a:noFill/>
+          <a:ln/>
+        </p:spPr>
+        <p:txBody>
+          <a:bodyPr wrap="square" lIns="0" tIns="0" rIns="0" bIns="0" rtlCol="0" anchor="ctr"/>
+          <a:lstStyle/>
+          <a:p>
+            <a:pPr algn="r" indent="0" marL="0">
+              <a:buNone/>
+            </a:pPr>
+            <a:r>
+              <a:rPr lang="en-US" sz="1000" dirty="0">
+                <a:solidFill>
+                  <a:srgbClr val="526777"/>
+                </a:solidFill>
+                <a:latin typeface="Segoe UI" pitchFamily="34" charset="0"/>
+                <a:ea typeface="Segoe UI" pitchFamily="34" charset="-122"/>
+                <a:cs typeface="Segoe UI" pitchFamily="34" charset="-120"/>
+              </a:rPr>
+              <a:t>36 / 37</a:t>
+            </a:r>
+            <a:endParaRPr lang="en-US" sz="1000" dirty="0"/>
+          </a:p>
+        </p:txBody>
+      </p:sp>
+    </p:spTree>
+  </p:cSld>
+  <p:clrMapOvr>
+    <a:masterClrMapping/>
+  </p:clrMapOvr>
+</p:sld>
+</file>
+
+<file path=ppt/slides/slide37.xml><?xml version="1.0" encoding="utf-8"?>
+<p:sld xmlns:a="http://schemas.openxmlformats.org/drawingml/2006/main" xmlns:r="http://schemas.openxmlformats.org/officeDocument/2006/relationships" xmlns:p="http://schemas.openxmlformats.org/presentationml/2006/main">
+  <p:cSld name="Slide 37">
+    <p:bg>
+      <p:bgPr>
+        <a:solidFill>
+          <a:srgbClr val="FAFBFC"/>
+        </a:solidFill>
+      </p:bgPr>
+    </p:bg>
+    <p:spTree>
+      <p:nvGrpSpPr>
+        <p:cNvPr id="1" name=""/>
+        <p:cNvGrpSpPr/>
+        <p:nvPr/>
+      </p:nvGrpSpPr>
+      <p:grpSpPr>
+        <a:xfrm>
+          <a:off x="0" y="0"/>
+          <a:ext cx="0" cy="0"/>
+          <a:chOff x="0" y="0"/>
+          <a:chExt cx="0" cy="0"/>
+        </a:xfrm>
+      </p:grpSpPr>
+      <p:sp>
+        <p:nvSpPr>
+          <p:cNvPr id="2" name="Shape 0"/>
+          <p:cNvSpPr/>
+          <p:nvPr/>
+        </p:nvSpPr>
+        <p:spPr>
+          <a:xfrm>
+            <a:off x="0" y="0"/>
+            <a:ext cx="12191695" cy="82296"/>
+          </a:xfrm>
+          <a:prstGeom prst="rect">
+            <a:avLst/>
+          </a:prstGeom>
+          <a:solidFill>
+            <a:srgbClr val="0078D4"/>
+          </a:solidFill>
+          <a:ln w="12700">
+            <a:solidFill>
+              <a:srgbClr val="333333">
+                <a:alpha val="0"/>
+              </a:srgbClr>
+            </a:solidFill>
+            <a:prstDash val="solid"/>
+          </a:ln>
+        </p:spPr>
+      </p:sp>
+      <p:sp>
+        <p:nvSpPr>
+          <p:cNvPr id="3" name="Text 1"/>
+          <p:cNvSpPr/>
+          <p:nvPr/>
+        </p:nvSpPr>
+        <p:spPr>
+          <a:xfrm>
+            <a:off x="548640" y="320040"/>
+            <a:ext cx="11064240" cy="274320"/>
+          </a:xfrm>
+          <a:prstGeom prst="rect">
+            <a:avLst/>
+          </a:prstGeom>
+          <a:noFill/>
+          <a:ln/>
+        </p:spPr>
+        <p:txBody>
+          <a:bodyPr wrap="square" lIns="0" tIns="0" rIns="0" bIns="0" rtlCol="0" anchor="ctr"/>
+          <a:lstStyle/>
+          <a:p>
+            <a:pPr indent="0" marL="0">
+              <a:buNone/>
+            </a:pPr>
+            <a:r>
+              <a:rPr lang="en-US" sz="1100" b="1" dirty="0">
+                <a:solidFill>
+                  <a:srgbClr val="0078D4"/>
+                </a:solidFill>
+                <a:latin typeface="Segoe UI" pitchFamily="34" charset="0"/>
+                <a:ea typeface="Segoe UI" pitchFamily="34" charset="-122"/>
+                <a:cs typeface="Segoe UI" pitchFamily="34" charset="-120"/>
+              </a:rPr>
+              <a:t>FOUNDRY / EVALUATION ENGINEERING</a:t>
+            </a:r>
+            <a:endParaRPr lang="en-US" sz="1100" dirty="0"/>
+          </a:p>
+        </p:txBody>
+      </p:sp>
+      <p:sp>
+        <p:nvSpPr>
+          <p:cNvPr id="4" name="Text 2"/>
+          <p:cNvSpPr/>
+          <p:nvPr/>
+        </p:nvSpPr>
+        <p:spPr>
+          <a:xfrm>
+            <a:off x="548640" y="777240"/>
+            <a:ext cx="11064240" cy="822960"/>
+          </a:xfrm>
+          <a:prstGeom prst="rect">
+            <a:avLst/>
+          </a:prstGeom>
+          <a:noFill/>
+          <a:ln/>
+        </p:spPr>
+        <p:txBody>
+          <a:bodyPr wrap="square" lIns="0" tIns="0" rIns="0" bIns="0" rtlCol="0" anchor="ctr"/>
+          <a:lstStyle/>
+          <a:p>
+            <a:pPr indent="0" marL="0">
+              <a:buNone/>
+            </a:pPr>
+            <a:r>
+              <a:rPr lang="en-US" sz="2700" b="1" dirty="0">
+                <a:solidFill>
+                  <a:srgbClr val="001B3D"/>
+                </a:solidFill>
+                <a:latin typeface="Segoe UI" pitchFamily="34" charset="0"/>
+                <a:ea typeface="Segoe UI" pitchFamily="34" charset="-122"/>
+                <a:cs typeface="Segoe UI" pitchFamily="34" charset="-120"/>
+              </a:rPr>
+              <a:t>Take the lab, guide and evidence with you</a:t>
+            </a:r>
+            <a:endParaRPr lang="en-US" sz="2700" dirty="0"/>
+          </a:p>
+        </p:txBody>
+      </p:sp>
+      <p:sp>
+        <p:nvSpPr>
+          <p:cNvPr id="5" name="Text 3"/>
+          <p:cNvSpPr/>
+          <p:nvPr/>
+        </p:nvSpPr>
+        <p:spPr>
+          <a:xfrm>
+            <a:off x="594360" y="1828800"/>
+            <a:ext cx="640080" cy="594360"/>
+          </a:xfrm>
+          <a:prstGeom prst="rect">
+            <a:avLst/>
+          </a:prstGeom>
+          <a:noFill/>
+          <a:ln/>
+        </p:spPr>
+        <p:txBody>
+          <a:bodyPr wrap="square" lIns="0" tIns="0" rIns="0" bIns="0" rtlCol="0" anchor="ctr"/>
+          <a:lstStyle/>
+          <a:p>
+            <a:pPr indent="0" marL="0">
+              <a:buNone/>
+            </a:pPr>
+            <a:r>
+              <a:rPr lang="en-US" sz="1700" b="1" dirty="0">
+                <a:solidFill>
+                  <a:srgbClr val="0078D4"/>
+                </a:solidFill>
+                <a:latin typeface="Segoe UI" pitchFamily="34" charset="0"/>
+                <a:ea typeface="Segoe UI" pitchFamily="34" charset="-122"/>
+                <a:cs typeface="Segoe UI" pitchFamily="34" charset="-120"/>
+              </a:rPr>
+              <a:t>01</a:t>
+            </a:r>
+            <a:endParaRPr lang="en-US" sz="1700" dirty="0"/>
+          </a:p>
+        </p:txBody>
+      </p:sp>
+      <p:sp>
+        <p:nvSpPr>
+          <p:cNvPr id="6" name="Text 4"/>
+          <p:cNvSpPr/>
+          <p:nvPr/>
+        </p:nvSpPr>
+        <p:spPr>
+          <a:xfrm>
+            <a:off x="1325880" y="1828800"/>
+            <a:ext cx="10195560" cy="731520"/>
+          </a:xfrm>
+          <a:prstGeom prst="rect">
+            <a:avLst/>
+          </a:prstGeom>
+          <a:noFill/>
+          <a:ln/>
+        </p:spPr>
+        <p:txBody>
+          <a:bodyPr wrap="square" lIns="0" tIns="0" rIns="0" bIns="0" rtlCol="0" anchor="ctr"/>
+          <a:lstStyle/>
+          <a:p>
+            <a:pPr indent="0" marL="0">
+              <a:buNone/>
+            </a:pPr>
+            <a:r>
+              <a:rPr lang="en-US" sz="2000" dirty="0">
+                <a:solidFill>
+                  <a:srgbClr val="183449"/>
+                </a:solidFill>
+                <a:latin typeface="Segoe UI" pitchFamily="34" charset="0"/>
+                <a:ea typeface="Segoe UI" pitchFamily="34" charset="-122"/>
+                <a:cs typeface="Segoe UI" pitchFamily="34" charset="-120"/>
+              </a:rPr>
+              <a:t>Lab 19: ten progressive hands-on exercises with runnable commands.</a:t>
+            </a:r>
+            <a:endParaRPr lang="en-US" sz="2000" dirty="0"/>
+          </a:p>
+        </p:txBody>
+      </p:sp>
+      <p:sp>
+        <p:nvSpPr>
+          <p:cNvPr id="7" name="Shape 5"/>
+          <p:cNvSpPr/>
+          <p:nvPr/>
+        </p:nvSpPr>
+        <p:spPr>
+          <a:xfrm>
+            <a:off x="1325880" y="2660904"/>
+            <a:ext cx="10149840" cy="0"/>
+          </a:xfrm>
+          <a:prstGeom prst="line">
+            <a:avLst/>
+          </a:prstGeom>
+          <a:noFill/>
+          <a:ln w="6350">
+            <a:solidFill>
+              <a:srgbClr val="DCE5ED"/>
+            </a:solidFill>
+            <a:prstDash val="solid"/>
+          </a:ln>
+        </p:spPr>
+      </p:sp>
+      <p:sp>
+        <p:nvSpPr>
+          <p:cNvPr id="8" name="Text 6"/>
+          <p:cNvSpPr/>
+          <p:nvPr/>
+        </p:nvSpPr>
+        <p:spPr>
+          <a:xfrm>
+            <a:off x="594360" y="2770632"/>
+            <a:ext cx="640080" cy="594360"/>
+          </a:xfrm>
+          <a:prstGeom prst="rect">
+            <a:avLst/>
+          </a:prstGeom>
+          <a:noFill/>
+          <a:ln/>
+        </p:spPr>
+        <p:txBody>
+          <a:bodyPr wrap="square" lIns="0" tIns="0" rIns="0" bIns="0" rtlCol="0" anchor="ctr"/>
+          <a:lstStyle/>
+          <a:p>
+            <a:pPr indent="0" marL="0">
+              <a:buNone/>
+            </a:pPr>
+            <a:r>
+              <a:rPr lang="en-US" sz="1700" b="1" dirty="0">
+                <a:solidFill>
+                  <a:srgbClr val="0078D4"/>
+                </a:solidFill>
+                <a:latin typeface="Segoe UI" pitchFamily="34" charset="0"/>
+                <a:ea typeface="Segoe UI" pitchFamily="34" charset="-122"/>
+                <a:cs typeface="Segoe UI" pitchFamily="34" charset="-120"/>
+              </a:rPr>
+              <a:t>02</a:t>
+            </a:r>
+            <a:endParaRPr lang="en-US" sz="1700" dirty="0"/>
+          </a:p>
+        </p:txBody>
+      </p:sp>
+      <p:sp>
+        <p:nvSpPr>
+          <p:cNvPr id="9" name="Text 7"/>
+          <p:cNvSpPr/>
+          <p:nvPr/>
+        </p:nvSpPr>
+        <p:spPr>
+          <a:xfrm>
+            <a:off x="1325880" y="2770632"/>
+            <a:ext cx="10195560" cy="731520"/>
+          </a:xfrm>
+          <a:prstGeom prst="rect">
+            <a:avLst/>
+          </a:prstGeom>
+          <a:noFill/>
+          <a:ln/>
+        </p:spPr>
+        <p:txBody>
+          <a:bodyPr wrap="square" lIns="0" tIns="0" rIns="0" bIns="0" rtlCol="0" anchor="ctr"/>
+          <a:lstStyle/>
+          <a:p>
+            <a:pPr indent="0" marL="0">
+              <a:buNone/>
+            </a:pPr>
+            <a:r>
+              <a:rPr lang="en-US" sz="2000" dirty="0">
+                <a:solidFill>
+                  <a:srgbClr val="183449"/>
+                </a:solidFill>
+                <a:latin typeface="Segoe UI" pitchFamily="34" charset="0"/>
+                <a:ea typeface="Segoe UI" pitchFamily="34" charset="-122"/>
+                <a:cs typeface="Segoe UI" pitchFamily="34" charset="-120"/>
+              </a:rPr>
+              <a:t>Guide: portal steps, SDK mappings, policies and troubleshooting.</a:t>
+            </a:r>
+            <a:endParaRPr lang="en-US" sz="2000" dirty="0"/>
+          </a:p>
+        </p:txBody>
+      </p:sp>
+      <p:sp>
+        <p:nvSpPr>
+          <p:cNvPr id="10" name="Shape 8"/>
+          <p:cNvSpPr/>
+          <p:nvPr/>
+        </p:nvSpPr>
+        <p:spPr>
+          <a:xfrm>
+            <a:off x="1325880" y="3602736"/>
+            <a:ext cx="10149840" cy="0"/>
+          </a:xfrm>
+          <a:prstGeom prst="line">
+            <a:avLst/>
+          </a:prstGeom>
+          <a:noFill/>
+          <a:ln w="6350">
+            <a:solidFill>
+              <a:srgbClr val="DCE5ED"/>
+            </a:solidFill>
+            <a:prstDash val="solid"/>
+          </a:ln>
+        </p:spPr>
+      </p:sp>
+      <p:sp>
+        <p:nvSpPr>
+          <p:cNvPr id="11" name="Text 9"/>
+          <p:cNvSpPr/>
+          <p:nvPr/>
+        </p:nvSpPr>
+        <p:spPr>
+          <a:xfrm>
+            <a:off x="594360" y="3712464"/>
+            <a:ext cx="640080" cy="594360"/>
+          </a:xfrm>
+          <a:prstGeom prst="rect">
+            <a:avLst/>
+          </a:prstGeom>
+          <a:noFill/>
+          <a:ln/>
+        </p:spPr>
+        <p:txBody>
+          <a:bodyPr wrap="square" lIns="0" tIns="0" rIns="0" bIns="0" rtlCol="0" anchor="ctr"/>
+          <a:lstStyle/>
+          <a:p>
+            <a:pPr indent="0" marL="0">
+              <a:buNone/>
+            </a:pPr>
+            <a:r>
+              <a:rPr lang="en-US" sz="1700" b="1" dirty="0">
+                <a:solidFill>
+                  <a:srgbClr val="0078D4"/>
+                </a:solidFill>
+                <a:latin typeface="Segoe UI" pitchFamily="34" charset="0"/>
+                <a:ea typeface="Segoe UI" pitchFamily="34" charset="-122"/>
+                <a:cs typeface="Segoe UI" pitchFamily="34" charset="-120"/>
+              </a:rPr>
+              <a:t>03</a:t>
+            </a:r>
+            <a:endParaRPr lang="en-US" sz="1700" dirty="0"/>
+          </a:p>
+        </p:txBody>
+      </p:sp>
+      <p:sp>
+        <p:nvSpPr>
+          <p:cNvPr id="12" name="Text 10"/>
+          <p:cNvSpPr/>
+          <p:nvPr/>
+        </p:nvSpPr>
+        <p:spPr>
+          <a:xfrm>
+            <a:off x="1325880" y="3712464"/>
+            <a:ext cx="10195560" cy="731520"/>
+          </a:xfrm>
+          <a:prstGeom prst="rect">
+            <a:avLst/>
+          </a:prstGeom>
+          <a:noFill/>
+          <a:ln/>
+        </p:spPr>
+        <p:txBody>
+          <a:bodyPr wrap="square" lIns="0" tIns="0" rIns="0" bIns="0" rtlCol="0" anchor="ctr"/>
+          <a:lstStyle/>
+          <a:p>
+            <a:pPr indent="0" marL="0">
+              <a:buNone/>
+            </a:pPr>
+            <a:r>
+              <a:rPr lang="en-US" sz="2000" dirty="0">
+                <a:solidFill>
+                  <a:srgbClr val="183449"/>
+                </a:solidFill>
+                <a:latin typeface="Segoe UI" pitchFamily="34" charset="0"/>
+                <a:ea typeface="Segoe UI" pitchFamily="34" charset="-122"/>
+                <a:cs typeface="Segoe UI" pitchFamily="34" charset="-120"/>
+              </a:rPr>
+              <a:t>Deck: editable EN/FR PowerPoint with instructor notes.</a:t>
+            </a:r>
+            <a:endParaRPr lang="en-US" sz="2000" dirty="0"/>
+          </a:p>
+        </p:txBody>
+      </p:sp>
+      <p:sp>
+        <p:nvSpPr>
+          <p:cNvPr id="13" name="Shape 11"/>
+          <p:cNvSpPr/>
+          <p:nvPr/>
+        </p:nvSpPr>
+        <p:spPr>
+          <a:xfrm>
+            <a:off x="1325880" y="4544568"/>
+            <a:ext cx="10149840" cy="0"/>
+          </a:xfrm>
+          <a:prstGeom prst="line">
+            <a:avLst/>
+          </a:prstGeom>
+          <a:noFill/>
+          <a:ln w="6350">
+            <a:solidFill>
+              <a:srgbClr val="DCE5ED"/>
+            </a:solidFill>
+            <a:prstDash val="solid"/>
+          </a:ln>
+        </p:spPr>
+      </p:sp>
+      <p:sp>
+        <p:nvSpPr>
+          <p:cNvPr id="14" name="Text 12"/>
+          <p:cNvSpPr/>
+          <p:nvPr/>
+        </p:nvSpPr>
+        <p:spPr>
+          <a:xfrm>
+            <a:off x="594360" y="4654296"/>
+            <a:ext cx="640080" cy="594360"/>
+          </a:xfrm>
+          <a:prstGeom prst="rect">
+            <a:avLst/>
+          </a:prstGeom>
+          <a:noFill/>
+          <a:ln/>
+        </p:spPr>
+        <p:txBody>
+          <a:bodyPr wrap="square" lIns="0" tIns="0" rIns="0" bIns="0" rtlCol="0" anchor="ctr"/>
+          <a:lstStyle/>
+          <a:p>
+            <a:pPr indent="0" marL="0">
+              <a:buNone/>
+            </a:pPr>
+            <a:r>
+              <a:rPr lang="en-US" sz="1700" b="1" dirty="0">
+                <a:solidFill>
+                  <a:srgbClr val="0078D4"/>
+                </a:solidFill>
+                <a:latin typeface="Segoe UI" pitchFamily="34" charset="0"/>
+                <a:ea typeface="Segoe UI" pitchFamily="34" charset="-122"/>
+                <a:cs typeface="Segoe UI" pitchFamily="34" charset="-120"/>
+              </a:rPr>
+              <a:t>04</a:t>
+            </a:r>
+            <a:endParaRPr lang="en-US" sz="1700" dirty="0"/>
+          </a:p>
+        </p:txBody>
+      </p:sp>
+      <p:sp>
+        <p:nvSpPr>
+          <p:cNvPr id="15" name="Text 13"/>
+          <p:cNvSpPr/>
+          <p:nvPr/>
+        </p:nvSpPr>
+        <p:spPr>
+          <a:xfrm>
+            <a:off x="1325880" y="4654296"/>
+            <a:ext cx="10195560" cy="731520"/>
+          </a:xfrm>
+          <a:prstGeom prst="rect">
+            <a:avLst/>
+          </a:prstGeom>
+          <a:noFill/>
+          <a:ln/>
+        </p:spPr>
+        <p:txBody>
+          <a:bodyPr wrap="square" lIns="0" tIns="0" rIns="0" bIns="0" rtlCol="0" anchor="ctr"/>
+          <a:lstStyle/>
+          <a:p>
+            <a:pPr indent="0" marL="0">
+              <a:buNone/>
+            </a:pPr>
+            <a:r>
+              <a:rPr lang="en-US" sz="2000" dirty="0">
+                <a:solidFill>
+                  <a:srgbClr val="183449"/>
+                </a:solidFill>
+                <a:latin typeface="Segoe UI" pitchFamily="34" charset="0"/>
+                <a:ea typeface="Segoe UI" pitchFamily="34" charset="-122"/>
+                <a:cs typeface="Segoe UI" pitchFamily="34" charset="-120"/>
+              </a:rPr>
+              <a:t>Sources: official Microsoft Learn links in these notes.</a:t>
+            </a:r>
+            <a:endParaRPr lang="en-US" sz="2000" dirty="0"/>
+          </a:p>
+        </p:txBody>
+      </p:sp>
+      <p:sp>
+        <p:nvSpPr>
+          <p:cNvPr id="16" name="Shape 14"/>
+          <p:cNvSpPr/>
+          <p:nvPr/>
+        </p:nvSpPr>
+        <p:spPr>
+          <a:xfrm>
+            <a:off x="1325880" y="5486400"/>
+            <a:ext cx="10149840" cy="0"/>
+          </a:xfrm>
+          <a:prstGeom prst="line">
+            <a:avLst/>
+          </a:prstGeom>
+          <a:noFill/>
+          <a:ln w="6350">
+            <a:solidFill>
+              <a:srgbClr val="DCE5ED"/>
+            </a:solidFill>
+            <a:prstDash val="solid"/>
+          </a:ln>
+        </p:spPr>
+      </p:sp>
+      <p:sp>
+        <p:nvSpPr>
+          <p:cNvPr id="17" name="Text 15">
+            <a:hlinkClick r:id="rId1" tooltip=""/>
+          </p:cNvPr>
+          <p:cNvSpPr/>
+          <p:nvPr/>
+        </p:nvSpPr>
+        <p:spPr>
+          <a:xfrm>
+            <a:off x="548640" y="6419088"/>
+            <a:ext cx="9784080" cy="210312"/>
+          </a:xfrm>
+          <a:prstGeom prst="rect">
+            <a:avLst/>
+          </a:prstGeom>
+          <a:noFill/>
+          <a:ln/>
+        </p:spPr>
+        <p:txBody>
+          <a:bodyPr wrap="square" lIns="0" tIns="0" rIns="0" bIns="0" rtlCol="0" anchor="ctr"/>
+          <a:lstStyle/>
+          <a:p>
+            <a:pPr indent="0" marL="0">
+              <a:buNone/>
+            </a:pPr>
+            <a:r>
+              <a:rPr lang="en-US" sz="1000" u="sng" dirty="0">
+                <a:solidFill>
+                  <a:srgbClr val="526777"/>
+                </a:solidFill>
+                <a:latin typeface="Segoe UI" pitchFamily="34" charset="0"/>
+                <a:ea typeface="Segoe UI" pitchFamily="34" charset="-122"/>
+                <a:cs typeface="Segoe UI" pitchFamily="34" charset="-120"/>
+                <a:hlinkClick r:id="rId1" invalidUrl="" action="" tgtFrame="" tooltip="" history="1" highlightClick="0" endSnd="0">
+                  <a:extLst>
+                    <a:ext uri="{A12FA001-AC4F-418D-AE19-62706E023703}">
+                      <ahyp:hlinkClr xmlns:ahyp="http://schemas.microsoft.com/office/drawing/2018/hyperlinkcolor" val="tx"/>
+                    </a:ext>
+                  </a:extLst>
+                </a:hlinkClick>
+              </a:rPr>
+              <a:t>Synthetic training only | Guide + Lab 19</a:t>
+            </a:r>
+            <a:endParaRPr lang="en-US" sz="1000" dirty="0"/>
+          </a:p>
+        </p:txBody>
+      </p:sp>
+      <p:sp>
+        <p:nvSpPr>
+          <p:cNvPr id="18" name="Text 16"/>
+          <p:cNvSpPr/>
+          <p:nvPr/>
+        </p:nvSpPr>
+        <p:spPr>
+          <a:xfrm>
+            <a:off x="10515600" y="6419088"/>
+            <a:ext cx="1097280" cy="210312"/>
+          </a:xfrm>
+          <a:prstGeom prst="rect">
+            <a:avLst/>
+          </a:prstGeom>
+          <a:noFill/>
+          <a:ln/>
+        </p:spPr>
+        <p:txBody>
+          <a:bodyPr wrap="square" lIns="0" tIns="0" rIns="0" bIns="0" rtlCol="0" anchor="ctr"/>
+          <a:lstStyle/>
+          <a:p>
+            <a:pPr algn="r" indent="0" marL="0">
+              <a:buNone/>
+            </a:pPr>
+            <a:r>
+              <a:rPr lang="en-US" sz="1000" dirty="0">
+                <a:solidFill>
+                  <a:srgbClr val="526777"/>
+                </a:solidFill>
+                <a:latin typeface="Segoe UI" pitchFamily="34" charset="0"/>
+                <a:ea typeface="Segoe UI" pitchFamily="34" charset="-122"/>
+                <a:cs typeface="Segoe UI" pitchFamily="34" charset="-120"/>
+              </a:rPr>
+              <a:t>37 / 37</a:t>
             </a:r>
             <a:endParaRPr lang="en-US" sz="1000" dirty="0"/>
           </a:p>
@@ -22125,7 +22966,7 @@
                 <a:ea typeface="Segoe UI" pitchFamily="34" charset="-122"/>
                 <a:cs typeface="Segoe UI" pitchFamily="34" charset="-120"/>
               </a:rPr>
-              <a:t>4 / 35</a:t>
+              <a:t>4 / 37</a:t>
             </a:r>
             <a:endParaRPr lang="en-US" sz="1000" dirty="0"/>
           </a:p>
@@ -22753,7 +23594,7 @@
                 <a:ea typeface="Segoe UI" pitchFamily="34" charset="-122"/>
                 <a:cs typeface="Segoe UI" pitchFamily="34" charset="-120"/>
               </a:rPr>
-              <a:t>5 / 35</a:t>
+              <a:t>5 / 37</a:t>
             </a:r>
             <a:endParaRPr lang="en-US" sz="1000" dirty="0"/>
           </a:p>
@@ -23389,7 +24230,7 @@
                 <a:ea typeface="Segoe UI" pitchFamily="34" charset="-122"/>
                 <a:cs typeface="Segoe UI" pitchFamily="34" charset="-120"/>
               </a:rPr>
-              <a:t>6 / 35</a:t>
+              <a:t>6 / 37</a:t>
             </a:r>
             <a:endParaRPr lang="en-US" sz="1000" dirty="0"/>
           </a:p>
@@ -24017,7 +24858,7 @@
                 <a:ea typeface="Segoe UI" pitchFamily="34" charset="-122"/>
                 <a:cs typeface="Segoe UI" pitchFamily="34" charset="-120"/>
               </a:rPr>
-              <a:t>7 / 35</a:t>
+              <a:t>7 / 37</a:t>
             </a:r>
             <a:endParaRPr lang="en-US" sz="1000" dirty="0"/>
           </a:p>
@@ -24645,7 +25486,7 @@
                 <a:ea typeface="Segoe UI" pitchFamily="34" charset="-122"/>
                 <a:cs typeface="Segoe UI" pitchFamily="34" charset="-120"/>
               </a:rPr>
-              <a:t>8 / 35</a:t>
+              <a:t>8 / 37</a:t>
             </a:r>
             <a:endParaRPr lang="en-US" sz="1000" dirty="0"/>
           </a:p>
@@ -25273,7 +26114,7 @@
                 <a:ea typeface="Segoe UI" pitchFamily="34" charset="-122"/>
                 <a:cs typeface="Segoe UI" pitchFamily="34" charset="-120"/>
               </a:rPr>
-              <a:t>9 / 35</a:t>
+              <a:t>9 / 37</a:t>
             </a:r>
             <a:endParaRPr lang="en-US" sz="1000" dirty="0"/>
           </a:p>
